--- a/concept/Research-Interest.pptx
+++ b/concept/Research-Interest.pptx
@@ -5,21 +5,14 @@
     <p:sldMasterId id="2147483648" r:id="rId1"/>
   </p:sldMasterIdLst>
   <p:notesMasterIdLst>
-    <p:notesMasterId r:id="rId14"/>
+    <p:notesMasterId r:id="rId7"/>
   </p:notesMasterIdLst>
   <p:sldIdLst>
-    <p:sldId id="270" r:id="rId2"/>
-    <p:sldId id="259" r:id="rId3"/>
-    <p:sldId id="272" r:id="rId4"/>
-    <p:sldId id="279" r:id="rId5"/>
-    <p:sldId id="280" r:id="rId6"/>
-    <p:sldId id="282" r:id="rId7"/>
-    <p:sldId id="271" r:id="rId8"/>
-    <p:sldId id="283" r:id="rId9"/>
-    <p:sldId id="284" r:id="rId10"/>
-    <p:sldId id="285" r:id="rId11"/>
-    <p:sldId id="286" r:id="rId12"/>
-    <p:sldId id="287" r:id="rId13"/>
+    <p:sldId id="286" r:id="rId2"/>
+    <p:sldId id="287" r:id="rId3"/>
+    <p:sldId id="288" r:id="rId4"/>
+    <p:sldId id="289" r:id="rId5"/>
+    <p:sldId id="290" r:id="rId6"/>
   </p:sldIdLst>
   <p:sldSz cx="12192000" cy="6858000"/>
   <p:notesSz cx="6858000" cy="9144000"/>
@@ -208,7 +201,7 @@
           <a:p>
             <a:fld id="{52DFC1B7-3D5E-4A5B-82A1-8FEEA2A3FD17}" type="datetimeFigureOut">
               <a:rPr lang="en-US" smtClean="0"/>
-              <a:t>7/16/2026</a:t>
+              <a:t>7/17/2026</a:t>
             </a:fld>
             <a:endParaRPr lang="en-US"/>
           </a:p>
@@ -622,7 +615,7 @@
           <a:p>
             <a:fld id="{76A8F9E1-B633-4671-85A1-702D296B2A14}" type="datetime1">
               <a:rPr lang="en-US" smtClean="0"/>
-              <a:t>7/16/2026</a:t>
+              <a:t>7/17/2026</a:t>
             </a:fld>
             <a:endParaRPr lang="en-US"/>
           </a:p>
@@ -820,7 +813,7 @@
           <a:p>
             <a:fld id="{C00B55C5-286B-4763-BAC7-BF7B72B1422A}" type="datetime1">
               <a:rPr lang="en-US" smtClean="0"/>
-              <a:t>7/16/2026</a:t>
+              <a:t>7/17/2026</a:t>
             </a:fld>
             <a:endParaRPr lang="en-US"/>
           </a:p>
@@ -1028,7 +1021,7 @@
           <a:p>
             <a:fld id="{3B612B56-0B9B-4C11-91C6-2FAECB8A82F0}" type="datetime1">
               <a:rPr lang="en-US" smtClean="0"/>
-              <a:t>7/16/2026</a:t>
+              <a:t>7/17/2026</a:t>
             </a:fld>
             <a:endParaRPr lang="en-US"/>
           </a:p>
@@ -1226,7 +1219,7 @@
           <a:p>
             <a:fld id="{C335A6D7-3A9E-4158-97DB-54FC883A2A06}" type="datetime1">
               <a:rPr lang="en-US" smtClean="0"/>
-              <a:t>7/16/2026</a:t>
+              <a:t>7/17/2026</a:t>
             </a:fld>
             <a:endParaRPr lang="en-US"/>
           </a:p>
@@ -1501,7 +1494,7 @@
           <a:p>
             <a:fld id="{BD7C4EFF-30AA-49EB-91CD-2B87EF8EB862}" type="datetime1">
               <a:rPr lang="en-US" smtClean="0"/>
-              <a:t>7/16/2026</a:t>
+              <a:t>7/17/2026</a:t>
             </a:fld>
             <a:endParaRPr lang="en-US"/>
           </a:p>
@@ -1766,7 +1759,7 @@
           <a:p>
             <a:fld id="{9F951118-A18D-425F-81A8-FD92900FE385}" type="datetime1">
               <a:rPr lang="en-US" smtClean="0"/>
-              <a:t>7/16/2026</a:t>
+              <a:t>7/17/2026</a:t>
             </a:fld>
             <a:endParaRPr lang="en-US"/>
           </a:p>
@@ -2178,7 +2171,7 @@
           <a:p>
             <a:fld id="{BA66260F-663B-4006-AA2C-98D64336E379}" type="datetime1">
               <a:rPr lang="en-US" smtClean="0"/>
-              <a:t>7/16/2026</a:t>
+              <a:t>7/17/2026</a:t>
             </a:fld>
             <a:endParaRPr lang="en-US"/>
           </a:p>
@@ -2319,7 +2312,7 @@
           <a:p>
             <a:fld id="{560CAB38-758B-4823-95AF-C50E6547966C}" type="datetime1">
               <a:rPr lang="en-US" smtClean="0"/>
-              <a:t>7/16/2026</a:t>
+              <a:t>7/17/2026</a:t>
             </a:fld>
             <a:endParaRPr lang="en-US"/>
           </a:p>
@@ -2432,7 +2425,7 @@
           <a:p>
             <a:fld id="{5A387344-709F-43EA-A55B-8246CD3267AB}" type="datetime1">
               <a:rPr lang="en-US" smtClean="0"/>
-              <a:t>7/16/2026</a:t>
+              <a:t>7/17/2026</a:t>
             </a:fld>
             <a:endParaRPr lang="en-US"/>
           </a:p>
@@ -2743,7 +2736,7 @@
           <a:p>
             <a:fld id="{C0ACB447-DA57-4353-AF4E-16DFDA026034}" type="datetime1">
               <a:rPr lang="en-US" smtClean="0"/>
-              <a:t>7/16/2026</a:t>
+              <a:t>7/17/2026</a:t>
             </a:fld>
             <a:endParaRPr lang="en-US"/>
           </a:p>
@@ -3031,7 +3024,7 @@
           <a:p>
             <a:fld id="{1125D064-2237-49F3-AB45-E1B7D4062571}" type="datetime1">
               <a:rPr lang="en-US" smtClean="0"/>
-              <a:t>7/16/2026</a:t>
+              <a:t>7/17/2026</a:t>
             </a:fld>
             <a:endParaRPr lang="en-US"/>
           </a:p>
@@ -3272,7 +3265,7 @@
           <a:p>
             <a:fld id="{FE9DC357-BB2B-4622-A46E-34C8E155D5BC}" type="datetime1">
               <a:rPr lang="en-US" smtClean="0"/>
-              <a:t>7/16/2026</a:t>
+              <a:t>7/17/2026</a:t>
             </a:fld>
             <a:endParaRPr lang="en-US"/>
           </a:p>
@@ -3681,272 +3674,6 @@
         <p:cNvPr id="1" name="">
           <a:extLst>
             <a:ext uri="{FF2B5EF4-FFF2-40B4-BE49-F238E27FC236}">
-              <a16:creationId xmlns:a16="http://schemas.microsoft.com/office/drawing/2014/main" id="{383D25CD-3838-A8B6-CDED-66FBCCC5DC43}"/>
-            </a:ext>
-          </a:extLst>
-        </p:cNvPr>
-        <p:cNvGrpSpPr/>
-        <p:nvPr/>
-      </p:nvGrpSpPr>
-      <p:grpSpPr>
-        <a:xfrm>
-          <a:off x="0" y="0"/>
-          <a:ext cx="0" cy="0"/>
-          <a:chOff x="0" y="0"/>
-          <a:chExt cx="0" cy="0"/>
-        </a:xfrm>
-      </p:grpSpPr>
-      <p:sp>
-        <p:nvSpPr>
-          <p:cNvPr id="2" name="Title 1">
-            <a:extLst>
-              <a:ext uri="{FF2B5EF4-FFF2-40B4-BE49-F238E27FC236}">
-                <a16:creationId xmlns:a16="http://schemas.microsoft.com/office/drawing/2014/main" id="{D0B8DCCF-E96E-5612-3869-CCEE12FFF728}"/>
-              </a:ext>
-            </a:extLst>
-          </p:cNvPr>
-          <p:cNvSpPr>
-            <a:spLocks noGrp="1"/>
-          </p:cNvSpPr>
-          <p:nvPr>
-            <p:ph type="ctrTitle"/>
-          </p:nvPr>
-        </p:nvSpPr>
-        <p:spPr>
-          <a:xfrm>
-            <a:off x="1524000" y="1214438"/>
-            <a:ext cx="9144000" cy="2387600"/>
-          </a:xfrm>
-        </p:spPr>
-        <p:txBody>
-          <a:bodyPr/>
-          <a:lstStyle/>
-          <a:p>
-            <a:r>
-              <a:rPr lang="en-GB"/>
-              <a:t>My Research Interest</a:t>
-            </a:r>
-            <a:endParaRPr lang="en-US"/>
-          </a:p>
-        </p:txBody>
-      </p:sp>
-      <p:sp>
-        <p:nvSpPr>
-          <p:cNvPr id="4" name="Subtitle 3">
-            <a:extLst>
-              <a:ext uri="{FF2B5EF4-FFF2-40B4-BE49-F238E27FC236}">
-                <a16:creationId xmlns:a16="http://schemas.microsoft.com/office/drawing/2014/main" id="{DFDE6BEC-9721-7972-52C7-4D71ADBA7B53}"/>
-              </a:ext>
-            </a:extLst>
-          </p:cNvPr>
-          <p:cNvSpPr>
-            <a:spLocks noGrp="1"/>
-          </p:cNvSpPr>
-          <p:nvPr>
-            <p:ph type="subTitle" idx="1"/>
-          </p:nvPr>
-        </p:nvSpPr>
-        <p:spPr/>
-        <p:txBody>
-          <a:bodyPr/>
-          <a:lstStyle/>
-          <a:p>
-            <a:r>
-              <a:rPr lang="en-GB"/>
-              <a:t>…it's quite involved, so I'll get to the title later, promise</a:t>
-            </a:r>
-            <a:endParaRPr lang="en-US"/>
-          </a:p>
-        </p:txBody>
-      </p:sp>
-    </p:spTree>
-    <p:extLst>
-      <p:ext uri="{BB962C8B-B14F-4D97-AF65-F5344CB8AC3E}">
-        <p14:creationId xmlns:p14="http://schemas.microsoft.com/office/powerpoint/2010/main" val="1865563216"/>
-      </p:ext>
-    </p:extLst>
-  </p:cSld>
-  <p:clrMapOvr>
-    <a:masterClrMapping/>
-  </p:clrMapOvr>
-</p:sld>
-</file>
-
-<file path=ppt/slides/slide10.xml><?xml version="1.0" encoding="utf-8"?>
-<p:sld xmlns:a="http://schemas.openxmlformats.org/drawingml/2006/main" xmlns:r="http://schemas.openxmlformats.org/officeDocument/2006/relationships" xmlns:p="http://schemas.openxmlformats.org/presentationml/2006/main">
-  <p:cSld>
-    <p:spTree>
-      <p:nvGrpSpPr>
-        <p:cNvPr id="1" name="">
-          <a:extLst>
-            <a:ext uri="{FF2B5EF4-FFF2-40B4-BE49-F238E27FC236}">
-              <a16:creationId xmlns:a16="http://schemas.microsoft.com/office/drawing/2014/main" id="{AFC43572-AEC2-13D1-5E6D-309659710A2A}"/>
-            </a:ext>
-          </a:extLst>
-        </p:cNvPr>
-        <p:cNvGrpSpPr/>
-        <p:nvPr/>
-      </p:nvGrpSpPr>
-      <p:grpSpPr>
-        <a:xfrm>
-          <a:off x="0" y="0"/>
-          <a:ext cx="0" cy="0"/>
-          <a:chOff x="0" y="0"/>
-          <a:chExt cx="0" cy="0"/>
-        </a:xfrm>
-      </p:grpSpPr>
-      <p:sp>
-        <p:nvSpPr>
-          <p:cNvPr id="2" name="Title 1">
-            <a:extLst>
-              <a:ext uri="{FF2B5EF4-FFF2-40B4-BE49-F238E27FC236}">
-                <a16:creationId xmlns:a16="http://schemas.microsoft.com/office/drawing/2014/main" id="{F7E3FCEA-8B0B-4302-6339-2A26278E123A}"/>
-              </a:ext>
-            </a:extLst>
-          </p:cNvPr>
-          <p:cNvSpPr>
-            <a:spLocks noGrp="1"/>
-          </p:cNvSpPr>
-          <p:nvPr>
-            <p:ph type="title"/>
-          </p:nvPr>
-        </p:nvSpPr>
-        <p:spPr/>
-        <p:txBody>
-          <a:bodyPr/>
-          <a:lstStyle/>
-          <a:p>
-            <a:r>
-              <a:rPr lang="en-GB"/>
-              <a:t>Conclusion</a:t>
-            </a:r>
-            <a:endParaRPr lang="en-US"/>
-          </a:p>
-        </p:txBody>
-      </p:sp>
-      <p:sp>
-        <p:nvSpPr>
-          <p:cNvPr id="3" name="Content Placeholder 2">
-            <a:extLst>
-              <a:ext uri="{FF2B5EF4-FFF2-40B4-BE49-F238E27FC236}">
-                <a16:creationId xmlns:a16="http://schemas.microsoft.com/office/drawing/2014/main" id="{2D2772FA-47CF-C39A-9D87-568F13A9AD19}"/>
-              </a:ext>
-            </a:extLst>
-          </p:cNvPr>
-          <p:cNvSpPr>
-            <a:spLocks noGrp="1"/>
-          </p:cNvSpPr>
-          <p:nvPr>
-            <p:ph idx="1"/>
-          </p:nvPr>
-        </p:nvSpPr>
-        <p:spPr/>
-        <p:txBody>
-          <a:bodyPr/>
-          <a:lstStyle/>
-          <a:p>
-            <a:r>
-              <a:rPr lang="en-GB"/>
-              <a:t>Modern Software uses a mix of programming languages</a:t>
-            </a:r>
-          </a:p>
-          <a:p>
-            <a:r>
-              <a:rPr lang="en-GB"/>
-              <a:t>This is a strain on Developers</a:t>
-            </a:r>
-          </a:p>
-          <a:p>
-            <a:pPr>
-              <a:buFont typeface="Wingdings" panose="05000000000000000000" pitchFamily="2" charset="2"/>
-              <a:buChar char="à"/>
-            </a:pPr>
-            <a:r>
-              <a:rPr lang="en-GB">
-                <a:sym typeface="Wingdings" panose="05000000000000000000" pitchFamily="2" charset="2"/>
-              </a:rPr>
-              <a:t> Fluent DSLs alleviate this</a:t>
-            </a:r>
-          </a:p>
-          <a:p>
-            <a:r>
-              <a:rPr lang="en-GB">
-                <a:sym typeface="Wingdings" panose="05000000000000000000" pitchFamily="2" charset="2"/>
-              </a:rPr>
-              <a:t>But come with their own problems!</a:t>
-            </a:r>
-          </a:p>
-          <a:p>
-            <a:pPr lvl="1"/>
-            <a:r>
-              <a:rPr lang="en-GB">
-                <a:sym typeface="Wingdings" panose="05000000000000000000" pitchFamily="2" charset="2"/>
-              </a:rPr>
-              <a:t>No safety guarantees</a:t>
-            </a:r>
-          </a:p>
-          <a:p>
-            <a:pPr lvl="1"/>
-            <a:r>
-              <a:rPr lang="en-GB">
-                <a:sym typeface="Wingdings" panose="05000000000000000000" pitchFamily="2" charset="2"/>
-              </a:rPr>
-              <a:t>Feature incompleteness</a:t>
-            </a:r>
-            <a:endParaRPr lang="en-GB"/>
-          </a:p>
-        </p:txBody>
-      </p:sp>
-      <p:sp>
-        <p:nvSpPr>
-          <p:cNvPr id="4" name="Slide Number Placeholder 3">
-            <a:extLst>
-              <a:ext uri="{FF2B5EF4-FFF2-40B4-BE49-F238E27FC236}">
-                <a16:creationId xmlns:a16="http://schemas.microsoft.com/office/drawing/2014/main" id="{970CBE23-81F3-6E67-0895-6CDC75CF545B}"/>
-              </a:ext>
-            </a:extLst>
-          </p:cNvPr>
-          <p:cNvSpPr>
-            <a:spLocks noGrp="1"/>
-          </p:cNvSpPr>
-          <p:nvPr>
-            <p:ph type="sldNum" sz="quarter" idx="12"/>
-          </p:nvPr>
-        </p:nvSpPr>
-        <p:spPr/>
-        <p:txBody>
-          <a:bodyPr/>
-          <a:lstStyle/>
-          <a:p>
-            <a:fld id="{52890E68-D690-4AC2-96FA-C0B5F80968DC}" type="slidenum">
-              <a:rPr lang="en-US" smtClean="0"/>
-              <a:t>10</a:t>
-            </a:fld>
-            <a:endParaRPr lang="en-US"/>
-          </a:p>
-        </p:txBody>
-      </p:sp>
-    </p:spTree>
-    <p:extLst>
-      <p:ext uri="{BB962C8B-B14F-4D97-AF65-F5344CB8AC3E}">
-        <p14:creationId xmlns:p14="http://schemas.microsoft.com/office/powerpoint/2010/main" val="667638678"/>
-      </p:ext>
-    </p:extLst>
-  </p:cSld>
-  <p:clrMapOvr>
-    <a:masterClrMapping/>
-  </p:clrMapOvr>
-</p:sld>
-</file>
-
-<file path=ppt/slides/slide11.xml><?xml version="1.0" encoding="utf-8"?>
-<p:sld xmlns:a="http://schemas.openxmlformats.org/drawingml/2006/main" xmlns:r="http://schemas.openxmlformats.org/officeDocument/2006/relationships" xmlns:p="http://schemas.openxmlformats.org/presentationml/2006/main">
-  <p:cSld>
-    <p:spTree>
-      <p:nvGrpSpPr>
-        <p:cNvPr id="1" name="">
-          <a:extLst>
-            <a:ext uri="{FF2B5EF4-FFF2-40B4-BE49-F238E27FC236}">
               <a16:creationId xmlns:a16="http://schemas.microsoft.com/office/drawing/2014/main" id="{B8D1A507-5148-BED2-0F82-A58C5EDB2B63}"/>
             </a:ext>
           </a:extLst>
@@ -4014,7 +3741,7 @@
           <a:p>
             <a:fld id="{52890E68-D690-4AC2-96FA-C0B5F80968DC}" type="slidenum">
               <a:rPr lang="en-US" smtClean="0"/>
-              <a:t>11</a:t>
+              <a:t>1</a:t>
             </a:fld>
             <a:endParaRPr lang="en-US"/>
           </a:p>
@@ -4544,7 +4271,7 @@
 </p:sld>
 </file>
 
-<file path=ppt/slides/slide12.xml><?xml version="1.0" encoding="utf-8"?>
+<file path=ppt/slides/slide2.xml><?xml version="1.0" encoding="utf-8"?>
 <p:sld xmlns:a="http://schemas.openxmlformats.org/drawingml/2006/main" xmlns:r="http://schemas.openxmlformats.org/officeDocument/2006/relationships" xmlns:p="http://schemas.openxmlformats.org/presentationml/2006/main">
   <p:cSld>
     <p:spTree>
@@ -4757,7 +4484,7 @@
           <a:p>
             <a:fld id="{52890E68-D690-4AC2-96FA-C0B5F80968DC}" type="slidenum">
               <a:rPr lang="en-US" smtClean="0"/>
-              <a:t>12</a:t>
+              <a:t>2</a:t>
             </a:fld>
             <a:endParaRPr lang="en-US"/>
           </a:p>
@@ -5019,7 +4746,7 @@
 </p:sld>
 </file>
 
-<file path=ppt/slides/slide2.xml><?xml version="1.0" encoding="utf-8"?>
+<file path=ppt/slides/slide3.xml><?xml version="1.0" encoding="utf-8"?>
 <p:sld xmlns:a="http://schemas.openxmlformats.org/drawingml/2006/main" xmlns:r="http://schemas.openxmlformats.org/officeDocument/2006/relationships" xmlns:p="http://schemas.openxmlformats.org/presentationml/2006/main">
   <p:cSld>
     <p:spTree>
@@ -5027,7 +4754,7 @@
         <p:cNvPr id="1" name="">
           <a:extLst>
             <a:ext uri="{FF2B5EF4-FFF2-40B4-BE49-F238E27FC236}">
-              <a16:creationId xmlns:a16="http://schemas.microsoft.com/office/drawing/2014/main" id="{9C1DEAD3-4AE9-2D67-8977-864AE8FF2F69}"/>
+              <a16:creationId xmlns:a16="http://schemas.microsoft.com/office/drawing/2014/main" id="{5E7A86C0-D4FA-144A-B096-4D80615ECE82}"/>
             </a:ext>
           </a:extLst>
         </p:cNvPr>
@@ -5047,7 +4774,7 @@
           <p:cNvPr id="2" name="Title 1">
             <a:extLst>
               <a:ext uri="{FF2B5EF4-FFF2-40B4-BE49-F238E27FC236}">
-                <a16:creationId xmlns:a16="http://schemas.microsoft.com/office/drawing/2014/main" id="{FF2D4AC1-4EEF-7AA9-2C01-04A3D1669718}"/>
+                <a16:creationId xmlns:a16="http://schemas.microsoft.com/office/drawing/2014/main" id="{46A8342A-DA08-D6B2-8792-2155CE7C3C39}"/>
               </a:ext>
             </a:extLst>
           </p:cNvPr>
@@ -5065,7 +4792,7 @@
           <a:p>
             <a:r>
               <a:rPr lang="en-GB"/>
-              <a:t>Overview</a:t>
+              <a:t>Use Case 3: DSL Syntax Highlighting</a:t>
             </a:r>
             <a:endParaRPr lang="en-US"/>
           </a:p>
@@ -5073,227 +4800,10 @@
       </p:sp>
       <p:sp>
         <p:nvSpPr>
-          <p:cNvPr id="3" name="Content Placeholder 2">
-            <a:extLst>
-              <a:ext uri="{FF2B5EF4-FFF2-40B4-BE49-F238E27FC236}">
-                <a16:creationId xmlns:a16="http://schemas.microsoft.com/office/drawing/2014/main" id="{BA8AEEA6-EABE-9CDB-3B1E-0999D17E4F5A}"/>
-              </a:ext>
-            </a:extLst>
-          </p:cNvPr>
-          <p:cNvSpPr>
-            <a:spLocks noGrp="1"/>
-          </p:cNvSpPr>
-          <p:nvPr>
-            <p:ph idx="1"/>
-          </p:nvPr>
-        </p:nvSpPr>
-        <p:spPr/>
-        <p:txBody>
-          <a:bodyPr/>
-          <a:lstStyle/>
-          <a:p>
-            <a:pPr marL="514350" indent="-514350">
-              <a:buFont typeface="+mj-lt"/>
-              <a:buAutoNum type="arabicPeriod"/>
-            </a:pPr>
-            <a:r>
-              <a:rPr lang="en-GB"/>
-              <a:t>How do Websites work?</a:t>
-            </a:r>
-          </a:p>
-          <a:p>
-            <a:pPr marL="971550" lvl="1" indent="-514350">
-              <a:buFont typeface="+mj-lt"/>
-              <a:buAutoNum type="alphaLcPeriod"/>
-            </a:pPr>
-            <a:r>
-              <a:rPr lang="en-GB"/>
-              <a:t>HTML = Layout</a:t>
-            </a:r>
-          </a:p>
-          <a:p>
-            <a:pPr marL="971550" lvl="1" indent="-514350">
-              <a:buFont typeface="+mj-lt"/>
-              <a:buAutoNum type="alphaLcPeriod"/>
-            </a:pPr>
-            <a:r>
-              <a:rPr lang="en-GB"/>
-              <a:t>CSS = Style</a:t>
-            </a:r>
-          </a:p>
-          <a:p>
-            <a:pPr marL="971550" lvl="1" indent="-514350">
-              <a:buFont typeface="+mj-lt"/>
-              <a:buAutoNum type="alphaLcPeriod"/>
-            </a:pPr>
-            <a:r>
-              <a:rPr lang="en-GB"/>
-              <a:t>JavaScript = All the cool stuff</a:t>
-            </a:r>
-          </a:p>
-          <a:p>
-            <a:pPr marL="971550" lvl="1" indent="-514350">
-              <a:buFont typeface="+mj-lt"/>
-              <a:buAutoNum type="alphaLcPeriod"/>
-            </a:pPr>
-            <a:r>
-              <a:rPr lang="en-GB"/>
-              <a:t>Modern Website Development</a:t>
-            </a:r>
-          </a:p>
-          <a:p>
-            <a:pPr marL="514350" indent="-514350">
-              <a:buFont typeface="+mj-lt"/>
-              <a:buAutoNum type="arabicPeriod"/>
-            </a:pPr>
-            <a:r>
-              <a:rPr lang="en-GB"/>
-              <a:t>What is a Fluent DSL?</a:t>
-            </a:r>
-          </a:p>
-          <a:p>
-            <a:pPr marL="514350" indent="-514350">
-              <a:buFont typeface="+mj-lt"/>
-              <a:buAutoNum type="arabicPeriod"/>
-            </a:pPr>
-            <a:r>
-              <a:rPr lang="en-GB"/>
-              <a:t>Making Fluent DSLs Secure</a:t>
-            </a:r>
-          </a:p>
-        </p:txBody>
-      </p:sp>
-      <p:sp>
-        <p:nvSpPr>
           <p:cNvPr id="4" name="Slide Number Placeholder 3">
             <a:extLst>
               <a:ext uri="{FF2B5EF4-FFF2-40B4-BE49-F238E27FC236}">
-                <a16:creationId xmlns:a16="http://schemas.microsoft.com/office/drawing/2014/main" id="{1FAE8F55-77EE-B192-B51B-455E1F6C62C0}"/>
-              </a:ext>
-            </a:extLst>
-          </p:cNvPr>
-          <p:cNvSpPr>
-            <a:spLocks noGrp="1"/>
-          </p:cNvSpPr>
-          <p:nvPr>
-            <p:ph type="sldNum" sz="quarter" idx="12"/>
-          </p:nvPr>
-        </p:nvSpPr>
-        <p:spPr/>
-        <p:txBody>
-          <a:bodyPr/>
-          <a:lstStyle/>
-          <a:p>
-            <a:fld id="{52890E68-D690-4AC2-96FA-C0B5F80968DC}" type="slidenum">
-              <a:rPr lang="en-US" smtClean="0"/>
-              <a:t>2</a:t>
-            </a:fld>
-            <a:endParaRPr lang="en-US"/>
-          </a:p>
-        </p:txBody>
-      </p:sp>
-    </p:spTree>
-    <p:extLst>
-      <p:ext uri="{BB962C8B-B14F-4D97-AF65-F5344CB8AC3E}">
-        <p14:creationId xmlns:p14="http://schemas.microsoft.com/office/powerpoint/2010/main" val="1392618560"/>
-      </p:ext>
-    </p:extLst>
-  </p:cSld>
-  <p:clrMapOvr>
-    <a:masterClrMapping/>
-  </p:clrMapOvr>
-</p:sld>
-</file>
-
-<file path=ppt/slides/slide3.xml><?xml version="1.0" encoding="utf-8"?>
-<p:sld xmlns:a="http://schemas.openxmlformats.org/drawingml/2006/main" xmlns:r="http://schemas.openxmlformats.org/officeDocument/2006/relationships" xmlns:p="http://schemas.openxmlformats.org/presentationml/2006/main">
-  <p:cSld>
-    <p:spTree>
-      <p:nvGrpSpPr>
-        <p:cNvPr id="1" name="">
-          <a:extLst>
-            <a:ext uri="{FF2B5EF4-FFF2-40B4-BE49-F238E27FC236}">
-              <a16:creationId xmlns:a16="http://schemas.microsoft.com/office/drawing/2014/main" id="{3A779BF0-3459-ACD7-32F6-7F45D82E11CD}"/>
-            </a:ext>
-          </a:extLst>
-        </p:cNvPr>
-        <p:cNvGrpSpPr/>
-        <p:nvPr/>
-      </p:nvGrpSpPr>
-      <p:grpSpPr>
-        <a:xfrm>
-          <a:off x="0" y="0"/>
-          <a:ext cx="0" cy="0"/>
-          <a:chOff x="0" y="0"/>
-          <a:chExt cx="0" cy="0"/>
-        </a:xfrm>
-      </p:grpSpPr>
-      <p:sp>
-        <p:nvSpPr>
-          <p:cNvPr id="2" name="Title 1">
-            <a:extLst>
-              <a:ext uri="{FF2B5EF4-FFF2-40B4-BE49-F238E27FC236}">
-                <a16:creationId xmlns:a16="http://schemas.microsoft.com/office/drawing/2014/main" id="{CF98A48B-4CBD-F55D-FACF-2544DECB21D6}"/>
-              </a:ext>
-            </a:extLst>
-          </p:cNvPr>
-          <p:cNvSpPr>
-            <a:spLocks noGrp="1"/>
-          </p:cNvSpPr>
-          <p:nvPr>
-            <p:ph type="title"/>
-          </p:nvPr>
-        </p:nvSpPr>
-        <p:spPr/>
-        <p:txBody>
-          <a:bodyPr/>
-          <a:lstStyle/>
-          <a:p>
-            <a:r>
-              <a:rPr lang="en-GB"/>
-              <a:t>How do Websites Work?</a:t>
-            </a:r>
-            <a:endParaRPr lang="en-US"/>
-          </a:p>
-        </p:txBody>
-      </p:sp>
-      <p:sp>
-        <p:nvSpPr>
-          <p:cNvPr id="3" name="Content Placeholder 2">
-            <a:extLst>
-              <a:ext uri="{FF2B5EF4-FFF2-40B4-BE49-F238E27FC236}">
-                <a16:creationId xmlns:a16="http://schemas.microsoft.com/office/drawing/2014/main" id="{892D3D92-9EAB-699C-4C36-08D28396E815}"/>
-              </a:ext>
-            </a:extLst>
-          </p:cNvPr>
-          <p:cNvSpPr>
-            <a:spLocks noGrp="1"/>
-          </p:cNvSpPr>
-          <p:nvPr>
-            <p:ph idx="1"/>
-          </p:nvPr>
-        </p:nvSpPr>
-        <p:spPr/>
-        <p:txBody>
-          <a:bodyPr/>
-          <a:lstStyle/>
-          <a:p>
-            <a:pPr marL="0" indent="0">
-              <a:buNone/>
-            </a:pPr>
-            <a:r>
-              <a:rPr lang="en-GB"/>
-              <a:t>HTML = Layout</a:t>
-            </a:r>
-          </a:p>
-        </p:txBody>
-      </p:sp>
-      <p:sp>
-        <p:nvSpPr>
-          <p:cNvPr id="4" name="Slide Number Placeholder 3">
-            <a:extLst>
-              <a:ext uri="{FF2B5EF4-FFF2-40B4-BE49-F238E27FC236}">
-                <a16:creationId xmlns:a16="http://schemas.microsoft.com/office/drawing/2014/main" id="{942772B6-789A-C534-F206-B68CBFA76C29}"/>
+                <a16:creationId xmlns:a16="http://schemas.microsoft.com/office/drawing/2014/main" id="{9EAC56A8-B6DF-BA9F-3498-46A7E18A6C56}"/>
               </a:ext>
             </a:extLst>
           </p:cNvPr>
@@ -5317,2335 +4827,31 @@
           </a:p>
         </p:txBody>
       </p:sp>
-      <p:pic>
-        <p:nvPicPr>
-          <p:cNvPr id="7" name="Picture 6">
-            <a:extLst>
-              <a:ext uri="{FF2B5EF4-FFF2-40B4-BE49-F238E27FC236}">
-                <a16:creationId xmlns:a16="http://schemas.microsoft.com/office/drawing/2014/main" id="{31288857-4B18-636A-B7CE-80E9F62489F8}"/>
-              </a:ext>
-            </a:extLst>
-          </p:cNvPr>
-          <p:cNvPicPr>
-            <a:picLocks noChangeAspect="1"/>
-          </p:cNvPicPr>
+      <p:sp>
+        <p:nvSpPr>
+          <p:cNvPr id="5" name="Rectangle 4">
+            <a:extLst>
+              <a:ext uri="{FF2B5EF4-FFF2-40B4-BE49-F238E27FC236}">
+                <a16:creationId xmlns:a16="http://schemas.microsoft.com/office/drawing/2014/main" id="{E5A3E6D8-C4DA-47A4-635D-1290839C1F57}"/>
+              </a:ext>
+            </a:extLst>
+          </p:cNvPr>
+          <p:cNvSpPr/>
           <p:nvPr/>
-        </p:nvPicPr>
-        <p:blipFill>
-          <a:blip r:embed="rId2">
-            <a:extLst>
-              <a:ext uri="{28A0092B-C50C-407E-A947-70E740481C1C}">
-                <a14:useLocalDpi xmlns:a14="http://schemas.microsoft.com/office/drawing/2010/main" val="0"/>
-              </a:ext>
-            </a:extLst>
-          </a:blip>
-          <a:stretch>
-            <a:fillRect/>
-          </a:stretch>
-        </p:blipFill>
+        </p:nvSpPr>
         <p:spPr>
           <a:xfrm>
-            <a:off x="6744573" y="1382293"/>
-            <a:ext cx="3732054" cy="5110582"/>
+            <a:off x="3178045" y="2810400"/>
+            <a:ext cx="5835910" cy="1237199"/>
           </a:xfrm>
           <a:prstGeom prst="rect">
             <a:avLst/>
           </a:prstGeom>
-        </p:spPr>
-      </p:pic>
-      <p:sp>
-        <p:nvSpPr>
-          <p:cNvPr id="9" name="Freeform: Shape 8">
-            <a:extLst>
-              <a:ext uri="{FF2B5EF4-FFF2-40B4-BE49-F238E27FC236}">
-                <a16:creationId xmlns:a16="http://schemas.microsoft.com/office/drawing/2014/main" id="{37E2A56F-7BBB-D546-8545-ECA85B977FE5}"/>
-              </a:ext>
-            </a:extLst>
-          </p:cNvPr>
-          <p:cNvSpPr/>
-          <p:nvPr/>
-        </p:nvSpPr>
-        <p:spPr>
-          <a:xfrm>
-            <a:off x="10506808" y="1204546"/>
-            <a:ext cx="977255" cy="1178169"/>
-          </a:xfrm>
-          <a:custGeom>
-            <a:avLst/>
-            <a:gdLst>
-              <a:gd name="csX0" fmla="*/ 694592 w 977255"/>
-              <a:gd name="csY0" fmla="*/ 0 h 1178169"/>
-              <a:gd name="csX1" fmla="*/ 940777 w 977255"/>
-              <a:gd name="csY1" fmla="*/ 694592 h 1178169"/>
-              <a:gd name="csX2" fmla="*/ 0 w 977255"/>
-              <a:gd name="csY2" fmla="*/ 1178169 h 1178169"/>
-            </a:gdLst>
-            <a:ahLst/>
-            <a:cxnLst>
-              <a:cxn ang="0">
-                <a:pos x="csX0" y="csY0"/>
-              </a:cxn>
-              <a:cxn ang="0">
-                <a:pos x="csX1" y="csY1"/>
-              </a:cxn>
-              <a:cxn ang="0">
-                <a:pos x="csX2" y="csY2"/>
-              </a:cxn>
-            </a:cxnLst>
-            <a:rect l="l" t="t" r="r" b="b"/>
-            <a:pathLst>
-              <a:path w="977255" h="1178169">
-                <a:moveTo>
-                  <a:pt x="694592" y="0"/>
-                </a:moveTo>
-                <a:cubicBezTo>
-                  <a:pt x="875567" y="249115"/>
-                  <a:pt x="1056542" y="498231"/>
-                  <a:pt x="940777" y="694592"/>
-                </a:cubicBezTo>
-                <a:cubicBezTo>
-                  <a:pt x="825012" y="890953"/>
-                  <a:pt x="412506" y="1034561"/>
-                  <a:pt x="0" y="1178169"/>
-                </a:cubicBezTo>
-              </a:path>
-            </a:pathLst>
-          </a:custGeom>
-          <a:ln>
-            <a:solidFill>
-              <a:srgbClr val="0070C0"/>
-            </a:solidFill>
-            <a:tailEnd type="triangle"/>
-          </a:ln>
-        </p:spPr>
-        <p:style>
-          <a:lnRef idx="1">
-            <a:schemeClr val="accent1"/>
-          </a:lnRef>
-          <a:fillRef idx="0">
-            <a:schemeClr val="accent1"/>
-          </a:fillRef>
-          <a:effectRef idx="0">
-            <a:schemeClr val="accent1"/>
-          </a:effectRef>
-          <a:fontRef idx="minor">
-            <a:schemeClr val="tx1"/>
-          </a:fontRef>
-        </p:style>
-        <p:txBody>
-          <a:bodyPr rtlCol="0" anchor="ctr"/>
-          <a:lstStyle/>
-          <a:p>
-            <a:pPr algn="ctr"/>
-            <a:endParaRPr lang="en-US"/>
-          </a:p>
-        </p:txBody>
-      </p:sp>
-      <p:sp>
-        <p:nvSpPr>
-          <p:cNvPr id="10" name="TextBox 9">
-            <a:extLst>
-              <a:ext uri="{FF2B5EF4-FFF2-40B4-BE49-F238E27FC236}">
-                <a16:creationId xmlns:a16="http://schemas.microsoft.com/office/drawing/2014/main" id="{D51B59DA-96A9-12F3-1579-F422E67AAFB5}"/>
-              </a:ext>
-            </a:extLst>
-          </p:cNvPr>
-          <p:cNvSpPr txBox="1"/>
-          <p:nvPr/>
-        </p:nvSpPr>
-        <p:spPr>
-          <a:xfrm>
-            <a:off x="10366513" y="565468"/>
-            <a:ext cx="1560444" cy="646331"/>
-          </a:xfrm>
-          <a:prstGeom prst="rect">
-            <a:avLst/>
-          </a:prstGeom>
-          <a:noFill/>
-        </p:spPr>
-        <p:txBody>
-          <a:bodyPr wrap="square" rtlCol="0">
-            <a:spAutoFit/>
-          </a:bodyPr>
-          <a:lstStyle/>
-          <a:p>
-            <a:pPr algn="ctr"/>
-            <a:r>
-              <a:rPr lang="en-GB">
-                <a:solidFill>
-                  <a:srgbClr val="0070C0"/>
-                </a:solidFill>
-                <a:latin typeface="Comic Sans MS" panose="030F0702030302020204" pitchFamily="66" charset="0"/>
-              </a:rPr>
-              <a:t>specified by HTML</a:t>
-            </a:r>
-            <a:endParaRPr lang="en-US">
-              <a:solidFill>
-                <a:srgbClr val="0070C0"/>
-              </a:solidFill>
-              <a:latin typeface="Comic Sans MS" panose="030F0702030302020204" pitchFamily="66" charset="0"/>
-            </a:endParaRPr>
-          </a:p>
-        </p:txBody>
-      </p:sp>
-      <p:pic>
-        <p:nvPicPr>
-          <p:cNvPr id="12" name="Picture 11">
-            <a:extLst>
-              <a:ext uri="{FF2B5EF4-FFF2-40B4-BE49-F238E27FC236}">
-                <a16:creationId xmlns:a16="http://schemas.microsoft.com/office/drawing/2014/main" id="{8E0D2185-6C1B-4C38-74A7-917868D68342}"/>
-              </a:ext>
-            </a:extLst>
-          </p:cNvPr>
-          <p:cNvPicPr>
-            <a:picLocks noChangeAspect="1"/>
-          </p:cNvPicPr>
-          <p:nvPr/>
-        </p:nvPicPr>
-        <p:blipFill>
-          <a:blip r:embed="rId3">
-            <a:extLst>
-              <a:ext uri="{28A0092B-C50C-407E-A947-70E740481C1C}">
-                <a14:useLocalDpi xmlns:a14="http://schemas.microsoft.com/office/drawing/2010/main" val="0"/>
-              </a:ext>
-            </a:extLst>
-          </a:blip>
-          <a:stretch>
-            <a:fillRect/>
-          </a:stretch>
-        </p:blipFill>
-        <p:spPr>
-          <a:xfrm>
-            <a:off x="1576741" y="2382715"/>
-            <a:ext cx="3550229" cy="1630561"/>
-          </a:xfrm>
-          <a:prstGeom prst="rect">
-            <a:avLst/>
-          </a:prstGeom>
-        </p:spPr>
-      </p:pic>
-      <p:pic>
-        <p:nvPicPr>
-          <p:cNvPr id="14" name="Picture 13">
-            <a:extLst>
-              <a:ext uri="{FF2B5EF4-FFF2-40B4-BE49-F238E27FC236}">
-                <a16:creationId xmlns:a16="http://schemas.microsoft.com/office/drawing/2014/main" id="{A38D8128-4837-77D8-9E8F-F163B777BF33}"/>
-              </a:ext>
-            </a:extLst>
-          </p:cNvPr>
-          <p:cNvPicPr>
-            <a:picLocks noChangeAspect="1"/>
-          </p:cNvPicPr>
-          <p:nvPr/>
-        </p:nvPicPr>
-        <p:blipFill>
-          <a:blip r:embed="rId4">
-            <a:extLst>
-              <a:ext uri="{28A0092B-C50C-407E-A947-70E740481C1C}">
-                <a14:useLocalDpi xmlns:a14="http://schemas.microsoft.com/office/drawing/2010/main" val="0"/>
-              </a:ext>
-            </a:extLst>
-          </a:blip>
-          <a:stretch>
-            <a:fillRect/>
-          </a:stretch>
-        </p:blipFill>
-        <p:spPr>
-          <a:xfrm>
-            <a:off x="1828619" y="4936497"/>
-            <a:ext cx="3046471" cy="1548206"/>
-          </a:xfrm>
-          <a:prstGeom prst="rect">
-            <a:avLst/>
-          </a:prstGeom>
-        </p:spPr>
-      </p:pic>
-      <p:sp>
-        <p:nvSpPr>
-          <p:cNvPr id="15" name="Arrow: Down 14">
-            <a:extLst>
-              <a:ext uri="{FF2B5EF4-FFF2-40B4-BE49-F238E27FC236}">
-                <a16:creationId xmlns:a16="http://schemas.microsoft.com/office/drawing/2014/main" id="{69B73620-48D6-4AF7-4F25-9ADFE9B50127}"/>
-              </a:ext>
-            </a:extLst>
-          </p:cNvPr>
-          <p:cNvSpPr/>
-          <p:nvPr/>
-        </p:nvSpPr>
-        <p:spPr>
-          <a:xfrm>
-            <a:off x="2971800" y="4102970"/>
-            <a:ext cx="725557" cy="743834"/>
-          </a:xfrm>
-          <a:prstGeom prst="downArrow">
-            <a:avLst/>
-          </a:prstGeom>
-          <a:ln w="38100"/>
-        </p:spPr>
-        <p:style>
-          <a:lnRef idx="2">
-            <a:schemeClr val="dk1"/>
-          </a:lnRef>
-          <a:fillRef idx="1">
-            <a:schemeClr val="lt1"/>
-          </a:fillRef>
-          <a:effectRef idx="0">
-            <a:schemeClr val="dk1"/>
-          </a:effectRef>
-          <a:fontRef idx="minor">
-            <a:schemeClr val="dk1"/>
-          </a:fontRef>
-        </p:style>
-        <p:txBody>
-          <a:bodyPr rtlCol="0" anchor="ctr"/>
-          <a:lstStyle/>
-          <a:p>
-            <a:pPr algn="ctr"/>
-            <a:endParaRPr lang="en-US"/>
-          </a:p>
-        </p:txBody>
-      </p:sp>
-    </p:spTree>
-    <p:extLst>
-      <p:ext uri="{BB962C8B-B14F-4D97-AF65-F5344CB8AC3E}">
-        <p14:creationId xmlns:p14="http://schemas.microsoft.com/office/powerpoint/2010/main" val="3140295314"/>
-      </p:ext>
-    </p:extLst>
-  </p:cSld>
-  <p:clrMapOvr>
-    <a:masterClrMapping/>
-  </p:clrMapOvr>
-  <p:timing>
-    <p:tnLst>
-      <p:par>
-        <p:cTn id="1" dur="indefinite" restart="never" nodeType="tmRoot">
-          <p:childTnLst>
-            <p:seq concurrent="1" nextAc="seek">
-              <p:cTn id="2" dur="indefinite" nodeType="mainSeq">
-                <p:childTnLst>
-                  <p:par>
-                    <p:cTn id="3" fill="hold">
-                      <p:stCondLst>
-                        <p:cond delay="indefinite"/>
-                      </p:stCondLst>
-                      <p:childTnLst>
-                        <p:par>
-                          <p:cTn id="4" fill="hold">
-                            <p:stCondLst>
-                              <p:cond delay="0"/>
-                            </p:stCondLst>
-                            <p:childTnLst>
-                              <p:par>
-                                <p:cTn id="5" presetID="1" presetClass="entr" presetSubtype="0" fill="hold" nodeType="clickEffect">
-                                  <p:stCondLst>
-                                    <p:cond delay="0"/>
-                                  </p:stCondLst>
-                                  <p:childTnLst>
-                                    <p:set>
-                                      <p:cBhvr>
-                                        <p:cTn id="6" dur="1" fill="hold">
-                                          <p:stCondLst>
-                                            <p:cond delay="0"/>
-                                          </p:stCondLst>
-                                        </p:cTn>
-                                        <p:tgtEl>
-                                          <p:spTgt spid="12"/>
-                                        </p:tgtEl>
-                                        <p:attrNameLst>
-                                          <p:attrName>style.visibility</p:attrName>
-                                        </p:attrNameLst>
-                                      </p:cBhvr>
-                                      <p:to>
-                                        <p:strVal val="visible"/>
-                                      </p:to>
-                                    </p:set>
-                                  </p:childTnLst>
-                                </p:cTn>
-                              </p:par>
-                            </p:childTnLst>
-                          </p:cTn>
-                        </p:par>
-                      </p:childTnLst>
-                    </p:cTn>
-                  </p:par>
-                  <p:par>
-                    <p:cTn id="7" fill="hold">
-                      <p:stCondLst>
-                        <p:cond delay="indefinite"/>
-                      </p:stCondLst>
-                      <p:childTnLst>
-                        <p:par>
-                          <p:cTn id="8" fill="hold">
-                            <p:stCondLst>
-                              <p:cond delay="0"/>
-                            </p:stCondLst>
-                            <p:childTnLst>
-                              <p:par>
-                                <p:cTn id="9" presetID="1" presetClass="entr" presetSubtype="0" fill="hold" grpId="0" nodeType="clickEffect">
-                                  <p:stCondLst>
-                                    <p:cond delay="0"/>
-                                  </p:stCondLst>
-                                  <p:childTnLst>
-                                    <p:set>
-                                      <p:cBhvr>
-                                        <p:cTn id="10" dur="1" fill="hold">
-                                          <p:stCondLst>
-                                            <p:cond delay="0"/>
-                                          </p:stCondLst>
-                                        </p:cTn>
-                                        <p:tgtEl>
-                                          <p:spTgt spid="15"/>
-                                        </p:tgtEl>
-                                        <p:attrNameLst>
-                                          <p:attrName>style.visibility</p:attrName>
-                                        </p:attrNameLst>
-                                      </p:cBhvr>
-                                      <p:to>
-                                        <p:strVal val="visible"/>
-                                      </p:to>
-                                    </p:set>
-                                  </p:childTnLst>
-                                </p:cTn>
-                              </p:par>
-                              <p:par>
-                                <p:cTn id="11" presetID="1" presetClass="entr" presetSubtype="0" fill="hold" nodeType="withEffect">
-                                  <p:stCondLst>
-                                    <p:cond delay="0"/>
-                                  </p:stCondLst>
-                                  <p:childTnLst>
-                                    <p:set>
-                                      <p:cBhvr>
-                                        <p:cTn id="12" dur="1" fill="hold">
-                                          <p:stCondLst>
-                                            <p:cond delay="0"/>
-                                          </p:stCondLst>
-                                        </p:cTn>
-                                        <p:tgtEl>
-                                          <p:spTgt spid="14"/>
-                                        </p:tgtEl>
-                                        <p:attrNameLst>
-                                          <p:attrName>style.visibility</p:attrName>
-                                        </p:attrNameLst>
-                                      </p:cBhvr>
-                                      <p:to>
-                                        <p:strVal val="visible"/>
-                                      </p:to>
-                                    </p:set>
-                                  </p:childTnLst>
-                                </p:cTn>
-                              </p:par>
-                            </p:childTnLst>
-                          </p:cTn>
-                        </p:par>
-                      </p:childTnLst>
-                    </p:cTn>
-                  </p:par>
-                </p:childTnLst>
-              </p:cTn>
-              <p:prevCondLst>
-                <p:cond evt="onPrev" delay="0">
-                  <p:tgtEl>
-                    <p:sldTgt/>
-                  </p:tgtEl>
-                </p:cond>
-              </p:prevCondLst>
-              <p:nextCondLst>
-                <p:cond evt="onNext" delay="0">
-                  <p:tgtEl>
-                    <p:sldTgt/>
-                  </p:tgtEl>
-                </p:cond>
-              </p:nextCondLst>
-            </p:seq>
-          </p:childTnLst>
-        </p:cTn>
-      </p:par>
-    </p:tnLst>
-    <p:bldLst>
-      <p:bldP spid="15" grpId="0" animBg="1"/>
-    </p:bldLst>
-  </p:timing>
-</p:sld>
-</file>
-
-<file path=ppt/slides/slide4.xml><?xml version="1.0" encoding="utf-8"?>
-<p:sld xmlns:a="http://schemas.openxmlformats.org/drawingml/2006/main" xmlns:r="http://schemas.openxmlformats.org/officeDocument/2006/relationships" xmlns:p="http://schemas.openxmlformats.org/presentationml/2006/main">
-  <p:cSld>
-    <p:spTree>
-      <p:nvGrpSpPr>
-        <p:cNvPr id="1" name="">
-          <a:extLst>
-            <a:ext uri="{FF2B5EF4-FFF2-40B4-BE49-F238E27FC236}">
-              <a16:creationId xmlns:a16="http://schemas.microsoft.com/office/drawing/2014/main" id="{16C4A90E-3797-5B31-D380-039B383AD41B}"/>
-            </a:ext>
-          </a:extLst>
-        </p:cNvPr>
-        <p:cNvGrpSpPr/>
-        <p:nvPr/>
-      </p:nvGrpSpPr>
-      <p:grpSpPr>
-        <a:xfrm>
-          <a:off x="0" y="0"/>
-          <a:ext cx="0" cy="0"/>
-          <a:chOff x="0" y="0"/>
-          <a:chExt cx="0" cy="0"/>
-        </a:xfrm>
-      </p:grpSpPr>
-      <p:sp>
-        <p:nvSpPr>
-          <p:cNvPr id="2" name="Title 1">
-            <a:extLst>
-              <a:ext uri="{FF2B5EF4-FFF2-40B4-BE49-F238E27FC236}">
-                <a16:creationId xmlns:a16="http://schemas.microsoft.com/office/drawing/2014/main" id="{68C06BBA-C8FE-A4B1-05FE-0A6B673B74D9}"/>
-              </a:ext>
-            </a:extLst>
-          </p:cNvPr>
-          <p:cNvSpPr>
-            <a:spLocks noGrp="1"/>
-          </p:cNvSpPr>
-          <p:nvPr>
-            <p:ph type="title"/>
-          </p:nvPr>
-        </p:nvSpPr>
-        <p:spPr/>
-        <p:txBody>
-          <a:bodyPr/>
-          <a:lstStyle/>
-          <a:p>
-            <a:r>
-              <a:rPr lang="en-GB"/>
-              <a:t>How do Websites Work?</a:t>
-            </a:r>
-            <a:endParaRPr lang="en-US"/>
-          </a:p>
-        </p:txBody>
-      </p:sp>
-      <p:sp>
-        <p:nvSpPr>
-          <p:cNvPr id="3" name="Content Placeholder 2">
-            <a:extLst>
-              <a:ext uri="{FF2B5EF4-FFF2-40B4-BE49-F238E27FC236}">
-                <a16:creationId xmlns:a16="http://schemas.microsoft.com/office/drawing/2014/main" id="{88765828-F215-EE5D-6A93-CEAE0D3F700D}"/>
-              </a:ext>
-            </a:extLst>
-          </p:cNvPr>
-          <p:cNvSpPr>
-            <a:spLocks noGrp="1"/>
-          </p:cNvSpPr>
-          <p:nvPr>
-            <p:ph idx="1"/>
-          </p:nvPr>
-        </p:nvSpPr>
-        <p:spPr/>
-        <p:txBody>
-          <a:bodyPr/>
-          <a:lstStyle/>
-          <a:p>
-            <a:pPr marL="0" indent="0">
-              <a:buNone/>
-            </a:pPr>
-            <a:r>
-              <a:rPr lang="en-GB"/>
-              <a:t>CSS = Style</a:t>
-            </a:r>
-          </a:p>
-        </p:txBody>
-      </p:sp>
-      <p:sp>
-        <p:nvSpPr>
-          <p:cNvPr id="4" name="Slide Number Placeholder 3">
-            <a:extLst>
-              <a:ext uri="{FF2B5EF4-FFF2-40B4-BE49-F238E27FC236}">
-                <a16:creationId xmlns:a16="http://schemas.microsoft.com/office/drawing/2014/main" id="{18F176F6-ADF5-C2D8-9ACC-0BF80BF06880}"/>
-              </a:ext>
-            </a:extLst>
-          </p:cNvPr>
-          <p:cNvSpPr>
-            <a:spLocks noGrp="1"/>
-          </p:cNvSpPr>
-          <p:nvPr>
-            <p:ph type="sldNum" sz="quarter" idx="12"/>
-          </p:nvPr>
-        </p:nvSpPr>
-        <p:spPr/>
-        <p:txBody>
-          <a:bodyPr/>
-          <a:lstStyle/>
-          <a:p>
-            <a:fld id="{52890E68-D690-4AC2-96FA-C0B5F80968DC}" type="slidenum">
-              <a:rPr lang="en-US" smtClean="0"/>
-              <a:t>4</a:t>
-            </a:fld>
-            <a:endParaRPr lang="en-US"/>
-          </a:p>
-        </p:txBody>
-      </p:sp>
-      <p:pic>
-        <p:nvPicPr>
-          <p:cNvPr id="6" name="Picture 5">
-            <a:extLst>
-              <a:ext uri="{FF2B5EF4-FFF2-40B4-BE49-F238E27FC236}">
-                <a16:creationId xmlns:a16="http://schemas.microsoft.com/office/drawing/2014/main" id="{156612AC-BEAA-6732-EDA0-AD9EE55753BE}"/>
-              </a:ext>
-            </a:extLst>
-          </p:cNvPr>
-          <p:cNvPicPr>
-            <a:picLocks noChangeAspect="1"/>
-          </p:cNvPicPr>
-          <p:nvPr/>
-        </p:nvPicPr>
-        <p:blipFill>
-          <a:blip r:embed="rId2">
-            <a:extLst>
-              <a:ext uri="{28A0092B-C50C-407E-A947-70E740481C1C}">
-                <a14:useLocalDpi xmlns:a14="http://schemas.microsoft.com/office/drawing/2010/main" val="0"/>
-              </a:ext>
-            </a:extLst>
-          </a:blip>
-          <a:stretch>
-            <a:fillRect/>
-          </a:stretch>
-        </p:blipFill>
-        <p:spPr>
-          <a:xfrm>
-            <a:off x="838200" y="2443136"/>
-            <a:ext cx="4792047" cy="1380759"/>
-          </a:xfrm>
-          <a:prstGeom prst="rect">
-            <a:avLst/>
-          </a:prstGeom>
-        </p:spPr>
-      </p:pic>
-      <p:pic>
-        <p:nvPicPr>
-          <p:cNvPr id="11" name="Picture 10">
-            <a:extLst>
-              <a:ext uri="{FF2B5EF4-FFF2-40B4-BE49-F238E27FC236}">
-                <a16:creationId xmlns:a16="http://schemas.microsoft.com/office/drawing/2014/main" id="{81D213A4-56F2-8ED3-6ED4-DB7049F30074}"/>
-              </a:ext>
-            </a:extLst>
-          </p:cNvPr>
-          <p:cNvPicPr>
-            <a:picLocks noChangeAspect="1"/>
-          </p:cNvPicPr>
-          <p:nvPr/>
-        </p:nvPicPr>
-        <p:blipFill>
-          <a:blip r:embed="rId3">
-            <a:extLst>
-              <a:ext uri="{28A0092B-C50C-407E-A947-70E740481C1C}">
-                <a14:useLocalDpi xmlns:a14="http://schemas.microsoft.com/office/drawing/2010/main" val="0"/>
-              </a:ext>
-            </a:extLst>
-          </a:blip>
-          <a:stretch>
-            <a:fillRect/>
-          </a:stretch>
-        </p:blipFill>
-        <p:spPr>
-          <a:xfrm>
-            <a:off x="7570171" y="867289"/>
-            <a:ext cx="3783629" cy="2956606"/>
-          </a:xfrm>
-          <a:prstGeom prst="rect">
-            <a:avLst/>
-          </a:prstGeom>
-        </p:spPr>
-      </p:pic>
-      <p:pic>
-        <p:nvPicPr>
-          <p:cNvPr id="16" name="Picture 15">
-            <a:extLst>
-              <a:ext uri="{FF2B5EF4-FFF2-40B4-BE49-F238E27FC236}">
-                <a16:creationId xmlns:a16="http://schemas.microsoft.com/office/drawing/2014/main" id="{D7DF6DB1-FAC4-E360-87F7-1B5ACF23AE44}"/>
-              </a:ext>
-            </a:extLst>
-          </p:cNvPr>
-          <p:cNvPicPr>
-            <a:picLocks noChangeAspect="1"/>
-          </p:cNvPicPr>
-          <p:nvPr/>
-        </p:nvPicPr>
-        <p:blipFill>
-          <a:blip r:embed="rId4">
-            <a:extLst>
-              <a:ext uri="{28A0092B-C50C-407E-A947-70E740481C1C}">
-                <a14:useLocalDpi xmlns:a14="http://schemas.microsoft.com/office/drawing/2010/main" val="0"/>
-              </a:ext>
-            </a:extLst>
-          </a:blip>
-          <a:stretch>
-            <a:fillRect/>
-          </a:stretch>
-        </p:blipFill>
-        <p:spPr>
-          <a:xfrm>
-            <a:off x="3454312" y="5291009"/>
-            <a:ext cx="1792919" cy="1131596"/>
-          </a:xfrm>
-          <a:prstGeom prst="rect">
-            <a:avLst/>
-          </a:prstGeom>
-        </p:spPr>
-      </p:pic>
-      <p:grpSp>
-        <p:nvGrpSpPr>
-          <p:cNvPr id="25" name="Group 24">
-            <a:extLst>
-              <a:ext uri="{FF2B5EF4-FFF2-40B4-BE49-F238E27FC236}">
-                <a16:creationId xmlns:a16="http://schemas.microsoft.com/office/drawing/2014/main" id="{697A9F21-8ECB-773D-1C62-DD3E49AD75AD}"/>
-              </a:ext>
-            </a:extLst>
-          </p:cNvPr>
-          <p:cNvGrpSpPr/>
-          <p:nvPr/>
-        </p:nvGrpSpPr>
-        <p:grpSpPr>
-          <a:xfrm>
-            <a:off x="6507595" y="5289488"/>
-            <a:ext cx="1792920" cy="1066862"/>
-            <a:chOff x="6507595" y="5289488"/>
-            <a:chExt cx="1792920" cy="1066862"/>
-          </a:xfrm>
-        </p:grpSpPr>
-        <p:pic>
-          <p:nvPicPr>
-            <p:cNvPr id="18" name="Picture 17">
-              <a:extLst>
-                <a:ext uri="{FF2B5EF4-FFF2-40B4-BE49-F238E27FC236}">
-                  <a16:creationId xmlns:a16="http://schemas.microsoft.com/office/drawing/2014/main" id="{7232D6DD-654A-951E-0380-E3DA66D9AFD7}"/>
-                </a:ext>
-              </a:extLst>
-            </p:cNvPr>
-            <p:cNvPicPr>
-              <a:picLocks noChangeAspect="1"/>
-            </p:cNvPicPr>
-            <p:nvPr/>
-          </p:nvPicPr>
-          <p:blipFill>
-            <a:blip r:embed="rId5">
-              <a:extLst>
-                <a:ext uri="{28A0092B-C50C-407E-A947-70E740481C1C}">
-                  <a14:useLocalDpi xmlns:a14="http://schemas.microsoft.com/office/drawing/2010/main" val="0"/>
-                </a:ext>
-              </a:extLst>
-            </a:blip>
-            <a:stretch>
-              <a:fillRect/>
-            </a:stretch>
-          </p:blipFill>
-          <p:spPr>
-            <a:xfrm>
-              <a:off x="6507595" y="5289488"/>
-              <a:ext cx="1792920" cy="1066862"/>
-            </a:xfrm>
-            <a:prstGeom prst="rect">
-              <a:avLst/>
-            </a:prstGeom>
-          </p:spPr>
-        </p:pic>
-        <p:pic>
-          <p:nvPicPr>
-            <p:cNvPr id="22" name="Picture 21">
-              <a:extLst>
-                <a:ext uri="{FF2B5EF4-FFF2-40B4-BE49-F238E27FC236}">
-                  <a16:creationId xmlns:a16="http://schemas.microsoft.com/office/drawing/2014/main" id="{1A045329-9E50-270F-B2C0-7110A6A3A434}"/>
-                </a:ext>
-              </a:extLst>
-            </p:cNvPr>
-            <p:cNvPicPr>
-              <a:picLocks noChangeAspect="1"/>
-            </p:cNvPicPr>
-            <p:nvPr/>
-          </p:nvPicPr>
-          <p:blipFill>
-            <a:blip r:embed="rId6">
-              <a:extLst>
-                <a:ext uri="{28A0092B-C50C-407E-A947-70E740481C1C}">
-                  <a14:useLocalDpi xmlns:a14="http://schemas.microsoft.com/office/drawing/2010/main" val="0"/>
-                </a:ext>
-              </a:extLst>
-            </a:blip>
-            <a:stretch>
-              <a:fillRect/>
-            </a:stretch>
-          </p:blipFill>
-          <p:spPr>
-            <a:xfrm>
-              <a:off x="7083900" y="5955000"/>
-              <a:ext cx="243721" cy="365125"/>
-            </a:xfrm>
-            <a:prstGeom prst="rect">
-              <a:avLst/>
-            </a:prstGeom>
-          </p:spPr>
-        </p:pic>
-      </p:grpSp>
-      <p:sp>
-        <p:nvSpPr>
-          <p:cNvPr id="23" name="Plus Sign 22">
-            <a:extLst>
-              <a:ext uri="{FF2B5EF4-FFF2-40B4-BE49-F238E27FC236}">
-                <a16:creationId xmlns:a16="http://schemas.microsoft.com/office/drawing/2014/main" id="{773C0347-CFAA-0439-DB0E-B98E239DD7EE}"/>
-              </a:ext>
-            </a:extLst>
-          </p:cNvPr>
-          <p:cNvSpPr/>
-          <p:nvPr/>
-        </p:nvSpPr>
-        <p:spPr>
-          <a:xfrm>
-            <a:off x="6226629" y="2659986"/>
-            <a:ext cx="867999" cy="947057"/>
-          </a:xfrm>
-          <a:prstGeom prst="mathPlus">
-            <a:avLst/>
-          </a:prstGeom>
-          <a:ln w="38100"/>
-        </p:spPr>
-        <p:style>
-          <a:lnRef idx="2">
-            <a:schemeClr val="dk1"/>
-          </a:lnRef>
-          <a:fillRef idx="1">
-            <a:schemeClr val="lt1"/>
-          </a:fillRef>
-          <a:effectRef idx="0">
-            <a:schemeClr val="dk1"/>
-          </a:effectRef>
-          <a:fontRef idx="minor">
-            <a:schemeClr val="dk1"/>
-          </a:fontRef>
-        </p:style>
-        <p:txBody>
-          <a:bodyPr rtlCol="0" anchor="ctr"/>
-          <a:lstStyle/>
-          <a:p>
-            <a:pPr algn="ctr"/>
-            <a:endParaRPr lang="en-US"/>
-          </a:p>
-        </p:txBody>
-      </p:sp>
-      <p:sp>
-        <p:nvSpPr>
-          <p:cNvPr id="24" name="Equals 23">
-            <a:extLst>
-              <a:ext uri="{FF2B5EF4-FFF2-40B4-BE49-F238E27FC236}">
-                <a16:creationId xmlns:a16="http://schemas.microsoft.com/office/drawing/2014/main" id="{5F62E320-73B0-9D09-39B8-7E357EC207D7}"/>
-              </a:ext>
-            </a:extLst>
-          </p:cNvPr>
-          <p:cNvSpPr/>
-          <p:nvPr/>
-        </p:nvSpPr>
-        <p:spPr>
-          <a:xfrm rot="5400000">
-            <a:off x="5285961" y="3910806"/>
-            <a:ext cx="1118423" cy="1293292"/>
-          </a:xfrm>
-          <a:prstGeom prst="mathEqual">
-            <a:avLst/>
-          </a:prstGeom>
-          <a:ln w="38100"/>
-        </p:spPr>
-        <p:style>
-          <a:lnRef idx="2">
-            <a:schemeClr val="dk1"/>
-          </a:lnRef>
-          <a:fillRef idx="1">
-            <a:schemeClr val="lt1"/>
-          </a:fillRef>
-          <a:effectRef idx="0">
-            <a:schemeClr val="dk1"/>
-          </a:effectRef>
-          <a:fontRef idx="minor">
-            <a:schemeClr val="dk1"/>
-          </a:fontRef>
-        </p:style>
-        <p:txBody>
-          <a:bodyPr rtlCol="0" anchor="ctr"/>
-          <a:lstStyle/>
-          <a:p>
-            <a:pPr algn="ctr"/>
-            <a:endParaRPr lang="en-US">
-              <a:solidFill>
-                <a:schemeClr val="tx1"/>
-              </a:solidFill>
-            </a:endParaRPr>
-          </a:p>
-        </p:txBody>
-      </p:sp>
-    </p:spTree>
-    <p:extLst>
-      <p:ext uri="{BB962C8B-B14F-4D97-AF65-F5344CB8AC3E}">
-        <p14:creationId xmlns:p14="http://schemas.microsoft.com/office/powerpoint/2010/main" val="892324574"/>
-      </p:ext>
-    </p:extLst>
-  </p:cSld>
-  <p:clrMapOvr>
-    <a:masterClrMapping/>
-  </p:clrMapOvr>
-  <p:timing>
-    <p:tnLst>
-      <p:par>
-        <p:cTn id="1" dur="indefinite" restart="never" nodeType="tmRoot">
-          <p:childTnLst>
-            <p:seq concurrent="1" nextAc="seek">
-              <p:cTn id="2" dur="indefinite" nodeType="mainSeq">
-                <p:childTnLst>
-                  <p:par>
-                    <p:cTn id="3" fill="hold">
-                      <p:stCondLst>
-                        <p:cond delay="indefinite"/>
-                      </p:stCondLst>
-                      <p:childTnLst>
-                        <p:par>
-                          <p:cTn id="4" fill="hold">
-                            <p:stCondLst>
-                              <p:cond delay="0"/>
-                            </p:stCondLst>
-                            <p:childTnLst>
-                              <p:par>
-                                <p:cTn id="5" presetID="1" presetClass="entr" presetSubtype="0" fill="hold" grpId="0" nodeType="clickEffect">
-                                  <p:stCondLst>
-                                    <p:cond delay="0"/>
-                                  </p:stCondLst>
-                                  <p:childTnLst>
-                                    <p:set>
-                                      <p:cBhvr>
-                                        <p:cTn id="6" dur="1" fill="hold">
-                                          <p:stCondLst>
-                                            <p:cond delay="0"/>
-                                          </p:stCondLst>
-                                        </p:cTn>
-                                        <p:tgtEl>
-                                          <p:spTgt spid="23"/>
-                                        </p:tgtEl>
-                                        <p:attrNameLst>
-                                          <p:attrName>style.visibility</p:attrName>
-                                        </p:attrNameLst>
-                                      </p:cBhvr>
-                                      <p:to>
-                                        <p:strVal val="visible"/>
-                                      </p:to>
-                                    </p:set>
-                                  </p:childTnLst>
-                                </p:cTn>
-                              </p:par>
-                              <p:par>
-                                <p:cTn id="7" presetID="1" presetClass="entr" presetSubtype="0" fill="hold" nodeType="withEffect">
-                                  <p:stCondLst>
-                                    <p:cond delay="0"/>
-                                  </p:stCondLst>
-                                  <p:childTnLst>
-                                    <p:set>
-                                      <p:cBhvr>
-                                        <p:cTn id="8" dur="1" fill="hold">
-                                          <p:stCondLst>
-                                            <p:cond delay="0"/>
-                                          </p:stCondLst>
-                                        </p:cTn>
-                                        <p:tgtEl>
-                                          <p:spTgt spid="11"/>
-                                        </p:tgtEl>
-                                        <p:attrNameLst>
-                                          <p:attrName>style.visibility</p:attrName>
-                                        </p:attrNameLst>
-                                      </p:cBhvr>
-                                      <p:to>
-                                        <p:strVal val="visible"/>
-                                      </p:to>
-                                    </p:set>
-                                  </p:childTnLst>
-                                </p:cTn>
-                              </p:par>
-                            </p:childTnLst>
-                          </p:cTn>
-                        </p:par>
-                      </p:childTnLst>
-                    </p:cTn>
-                  </p:par>
-                  <p:par>
-                    <p:cTn id="9" fill="hold">
-                      <p:stCondLst>
-                        <p:cond delay="indefinite"/>
-                      </p:stCondLst>
-                      <p:childTnLst>
-                        <p:par>
-                          <p:cTn id="10" fill="hold">
-                            <p:stCondLst>
-                              <p:cond delay="0"/>
-                            </p:stCondLst>
-                            <p:childTnLst>
-                              <p:par>
-                                <p:cTn id="11" presetID="1" presetClass="entr" presetSubtype="0" fill="hold" grpId="0" nodeType="clickEffect">
-                                  <p:stCondLst>
-                                    <p:cond delay="0"/>
-                                  </p:stCondLst>
-                                  <p:childTnLst>
-                                    <p:set>
-                                      <p:cBhvr>
-                                        <p:cTn id="12" dur="1" fill="hold">
-                                          <p:stCondLst>
-                                            <p:cond delay="0"/>
-                                          </p:stCondLst>
-                                        </p:cTn>
-                                        <p:tgtEl>
-                                          <p:spTgt spid="24"/>
-                                        </p:tgtEl>
-                                        <p:attrNameLst>
-                                          <p:attrName>style.visibility</p:attrName>
-                                        </p:attrNameLst>
-                                      </p:cBhvr>
-                                      <p:to>
-                                        <p:strVal val="visible"/>
-                                      </p:to>
-                                    </p:set>
-                                  </p:childTnLst>
-                                </p:cTn>
-                              </p:par>
-                              <p:par>
-                                <p:cTn id="13" presetID="1" presetClass="entr" presetSubtype="0" fill="hold" nodeType="withEffect">
-                                  <p:stCondLst>
-                                    <p:cond delay="0"/>
-                                  </p:stCondLst>
-                                  <p:childTnLst>
-                                    <p:set>
-                                      <p:cBhvr>
-                                        <p:cTn id="14" dur="1" fill="hold">
-                                          <p:stCondLst>
-                                            <p:cond delay="0"/>
-                                          </p:stCondLst>
-                                        </p:cTn>
-                                        <p:tgtEl>
-                                          <p:spTgt spid="16"/>
-                                        </p:tgtEl>
-                                        <p:attrNameLst>
-                                          <p:attrName>style.visibility</p:attrName>
-                                        </p:attrNameLst>
-                                      </p:cBhvr>
-                                      <p:to>
-                                        <p:strVal val="visible"/>
-                                      </p:to>
-                                    </p:set>
-                                  </p:childTnLst>
-                                </p:cTn>
-                              </p:par>
-                              <p:par>
-                                <p:cTn id="15" presetID="1" presetClass="entr" presetSubtype="0" fill="hold" nodeType="withEffect">
-                                  <p:stCondLst>
-                                    <p:cond delay="0"/>
-                                  </p:stCondLst>
-                                  <p:childTnLst>
-                                    <p:set>
-                                      <p:cBhvr>
-                                        <p:cTn id="16" dur="1" fill="hold">
-                                          <p:stCondLst>
-                                            <p:cond delay="0"/>
-                                          </p:stCondLst>
-                                        </p:cTn>
-                                        <p:tgtEl>
-                                          <p:spTgt spid="25"/>
-                                        </p:tgtEl>
-                                        <p:attrNameLst>
-                                          <p:attrName>style.visibility</p:attrName>
-                                        </p:attrNameLst>
-                                      </p:cBhvr>
-                                      <p:to>
-                                        <p:strVal val="visible"/>
-                                      </p:to>
-                                    </p:set>
-                                  </p:childTnLst>
-                                </p:cTn>
-                              </p:par>
-                            </p:childTnLst>
-                          </p:cTn>
-                        </p:par>
-                      </p:childTnLst>
-                    </p:cTn>
-                  </p:par>
-                </p:childTnLst>
-              </p:cTn>
-              <p:prevCondLst>
-                <p:cond evt="onPrev" delay="0">
-                  <p:tgtEl>
-                    <p:sldTgt/>
-                  </p:tgtEl>
-                </p:cond>
-              </p:prevCondLst>
-              <p:nextCondLst>
-                <p:cond evt="onNext" delay="0">
-                  <p:tgtEl>
-                    <p:sldTgt/>
-                  </p:tgtEl>
-                </p:cond>
-              </p:nextCondLst>
-            </p:seq>
-          </p:childTnLst>
-        </p:cTn>
-      </p:par>
-    </p:tnLst>
-    <p:bldLst>
-      <p:bldP spid="23" grpId="0" animBg="1"/>
-      <p:bldP spid="24" grpId="0" animBg="1"/>
-    </p:bldLst>
-  </p:timing>
-</p:sld>
-</file>
-
-<file path=ppt/slides/slide5.xml><?xml version="1.0" encoding="utf-8"?>
-<p:sld xmlns:a="http://schemas.openxmlformats.org/drawingml/2006/main" xmlns:r="http://schemas.openxmlformats.org/officeDocument/2006/relationships" xmlns:p="http://schemas.openxmlformats.org/presentationml/2006/main">
-  <p:cSld>
-    <p:spTree>
-      <p:nvGrpSpPr>
-        <p:cNvPr id="1" name="">
-          <a:extLst>
-            <a:ext uri="{FF2B5EF4-FFF2-40B4-BE49-F238E27FC236}">
-              <a16:creationId xmlns:a16="http://schemas.microsoft.com/office/drawing/2014/main" id="{9894524A-6A0C-8A38-4A0C-1A715C9F999A}"/>
-            </a:ext>
-          </a:extLst>
-        </p:cNvPr>
-        <p:cNvGrpSpPr/>
-        <p:nvPr/>
-      </p:nvGrpSpPr>
-      <p:grpSpPr>
-        <a:xfrm>
-          <a:off x="0" y="0"/>
-          <a:ext cx="0" cy="0"/>
-          <a:chOff x="0" y="0"/>
-          <a:chExt cx="0" cy="0"/>
-        </a:xfrm>
-      </p:grpSpPr>
-      <p:sp>
-        <p:nvSpPr>
-          <p:cNvPr id="2" name="Title 1">
-            <a:extLst>
-              <a:ext uri="{FF2B5EF4-FFF2-40B4-BE49-F238E27FC236}">
-                <a16:creationId xmlns:a16="http://schemas.microsoft.com/office/drawing/2014/main" id="{8001E514-E537-0BC5-B0D5-CDD45E1C6E4E}"/>
-              </a:ext>
-            </a:extLst>
-          </p:cNvPr>
-          <p:cNvSpPr>
-            <a:spLocks noGrp="1"/>
-          </p:cNvSpPr>
-          <p:nvPr>
-            <p:ph type="title"/>
-          </p:nvPr>
-        </p:nvSpPr>
-        <p:spPr/>
-        <p:txBody>
-          <a:bodyPr/>
-          <a:lstStyle/>
-          <a:p>
-            <a:r>
-              <a:rPr lang="en-GB"/>
-              <a:t>How do Websites Work?</a:t>
-            </a:r>
-            <a:endParaRPr lang="en-US"/>
-          </a:p>
-        </p:txBody>
-      </p:sp>
-      <p:sp>
-        <p:nvSpPr>
-          <p:cNvPr id="3" name="Content Placeholder 2">
-            <a:extLst>
-              <a:ext uri="{FF2B5EF4-FFF2-40B4-BE49-F238E27FC236}">
-                <a16:creationId xmlns:a16="http://schemas.microsoft.com/office/drawing/2014/main" id="{39023CEB-0D83-731D-7A9C-C8D87121F799}"/>
-              </a:ext>
-            </a:extLst>
-          </p:cNvPr>
-          <p:cNvSpPr>
-            <a:spLocks noGrp="1"/>
-          </p:cNvSpPr>
-          <p:nvPr>
-            <p:ph idx="1"/>
-          </p:nvPr>
-        </p:nvSpPr>
-        <p:spPr/>
-        <p:txBody>
-          <a:bodyPr/>
-          <a:lstStyle/>
-          <a:p>
-            <a:pPr marL="0" indent="0">
-              <a:buNone/>
-            </a:pPr>
-            <a:r>
-              <a:rPr lang="en-GB"/>
-              <a:t>JavaScript = All the cool stuff</a:t>
-            </a:r>
-          </a:p>
-        </p:txBody>
-      </p:sp>
-      <p:sp>
-        <p:nvSpPr>
-          <p:cNvPr id="4" name="Slide Number Placeholder 3">
-            <a:extLst>
-              <a:ext uri="{FF2B5EF4-FFF2-40B4-BE49-F238E27FC236}">
-                <a16:creationId xmlns:a16="http://schemas.microsoft.com/office/drawing/2014/main" id="{8ACD8E19-5048-A3D0-8430-760AE9E3DA6B}"/>
-              </a:ext>
-            </a:extLst>
-          </p:cNvPr>
-          <p:cNvSpPr>
-            <a:spLocks noGrp="1"/>
-          </p:cNvSpPr>
-          <p:nvPr>
-            <p:ph type="sldNum" sz="quarter" idx="12"/>
-          </p:nvPr>
-        </p:nvSpPr>
-        <p:spPr/>
-        <p:txBody>
-          <a:bodyPr/>
-          <a:lstStyle/>
-          <a:p>
-            <a:fld id="{52890E68-D690-4AC2-96FA-C0B5F80968DC}" type="slidenum">
-              <a:rPr lang="en-US" smtClean="0"/>
-              <a:t>5</a:t>
-            </a:fld>
-            <a:endParaRPr lang="en-US"/>
-          </a:p>
-        </p:txBody>
-      </p:sp>
-      <p:sp>
-        <p:nvSpPr>
-          <p:cNvPr id="23" name="Plus Sign 22">
-            <a:extLst>
-              <a:ext uri="{FF2B5EF4-FFF2-40B4-BE49-F238E27FC236}">
-                <a16:creationId xmlns:a16="http://schemas.microsoft.com/office/drawing/2014/main" id="{478BDF2D-EC79-6E6D-EA9A-B385D2CE5AA1}"/>
-              </a:ext>
-            </a:extLst>
-          </p:cNvPr>
-          <p:cNvSpPr/>
-          <p:nvPr/>
-        </p:nvSpPr>
-        <p:spPr>
-          <a:xfrm>
-            <a:off x="6226629" y="2659986"/>
-            <a:ext cx="867999" cy="947057"/>
-          </a:xfrm>
-          <a:prstGeom prst="mathPlus">
-            <a:avLst/>
-          </a:prstGeom>
-          <a:ln w="38100"/>
-        </p:spPr>
-        <p:style>
-          <a:lnRef idx="2">
-            <a:schemeClr val="dk1"/>
-          </a:lnRef>
-          <a:fillRef idx="1">
-            <a:schemeClr val="lt1"/>
-          </a:fillRef>
-          <a:effectRef idx="0">
-            <a:schemeClr val="dk1"/>
-          </a:effectRef>
-          <a:fontRef idx="minor">
-            <a:schemeClr val="dk1"/>
-          </a:fontRef>
-        </p:style>
-        <p:txBody>
-          <a:bodyPr rtlCol="0" anchor="ctr"/>
-          <a:lstStyle/>
-          <a:p>
-            <a:pPr algn="ctr"/>
-            <a:endParaRPr lang="en-US"/>
-          </a:p>
-        </p:txBody>
-      </p:sp>
-      <p:sp>
-        <p:nvSpPr>
-          <p:cNvPr id="24" name="Equals 23">
-            <a:extLst>
-              <a:ext uri="{FF2B5EF4-FFF2-40B4-BE49-F238E27FC236}">
-                <a16:creationId xmlns:a16="http://schemas.microsoft.com/office/drawing/2014/main" id="{E7898A4A-C1BC-5964-DF0B-EAC968F06A4B}"/>
-              </a:ext>
-            </a:extLst>
-          </p:cNvPr>
-          <p:cNvSpPr/>
-          <p:nvPr/>
-        </p:nvSpPr>
-        <p:spPr>
-          <a:xfrm rot="5400000">
-            <a:off x="5285961" y="3910806"/>
-            <a:ext cx="1118423" cy="1293292"/>
-          </a:xfrm>
-          <a:prstGeom prst="mathEqual">
-            <a:avLst/>
-          </a:prstGeom>
-          <a:ln w="38100"/>
-        </p:spPr>
-        <p:style>
-          <a:lnRef idx="2">
-            <a:schemeClr val="dk1"/>
-          </a:lnRef>
-          <a:fillRef idx="1">
-            <a:schemeClr val="lt1"/>
-          </a:fillRef>
-          <a:effectRef idx="0">
-            <a:schemeClr val="dk1"/>
-          </a:effectRef>
-          <a:fontRef idx="minor">
-            <a:schemeClr val="dk1"/>
-          </a:fontRef>
-        </p:style>
-        <p:txBody>
-          <a:bodyPr rtlCol="0" anchor="ctr"/>
-          <a:lstStyle/>
-          <a:p>
-            <a:pPr algn="ctr"/>
-            <a:endParaRPr lang="en-US">
-              <a:solidFill>
-                <a:schemeClr val="tx1"/>
-              </a:solidFill>
-            </a:endParaRPr>
-          </a:p>
-        </p:txBody>
-      </p:sp>
-      <p:pic>
-        <p:nvPicPr>
-          <p:cNvPr id="7" name="Picture 6">
-            <a:extLst>
-              <a:ext uri="{FF2B5EF4-FFF2-40B4-BE49-F238E27FC236}">
-                <a16:creationId xmlns:a16="http://schemas.microsoft.com/office/drawing/2014/main" id="{5B22E573-21F7-34E8-0EF8-26A7DAF1F75A}"/>
-              </a:ext>
-            </a:extLst>
-          </p:cNvPr>
-          <p:cNvPicPr>
-            <a:picLocks noChangeAspect="1"/>
-          </p:cNvPicPr>
-          <p:nvPr/>
-        </p:nvPicPr>
-        <p:blipFill>
-          <a:blip r:embed="rId2">
-            <a:extLst>
-              <a:ext uri="{28A0092B-C50C-407E-A947-70E740481C1C}">
-                <a14:useLocalDpi xmlns:a14="http://schemas.microsoft.com/office/drawing/2010/main" val="0"/>
-              </a:ext>
-            </a:extLst>
-          </a:blip>
-          <a:stretch>
-            <a:fillRect/>
-          </a:stretch>
-        </p:blipFill>
-        <p:spPr>
-          <a:xfrm>
-            <a:off x="624516" y="2599912"/>
-            <a:ext cx="5143090" cy="1152686"/>
-          </a:xfrm>
-          <a:prstGeom prst="rect">
-            <a:avLst/>
-          </a:prstGeom>
-        </p:spPr>
-      </p:pic>
-      <p:pic>
-        <p:nvPicPr>
-          <p:cNvPr id="12" name="Picture 11">
-            <a:extLst>
-              <a:ext uri="{FF2B5EF4-FFF2-40B4-BE49-F238E27FC236}">
-                <a16:creationId xmlns:a16="http://schemas.microsoft.com/office/drawing/2014/main" id="{EA78C3F6-4053-0D88-5ECF-EBEE149CE744}"/>
-              </a:ext>
-            </a:extLst>
-          </p:cNvPr>
-          <p:cNvPicPr>
-            <a:picLocks noChangeAspect="1"/>
-          </p:cNvPicPr>
-          <p:nvPr/>
-        </p:nvPicPr>
-        <p:blipFill>
-          <a:blip r:embed="rId3">
-            <a:extLst>
-              <a:ext uri="{28A0092B-C50C-407E-A947-70E740481C1C}">
-                <a14:useLocalDpi xmlns:a14="http://schemas.microsoft.com/office/drawing/2010/main" val="0"/>
-              </a:ext>
-            </a:extLst>
-          </a:blip>
-          <a:stretch>
-            <a:fillRect/>
-          </a:stretch>
-        </p:blipFill>
-        <p:spPr>
-          <a:xfrm>
-            <a:off x="7553651" y="2659986"/>
-            <a:ext cx="3056956" cy="947057"/>
-          </a:xfrm>
-          <a:prstGeom prst="rect">
-            <a:avLst/>
-          </a:prstGeom>
-        </p:spPr>
-      </p:pic>
-      <p:pic>
-        <p:nvPicPr>
-          <p:cNvPr id="14" name="Picture 13">
-            <a:extLst>
-              <a:ext uri="{FF2B5EF4-FFF2-40B4-BE49-F238E27FC236}">
-                <a16:creationId xmlns:a16="http://schemas.microsoft.com/office/drawing/2014/main" id="{FA7EEC17-AB53-DDE4-E5B6-BD2B3395B6D5}"/>
-              </a:ext>
-            </a:extLst>
-          </p:cNvPr>
-          <p:cNvPicPr>
-            <a:picLocks noChangeAspect="1"/>
-          </p:cNvPicPr>
-          <p:nvPr/>
-        </p:nvPicPr>
-        <p:blipFill>
-          <a:blip r:embed="rId4">
-            <a:extLst>
-              <a:ext uri="{28A0092B-C50C-407E-A947-70E740481C1C}">
-                <a14:useLocalDpi xmlns:a14="http://schemas.microsoft.com/office/drawing/2010/main" val="0"/>
-              </a:ext>
-            </a:extLst>
-          </a:blip>
-          <a:stretch>
-            <a:fillRect/>
-          </a:stretch>
-        </p:blipFill>
-        <p:spPr>
-          <a:xfrm>
-            <a:off x="4550489" y="5270210"/>
-            <a:ext cx="2589366" cy="1461142"/>
-          </a:xfrm>
-          <a:prstGeom prst="rect">
-            <a:avLst/>
-          </a:prstGeom>
-        </p:spPr>
-      </p:pic>
-    </p:spTree>
-    <p:extLst>
-      <p:ext uri="{BB962C8B-B14F-4D97-AF65-F5344CB8AC3E}">
-        <p14:creationId xmlns:p14="http://schemas.microsoft.com/office/powerpoint/2010/main" val="3293644011"/>
-      </p:ext>
-    </p:extLst>
-  </p:cSld>
-  <p:clrMapOvr>
-    <a:masterClrMapping/>
-  </p:clrMapOvr>
-  <p:timing>
-    <p:tnLst>
-      <p:par>
-        <p:cTn id="1" dur="indefinite" restart="never" nodeType="tmRoot">
-          <p:childTnLst>
-            <p:seq concurrent="1" nextAc="seek">
-              <p:cTn id="2" dur="indefinite" nodeType="mainSeq">
-                <p:childTnLst>
-                  <p:par>
-                    <p:cTn id="3" fill="hold">
-                      <p:stCondLst>
-                        <p:cond delay="indefinite"/>
-                      </p:stCondLst>
-                      <p:childTnLst>
-                        <p:par>
-                          <p:cTn id="4" fill="hold">
-                            <p:stCondLst>
-                              <p:cond delay="0"/>
-                            </p:stCondLst>
-                            <p:childTnLst>
-                              <p:par>
-                                <p:cTn id="5" presetID="1" presetClass="entr" presetSubtype="0" fill="hold" grpId="0" nodeType="clickEffect">
-                                  <p:stCondLst>
-                                    <p:cond delay="0"/>
-                                  </p:stCondLst>
-                                  <p:childTnLst>
-                                    <p:set>
-                                      <p:cBhvr>
-                                        <p:cTn id="6" dur="1" fill="hold">
-                                          <p:stCondLst>
-                                            <p:cond delay="0"/>
-                                          </p:stCondLst>
-                                        </p:cTn>
-                                        <p:tgtEl>
-                                          <p:spTgt spid="23"/>
-                                        </p:tgtEl>
-                                        <p:attrNameLst>
-                                          <p:attrName>style.visibility</p:attrName>
-                                        </p:attrNameLst>
-                                      </p:cBhvr>
-                                      <p:to>
-                                        <p:strVal val="visible"/>
-                                      </p:to>
-                                    </p:set>
-                                  </p:childTnLst>
-                                </p:cTn>
-                              </p:par>
-                            </p:childTnLst>
-                          </p:cTn>
-                        </p:par>
-                      </p:childTnLst>
-                    </p:cTn>
-                  </p:par>
-                  <p:par>
-                    <p:cTn id="7" fill="hold">
-                      <p:stCondLst>
-                        <p:cond delay="indefinite"/>
-                      </p:stCondLst>
-                      <p:childTnLst>
-                        <p:par>
-                          <p:cTn id="8" fill="hold">
-                            <p:stCondLst>
-                              <p:cond delay="0"/>
-                            </p:stCondLst>
-                            <p:childTnLst>
-                              <p:par>
-                                <p:cTn id="9" presetID="1" presetClass="entr" presetSubtype="0" fill="hold" grpId="0" nodeType="clickEffect">
-                                  <p:stCondLst>
-                                    <p:cond delay="0"/>
-                                  </p:stCondLst>
-                                  <p:childTnLst>
-                                    <p:set>
-                                      <p:cBhvr>
-                                        <p:cTn id="10" dur="1" fill="hold">
-                                          <p:stCondLst>
-                                            <p:cond delay="0"/>
-                                          </p:stCondLst>
-                                        </p:cTn>
-                                        <p:tgtEl>
-                                          <p:spTgt spid="24"/>
-                                        </p:tgtEl>
-                                        <p:attrNameLst>
-                                          <p:attrName>style.visibility</p:attrName>
-                                        </p:attrNameLst>
-                                      </p:cBhvr>
-                                      <p:to>
-                                        <p:strVal val="visible"/>
-                                      </p:to>
-                                    </p:set>
-                                  </p:childTnLst>
-                                </p:cTn>
-                              </p:par>
-                            </p:childTnLst>
-                          </p:cTn>
-                        </p:par>
-                      </p:childTnLst>
-                    </p:cTn>
-                  </p:par>
-                </p:childTnLst>
-              </p:cTn>
-              <p:prevCondLst>
-                <p:cond evt="onPrev" delay="0">
-                  <p:tgtEl>
-                    <p:sldTgt/>
-                  </p:tgtEl>
-                </p:cond>
-              </p:prevCondLst>
-              <p:nextCondLst>
-                <p:cond evt="onNext" delay="0">
-                  <p:tgtEl>
-                    <p:sldTgt/>
-                  </p:tgtEl>
-                </p:cond>
-              </p:nextCondLst>
-            </p:seq>
-          </p:childTnLst>
-        </p:cTn>
-      </p:par>
-    </p:tnLst>
-    <p:bldLst>
-      <p:bldP spid="23" grpId="0" animBg="1"/>
-      <p:bldP spid="24" grpId="0" animBg="1"/>
-    </p:bldLst>
-  </p:timing>
-</p:sld>
-</file>
-
-<file path=ppt/slides/slide6.xml><?xml version="1.0" encoding="utf-8"?>
-<p:sld xmlns:a="http://schemas.openxmlformats.org/drawingml/2006/main" xmlns:r="http://schemas.openxmlformats.org/officeDocument/2006/relationships" xmlns:p="http://schemas.openxmlformats.org/presentationml/2006/main">
-  <p:cSld>
-    <p:spTree>
-      <p:nvGrpSpPr>
-        <p:cNvPr id="1" name="">
-          <a:extLst>
-            <a:ext uri="{FF2B5EF4-FFF2-40B4-BE49-F238E27FC236}">
-              <a16:creationId xmlns:a16="http://schemas.microsoft.com/office/drawing/2014/main" id="{1ADFF728-52F1-1A41-9DB0-77F12D99D486}"/>
-            </a:ext>
-          </a:extLst>
-        </p:cNvPr>
-        <p:cNvGrpSpPr/>
-        <p:nvPr/>
-      </p:nvGrpSpPr>
-      <p:grpSpPr>
-        <a:xfrm>
-          <a:off x="0" y="0"/>
-          <a:ext cx="0" cy="0"/>
-          <a:chOff x="0" y="0"/>
-          <a:chExt cx="0" cy="0"/>
-        </a:xfrm>
-      </p:grpSpPr>
-      <p:sp>
-        <p:nvSpPr>
-          <p:cNvPr id="2" name="Title 1">
-            <a:extLst>
-              <a:ext uri="{FF2B5EF4-FFF2-40B4-BE49-F238E27FC236}">
-                <a16:creationId xmlns:a16="http://schemas.microsoft.com/office/drawing/2014/main" id="{C18E454D-BDF5-B392-5406-A3B07A91DE41}"/>
-              </a:ext>
-            </a:extLst>
-          </p:cNvPr>
-          <p:cNvSpPr>
-            <a:spLocks noGrp="1"/>
-          </p:cNvSpPr>
-          <p:nvPr>
-            <p:ph type="title"/>
-          </p:nvPr>
-        </p:nvSpPr>
-        <p:spPr/>
-        <p:txBody>
-          <a:bodyPr/>
-          <a:lstStyle/>
-          <a:p>
-            <a:r>
-              <a:rPr lang="en-GB"/>
-              <a:t>Modern Website Development</a:t>
-            </a:r>
-            <a:endParaRPr lang="en-US"/>
-          </a:p>
-        </p:txBody>
-      </p:sp>
-      <p:sp>
-        <p:nvSpPr>
-          <p:cNvPr id="3" name="Content Placeholder 2">
-            <a:extLst>
-              <a:ext uri="{FF2B5EF4-FFF2-40B4-BE49-F238E27FC236}">
-                <a16:creationId xmlns:a16="http://schemas.microsoft.com/office/drawing/2014/main" id="{3D853120-35CF-4279-E11F-B6C9DEBBDB36}"/>
-              </a:ext>
-            </a:extLst>
-          </p:cNvPr>
-          <p:cNvSpPr>
-            <a:spLocks noGrp="1"/>
-          </p:cNvSpPr>
-          <p:nvPr>
-            <p:ph idx="1"/>
-          </p:nvPr>
-        </p:nvSpPr>
-        <p:spPr/>
-        <p:txBody>
-          <a:bodyPr>
-            <a:normAutofit lnSpcReduction="10000"/>
-          </a:bodyPr>
-          <a:lstStyle/>
-          <a:p>
-            <a:r>
-              <a:rPr lang="en-GB"/>
-              <a:t>Every Language covers its own </a:t>
-            </a:r>
-            <a:r>
-              <a:rPr lang="en-GB" b="1"/>
-              <a:t>problem domain:</a:t>
-            </a:r>
-          </a:p>
-          <a:p>
-            <a:pPr lvl="1"/>
-            <a:r>
-              <a:rPr lang="en-GB"/>
-              <a:t>HTML = Layout</a:t>
-            </a:r>
-          </a:p>
-          <a:p>
-            <a:pPr lvl="1"/>
-            <a:r>
-              <a:rPr lang="en-GB"/>
-              <a:t>CSS = Style</a:t>
-            </a:r>
-          </a:p>
-          <a:p>
-            <a:pPr lvl="1"/>
-            <a:r>
-              <a:rPr lang="en-GB"/>
-              <a:t>JavaScript = Behaviour</a:t>
-            </a:r>
-          </a:p>
-          <a:p>
-            <a:pPr lvl="1"/>
-            <a:endParaRPr lang="en-GB"/>
-          </a:p>
-          <a:p>
-            <a:pPr marL="457200" lvl="1" indent="0">
-              <a:buNone/>
-            </a:pPr>
-            <a:endParaRPr lang="en-GB"/>
-          </a:p>
-          <a:p>
-            <a:pPr marL="457200" lvl="1" indent="0">
-              <a:buNone/>
-            </a:pPr>
-            <a:endParaRPr lang="en-GB"/>
-          </a:p>
-          <a:p>
-            <a:pPr>
-              <a:buFont typeface="Wingdings" panose="05000000000000000000" pitchFamily="2" charset="2"/>
-              <a:buChar char="à"/>
-            </a:pPr>
-            <a:r>
-              <a:rPr lang="en-GB">
-                <a:sym typeface="Wingdings" panose="05000000000000000000" pitchFamily="2" charset="2"/>
-              </a:rPr>
-              <a:t>Very Complex: Developers need to be comfortable with 3 language</a:t>
-            </a:r>
-          </a:p>
-          <a:p>
-            <a:pPr marL="0" indent="0">
-              <a:buNone/>
-            </a:pPr>
-            <a:r>
-              <a:rPr lang="en-GB">
-                <a:sym typeface="Wingdings" panose="05000000000000000000" pitchFamily="2" charset="2"/>
-              </a:rPr>
-              <a:t>     (at least!)</a:t>
-            </a:r>
-          </a:p>
-          <a:p>
-            <a:pPr marL="0" indent="0">
-              <a:buNone/>
-            </a:pPr>
-            <a:r>
-              <a:rPr lang="en-GB">
-                <a:sym typeface="Wingdings" panose="05000000000000000000" pitchFamily="2" charset="2"/>
-              </a:rPr>
-              <a:t>Solution: Fluent DSLs</a:t>
-            </a:r>
-          </a:p>
-        </p:txBody>
-      </p:sp>
-      <p:sp>
-        <p:nvSpPr>
-          <p:cNvPr id="4" name="Slide Number Placeholder 3">
-            <a:extLst>
-              <a:ext uri="{FF2B5EF4-FFF2-40B4-BE49-F238E27FC236}">
-                <a16:creationId xmlns:a16="http://schemas.microsoft.com/office/drawing/2014/main" id="{5CEBBF50-D11D-4951-B6E9-63CFFA5F444D}"/>
-              </a:ext>
-            </a:extLst>
-          </p:cNvPr>
-          <p:cNvSpPr>
-            <a:spLocks noGrp="1"/>
-          </p:cNvSpPr>
-          <p:nvPr>
-            <p:ph type="sldNum" sz="quarter" idx="12"/>
-          </p:nvPr>
-        </p:nvSpPr>
-        <p:spPr/>
-        <p:txBody>
-          <a:bodyPr/>
-          <a:lstStyle/>
-          <a:p>
-            <a:fld id="{52890E68-D690-4AC2-96FA-C0B5F80968DC}" type="slidenum">
-              <a:rPr lang="en-US" smtClean="0"/>
-              <a:t>6</a:t>
-            </a:fld>
-            <a:endParaRPr lang="en-US"/>
-          </a:p>
-        </p:txBody>
-      </p:sp>
-    </p:spTree>
-    <p:extLst>
-      <p:ext uri="{BB962C8B-B14F-4D97-AF65-F5344CB8AC3E}">
-        <p14:creationId xmlns:p14="http://schemas.microsoft.com/office/powerpoint/2010/main" val="2642122016"/>
-      </p:ext>
-    </p:extLst>
-  </p:cSld>
-  <p:clrMapOvr>
-    <a:masterClrMapping/>
-  </p:clrMapOvr>
-</p:sld>
-</file>
-
-<file path=ppt/slides/slide7.xml><?xml version="1.0" encoding="utf-8"?>
-<p:sld xmlns:a="http://schemas.openxmlformats.org/drawingml/2006/main" xmlns:r="http://schemas.openxmlformats.org/officeDocument/2006/relationships" xmlns:p="http://schemas.openxmlformats.org/presentationml/2006/main">
-  <p:cSld>
-    <p:spTree>
-      <p:nvGrpSpPr>
-        <p:cNvPr id="1" name="">
-          <a:extLst>
-            <a:ext uri="{FF2B5EF4-FFF2-40B4-BE49-F238E27FC236}">
-              <a16:creationId xmlns:a16="http://schemas.microsoft.com/office/drawing/2014/main" id="{9F13BEC4-C0CE-180E-58D5-76FB00E477F0}"/>
-            </a:ext>
-          </a:extLst>
-        </p:cNvPr>
-        <p:cNvGrpSpPr/>
-        <p:nvPr/>
-      </p:nvGrpSpPr>
-      <p:grpSpPr>
-        <a:xfrm>
-          <a:off x="0" y="0"/>
-          <a:ext cx="0" cy="0"/>
-          <a:chOff x="0" y="0"/>
-          <a:chExt cx="0" cy="0"/>
-        </a:xfrm>
-      </p:grpSpPr>
-      <p:sp>
-        <p:nvSpPr>
-          <p:cNvPr id="2" name="Title 1">
-            <a:extLst>
-              <a:ext uri="{FF2B5EF4-FFF2-40B4-BE49-F238E27FC236}">
-                <a16:creationId xmlns:a16="http://schemas.microsoft.com/office/drawing/2014/main" id="{5290BB9E-5673-FB59-6594-53991A75666C}"/>
-              </a:ext>
-            </a:extLst>
-          </p:cNvPr>
-          <p:cNvSpPr>
-            <a:spLocks noGrp="1"/>
-          </p:cNvSpPr>
-          <p:nvPr>
-            <p:ph type="title"/>
-          </p:nvPr>
-        </p:nvSpPr>
-        <p:spPr/>
-        <p:txBody>
-          <a:bodyPr/>
-          <a:lstStyle/>
-          <a:p>
-            <a:r>
-              <a:rPr lang="en-GB"/>
-              <a:t>What are Fluent DSLs?</a:t>
-            </a:r>
-            <a:endParaRPr lang="en-US"/>
-          </a:p>
-        </p:txBody>
-      </p:sp>
-      <p:sp>
-        <p:nvSpPr>
-          <p:cNvPr id="3" name="Content Placeholder 2">
-            <a:extLst>
-              <a:ext uri="{FF2B5EF4-FFF2-40B4-BE49-F238E27FC236}">
-                <a16:creationId xmlns:a16="http://schemas.microsoft.com/office/drawing/2014/main" id="{88E5AA89-67A4-0711-DB74-4B69167416D6}"/>
-              </a:ext>
-            </a:extLst>
-          </p:cNvPr>
-          <p:cNvSpPr>
-            <a:spLocks noGrp="1"/>
-          </p:cNvSpPr>
-          <p:nvPr>
-            <p:ph idx="1"/>
-          </p:nvPr>
-        </p:nvSpPr>
-        <p:spPr/>
-        <p:txBody>
-          <a:bodyPr/>
-          <a:lstStyle/>
-          <a:p>
-            <a:r>
-              <a:rPr lang="en-GB"/>
-              <a:t>DSL = </a:t>
-            </a:r>
-            <a:r>
-              <a:rPr lang="en-GB" b="1"/>
-              <a:t>Domain Specific Language</a:t>
-            </a:r>
-          </a:p>
-          <a:p>
-            <a:r>
-              <a:rPr lang="en-GB"/>
-              <a:t>Fluent DSL = A DSL using familiar syntax</a:t>
-            </a:r>
-          </a:p>
-        </p:txBody>
-      </p:sp>
-      <p:sp>
-        <p:nvSpPr>
-          <p:cNvPr id="4" name="Slide Number Placeholder 3">
-            <a:extLst>
-              <a:ext uri="{FF2B5EF4-FFF2-40B4-BE49-F238E27FC236}">
-                <a16:creationId xmlns:a16="http://schemas.microsoft.com/office/drawing/2014/main" id="{4FCA8B16-5C5D-9B63-01C6-89101D1F4D55}"/>
-              </a:ext>
-            </a:extLst>
-          </p:cNvPr>
-          <p:cNvSpPr>
-            <a:spLocks noGrp="1"/>
-          </p:cNvSpPr>
-          <p:nvPr>
-            <p:ph type="sldNum" sz="quarter" idx="12"/>
-          </p:nvPr>
-        </p:nvSpPr>
-        <p:spPr/>
-        <p:txBody>
-          <a:bodyPr/>
-          <a:lstStyle/>
-          <a:p>
-            <a:fld id="{52890E68-D690-4AC2-96FA-C0B5F80968DC}" type="slidenum">
-              <a:rPr lang="en-US" smtClean="0"/>
-              <a:t>7</a:t>
-            </a:fld>
-            <a:endParaRPr lang="en-US"/>
-          </a:p>
-        </p:txBody>
-      </p:sp>
-      <p:pic>
-        <p:nvPicPr>
-          <p:cNvPr id="6" name="Picture 5">
-            <a:extLst>
-              <a:ext uri="{FF2B5EF4-FFF2-40B4-BE49-F238E27FC236}">
-                <a16:creationId xmlns:a16="http://schemas.microsoft.com/office/drawing/2014/main" id="{3F508A7E-E4F5-F6BF-6CFE-A22DB33451A6}"/>
-              </a:ext>
-            </a:extLst>
-          </p:cNvPr>
-          <p:cNvPicPr>
-            <a:picLocks noChangeAspect="1"/>
-          </p:cNvPicPr>
-          <p:nvPr/>
-        </p:nvPicPr>
-        <p:blipFill>
-          <a:blip r:embed="rId2">
-            <a:extLst>
-              <a:ext uri="{28A0092B-C50C-407E-A947-70E740481C1C}">
-                <a14:useLocalDpi xmlns:a14="http://schemas.microsoft.com/office/drawing/2010/main" val="0"/>
-              </a:ext>
-            </a:extLst>
-          </a:blip>
-          <a:stretch>
-            <a:fillRect/>
-          </a:stretch>
-        </p:blipFill>
-        <p:spPr>
-          <a:xfrm>
-            <a:off x="1265504" y="3553056"/>
-            <a:ext cx="3886788" cy="2346079"/>
-          </a:xfrm>
-          <a:prstGeom prst="rect">
-            <a:avLst/>
-          </a:prstGeom>
-        </p:spPr>
-      </p:pic>
-      <p:sp>
-        <p:nvSpPr>
-          <p:cNvPr id="7" name="Arrow: Right 6">
-            <a:extLst>
-              <a:ext uri="{FF2B5EF4-FFF2-40B4-BE49-F238E27FC236}">
-                <a16:creationId xmlns:a16="http://schemas.microsoft.com/office/drawing/2014/main" id="{F82623C3-9109-D93F-FFCC-CD799749B5E3}"/>
-              </a:ext>
-            </a:extLst>
-          </p:cNvPr>
-          <p:cNvSpPr/>
-          <p:nvPr/>
-        </p:nvSpPr>
-        <p:spPr>
-          <a:xfrm>
-            <a:off x="5433646" y="4352192"/>
-            <a:ext cx="1283677" cy="641839"/>
-          </a:xfrm>
-          <a:prstGeom prst="rightArrow">
-            <a:avLst/>
-          </a:prstGeom>
-          <a:ln w="38100"/>
-        </p:spPr>
-        <p:style>
-          <a:lnRef idx="2">
-            <a:schemeClr val="dk1"/>
-          </a:lnRef>
-          <a:fillRef idx="1">
-            <a:schemeClr val="lt1"/>
-          </a:fillRef>
-          <a:effectRef idx="0">
-            <a:schemeClr val="dk1"/>
-          </a:effectRef>
-          <a:fontRef idx="minor">
-            <a:schemeClr val="dk1"/>
-          </a:fontRef>
-        </p:style>
-        <p:txBody>
-          <a:bodyPr rtlCol="0" anchor="ctr"/>
-          <a:lstStyle/>
-          <a:p>
-            <a:pPr algn="ctr"/>
-            <a:endParaRPr lang="en-US"/>
-          </a:p>
-        </p:txBody>
-      </p:sp>
-      <p:pic>
-        <p:nvPicPr>
-          <p:cNvPr id="9" name="Picture 8">
-            <a:extLst>
-              <a:ext uri="{FF2B5EF4-FFF2-40B4-BE49-F238E27FC236}">
-                <a16:creationId xmlns:a16="http://schemas.microsoft.com/office/drawing/2014/main" id="{0211319D-B68C-1308-F0D7-0DD491F669F0}"/>
-              </a:ext>
-            </a:extLst>
-          </p:cNvPr>
-          <p:cNvPicPr>
-            <a:picLocks noChangeAspect="1"/>
-          </p:cNvPicPr>
-          <p:nvPr/>
-        </p:nvPicPr>
-        <p:blipFill>
-          <a:blip r:embed="rId3">
-            <a:extLst>
-              <a:ext uri="{28A0092B-C50C-407E-A947-70E740481C1C}">
-                <a14:useLocalDpi xmlns:a14="http://schemas.microsoft.com/office/drawing/2010/main" val="0"/>
-              </a:ext>
-            </a:extLst>
-          </a:blip>
-          <a:stretch>
-            <a:fillRect/>
-          </a:stretch>
-        </p:blipFill>
-        <p:spPr>
-          <a:xfrm>
-            <a:off x="6998677" y="3746662"/>
-            <a:ext cx="1744616" cy="1958866"/>
-          </a:xfrm>
-          <a:prstGeom prst="rect">
-            <a:avLst/>
-          </a:prstGeom>
-        </p:spPr>
-      </p:pic>
-    </p:spTree>
-    <p:extLst>
-      <p:ext uri="{BB962C8B-B14F-4D97-AF65-F5344CB8AC3E}">
-        <p14:creationId xmlns:p14="http://schemas.microsoft.com/office/powerpoint/2010/main" val="3558839069"/>
-      </p:ext>
-    </p:extLst>
-  </p:cSld>
-  <p:clrMapOvr>
-    <a:masterClrMapping/>
-  </p:clrMapOvr>
-</p:sld>
-</file>
-
-<file path=ppt/slides/slide8.xml><?xml version="1.0" encoding="utf-8"?>
-<p:sld xmlns:a="http://schemas.openxmlformats.org/drawingml/2006/main" xmlns:r="http://schemas.openxmlformats.org/officeDocument/2006/relationships" xmlns:p="http://schemas.openxmlformats.org/presentationml/2006/main">
-  <p:cSld>
-    <p:spTree>
-      <p:nvGrpSpPr>
-        <p:cNvPr id="1" name="">
-          <a:extLst>
-            <a:ext uri="{FF2B5EF4-FFF2-40B4-BE49-F238E27FC236}">
-              <a16:creationId xmlns:a16="http://schemas.microsoft.com/office/drawing/2014/main" id="{D559A3D8-4397-5458-934A-096AF7C77F69}"/>
-            </a:ext>
-          </a:extLst>
-        </p:cNvPr>
-        <p:cNvGrpSpPr/>
-        <p:nvPr/>
-      </p:nvGrpSpPr>
-      <p:grpSpPr>
-        <a:xfrm>
-          <a:off x="0" y="0"/>
-          <a:ext cx="0" cy="0"/>
-          <a:chOff x="0" y="0"/>
-          <a:chExt cx="0" cy="0"/>
-        </a:xfrm>
-      </p:grpSpPr>
-      <p:sp>
-        <p:nvSpPr>
-          <p:cNvPr id="2" name="Title 1">
-            <a:extLst>
-              <a:ext uri="{FF2B5EF4-FFF2-40B4-BE49-F238E27FC236}">
-                <a16:creationId xmlns:a16="http://schemas.microsoft.com/office/drawing/2014/main" id="{47A169D0-2BDB-9771-42EB-CEB90B218A9D}"/>
-              </a:ext>
-            </a:extLst>
-          </p:cNvPr>
-          <p:cNvSpPr>
-            <a:spLocks noGrp="1"/>
-          </p:cNvSpPr>
-          <p:nvPr>
-            <p:ph type="title"/>
-          </p:nvPr>
-        </p:nvSpPr>
-        <p:spPr/>
-        <p:txBody>
-          <a:bodyPr/>
-          <a:lstStyle/>
-          <a:p>
-            <a:r>
-              <a:rPr lang="en-GB"/>
-              <a:t>My Research Goal</a:t>
-            </a:r>
-            <a:endParaRPr lang="en-US"/>
-          </a:p>
-        </p:txBody>
-      </p:sp>
-      <p:sp>
-        <p:nvSpPr>
-          <p:cNvPr id="3" name="Content Placeholder 2">
-            <a:extLst>
-              <a:ext uri="{FF2B5EF4-FFF2-40B4-BE49-F238E27FC236}">
-                <a16:creationId xmlns:a16="http://schemas.microsoft.com/office/drawing/2014/main" id="{3878CEFD-DF19-E8A5-DAC1-02618FBFA922}"/>
-              </a:ext>
-            </a:extLst>
-          </p:cNvPr>
-          <p:cNvSpPr>
-            <a:spLocks noGrp="1"/>
-          </p:cNvSpPr>
-          <p:nvPr>
-            <p:ph idx="1"/>
-          </p:nvPr>
-        </p:nvSpPr>
-        <p:spPr/>
-        <p:txBody>
-          <a:bodyPr/>
-          <a:lstStyle/>
-          <a:p>
-            <a:r>
-              <a:rPr lang="en-GB"/>
-              <a:t>Prevent misuse of Fluent DSLs:</a:t>
-            </a:r>
-          </a:p>
-        </p:txBody>
-      </p:sp>
-      <p:sp>
-        <p:nvSpPr>
-          <p:cNvPr id="4" name="Slide Number Placeholder 3">
-            <a:extLst>
-              <a:ext uri="{FF2B5EF4-FFF2-40B4-BE49-F238E27FC236}">
-                <a16:creationId xmlns:a16="http://schemas.microsoft.com/office/drawing/2014/main" id="{267AF29E-CE18-B6B7-438C-F8B36AC5E25D}"/>
-              </a:ext>
-            </a:extLst>
-          </p:cNvPr>
-          <p:cNvSpPr>
-            <a:spLocks noGrp="1"/>
-          </p:cNvSpPr>
-          <p:nvPr>
-            <p:ph type="sldNum" sz="quarter" idx="12"/>
-          </p:nvPr>
-        </p:nvSpPr>
-        <p:spPr/>
-        <p:txBody>
-          <a:bodyPr/>
-          <a:lstStyle/>
-          <a:p>
-            <a:fld id="{52890E68-D690-4AC2-96FA-C0B5F80968DC}" type="slidenum">
-              <a:rPr lang="en-US" smtClean="0"/>
-              <a:t>8</a:t>
-            </a:fld>
-            <a:endParaRPr lang="en-US"/>
-          </a:p>
-        </p:txBody>
-      </p:sp>
-      <p:sp>
-        <p:nvSpPr>
-          <p:cNvPr id="7" name="Arrow: Right 6">
-            <a:extLst>
-              <a:ext uri="{FF2B5EF4-FFF2-40B4-BE49-F238E27FC236}">
-                <a16:creationId xmlns:a16="http://schemas.microsoft.com/office/drawing/2014/main" id="{44E33AEC-F77B-8A42-E5A6-37D249AC399A}"/>
-              </a:ext>
-            </a:extLst>
-          </p:cNvPr>
-          <p:cNvSpPr/>
-          <p:nvPr/>
-        </p:nvSpPr>
-        <p:spPr>
-          <a:xfrm>
-            <a:off x="5454161" y="3442188"/>
-            <a:ext cx="1283677" cy="641839"/>
-          </a:xfrm>
-          <a:prstGeom prst="rightArrow">
-            <a:avLst/>
-          </a:prstGeom>
-          <a:ln w="38100"/>
-        </p:spPr>
-        <p:style>
-          <a:lnRef idx="2">
-            <a:schemeClr val="dk1"/>
-          </a:lnRef>
-          <a:fillRef idx="1">
-            <a:schemeClr val="lt1"/>
-          </a:fillRef>
-          <a:effectRef idx="0">
-            <a:schemeClr val="dk1"/>
-          </a:effectRef>
-          <a:fontRef idx="minor">
-            <a:schemeClr val="dk1"/>
-          </a:fontRef>
-        </p:style>
-        <p:txBody>
-          <a:bodyPr rtlCol="0" anchor="ctr"/>
-          <a:lstStyle/>
-          <a:p>
-            <a:pPr algn="ctr"/>
-            <a:endParaRPr lang="en-US"/>
-          </a:p>
-        </p:txBody>
-      </p:sp>
-      <p:pic>
-        <p:nvPicPr>
-          <p:cNvPr id="8" name="Picture 7">
-            <a:extLst>
-              <a:ext uri="{FF2B5EF4-FFF2-40B4-BE49-F238E27FC236}">
-                <a16:creationId xmlns:a16="http://schemas.microsoft.com/office/drawing/2014/main" id="{90AF0396-7109-EB42-F435-E924569DD6E2}"/>
-              </a:ext>
-            </a:extLst>
-          </p:cNvPr>
-          <p:cNvPicPr>
-            <a:picLocks noChangeAspect="1"/>
-          </p:cNvPicPr>
-          <p:nvPr/>
-        </p:nvPicPr>
-        <p:blipFill>
-          <a:blip r:embed="rId2">
-            <a:extLst>
-              <a:ext uri="{28A0092B-C50C-407E-A947-70E740481C1C}">
-                <a14:useLocalDpi xmlns:a14="http://schemas.microsoft.com/office/drawing/2010/main" val="0"/>
-              </a:ext>
-            </a:extLst>
-          </a:blip>
-          <a:stretch>
-            <a:fillRect/>
-          </a:stretch>
-        </p:blipFill>
-        <p:spPr>
-          <a:xfrm>
-            <a:off x="1701239" y="2722130"/>
-            <a:ext cx="3451053" cy="2049063"/>
-          </a:xfrm>
-          <a:prstGeom prst="rect">
-            <a:avLst/>
-          </a:prstGeom>
-        </p:spPr>
-      </p:pic>
-      <p:sp>
-        <p:nvSpPr>
-          <p:cNvPr id="10" name="&quot;Not Allowed&quot; Symbol 9">
-            <a:extLst>
-              <a:ext uri="{FF2B5EF4-FFF2-40B4-BE49-F238E27FC236}">
-                <a16:creationId xmlns:a16="http://schemas.microsoft.com/office/drawing/2014/main" id="{337CB5E8-E0CD-8152-F714-95D0CB3121A5}"/>
-              </a:ext>
-            </a:extLst>
-          </p:cNvPr>
-          <p:cNvSpPr/>
-          <p:nvPr/>
-        </p:nvSpPr>
-        <p:spPr>
-          <a:xfrm>
-            <a:off x="7080739" y="2963008"/>
-            <a:ext cx="1529861" cy="1529861"/>
-          </a:xfrm>
-          <a:prstGeom prst="noSmoking">
-            <a:avLst/>
-          </a:prstGeom>
           <a:solidFill>
-            <a:srgbClr val="FF0000"/>
+            <a:srgbClr val="1E1F22"/>
           </a:solidFill>
-          <a:ln w="38100"/>
-        </p:spPr>
-        <p:style>
-          <a:lnRef idx="2">
-            <a:schemeClr val="dk1"/>
-          </a:lnRef>
-          <a:fillRef idx="1">
-            <a:schemeClr val="lt1"/>
-          </a:fillRef>
-          <a:effectRef idx="0">
-            <a:schemeClr val="dk1"/>
-          </a:effectRef>
-          <a:fontRef idx="minor">
-            <a:schemeClr val="dk1"/>
-          </a:fontRef>
-        </p:style>
-        <p:txBody>
-          <a:bodyPr rtlCol="0" anchor="ctr"/>
-          <a:lstStyle/>
-          <a:p>
-            <a:pPr algn="ctr"/>
-            <a:endParaRPr lang="en-US">
-              <a:solidFill>
-                <a:schemeClr val="tx1"/>
-              </a:solidFill>
-            </a:endParaRPr>
-          </a:p>
-        </p:txBody>
-      </p:sp>
-      <p:sp>
-        <p:nvSpPr>
-          <p:cNvPr id="12" name="TextBox 11">
-            <a:extLst>
-              <a:ext uri="{FF2B5EF4-FFF2-40B4-BE49-F238E27FC236}">
-                <a16:creationId xmlns:a16="http://schemas.microsoft.com/office/drawing/2014/main" id="{41C0D09C-8E88-C7C1-A8F4-73A7DAC56D8C}"/>
-              </a:ext>
-            </a:extLst>
-          </p:cNvPr>
-          <p:cNvSpPr txBox="1"/>
-          <p:nvPr/>
-        </p:nvSpPr>
-        <p:spPr>
-          <a:xfrm>
-            <a:off x="527920" y="4906130"/>
-            <a:ext cx="1731702" cy="646331"/>
-          </a:xfrm>
-          <a:prstGeom prst="rect">
-            <a:avLst/>
-          </a:prstGeom>
-          <a:noFill/>
-        </p:spPr>
-        <p:txBody>
-          <a:bodyPr wrap="square" rtlCol="0">
-            <a:spAutoFit/>
-          </a:bodyPr>
-          <a:lstStyle/>
-          <a:p>
-            <a:pPr algn="ctr"/>
-            <a:r>
-              <a:rPr lang="en-GB">
-                <a:solidFill>
-                  <a:srgbClr val="0070C0"/>
-                </a:solidFill>
-                <a:latin typeface="Comic Sans MS" panose="030F0702030302020204" pitchFamily="66" charset="0"/>
-              </a:rPr>
-              <a:t>double tagging is not allowed</a:t>
-            </a:r>
-            <a:endParaRPr lang="en-US">
-              <a:solidFill>
-                <a:srgbClr val="0070C0"/>
-              </a:solidFill>
-              <a:latin typeface="Comic Sans MS" panose="030F0702030302020204" pitchFamily="66" charset="0"/>
-            </a:endParaRPr>
-          </a:p>
-        </p:txBody>
-      </p:sp>
-      <p:sp>
-        <p:nvSpPr>
-          <p:cNvPr id="14" name="Freeform: Shape 13">
-            <a:extLst>
-              <a:ext uri="{FF2B5EF4-FFF2-40B4-BE49-F238E27FC236}">
-                <a16:creationId xmlns:a16="http://schemas.microsoft.com/office/drawing/2014/main" id="{35E0D132-D961-6A1F-BF03-FB50A768B4D2}"/>
-              </a:ext>
-            </a:extLst>
-          </p:cNvPr>
-          <p:cNvSpPr/>
-          <p:nvPr/>
-        </p:nvSpPr>
-        <p:spPr>
-          <a:xfrm>
-            <a:off x="878175" y="3710354"/>
-            <a:ext cx="1117679" cy="984738"/>
-          </a:xfrm>
-          <a:custGeom>
-            <a:avLst/>
-            <a:gdLst>
-              <a:gd name="csX0" fmla="*/ 361540 w 1117679"/>
-              <a:gd name="csY0" fmla="*/ 984738 h 984738"/>
-              <a:gd name="csX1" fmla="*/ 36225 w 1117679"/>
-              <a:gd name="csY1" fmla="*/ 290146 h 984738"/>
-              <a:gd name="csX2" fmla="*/ 1117679 w 1117679"/>
-              <a:gd name="csY2" fmla="*/ 0 h 984738"/>
-            </a:gdLst>
-            <a:ahLst/>
-            <a:cxnLst>
-              <a:cxn ang="0">
-                <a:pos x="csX0" y="csY0"/>
-              </a:cxn>
-              <a:cxn ang="0">
-                <a:pos x="csX1" y="csY1"/>
-              </a:cxn>
-              <a:cxn ang="0">
-                <a:pos x="csX2" y="csY2"/>
-              </a:cxn>
-            </a:cxnLst>
-            <a:rect l="l" t="t" r="r" b="b"/>
-            <a:pathLst>
-              <a:path w="1117679" h="984738">
-                <a:moveTo>
-                  <a:pt x="361540" y="984738"/>
-                </a:moveTo>
-                <a:cubicBezTo>
-                  <a:pt x="135871" y="719503"/>
-                  <a:pt x="-89798" y="454269"/>
-                  <a:pt x="36225" y="290146"/>
-                </a:cubicBezTo>
-                <a:cubicBezTo>
-                  <a:pt x="162248" y="126023"/>
-                  <a:pt x="639963" y="63011"/>
-                  <a:pt x="1117679" y="0"/>
-                </a:cubicBezTo>
-              </a:path>
-            </a:pathLst>
-          </a:custGeom>
-          <a:noFill/>
-          <a:ln w="12700">
-            <a:solidFill>
-              <a:srgbClr val="0070C0"/>
-            </a:solidFill>
-            <a:headEnd type="none"/>
-            <a:tailEnd type="triangle"/>
+          <a:ln w="38100">
+            <a:noFill/>
           </a:ln>
         </p:spPr>
         <p:style>
@@ -7663,18 +4869,232 @@
           </a:fontRef>
         </p:style>
         <p:txBody>
-          <a:bodyPr rtlCol="0" anchor="ctr"/>
-          <a:lstStyle/>
-          <a:p>
-            <a:pPr algn="ctr"/>
-            <a:endParaRPr lang="en-US"/>
+          <a:bodyPr rtlCol="0" anchor="t"/>
+          <a:lstStyle/>
+          <a:p>
+            <a:r>
+              <a:rPr lang="en-US">
+                <a:solidFill>
+                  <a:srgbClr val="BCBEC4"/>
+                </a:solidFill>
+                <a:latin typeface="Consolas" panose="020B0609020204030204" pitchFamily="49" charset="0"/>
+              </a:rPr>
+              <a:t>Query query = SQL.</a:t>
+            </a:r>
+            <a:r>
+              <a:rPr lang="en-US">
+                <a:solidFill>
+                  <a:schemeClr val="accent2"/>
+                </a:solidFill>
+                <a:latin typeface="Consolas" panose="020B0609020204030204" pitchFamily="49" charset="0"/>
+              </a:rPr>
+              <a:t>select</a:t>
+            </a:r>
+            <a:r>
+              <a:rPr lang="en-US">
+                <a:solidFill>
+                  <a:srgbClr val="BCBEC4"/>
+                </a:solidFill>
+                <a:latin typeface="Consolas" panose="020B0609020204030204" pitchFamily="49" charset="0"/>
+              </a:rPr>
+              <a:t>(</a:t>
+            </a:r>
+            <a:r>
+              <a:rPr lang="en-US">
+                <a:solidFill>
+                  <a:srgbClr val="6AAB73"/>
+                </a:solidFill>
+                <a:latin typeface="Consolas" panose="020B0609020204030204" pitchFamily="49" charset="0"/>
+              </a:rPr>
+              <a:t>"</a:t>
+            </a:r>
+            <a:r>
+              <a:rPr lang="en-US">
+                <a:solidFill>
+                  <a:srgbClr val="BCBEC4"/>
+                </a:solidFill>
+                <a:latin typeface="Consolas" panose="020B0609020204030204" pitchFamily="49" charset="0"/>
+              </a:rPr>
+              <a:t>name, birth_year</a:t>
+            </a:r>
+            <a:r>
+              <a:rPr lang="en-US">
+                <a:solidFill>
+                  <a:srgbClr val="6AAB73"/>
+                </a:solidFill>
+                <a:latin typeface="Consolas" panose="020B0609020204030204" pitchFamily="49" charset="0"/>
+              </a:rPr>
+              <a:t>"</a:t>
+            </a:r>
+            <a:r>
+              <a:rPr lang="en-US">
+                <a:solidFill>
+                  <a:srgbClr val="BCBEC4"/>
+                </a:solidFill>
+                <a:latin typeface="Consolas" panose="020B0609020204030204" pitchFamily="49" charset="0"/>
+              </a:rPr>
+              <a:t>)</a:t>
+            </a:r>
+          </a:p>
+          <a:p>
+            <a:r>
+              <a:rPr lang="en-US">
+                <a:solidFill>
+                  <a:srgbClr val="BCBEC4"/>
+                </a:solidFill>
+                <a:latin typeface="Consolas" panose="020B0609020204030204" pitchFamily="49" charset="0"/>
+              </a:rPr>
+              <a:t>                 .</a:t>
+            </a:r>
+            <a:r>
+              <a:rPr lang="en-US">
+                <a:solidFill>
+                  <a:schemeClr val="accent2"/>
+                </a:solidFill>
+                <a:latin typeface="Consolas" panose="020B0609020204030204" pitchFamily="49" charset="0"/>
+              </a:rPr>
+              <a:t>from</a:t>
+            </a:r>
+            <a:r>
+              <a:rPr lang="en-US">
+                <a:solidFill>
+                  <a:srgbClr val="BCBEC4"/>
+                </a:solidFill>
+                <a:latin typeface="Consolas" panose="020B0609020204030204" pitchFamily="49" charset="0"/>
+              </a:rPr>
+              <a:t>(</a:t>
+            </a:r>
+            <a:r>
+              <a:rPr lang="en-US">
+                <a:solidFill>
+                  <a:srgbClr val="6AAB73"/>
+                </a:solidFill>
+                <a:latin typeface="Consolas" panose="020B0609020204030204" pitchFamily="49" charset="0"/>
+              </a:rPr>
+              <a:t>"</a:t>
+            </a:r>
+            <a:r>
+              <a:rPr lang="en-US">
+                <a:solidFill>
+                  <a:srgbClr val="BCBEC4"/>
+                </a:solidFill>
+                <a:latin typeface="Consolas" panose="020B0609020204030204" pitchFamily="49" charset="0"/>
+              </a:rPr>
+              <a:t>Students</a:t>
+            </a:r>
+            <a:r>
+              <a:rPr lang="en-US">
+                <a:solidFill>
+                  <a:srgbClr val="6AAB73"/>
+                </a:solidFill>
+                <a:latin typeface="Consolas" panose="020B0609020204030204" pitchFamily="49" charset="0"/>
+              </a:rPr>
+              <a:t>"</a:t>
+            </a:r>
+            <a:r>
+              <a:rPr lang="en-US">
+                <a:solidFill>
+                  <a:srgbClr val="BCBEC4"/>
+                </a:solidFill>
+                <a:latin typeface="Consolas" panose="020B0609020204030204" pitchFamily="49" charset="0"/>
+              </a:rPr>
+              <a:t>)</a:t>
+            </a:r>
+          </a:p>
+          <a:p>
+            <a:r>
+              <a:rPr lang="en-US">
+                <a:solidFill>
+                  <a:srgbClr val="BCBEC4"/>
+                </a:solidFill>
+                <a:latin typeface="Consolas" panose="020B0609020204030204" pitchFamily="49" charset="0"/>
+              </a:rPr>
+              <a:t>                 .</a:t>
+            </a:r>
+            <a:r>
+              <a:rPr lang="en-US">
+                <a:solidFill>
+                  <a:schemeClr val="accent2"/>
+                </a:solidFill>
+                <a:latin typeface="Consolas" panose="020B0609020204030204" pitchFamily="49" charset="0"/>
+              </a:rPr>
+              <a:t>where</a:t>
+            </a:r>
+            <a:r>
+              <a:rPr lang="en-US">
+                <a:solidFill>
+                  <a:srgbClr val="BCBEC4"/>
+                </a:solidFill>
+                <a:latin typeface="Consolas" panose="020B0609020204030204" pitchFamily="49" charset="0"/>
+              </a:rPr>
+              <a:t>(</a:t>
+            </a:r>
+            <a:r>
+              <a:rPr lang="en-US">
+                <a:solidFill>
+                  <a:srgbClr val="6AAB73"/>
+                </a:solidFill>
+                <a:latin typeface="Consolas" panose="020B0609020204030204" pitchFamily="49" charset="0"/>
+              </a:rPr>
+              <a:t>"</a:t>
+            </a:r>
+            <a:r>
+              <a:rPr lang="en-US">
+                <a:solidFill>
+                  <a:srgbClr val="BCBEC4"/>
+                </a:solidFill>
+                <a:latin typeface="Consolas" panose="020B0609020204030204" pitchFamily="49" charset="0"/>
+              </a:rPr>
+              <a:t>birth_year == </a:t>
+            </a:r>
+            <a:r>
+              <a:rPr lang="en-US">
+                <a:solidFill>
+                  <a:schemeClr val="accent1">
+                    <a:lumMod val="60000"/>
+                    <a:lumOff val="40000"/>
+                  </a:schemeClr>
+                </a:solidFill>
+                <a:latin typeface="Consolas" panose="020B0609020204030204" pitchFamily="49" charset="0"/>
+              </a:rPr>
+              <a:t>2005</a:t>
+            </a:r>
+            <a:r>
+              <a:rPr lang="en-US">
+                <a:solidFill>
+                  <a:srgbClr val="6AAB73"/>
+                </a:solidFill>
+                <a:latin typeface="Consolas" panose="020B0609020204030204" pitchFamily="49" charset="0"/>
+              </a:rPr>
+              <a:t>"</a:t>
+            </a:r>
+            <a:r>
+              <a:rPr lang="en-US">
+                <a:solidFill>
+                  <a:srgbClr val="BCBEC4"/>
+                </a:solidFill>
+                <a:latin typeface="Consolas" panose="020B0609020204030204" pitchFamily="49" charset="0"/>
+              </a:rPr>
+              <a:t>)</a:t>
+            </a:r>
+          </a:p>
+          <a:p>
+            <a:r>
+              <a:rPr lang="en-US">
+                <a:solidFill>
+                  <a:srgbClr val="BCBEC4"/>
+                </a:solidFill>
+                <a:latin typeface="Consolas" panose="020B0609020204030204" pitchFamily="49" charset="0"/>
+              </a:rPr>
+              <a:t>                 .end();</a:t>
+            </a:r>
           </a:p>
         </p:txBody>
       </p:sp>
     </p:spTree>
     <p:extLst>
       <p:ext uri="{BB962C8B-B14F-4D97-AF65-F5344CB8AC3E}">
-        <p14:creationId xmlns:p14="http://schemas.microsoft.com/office/powerpoint/2010/main" val="1880886494"/>
+        <p14:creationId xmlns:p14="http://schemas.microsoft.com/office/powerpoint/2010/main" val="2923497200"/>
       </p:ext>
     </p:extLst>
   </p:cSld>
@@ -7684,7 +5104,7 @@
 </p:sld>
 </file>
 
-<file path=ppt/slides/slide9.xml><?xml version="1.0" encoding="utf-8"?>
+<file path=ppt/slides/slide4.xml><?xml version="1.0" encoding="utf-8"?>
 <p:sld xmlns:a="http://schemas.openxmlformats.org/drawingml/2006/main" xmlns:r="http://schemas.openxmlformats.org/officeDocument/2006/relationships" xmlns:p="http://schemas.openxmlformats.org/presentationml/2006/main">
   <p:cSld>
     <p:spTree>
@@ -7692,7 +5112,7 @@
         <p:cNvPr id="1" name="">
           <a:extLst>
             <a:ext uri="{FF2B5EF4-FFF2-40B4-BE49-F238E27FC236}">
-              <a16:creationId xmlns:a16="http://schemas.microsoft.com/office/drawing/2014/main" id="{9E07DF96-89E2-7590-0766-6C41648FD841}"/>
+              <a16:creationId xmlns:a16="http://schemas.microsoft.com/office/drawing/2014/main" id="{C01402A4-6D13-7F3D-9B64-E083C148CFE1}"/>
             </a:ext>
           </a:extLst>
         </p:cNvPr>
@@ -7712,7 +5132,7 @@
           <p:cNvPr id="2" name="Title 1">
             <a:extLst>
               <a:ext uri="{FF2B5EF4-FFF2-40B4-BE49-F238E27FC236}">
-                <a16:creationId xmlns:a16="http://schemas.microsoft.com/office/drawing/2014/main" id="{75A70C08-CDF0-7B32-2162-F19D1704E9A4}"/>
+                <a16:creationId xmlns:a16="http://schemas.microsoft.com/office/drawing/2014/main" id="{CCF6BBC4-CD10-B120-754E-57D7CA563056}"/>
               </a:ext>
             </a:extLst>
           </p:cNvPr>
@@ -7730,7 +5150,7 @@
           <a:p>
             <a:r>
               <a:rPr lang="en-GB"/>
-              <a:t>My Research Goal</a:t>
+              <a:t>Use Case 4: Semantic EDSL Analysis</a:t>
             </a:r>
             <a:endParaRPr lang="en-US"/>
           </a:p>
@@ -7738,58 +5158,10 @@
       </p:sp>
       <p:sp>
         <p:nvSpPr>
-          <p:cNvPr id="3" name="Content Placeholder 2">
-            <a:extLst>
-              <a:ext uri="{FF2B5EF4-FFF2-40B4-BE49-F238E27FC236}">
-                <a16:creationId xmlns:a16="http://schemas.microsoft.com/office/drawing/2014/main" id="{8604B198-826B-5126-FBEB-6F3D9C1512A6}"/>
-              </a:ext>
-            </a:extLst>
-          </p:cNvPr>
-          <p:cNvSpPr>
-            <a:spLocks noGrp="1"/>
-          </p:cNvSpPr>
-          <p:nvPr>
-            <p:ph idx="1"/>
-          </p:nvPr>
-        </p:nvSpPr>
-        <p:spPr/>
-        <p:txBody>
-          <a:bodyPr/>
-          <a:lstStyle/>
-          <a:p>
-            <a:r>
-              <a:rPr lang="en-GB"/>
-              <a:t>Research Title: Static Correctness for Fluent DSLs</a:t>
-            </a:r>
-          </a:p>
-          <a:p>
-            <a:r>
-              <a:rPr lang="en-GB"/>
-              <a:t>Current Progress:</a:t>
-            </a:r>
-          </a:p>
-          <a:p>
-            <a:pPr lvl="1"/>
-            <a:r>
-              <a:rPr lang="en-GB"/>
-              <a:t>Identified host language: Java</a:t>
-            </a:r>
-          </a:p>
-          <a:p>
-            <a:pPr lvl="1"/>
-            <a:r>
-              <a:rPr lang="en-GB"/>
-              <a:t>Identified DSL to embed: SQL</a:t>
-            </a:r>
-          </a:p>
-        </p:txBody>
-      </p:sp>
-      <p:sp>
-        <p:nvSpPr>
           <p:cNvPr id="4" name="Slide Number Placeholder 3">
             <a:extLst>
               <a:ext uri="{FF2B5EF4-FFF2-40B4-BE49-F238E27FC236}">
-                <a16:creationId xmlns:a16="http://schemas.microsoft.com/office/drawing/2014/main" id="{7FF4F64B-BCDC-5D61-F15E-27F4FCA0D15B}"/>
+                <a16:creationId xmlns:a16="http://schemas.microsoft.com/office/drawing/2014/main" id="{40BFF64D-5F8E-0D53-D334-3E7384E10554}"/>
               </a:ext>
             </a:extLst>
           </p:cNvPr>
@@ -7807,16 +5179,935 @@
           <a:p>
             <a:fld id="{52890E68-D690-4AC2-96FA-C0B5F80968DC}" type="slidenum">
               <a:rPr lang="en-US" smtClean="0"/>
-              <a:t>9</a:t>
+              <a:t>4</a:t>
             </a:fld>
             <a:endParaRPr lang="en-US"/>
+          </a:p>
+        </p:txBody>
+      </p:sp>
+      <p:sp>
+        <p:nvSpPr>
+          <p:cNvPr id="5" name="Rectangle 4">
+            <a:extLst>
+              <a:ext uri="{FF2B5EF4-FFF2-40B4-BE49-F238E27FC236}">
+                <a16:creationId xmlns:a16="http://schemas.microsoft.com/office/drawing/2014/main" id="{E2CBE598-DD5D-20B4-E959-2490734AFCF9}"/>
+              </a:ext>
+            </a:extLst>
+          </p:cNvPr>
+          <p:cNvSpPr/>
+          <p:nvPr/>
+        </p:nvSpPr>
+        <p:spPr>
+          <a:xfrm>
+            <a:off x="3178045" y="2810400"/>
+            <a:ext cx="5835910" cy="1237199"/>
+          </a:xfrm>
+          <a:prstGeom prst="rect">
+            <a:avLst/>
+          </a:prstGeom>
+          <a:solidFill>
+            <a:srgbClr val="1E1F22"/>
+          </a:solidFill>
+          <a:ln w="38100">
+            <a:noFill/>
+          </a:ln>
+        </p:spPr>
+        <p:style>
+          <a:lnRef idx="2">
+            <a:schemeClr val="dk1"/>
+          </a:lnRef>
+          <a:fillRef idx="1">
+            <a:schemeClr val="lt1"/>
+          </a:fillRef>
+          <a:effectRef idx="0">
+            <a:schemeClr val="dk1"/>
+          </a:effectRef>
+          <a:fontRef idx="minor">
+            <a:schemeClr val="dk1"/>
+          </a:fontRef>
+        </p:style>
+        <p:txBody>
+          <a:bodyPr rtlCol="0" anchor="t"/>
+          <a:lstStyle/>
+          <a:p>
+            <a:r>
+              <a:rPr lang="en-US">
+                <a:solidFill>
+                  <a:srgbClr val="BCBEC4"/>
+                </a:solidFill>
+                <a:latin typeface="Consolas" panose="020B0609020204030204" pitchFamily="49" charset="0"/>
+              </a:rPr>
+              <a:t>Query query = SQL.</a:t>
+            </a:r>
+            <a:r>
+              <a:rPr lang="en-US">
+                <a:solidFill>
+                  <a:schemeClr val="accent2"/>
+                </a:solidFill>
+                <a:latin typeface="Consolas" panose="020B0609020204030204" pitchFamily="49" charset="0"/>
+              </a:rPr>
+              <a:t>select</a:t>
+            </a:r>
+            <a:r>
+              <a:rPr lang="en-US">
+                <a:solidFill>
+                  <a:srgbClr val="BCBEC4"/>
+                </a:solidFill>
+                <a:latin typeface="Consolas" panose="020B0609020204030204" pitchFamily="49" charset="0"/>
+              </a:rPr>
+              <a:t>(</a:t>
+            </a:r>
+            <a:r>
+              <a:rPr lang="en-US">
+                <a:solidFill>
+                  <a:srgbClr val="6AAB73"/>
+                </a:solidFill>
+                <a:latin typeface="Consolas" panose="020B0609020204030204" pitchFamily="49" charset="0"/>
+              </a:rPr>
+              <a:t>"</a:t>
+            </a:r>
+            <a:r>
+              <a:rPr lang="en-US">
+                <a:solidFill>
+                  <a:srgbClr val="BCBEC4"/>
+                </a:solidFill>
+                <a:latin typeface="Consolas" panose="020B0609020204030204" pitchFamily="49" charset="0"/>
+              </a:rPr>
+              <a:t>name</a:t>
+            </a:r>
+            <a:r>
+              <a:rPr lang="en-US">
+                <a:solidFill>
+                  <a:srgbClr val="6AAB73"/>
+                </a:solidFill>
+                <a:latin typeface="Consolas" panose="020B0609020204030204" pitchFamily="49" charset="0"/>
+              </a:rPr>
+              <a:t>"</a:t>
+            </a:r>
+            <a:r>
+              <a:rPr lang="en-US">
+                <a:solidFill>
+                  <a:srgbClr val="BCBEC4"/>
+                </a:solidFill>
+                <a:latin typeface="Consolas" panose="020B0609020204030204" pitchFamily="49" charset="0"/>
+              </a:rPr>
+              <a:t>)</a:t>
+            </a:r>
+          </a:p>
+          <a:p>
+            <a:r>
+              <a:rPr lang="en-US">
+                <a:solidFill>
+                  <a:srgbClr val="BCBEC4"/>
+                </a:solidFill>
+                <a:latin typeface="Consolas" panose="020B0609020204030204" pitchFamily="49" charset="0"/>
+              </a:rPr>
+              <a:t>                 .</a:t>
+            </a:r>
+            <a:r>
+              <a:rPr lang="en-US">
+                <a:solidFill>
+                  <a:schemeClr val="accent2"/>
+                </a:solidFill>
+                <a:latin typeface="Consolas" panose="020B0609020204030204" pitchFamily="49" charset="0"/>
+              </a:rPr>
+              <a:t>from</a:t>
+            </a:r>
+            <a:r>
+              <a:rPr lang="en-US">
+                <a:solidFill>
+                  <a:srgbClr val="BCBEC4"/>
+                </a:solidFill>
+                <a:latin typeface="Consolas" panose="020B0609020204030204" pitchFamily="49" charset="0"/>
+              </a:rPr>
+              <a:t>(</a:t>
+            </a:r>
+            <a:r>
+              <a:rPr lang="en-US">
+                <a:solidFill>
+                  <a:srgbClr val="6AAB73"/>
+                </a:solidFill>
+                <a:latin typeface="Consolas" panose="020B0609020204030204" pitchFamily="49" charset="0"/>
+              </a:rPr>
+              <a:t>"</a:t>
+            </a:r>
+            <a:r>
+              <a:rPr lang="en-US">
+                <a:solidFill>
+                  <a:srgbClr val="BCBEC4"/>
+                </a:solidFill>
+                <a:latin typeface="Consolas" panose="020B0609020204030204" pitchFamily="49" charset="0"/>
+              </a:rPr>
+              <a:t>Students</a:t>
+            </a:r>
+            <a:r>
+              <a:rPr lang="en-US">
+                <a:solidFill>
+                  <a:srgbClr val="6AAB73"/>
+                </a:solidFill>
+                <a:latin typeface="Consolas" panose="020B0609020204030204" pitchFamily="49" charset="0"/>
+              </a:rPr>
+              <a:t>"</a:t>
+            </a:r>
+            <a:r>
+              <a:rPr lang="en-US">
+                <a:solidFill>
+                  <a:srgbClr val="BCBEC4"/>
+                </a:solidFill>
+                <a:latin typeface="Consolas" panose="020B0609020204030204" pitchFamily="49" charset="0"/>
+              </a:rPr>
+              <a:t>)</a:t>
+            </a:r>
+          </a:p>
+          <a:p>
+            <a:r>
+              <a:rPr lang="en-US">
+                <a:solidFill>
+                  <a:srgbClr val="BCBEC4"/>
+                </a:solidFill>
+                <a:latin typeface="Consolas" panose="020B0609020204030204" pitchFamily="49" charset="0"/>
+              </a:rPr>
+              <a:t>                 .</a:t>
+            </a:r>
+            <a:r>
+              <a:rPr lang="en-US">
+                <a:solidFill>
+                  <a:schemeClr val="accent2"/>
+                </a:solidFill>
+                <a:latin typeface="Consolas" panose="020B0609020204030204" pitchFamily="49" charset="0"/>
+              </a:rPr>
+              <a:t>where</a:t>
+            </a:r>
+            <a:r>
+              <a:rPr lang="en-US">
+                <a:solidFill>
+                  <a:srgbClr val="BCBEC4"/>
+                </a:solidFill>
+                <a:latin typeface="Consolas" panose="020B0609020204030204" pitchFamily="49" charset="0"/>
+              </a:rPr>
+              <a:t>(</a:t>
+            </a:r>
+            <a:r>
+              <a:rPr lang="en-US">
+                <a:solidFill>
+                  <a:srgbClr val="6AAB73"/>
+                </a:solidFill>
+                <a:latin typeface="Consolas" panose="020B0609020204030204" pitchFamily="49" charset="0"/>
+              </a:rPr>
+              <a:t>"</a:t>
+            </a:r>
+            <a:r>
+              <a:rPr lang="en-US" u="wavyHeavy">
+                <a:solidFill>
+                  <a:srgbClr val="BCBEC4"/>
+                </a:solidFill>
+                <a:uFill>
+                  <a:solidFill>
+                    <a:srgbClr val="FF0000"/>
+                  </a:solidFill>
+                </a:uFill>
+                <a:latin typeface="Consolas" panose="020B0609020204030204" pitchFamily="49" charset="0"/>
+              </a:rPr>
+              <a:t>birth_year</a:t>
+            </a:r>
+            <a:r>
+              <a:rPr lang="en-US">
+                <a:solidFill>
+                  <a:srgbClr val="BCBEC4"/>
+                </a:solidFill>
+                <a:latin typeface="Consolas" panose="020B0609020204030204" pitchFamily="49" charset="0"/>
+              </a:rPr>
+              <a:t> == </a:t>
+            </a:r>
+            <a:r>
+              <a:rPr lang="en-US">
+                <a:solidFill>
+                  <a:schemeClr val="accent1">
+                    <a:lumMod val="60000"/>
+                    <a:lumOff val="40000"/>
+                  </a:schemeClr>
+                </a:solidFill>
+                <a:latin typeface="Consolas" panose="020B0609020204030204" pitchFamily="49" charset="0"/>
+              </a:rPr>
+              <a:t>2005</a:t>
+            </a:r>
+            <a:r>
+              <a:rPr lang="en-US">
+                <a:solidFill>
+                  <a:srgbClr val="6AAB73"/>
+                </a:solidFill>
+                <a:latin typeface="Consolas" panose="020B0609020204030204" pitchFamily="49" charset="0"/>
+              </a:rPr>
+              <a:t>"</a:t>
+            </a:r>
+            <a:r>
+              <a:rPr lang="en-US">
+                <a:solidFill>
+                  <a:srgbClr val="BCBEC4"/>
+                </a:solidFill>
+                <a:latin typeface="Consolas" panose="020B0609020204030204" pitchFamily="49" charset="0"/>
+              </a:rPr>
+              <a:t>)</a:t>
+            </a:r>
+          </a:p>
+          <a:p>
+            <a:r>
+              <a:rPr lang="en-US">
+                <a:solidFill>
+                  <a:srgbClr val="BCBEC4"/>
+                </a:solidFill>
+                <a:latin typeface="Consolas" panose="020B0609020204030204" pitchFamily="49" charset="0"/>
+              </a:rPr>
+              <a:t>                 .end();</a:t>
+            </a:r>
+          </a:p>
+        </p:txBody>
+      </p:sp>
+      <p:sp>
+        <p:nvSpPr>
+          <p:cNvPr id="6" name="Rectangle: Rounded Corners 5">
+            <a:extLst>
+              <a:ext uri="{FF2B5EF4-FFF2-40B4-BE49-F238E27FC236}">
+                <a16:creationId xmlns:a16="http://schemas.microsoft.com/office/drawing/2014/main" id="{DF126BE1-004D-263A-1211-1A5E784FDB15}"/>
+              </a:ext>
+            </a:extLst>
+          </p:cNvPr>
+          <p:cNvSpPr/>
+          <p:nvPr/>
+        </p:nvSpPr>
+        <p:spPr>
+          <a:xfrm>
+            <a:off x="6667592" y="3816876"/>
+            <a:ext cx="4131013" cy="365125"/>
+          </a:xfrm>
+          <a:prstGeom prst="roundRect">
+            <a:avLst/>
+          </a:prstGeom>
+          <a:solidFill>
+            <a:schemeClr val="tx1">
+              <a:lumMod val="75000"/>
+              <a:lumOff val="25000"/>
+            </a:schemeClr>
+          </a:solidFill>
+          <a:ln w="12700">
+            <a:solidFill>
+              <a:schemeClr val="tx1">
+                <a:lumMod val="65000"/>
+                <a:lumOff val="35000"/>
+              </a:schemeClr>
+            </a:solidFill>
+          </a:ln>
+        </p:spPr>
+        <p:style>
+          <a:lnRef idx="2">
+            <a:schemeClr val="dk1"/>
+          </a:lnRef>
+          <a:fillRef idx="1">
+            <a:schemeClr val="lt1"/>
+          </a:fillRef>
+          <a:effectRef idx="0">
+            <a:schemeClr val="dk1"/>
+          </a:effectRef>
+          <a:fontRef idx="minor">
+            <a:schemeClr val="dk1"/>
+          </a:fontRef>
+        </p:style>
+        <p:txBody>
+          <a:bodyPr rtlCol="0" anchor="t"/>
+          <a:lstStyle/>
+          <a:p>
+            <a:r>
+              <a:rPr lang="en-GB" sz="1600">
+                <a:solidFill>
+                  <a:srgbClr val="BCBEC4"/>
+                </a:solidFill>
+              </a:rPr>
+              <a:t>Unknown id 'birth_year'</a:t>
+            </a:r>
+            <a:endParaRPr lang="en-US" sz="1600">
+              <a:solidFill>
+                <a:srgbClr val="BCBEC4"/>
+              </a:solidFill>
+            </a:endParaRPr>
+          </a:p>
+        </p:txBody>
+      </p:sp>
+      <p:pic>
+        <p:nvPicPr>
+          <p:cNvPr id="8" name="Picture 7">
+            <a:extLst>
+              <a:ext uri="{FF2B5EF4-FFF2-40B4-BE49-F238E27FC236}">
+                <a16:creationId xmlns:a16="http://schemas.microsoft.com/office/drawing/2014/main" id="{E87CEDD4-B29D-48D3-A9FC-C4DE764FE5A8}"/>
+              </a:ext>
+            </a:extLst>
+          </p:cNvPr>
+          <p:cNvPicPr>
+            <a:picLocks noChangeAspect="1"/>
+          </p:cNvPicPr>
+          <p:nvPr/>
+        </p:nvPicPr>
+        <p:blipFill>
+          <a:blip r:embed="rId2">
+            <a:extLst>
+              <a:ext uri="{28A0092B-C50C-407E-A947-70E740481C1C}">
+                <a14:useLocalDpi xmlns:a14="http://schemas.microsoft.com/office/drawing/2010/main" val="0"/>
+              </a:ext>
+            </a:extLst>
+          </a:blip>
+          <a:stretch>
+            <a:fillRect/>
+          </a:stretch>
+        </p:blipFill>
+        <p:spPr>
+          <a:xfrm>
+            <a:off x="6667592" y="3546706"/>
+            <a:ext cx="130150" cy="194982"/>
+          </a:xfrm>
+          <a:prstGeom prst="rect">
+            <a:avLst/>
+          </a:prstGeom>
+        </p:spPr>
+      </p:pic>
+      <p:sp>
+        <p:nvSpPr>
+          <p:cNvPr id="10" name="Rectangle: Rounded Corners 9">
+            <a:extLst>
+              <a:ext uri="{FF2B5EF4-FFF2-40B4-BE49-F238E27FC236}">
+                <a16:creationId xmlns:a16="http://schemas.microsoft.com/office/drawing/2014/main" id="{F2322C1E-A3FE-D51D-8E4A-FE363E3FDB52}"/>
+              </a:ext>
+            </a:extLst>
+          </p:cNvPr>
+          <p:cNvSpPr/>
+          <p:nvPr/>
+        </p:nvSpPr>
+        <p:spPr>
+          <a:xfrm>
+            <a:off x="6667591" y="4182001"/>
+            <a:ext cx="4131013" cy="365125"/>
+          </a:xfrm>
+          <a:prstGeom prst="roundRect">
+            <a:avLst/>
+          </a:prstGeom>
+          <a:solidFill>
+            <a:schemeClr val="tx1">
+              <a:lumMod val="85000"/>
+              <a:lumOff val="15000"/>
+            </a:schemeClr>
+          </a:solidFill>
+          <a:ln w="12700">
+            <a:solidFill>
+              <a:schemeClr val="tx1">
+                <a:lumMod val="65000"/>
+                <a:lumOff val="35000"/>
+              </a:schemeClr>
+            </a:solidFill>
+          </a:ln>
+        </p:spPr>
+        <p:style>
+          <a:lnRef idx="2">
+            <a:schemeClr val="dk1"/>
+          </a:lnRef>
+          <a:fillRef idx="1">
+            <a:schemeClr val="lt1"/>
+          </a:fillRef>
+          <a:effectRef idx="0">
+            <a:schemeClr val="dk1"/>
+          </a:effectRef>
+          <a:fontRef idx="minor">
+            <a:schemeClr val="dk1"/>
+          </a:fontRef>
+        </p:style>
+        <p:txBody>
+          <a:bodyPr rtlCol="0" anchor="t"/>
+          <a:lstStyle/>
+          <a:p>
+            <a:r>
+              <a:rPr lang="en-GB" sz="1600">
+                <a:solidFill>
+                  <a:schemeClr val="tx2">
+                    <a:lumMod val="50000"/>
+                    <a:lumOff val="50000"/>
+                  </a:schemeClr>
+                </a:solidFill>
+              </a:rPr>
+              <a:t>Select 'birth_year' from table 'Students'</a:t>
+            </a:r>
+            <a:endParaRPr lang="en-US" sz="1600">
+              <a:solidFill>
+                <a:schemeClr val="tx2">
+                  <a:lumMod val="50000"/>
+                  <a:lumOff val="50000"/>
+                </a:schemeClr>
+              </a:solidFill>
+            </a:endParaRPr>
           </a:p>
         </p:txBody>
       </p:sp>
     </p:spTree>
     <p:extLst>
       <p:ext uri="{BB962C8B-B14F-4D97-AF65-F5344CB8AC3E}">
-        <p14:creationId xmlns:p14="http://schemas.microsoft.com/office/powerpoint/2010/main" val="2703989683"/>
+        <p14:creationId xmlns:p14="http://schemas.microsoft.com/office/powerpoint/2010/main" val="1794034668"/>
+      </p:ext>
+    </p:extLst>
+  </p:cSld>
+  <p:clrMapOvr>
+    <a:masterClrMapping/>
+  </p:clrMapOvr>
+</p:sld>
+</file>
+
+<file path=ppt/slides/slide5.xml><?xml version="1.0" encoding="utf-8"?>
+<p:sld xmlns:a="http://schemas.openxmlformats.org/drawingml/2006/main" xmlns:r="http://schemas.openxmlformats.org/officeDocument/2006/relationships" xmlns:p="http://schemas.openxmlformats.org/presentationml/2006/main">
+  <p:cSld>
+    <p:spTree>
+      <p:nvGrpSpPr>
+        <p:cNvPr id="1" name="">
+          <a:extLst>
+            <a:ext uri="{FF2B5EF4-FFF2-40B4-BE49-F238E27FC236}">
+              <a16:creationId xmlns:a16="http://schemas.microsoft.com/office/drawing/2014/main" id="{6240B38F-BC44-305A-88F0-F6D0E1187EFE}"/>
+            </a:ext>
+          </a:extLst>
+        </p:cNvPr>
+        <p:cNvGrpSpPr/>
+        <p:nvPr/>
+      </p:nvGrpSpPr>
+      <p:grpSpPr>
+        <a:xfrm>
+          <a:off x="0" y="0"/>
+          <a:ext cx="0" cy="0"/>
+          <a:chOff x="0" y="0"/>
+          <a:chExt cx="0" cy="0"/>
+        </a:xfrm>
+      </p:grpSpPr>
+      <p:sp>
+        <p:nvSpPr>
+          <p:cNvPr id="2" name="Title 1">
+            <a:extLst>
+              <a:ext uri="{FF2B5EF4-FFF2-40B4-BE49-F238E27FC236}">
+                <a16:creationId xmlns:a16="http://schemas.microsoft.com/office/drawing/2014/main" id="{3A81D48F-049D-192A-1D7F-53D5362AE57C}"/>
+              </a:ext>
+            </a:extLst>
+          </p:cNvPr>
+          <p:cNvSpPr>
+            <a:spLocks noGrp="1"/>
+          </p:cNvSpPr>
+          <p:nvPr>
+            <p:ph type="title"/>
+          </p:nvPr>
+        </p:nvSpPr>
+        <p:spPr/>
+        <p:txBody>
+          <a:bodyPr/>
+          <a:lstStyle/>
+          <a:p>
+            <a:r>
+              <a:rPr lang="en-GB"/>
+              <a:t>Stretch Goal: </a:t>
+            </a:r>
+            <a:r>
+              <a:rPr lang="en-GB" u="sng"/>
+              <a:t>Simple</a:t>
+            </a:r>
+            <a:r>
+              <a:rPr lang="en-GB"/>
+              <a:t> Dataflow Analysis</a:t>
+            </a:r>
+            <a:endParaRPr lang="en-US"/>
+          </a:p>
+        </p:txBody>
+      </p:sp>
+      <p:sp>
+        <p:nvSpPr>
+          <p:cNvPr id="4" name="Slide Number Placeholder 3">
+            <a:extLst>
+              <a:ext uri="{FF2B5EF4-FFF2-40B4-BE49-F238E27FC236}">
+                <a16:creationId xmlns:a16="http://schemas.microsoft.com/office/drawing/2014/main" id="{61284E70-C55F-9BD6-873C-0935F86BCDDE}"/>
+              </a:ext>
+            </a:extLst>
+          </p:cNvPr>
+          <p:cNvSpPr>
+            <a:spLocks noGrp="1"/>
+          </p:cNvSpPr>
+          <p:nvPr>
+            <p:ph type="sldNum" sz="quarter" idx="12"/>
+          </p:nvPr>
+        </p:nvSpPr>
+        <p:spPr/>
+        <p:txBody>
+          <a:bodyPr/>
+          <a:lstStyle/>
+          <a:p>
+            <a:fld id="{52890E68-D690-4AC2-96FA-C0B5F80968DC}" type="slidenum">
+              <a:rPr lang="en-US" smtClean="0"/>
+              <a:t>5</a:t>
+            </a:fld>
+            <a:endParaRPr lang="en-US"/>
+          </a:p>
+        </p:txBody>
+      </p:sp>
+      <p:sp>
+        <p:nvSpPr>
+          <p:cNvPr id="7" name="Rectangle 6">
+            <a:extLst>
+              <a:ext uri="{FF2B5EF4-FFF2-40B4-BE49-F238E27FC236}">
+                <a16:creationId xmlns:a16="http://schemas.microsoft.com/office/drawing/2014/main" id="{1EF30878-4846-9652-4553-AB32A78DD21A}"/>
+              </a:ext>
+            </a:extLst>
+          </p:cNvPr>
+          <p:cNvSpPr/>
+          <p:nvPr/>
+        </p:nvSpPr>
+        <p:spPr>
+          <a:xfrm>
+            <a:off x="1152415" y="1893877"/>
+            <a:ext cx="9328016" cy="3126531"/>
+          </a:xfrm>
+          <a:prstGeom prst="rect">
+            <a:avLst/>
+          </a:prstGeom>
+          <a:solidFill>
+            <a:srgbClr val="1E1F22"/>
+          </a:solidFill>
+          <a:ln w="38100">
+            <a:noFill/>
+          </a:ln>
+        </p:spPr>
+        <p:style>
+          <a:lnRef idx="2">
+            <a:schemeClr val="dk1"/>
+          </a:lnRef>
+          <a:fillRef idx="1">
+            <a:schemeClr val="lt1"/>
+          </a:fillRef>
+          <a:effectRef idx="0">
+            <a:schemeClr val="dk1"/>
+          </a:effectRef>
+          <a:fontRef idx="minor">
+            <a:schemeClr val="dk1"/>
+          </a:fontRef>
+        </p:style>
+        <p:txBody>
+          <a:bodyPr rtlCol="0" anchor="t"/>
+          <a:lstStyle/>
+          <a:p>
+            <a:r>
+              <a:rPr lang="en-US">
+                <a:solidFill>
+                  <a:srgbClr val="BCBEC4"/>
+                </a:solidFill>
+                <a:latin typeface="Consolas" panose="020B0609020204030204" pitchFamily="49" charset="0"/>
+              </a:rPr>
+              <a:t>Where whereClause;</a:t>
+            </a:r>
+          </a:p>
+          <a:p>
+            <a:r>
+              <a:rPr lang="en-US">
+                <a:solidFill>
+                  <a:schemeClr val="accent2"/>
+                </a:solidFill>
+                <a:latin typeface="Consolas" panose="020B0609020204030204" pitchFamily="49" charset="0"/>
+              </a:rPr>
+              <a:t>if</a:t>
+            </a:r>
+            <a:r>
+              <a:rPr lang="en-US">
+                <a:solidFill>
+                  <a:srgbClr val="BCBEC4"/>
+                </a:solidFill>
+                <a:latin typeface="Consolas" panose="020B0609020204030204" pitchFamily="49" charset="0"/>
+              </a:rPr>
+              <a:t> (negate) {</a:t>
+            </a:r>
+          </a:p>
+          <a:p>
+            <a:r>
+              <a:rPr lang="en-US">
+                <a:solidFill>
+                  <a:srgbClr val="BCBEC4"/>
+                </a:solidFill>
+                <a:latin typeface="Consolas" panose="020B0609020204030204" pitchFamily="49" charset="0"/>
+              </a:rPr>
+              <a:t>  whereClause = Where.columnId("birth_year").notEquals().nat(</a:t>
+            </a:r>
+            <a:r>
+              <a:rPr lang="en-US">
+                <a:solidFill>
+                  <a:schemeClr val="accent1">
+                    <a:lumMod val="60000"/>
+                    <a:lumOff val="40000"/>
+                  </a:schemeClr>
+                </a:solidFill>
+                <a:latin typeface="Consolas" panose="020B0609020204030204" pitchFamily="49" charset="0"/>
+              </a:rPr>
+              <a:t>2005</a:t>
+            </a:r>
+            <a:r>
+              <a:rPr lang="en-US">
+                <a:solidFill>
+                  <a:srgbClr val="BCBEC4"/>
+                </a:solidFill>
+                <a:latin typeface="Consolas" panose="020B0609020204030204" pitchFamily="49" charset="0"/>
+              </a:rPr>
+              <a:t>);</a:t>
+            </a:r>
+          </a:p>
+          <a:p>
+            <a:r>
+              <a:rPr lang="en-US">
+                <a:solidFill>
+                  <a:srgbClr val="BCBEC4"/>
+                </a:solidFill>
+                <a:latin typeface="Consolas" panose="020B0609020204030204" pitchFamily="49" charset="0"/>
+              </a:rPr>
+              <a:t>} </a:t>
+            </a:r>
+            <a:r>
+              <a:rPr lang="en-US">
+                <a:solidFill>
+                  <a:schemeClr val="accent2"/>
+                </a:solidFill>
+                <a:latin typeface="Consolas" panose="020B0609020204030204" pitchFamily="49" charset="0"/>
+              </a:rPr>
+              <a:t>else</a:t>
+            </a:r>
+            <a:r>
+              <a:rPr lang="en-US">
+                <a:solidFill>
+                  <a:srgbClr val="BCBEC4"/>
+                </a:solidFill>
+                <a:latin typeface="Consolas" panose="020B0609020204030204" pitchFamily="49" charset="0"/>
+              </a:rPr>
+              <a:t> {</a:t>
+            </a:r>
+          </a:p>
+          <a:p>
+            <a:r>
+              <a:rPr lang="en-US">
+                <a:solidFill>
+                  <a:srgbClr val="BCBEC4"/>
+                </a:solidFill>
+                <a:latin typeface="Consolas" panose="020B0609020204030204" pitchFamily="49" charset="0"/>
+              </a:rPr>
+              <a:t>  whereClause = Where.columnId("birth_year").equals().nat(</a:t>
+            </a:r>
+            <a:r>
+              <a:rPr lang="en-US">
+                <a:solidFill>
+                  <a:schemeClr val="accent1">
+                    <a:lumMod val="60000"/>
+                    <a:lumOff val="40000"/>
+                  </a:schemeClr>
+                </a:solidFill>
+                <a:latin typeface="Consolas" panose="020B0609020204030204" pitchFamily="49" charset="0"/>
+              </a:rPr>
+              <a:t>2005</a:t>
+            </a:r>
+            <a:r>
+              <a:rPr lang="en-US">
+                <a:solidFill>
+                  <a:srgbClr val="BCBEC4"/>
+                </a:solidFill>
+                <a:latin typeface="Consolas" panose="020B0609020204030204" pitchFamily="49" charset="0"/>
+              </a:rPr>
+              <a:t>);</a:t>
+            </a:r>
+          </a:p>
+          <a:p>
+            <a:r>
+              <a:rPr lang="en-US">
+                <a:solidFill>
+                  <a:srgbClr val="BCBEC4"/>
+                </a:solidFill>
+                <a:latin typeface="Consolas" panose="020B0609020204030204" pitchFamily="49" charset="0"/>
+              </a:rPr>
+              <a:t>}</a:t>
+            </a:r>
+          </a:p>
+          <a:p>
+            <a:endParaRPr lang="en-US">
+              <a:solidFill>
+                <a:srgbClr val="BCBEC4"/>
+              </a:solidFill>
+              <a:latin typeface="Consolas" panose="020B0609020204030204" pitchFamily="49" charset="0"/>
+            </a:endParaRPr>
+          </a:p>
+          <a:p>
+            <a:r>
+              <a:rPr lang="en-US">
+                <a:solidFill>
+                  <a:srgbClr val="BCBEC4"/>
+                </a:solidFill>
+                <a:latin typeface="Consolas" panose="020B0609020204030204" pitchFamily="49" charset="0"/>
+              </a:rPr>
+              <a:t>Query query = SQL.</a:t>
+            </a:r>
+            <a:r>
+              <a:rPr lang="en-US">
+                <a:solidFill>
+                  <a:schemeClr val="accent2"/>
+                </a:solidFill>
+                <a:latin typeface="Consolas" panose="020B0609020204030204" pitchFamily="49" charset="0"/>
+              </a:rPr>
+              <a:t>select</a:t>
+            </a:r>
+            <a:r>
+              <a:rPr lang="en-US">
+                <a:solidFill>
+                  <a:srgbClr val="BCBEC4"/>
+                </a:solidFill>
+                <a:latin typeface="Consolas" panose="020B0609020204030204" pitchFamily="49" charset="0"/>
+              </a:rPr>
+              <a:t>(</a:t>
+            </a:r>
+            <a:r>
+              <a:rPr lang="en-US">
+                <a:solidFill>
+                  <a:srgbClr val="6AAB73"/>
+                </a:solidFill>
+                <a:latin typeface="Consolas" panose="020B0609020204030204" pitchFamily="49" charset="0"/>
+              </a:rPr>
+              <a:t>"</a:t>
+            </a:r>
+            <a:r>
+              <a:rPr lang="en-US">
+                <a:solidFill>
+                  <a:srgbClr val="BCBEC4"/>
+                </a:solidFill>
+                <a:latin typeface="Consolas" panose="020B0609020204030204" pitchFamily="49" charset="0"/>
+              </a:rPr>
+              <a:t>name, birth_year</a:t>
+            </a:r>
+            <a:r>
+              <a:rPr lang="en-US">
+                <a:solidFill>
+                  <a:srgbClr val="6AAB73"/>
+                </a:solidFill>
+                <a:latin typeface="Consolas" panose="020B0609020204030204" pitchFamily="49" charset="0"/>
+              </a:rPr>
+              <a:t>"</a:t>
+            </a:r>
+            <a:r>
+              <a:rPr lang="en-US">
+                <a:solidFill>
+                  <a:srgbClr val="BCBEC4"/>
+                </a:solidFill>
+                <a:latin typeface="Consolas" panose="020B0609020204030204" pitchFamily="49" charset="0"/>
+              </a:rPr>
+              <a:t>)</a:t>
+            </a:r>
+          </a:p>
+          <a:p>
+            <a:r>
+              <a:rPr lang="en-US">
+                <a:solidFill>
+                  <a:srgbClr val="BCBEC4"/>
+                </a:solidFill>
+                <a:latin typeface="Consolas" panose="020B0609020204030204" pitchFamily="49" charset="0"/>
+              </a:rPr>
+              <a:t>                 .</a:t>
+            </a:r>
+            <a:r>
+              <a:rPr lang="en-US">
+                <a:solidFill>
+                  <a:schemeClr val="accent2"/>
+                </a:solidFill>
+                <a:latin typeface="Consolas" panose="020B0609020204030204" pitchFamily="49" charset="0"/>
+              </a:rPr>
+              <a:t>from</a:t>
+            </a:r>
+            <a:r>
+              <a:rPr lang="en-US">
+                <a:solidFill>
+                  <a:srgbClr val="BCBEC4"/>
+                </a:solidFill>
+                <a:latin typeface="Consolas" panose="020B0609020204030204" pitchFamily="49" charset="0"/>
+              </a:rPr>
+              <a:t>(</a:t>
+            </a:r>
+            <a:r>
+              <a:rPr lang="en-US">
+                <a:solidFill>
+                  <a:srgbClr val="6AAB73"/>
+                </a:solidFill>
+                <a:latin typeface="Consolas" panose="020B0609020204030204" pitchFamily="49" charset="0"/>
+              </a:rPr>
+              <a:t>"</a:t>
+            </a:r>
+            <a:r>
+              <a:rPr lang="en-US">
+                <a:solidFill>
+                  <a:srgbClr val="BCBEC4"/>
+                </a:solidFill>
+                <a:latin typeface="Consolas" panose="020B0609020204030204" pitchFamily="49" charset="0"/>
+              </a:rPr>
+              <a:t>Students</a:t>
+            </a:r>
+            <a:r>
+              <a:rPr lang="en-US">
+                <a:solidFill>
+                  <a:srgbClr val="6AAB73"/>
+                </a:solidFill>
+                <a:latin typeface="Consolas" panose="020B0609020204030204" pitchFamily="49" charset="0"/>
+              </a:rPr>
+              <a:t>"</a:t>
+            </a:r>
+            <a:r>
+              <a:rPr lang="en-US">
+                <a:solidFill>
+                  <a:srgbClr val="BCBEC4"/>
+                </a:solidFill>
+                <a:latin typeface="Consolas" panose="020B0609020204030204" pitchFamily="49" charset="0"/>
+              </a:rPr>
+              <a:t>)</a:t>
+            </a:r>
+          </a:p>
+          <a:p>
+            <a:r>
+              <a:rPr lang="en-US">
+                <a:solidFill>
+                  <a:srgbClr val="BCBEC4"/>
+                </a:solidFill>
+                <a:latin typeface="Consolas" panose="020B0609020204030204" pitchFamily="49" charset="0"/>
+              </a:rPr>
+              <a:t>                 .</a:t>
+            </a:r>
+            <a:r>
+              <a:rPr lang="en-US">
+                <a:solidFill>
+                  <a:schemeClr val="accent2"/>
+                </a:solidFill>
+                <a:latin typeface="Consolas" panose="020B0609020204030204" pitchFamily="49" charset="0"/>
+              </a:rPr>
+              <a:t>where</a:t>
+            </a:r>
+            <a:r>
+              <a:rPr lang="en-US">
+                <a:solidFill>
+                  <a:srgbClr val="BCBEC4"/>
+                </a:solidFill>
+                <a:latin typeface="Consolas" panose="020B0609020204030204" pitchFamily="49" charset="0"/>
+              </a:rPr>
+              <a:t>(whereClause)</a:t>
+            </a:r>
+          </a:p>
+          <a:p>
+            <a:r>
+              <a:rPr lang="en-US">
+                <a:solidFill>
+                  <a:srgbClr val="BCBEC4"/>
+                </a:solidFill>
+                <a:latin typeface="Consolas" panose="020B0609020204030204" pitchFamily="49" charset="0"/>
+              </a:rPr>
+              <a:t>                 .end();</a:t>
+            </a:r>
+          </a:p>
+        </p:txBody>
+      </p:sp>
+    </p:spTree>
+    <p:extLst>
+      <p:ext uri="{BB962C8B-B14F-4D97-AF65-F5344CB8AC3E}">
+        <p14:creationId xmlns:p14="http://schemas.microsoft.com/office/powerpoint/2010/main" val="999814529"/>
       </p:ext>
     </p:extLst>
   </p:cSld>

--- a/concept/Research-Interest.pptx
+++ b/concept/Research-Interest.pptx
@@ -5,14 +5,22 @@
     <p:sldMasterId id="2147483648" r:id="rId1"/>
   </p:sldMasterIdLst>
   <p:notesMasterIdLst>
-    <p:notesMasterId r:id="rId7"/>
+    <p:notesMasterId r:id="rId15"/>
   </p:notesMasterIdLst>
   <p:sldIdLst>
-    <p:sldId id="286" r:id="rId2"/>
-    <p:sldId id="287" r:id="rId3"/>
-    <p:sldId id="288" r:id="rId4"/>
-    <p:sldId id="289" r:id="rId5"/>
-    <p:sldId id="290" r:id="rId6"/>
+    <p:sldId id="291" r:id="rId2"/>
+    <p:sldId id="294" r:id="rId3"/>
+    <p:sldId id="300" r:id="rId4"/>
+    <p:sldId id="295" r:id="rId5"/>
+    <p:sldId id="292" r:id="rId6"/>
+    <p:sldId id="297" r:id="rId7"/>
+    <p:sldId id="298" r:id="rId8"/>
+    <p:sldId id="299" r:id="rId9"/>
+    <p:sldId id="286" r:id="rId10"/>
+    <p:sldId id="287" r:id="rId11"/>
+    <p:sldId id="288" r:id="rId12"/>
+    <p:sldId id="289" r:id="rId13"/>
+    <p:sldId id="290" r:id="rId14"/>
   </p:sldIdLst>
   <p:sldSz cx="12192000" cy="6858000"/>
   <p:notesSz cx="6858000" cy="9144000"/>
@@ -201,7 +209,7 @@
           <a:p>
             <a:fld id="{52DFC1B7-3D5E-4A5B-82A1-8FEEA2A3FD17}" type="datetimeFigureOut">
               <a:rPr lang="en-US" smtClean="0"/>
-              <a:t>7/17/2026</a:t>
+              <a:t>7/21/2026</a:t>
             </a:fld>
             <a:endParaRPr lang="en-US"/>
           </a:p>
@@ -615,7 +623,7 @@
           <a:p>
             <a:fld id="{76A8F9E1-B633-4671-85A1-702D296B2A14}" type="datetime1">
               <a:rPr lang="en-US" smtClean="0"/>
-              <a:t>7/17/2026</a:t>
+              <a:t>7/21/2026</a:t>
             </a:fld>
             <a:endParaRPr lang="en-US"/>
           </a:p>
@@ -813,7 +821,7 @@
           <a:p>
             <a:fld id="{C00B55C5-286B-4763-BAC7-BF7B72B1422A}" type="datetime1">
               <a:rPr lang="en-US" smtClean="0"/>
-              <a:t>7/17/2026</a:t>
+              <a:t>7/21/2026</a:t>
             </a:fld>
             <a:endParaRPr lang="en-US"/>
           </a:p>
@@ -1021,7 +1029,7 @@
           <a:p>
             <a:fld id="{3B612B56-0B9B-4C11-91C6-2FAECB8A82F0}" type="datetime1">
               <a:rPr lang="en-US" smtClean="0"/>
-              <a:t>7/17/2026</a:t>
+              <a:t>7/21/2026</a:t>
             </a:fld>
             <a:endParaRPr lang="en-US"/>
           </a:p>
@@ -1095,7 +1103,7 @@
 </file>
 
 <file path=ppt/slideLayouts/slideLayout2.xml><?xml version="1.0" encoding="utf-8"?>
-<p:sldLayout xmlns:a="http://schemas.openxmlformats.org/drawingml/2006/main" xmlns:r="http://schemas.openxmlformats.org/officeDocument/2006/relationships" xmlns:p="http://schemas.openxmlformats.org/presentationml/2006/main" type="obj" preserve="1">
+<p:sldLayout xmlns:a="http://schemas.openxmlformats.org/drawingml/2006/main" xmlns:r="http://schemas.openxmlformats.org/officeDocument/2006/relationships" xmlns:p="http://schemas.openxmlformats.org/presentationml/2006/main" preserve="1" userDrawn="1">
   <p:cSld name="Title and Content">
     <p:spTree>
       <p:nvGrpSpPr>
@@ -1219,7 +1227,7 @@
           <a:p>
             <a:fld id="{C335A6D7-3A9E-4158-97DB-54FC883A2A06}" type="datetime1">
               <a:rPr lang="en-US" smtClean="0"/>
-              <a:t>7/17/2026</a:t>
+              <a:t>7/21/2026</a:t>
             </a:fld>
             <a:endParaRPr lang="en-US"/>
           </a:p>
@@ -1275,6 +1283,52 @@
               <a:rPr lang="en-US" smtClean="0"/>
               <a:t>‹#›</a:t>
             </a:fld>
+            <a:endParaRPr lang="en-US"/>
+          </a:p>
+        </p:txBody>
+      </p:sp>
+      <p:sp>
+        <p:nvSpPr>
+          <p:cNvPr id="10" name="Text Placeholder 9">
+            <a:extLst>
+              <a:ext uri="{FF2B5EF4-FFF2-40B4-BE49-F238E27FC236}">
+                <a16:creationId xmlns:a16="http://schemas.microsoft.com/office/drawing/2014/main" id="{F415A2B9-7A2C-23E7-E194-DF2295B7594F}"/>
+              </a:ext>
+            </a:extLst>
+          </p:cNvPr>
+          <p:cNvSpPr>
+            <a:spLocks noGrp="1"/>
+          </p:cNvSpPr>
+          <p:nvPr>
+            <p:ph type="body" sz="quarter" idx="13" hasCustomPrompt="1"/>
+          </p:nvPr>
+        </p:nvSpPr>
+        <p:spPr>
+          <a:xfrm>
+            <a:off x="838200" y="296863"/>
+            <a:ext cx="10515600" cy="642937"/>
+          </a:xfrm>
+        </p:spPr>
+        <p:txBody>
+          <a:bodyPr/>
+          <a:lstStyle>
+            <a:lvl1pPr>
+              <a:buNone/>
+              <a:defRPr sz="3000">
+                <a:solidFill>
+                  <a:schemeClr val="bg2">
+                    <a:lumMod val="50000"/>
+                  </a:schemeClr>
+                </a:solidFill>
+              </a:defRPr>
+            </a:lvl1pPr>
+          </a:lstStyle>
+          <a:p>
+            <a:pPr lvl="0"/>
+            <a:r>
+              <a:rPr lang="en-GB"/>
+              <a:t>Chapter</a:t>
+            </a:r>
             <a:endParaRPr lang="en-US"/>
           </a:p>
         </p:txBody>
@@ -1494,7 +1548,7 @@
           <a:p>
             <a:fld id="{BD7C4EFF-30AA-49EB-91CD-2B87EF8EB862}" type="datetime1">
               <a:rPr lang="en-US" smtClean="0"/>
-              <a:t>7/17/2026</a:t>
+              <a:t>7/21/2026</a:t>
             </a:fld>
             <a:endParaRPr lang="en-US"/>
           </a:p>
@@ -1759,7 +1813,7 @@
           <a:p>
             <a:fld id="{9F951118-A18D-425F-81A8-FD92900FE385}" type="datetime1">
               <a:rPr lang="en-US" smtClean="0"/>
-              <a:t>7/17/2026</a:t>
+              <a:t>7/21/2026</a:t>
             </a:fld>
             <a:endParaRPr lang="en-US"/>
           </a:p>
@@ -2171,7 +2225,7 @@
           <a:p>
             <a:fld id="{BA66260F-663B-4006-AA2C-98D64336E379}" type="datetime1">
               <a:rPr lang="en-US" smtClean="0"/>
-              <a:t>7/17/2026</a:t>
+              <a:t>7/21/2026</a:t>
             </a:fld>
             <a:endParaRPr lang="en-US"/>
           </a:p>
@@ -2312,7 +2366,7 @@
           <a:p>
             <a:fld id="{560CAB38-758B-4823-95AF-C50E6547966C}" type="datetime1">
               <a:rPr lang="en-US" smtClean="0"/>
-              <a:t>7/17/2026</a:t>
+              <a:t>7/21/2026</a:t>
             </a:fld>
             <a:endParaRPr lang="en-US"/>
           </a:p>
@@ -2425,7 +2479,7 @@
           <a:p>
             <a:fld id="{5A387344-709F-43EA-A55B-8246CD3267AB}" type="datetime1">
               <a:rPr lang="en-US" smtClean="0"/>
-              <a:t>7/17/2026</a:t>
+              <a:t>7/21/2026</a:t>
             </a:fld>
             <a:endParaRPr lang="en-US"/>
           </a:p>
@@ -2736,7 +2790,7 @@
           <a:p>
             <a:fld id="{C0ACB447-DA57-4353-AF4E-16DFDA026034}" type="datetime1">
               <a:rPr lang="en-US" smtClean="0"/>
-              <a:t>7/17/2026</a:t>
+              <a:t>7/21/2026</a:t>
             </a:fld>
             <a:endParaRPr lang="en-US"/>
           </a:p>
@@ -3024,7 +3078,7 @@
           <a:p>
             <a:fld id="{1125D064-2237-49F3-AB45-E1B7D4062571}" type="datetime1">
               <a:rPr lang="en-US" smtClean="0"/>
-              <a:t>7/17/2026</a:t>
+              <a:t>7/21/2026</a:t>
             </a:fld>
             <a:endParaRPr lang="en-US"/>
           </a:p>
@@ -3137,8 +3191,8 @@
         </p:nvSpPr>
         <p:spPr>
           <a:xfrm>
-            <a:off x="838200" y="365125"/>
-            <a:ext cx="10515600" cy="1325563"/>
+            <a:off x="838200" y="939114"/>
+            <a:ext cx="10515600" cy="751574"/>
           </a:xfrm>
           <a:prstGeom prst="rect">
             <a:avLst/>
@@ -3265,7 +3319,7 @@
           <a:p>
             <a:fld id="{FE9DC357-BB2B-4622-A46E-34C8E155D5BC}" type="datetime1">
               <a:rPr lang="en-US" smtClean="0"/>
-              <a:t>7/17/2026</a:t>
+              <a:t>7/21/2026</a:t>
             </a:fld>
             <a:endParaRPr lang="en-US"/>
           </a:p>
@@ -3671,6 +3725,7397 @@
   <p:cSld>
     <p:spTree>
       <p:nvGrpSpPr>
+        <p:cNvPr id="1" name=""/>
+        <p:cNvGrpSpPr/>
+        <p:nvPr/>
+      </p:nvGrpSpPr>
+      <p:grpSpPr>
+        <a:xfrm>
+          <a:off x="0" y="0"/>
+          <a:ext cx="0" cy="0"/>
+          <a:chOff x="0" y="0"/>
+          <a:chExt cx="0" cy="0"/>
+        </a:xfrm>
+      </p:grpSpPr>
+      <p:sp>
+        <p:nvSpPr>
+          <p:cNvPr id="2" name="Title 1">
+            <a:extLst>
+              <a:ext uri="{FF2B5EF4-FFF2-40B4-BE49-F238E27FC236}">
+                <a16:creationId xmlns:a16="http://schemas.microsoft.com/office/drawing/2014/main" id="{216EBB7D-D940-45D4-1008-947EBEC01D5C}"/>
+              </a:ext>
+            </a:extLst>
+          </p:cNvPr>
+          <p:cNvSpPr>
+            <a:spLocks noGrp="1"/>
+          </p:cNvSpPr>
+          <p:nvPr>
+            <p:ph type="ctrTitle"/>
+          </p:nvPr>
+        </p:nvSpPr>
+        <p:spPr/>
+        <p:txBody>
+          <a:bodyPr/>
+          <a:lstStyle/>
+          <a:p>
+            <a:r>
+              <a:rPr lang="en-GB"/>
+              <a:t>Backtranslating Fluent APIs</a:t>
+            </a:r>
+            <a:endParaRPr lang="en-US"/>
+          </a:p>
+        </p:txBody>
+      </p:sp>
+      <p:sp>
+        <p:nvSpPr>
+          <p:cNvPr id="3" name="Subtitle 2">
+            <a:extLst>
+              <a:ext uri="{FF2B5EF4-FFF2-40B4-BE49-F238E27FC236}">
+                <a16:creationId xmlns:a16="http://schemas.microsoft.com/office/drawing/2014/main" id="{1986BF54-FFE2-BB8C-F984-57B6BC09E051}"/>
+              </a:ext>
+            </a:extLst>
+          </p:cNvPr>
+          <p:cNvSpPr>
+            <a:spLocks noGrp="1"/>
+          </p:cNvSpPr>
+          <p:nvPr>
+            <p:ph type="subTitle" idx="1"/>
+          </p:nvPr>
+        </p:nvSpPr>
+        <p:spPr/>
+        <p:txBody>
+          <a:bodyPr/>
+          <a:lstStyle/>
+          <a:p>
+            <a:r>
+              <a:rPr lang="en-GB"/>
+              <a:t>Dennis Prüne</a:t>
+            </a:r>
+          </a:p>
+          <a:p>
+            <a:r>
+              <a:rPr lang="en-GB"/>
+              <a:t>26M30498</a:t>
+            </a:r>
+            <a:endParaRPr lang="en-US"/>
+          </a:p>
+        </p:txBody>
+      </p:sp>
+    </p:spTree>
+    <p:extLst>
+      <p:ext uri="{BB962C8B-B14F-4D97-AF65-F5344CB8AC3E}">
+        <p14:creationId xmlns:p14="http://schemas.microsoft.com/office/powerpoint/2010/main" val="2667857608"/>
+      </p:ext>
+    </p:extLst>
+  </p:cSld>
+  <p:clrMapOvr>
+    <a:masterClrMapping/>
+  </p:clrMapOvr>
+</p:sld>
+</file>
+
+<file path=ppt/slides/slide10.xml><?xml version="1.0" encoding="utf-8"?>
+<p:sld xmlns:a="http://schemas.openxmlformats.org/drawingml/2006/main" xmlns:r="http://schemas.openxmlformats.org/officeDocument/2006/relationships" xmlns:p="http://schemas.openxmlformats.org/presentationml/2006/main">
+  <p:cSld>
+    <p:spTree>
+      <p:nvGrpSpPr>
+        <p:cNvPr id="1" name="">
+          <a:extLst>
+            <a:ext uri="{FF2B5EF4-FFF2-40B4-BE49-F238E27FC236}">
+              <a16:creationId xmlns:a16="http://schemas.microsoft.com/office/drawing/2014/main" id="{443C1E30-2F61-951D-46FF-5BA9CB21901B}"/>
+            </a:ext>
+          </a:extLst>
+        </p:cNvPr>
+        <p:cNvGrpSpPr/>
+        <p:nvPr/>
+      </p:nvGrpSpPr>
+      <p:grpSpPr>
+        <a:xfrm>
+          <a:off x="0" y="0"/>
+          <a:ext cx="0" cy="0"/>
+          <a:chOff x="0" y="0"/>
+          <a:chExt cx="0" cy="0"/>
+        </a:xfrm>
+      </p:grpSpPr>
+      <p:sp>
+        <p:nvSpPr>
+          <p:cNvPr id="6" name="Rectangle 5">
+            <a:extLst>
+              <a:ext uri="{FF2B5EF4-FFF2-40B4-BE49-F238E27FC236}">
+                <a16:creationId xmlns:a16="http://schemas.microsoft.com/office/drawing/2014/main" id="{0274853B-4518-FEAD-0748-C739F688ECC7}"/>
+              </a:ext>
+            </a:extLst>
+          </p:cNvPr>
+          <p:cNvSpPr/>
+          <p:nvPr/>
+        </p:nvSpPr>
+        <p:spPr>
+          <a:xfrm>
+            <a:off x="3527898" y="4339018"/>
+            <a:ext cx="5136204" cy="943154"/>
+          </a:xfrm>
+          <a:prstGeom prst="rect">
+            <a:avLst/>
+          </a:prstGeom>
+          <a:solidFill>
+            <a:srgbClr val="1E1F22"/>
+          </a:solidFill>
+          <a:ln w="38100">
+            <a:noFill/>
+          </a:ln>
+        </p:spPr>
+        <p:style>
+          <a:lnRef idx="2">
+            <a:schemeClr val="dk1"/>
+          </a:lnRef>
+          <a:fillRef idx="1">
+            <a:schemeClr val="lt1"/>
+          </a:fillRef>
+          <a:effectRef idx="0">
+            <a:schemeClr val="dk1"/>
+          </a:effectRef>
+          <a:fontRef idx="minor">
+            <a:schemeClr val="dk1"/>
+          </a:fontRef>
+        </p:style>
+        <p:txBody>
+          <a:bodyPr rtlCol="0" anchor="t"/>
+          <a:lstStyle/>
+          <a:p>
+            <a:r>
+              <a:rPr lang="en-US">
+                <a:solidFill>
+                  <a:srgbClr val="BCBEC4"/>
+                </a:solidFill>
+                <a:latin typeface="Consolas" panose="020B0609020204030204" pitchFamily="49" charset="0"/>
+              </a:rPr>
+              <a:t>Query query = SQL.select(</a:t>
+            </a:r>
+            <a:r>
+              <a:rPr lang="en-US">
+                <a:solidFill>
+                  <a:srgbClr val="6AAB73"/>
+                </a:solidFill>
+                <a:latin typeface="Consolas" panose="020B0609020204030204" pitchFamily="49" charset="0"/>
+              </a:rPr>
+              <a:t>"</a:t>
+            </a:r>
+            <a:r>
+              <a:rPr lang="en-US" u="wavyHeavy">
+                <a:solidFill>
+                  <a:srgbClr val="6AAB73"/>
+                </a:solidFill>
+                <a:uFill>
+                  <a:solidFill>
+                    <a:srgbClr val="FF0000"/>
+                  </a:solidFill>
+                </a:uFill>
+                <a:latin typeface="Consolas" panose="020B0609020204030204" pitchFamily="49" charset="0"/>
+              </a:rPr>
+              <a:t>1 </a:t>
+            </a:r>
+            <a:r>
+              <a:rPr lang="en-US">
+                <a:solidFill>
+                  <a:srgbClr val="6AAB73"/>
+                </a:solidFill>
+                <a:latin typeface="Consolas" panose="020B0609020204030204" pitchFamily="49" charset="0"/>
+              </a:rPr>
+              <a:t>+ 5"</a:t>
+            </a:r>
+            <a:r>
+              <a:rPr lang="en-US">
+                <a:solidFill>
+                  <a:srgbClr val="BCBEC4"/>
+                </a:solidFill>
+                <a:latin typeface="Consolas" panose="020B0609020204030204" pitchFamily="49" charset="0"/>
+              </a:rPr>
+              <a:t>)</a:t>
+            </a:r>
+          </a:p>
+          <a:p>
+            <a:r>
+              <a:rPr lang="en-US">
+                <a:solidFill>
+                  <a:srgbClr val="BCBEC4"/>
+                </a:solidFill>
+                <a:latin typeface="Consolas" panose="020B0609020204030204" pitchFamily="49" charset="0"/>
+              </a:rPr>
+              <a:t>                 .from(</a:t>
+            </a:r>
+            <a:r>
+              <a:rPr lang="en-US">
+                <a:solidFill>
+                  <a:srgbClr val="6AAB73"/>
+                </a:solidFill>
+                <a:latin typeface="Consolas" panose="020B0609020204030204" pitchFamily="49" charset="0"/>
+              </a:rPr>
+              <a:t>"Students"</a:t>
+            </a:r>
+            <a:r>
+              <a:rPr lang="en-US">
+                <a:solidFill>
+                  <a:srgbClr val="BCBEC4"/>
+                </a:solidFill>
+                <a:latin typeface="Consolas" panose="020B0609020204030204" pitchFamily="49" charset="0"/>
+              </a:rPr>
+              <a:t>)</a:t>
+            </a:r>
+          </a:p>
+          <a:p>
+            <a:r>
+              <a:rPr lang="en-US">
+                <a:solidFill>
+                  <a:srgbClr val="BCBEC4"/>
+                </a:solidFill>
+                <a:latin typeface="Consolas" panose="020B0609020204030204" pitchFamily="49" charset="0"/>
+              </a:rPr>
+              <a:t>                 .end();</a:t>
+            </a:r>
+          </a:p>
+        </p:txBody>
+      </p:sp>
+      <p:sp>
+        <p:nvSpPr>
+          <p:cNvPr id="2" name="Title 1">
+            <a:extLst>
+              <a:ext uri="{FF2B5EF4-FFF2-40B4-BE49-F238E27FC236}">
+                <a16:creationId xmlns:a16="http://schemas.microsoft.com/office/drawing/2014/main" id="{F40B221C-34EB-5291-3719-7053CB04F2E3}"/>
+              </a:ext>
+            </a:extLst>
+          </p:cNvPr>
+          <p:cNvSpPr>
+            <a:spLocks noGrp="1"/>
+          </p:cNvSpPr>
+          <p:nvPr>
+            <p:ph type="title"/>
+          </p:nvPr>
+        </p:nvSpPr>
+        <p:spPr/>
+        <p:txBody>
+          <a:bodyPr/>
+          <a:lstStyle/>
+          <a:p>
+            <a:r>
+              <a:rPr lang="en-GB"/>
+              <a:t>Use Case 2: Analyzing String Literals</a:t>
+            </a:r>
+            <a:endParaRPr lang="en-US"/>
+          </a:p>
+        </p:txBody>
+      </p:sp>
+      <p:sp>
+        <p:nvSpPr>
+          <p:cNvPr id="4" name="Slide Number Placeholder 3">
+            <a:extLst>
+              <a:ext uri="{FF2B5EF4-FFF2-40B4-BE49-F238E27FC236}">
+                <a16:creationId xmlns:a16="http://schemas.microsoft.com/office/drawing/2014/main" id="{AC07B5FB-6A78-3AD9-87A9-0381EEAA8F0F}"/>
+              </a:ext>
+            </a:extLst>
+          </p:cNvPr>
+          <p:cNvSpPr>
+            <a:spLocks noGrp="1"/>
+          </p:cNvSpPr>
+          <p:nvPr>
+            <p:ph type="sldNum" sz="quarter" idx="12"/>
+          </p:nvPr>
+        </p:nvSpPr>
+        <p:spPr/>
+        <p:txBody>
+          <a:bodyPr/>
+          <a:lstStyle/>
+          <a:p>
+            <a:fld id="{52890E68-D690-4AC2-96FA-C0B5F80968DC}" type="slidenum">
+              <a:rPr lang="en-US" smtClean="0"/>
+              <a:t>10</a:t>
+            </a:fld>
+            <a:endParaRPr lang="en-US"/>
+          </a:p>
+        </p:txBody>
+      </p:sp>
+      <p:sp>
+        <p:nvSpPr>
+          <p:cNvPr id="5" name="Rectangle 4">
+            <a:extLst>
+              <a:ext uri="{FF2B5EF4-FFF2-40B4-BE49-F238E27FC236}">
+                <a16:creationId xmlns:a16="http://schemas.microsoft.com/office/drawing/2014/main" id="{67972773-4748-E484-1CB5-4C8C748DF3CB}"/>
+              </a:ext>
+            </a:extLst>
+          </p:cNvPr>
+          <p:cNvSpPr/>
+          <p:nvPr/>
+        </p:nvSpPr>
+        <p:spPr>
+          <a:xfrm>
+            <a:off x="3527898" y="1682583"/>
+            <a:ext cx="5136204" cy="943154"/>
+          </a:xfrm>
+          <a:prstGeom prst="rect">
+            <a:avLst/>
+          </a:prstGeom>
+          <a:solidFill>
+            <a:srgbClr val="1E1F22"/>
+          </a:solidFill>
+          <a:ln w="38100">
+            <a:noFill/>
+          </a:ln>
+        </p:spPr>
+        <p:style>
+          <a:lnRef idx="2">
+            <a:schemeClr val="dk1"/>
+          </a:lnRef>
+          <a:fillRef idx="1">
+            <a:schemeClr val="lt1"/>
+          </a:fillRef>
+          <a:effectRef idx="0">
+            <a:schemeClr val="dk1"/>
+          </a:effectRef>
+          <a:fontRef idx="minor">
+            <a:schemeClr val="dk1"/>
+          </a:fontRef>
+        </p:style>
+        <p:txBody>
+          <a:bodyPr rtlCol="0" anchor="t"/>
+          <a:lstStyle/>
+          <a:p>
+            <a:r>
+              <a:rPr lang="en-US">
+                <a:solidFill>
+                  <a:srgbClr val="BCBEC4"/>
+                </a:solidFill>
+                <a:latin typeface="Consolas" panose="020B0609020204030204" pitchFamily="49" charset="0"/>
+              </a:rPr>
+              <a:t>Query query = SQL.select(</a:t>
+            </a:r>
+            <a:r>
+              <a:rPr lang="en-US">
+                <a:solidFill>
+                  <a:srgbClr val="6AAB73"/>
+                </a:solidFill>
+                <a:latin typeface="Consolas" panose="020B0609020204030204" pitchFamily="49" charset="0"/>
+              </a:rPr>
+              <a:t>"</a:t>
+            </a:r>
+            <a:r>
+              <a:rPr lang="en-US" u="wavyHeavy">
+                <a:solidFill>
+                  <a:srgbClr val="6AAB73"/>
+                </a:solidFill>
+                <a:uFill>
+                  <a:solidFill>
+                    <a:srgbClr val="FF0000"/>
+                  </a:solidFill>
+                </a:uFill>
+                <a:latin typeface="Consolas" panose="020B0609020204030204" pitchFamily="49" charset="0"/>
+              </a:rPr>
+              <a:t>1 </a:t>
+            </a:r>
+            <a:r>
+              <a:rPr lang="en-US">
+                <a:solidFill>
+                  <a:srgbClr val="6AAB73"/>
+                </a:solidFill>
+                <a:latin typeface="Consolas" panose="020B0609020204030204" pitchFamily="49" charset="0"/>
+              </a:rPr>
+              <a:t>+ 5"</a:t>
+            </a:r>
+            <a:r>
+              <a:rPr lang="en-US">
+                <a:solidFill>
+                  <a:srgbClr val="BCBEC4"/>
+                </a:solidFill>
+                <a:latin typeface="Consolas" panose="020B0609020204030204" pitchFamily="49" charset="0"/>
+              </a:rPr>
+              <a:t>)</a:t>
+            </a:r>
+          </a:p>
+          <a:p>
+            <a:r>
+              <a:rPr lang="en-US">
+                <a:solidFill>
+                  <a:srgbClr val="BCBEC4"/>
+                </a:solidFill>
+                <a:latin typeface="Consolas" panose="020B0609020204030204" pitchFamily="49" charset="0"/>
+              </a:rPr>
+              <a:t>                 .from(</a:t>
+            </a:r>
+            <a:r>
+              <a:rPr lang="en-US">
+                <a:solidFill>
+                  <a:srgbClr val="6AAB73"/>
+                </a:solidFill>
+                <a:latin typeface="Consolas" panose="020B0609020204030204" pitchFamily="49" charset="0"/>
+              </a:rPr>
+              <a:t>"Students"</a:t>
+            </a:r>
+            <a:r>
+              <a:rPr lang="en-US">
+                <a:solidFill>
+                  <a:srgbClr val="BCBEC4"/>
+                </a:solidFill>
+                <a:latin typeface="Consolas" panose="020B0609020204030204" pitchFamily="49" charset="0"/>
+              </a:rPr>
+              <a:t>)</a:t>
+            </a:r>
+          </a:p>
+          <a:p>
+            <a:r>
+              <a:rPr lang="en-US">
+                <a:solidFill>
+                  <a:srgbClr val="BCBEC4"/>
+                </a:solidFill>
+                <a:latin typeface="Consolas" panose="020B0609020204030204" pitchFamily="49" charset="0"/>
+              </a:rPr>
+              <a:t>                 .end();</a:t>
+            </a:r>
+          </a:p>
+        </p:txBody>
+      </p:sp>
+      <p:sp>
+        <p:nvSpPr>
+          <p:cNvPr id="8" name="Rectangle: Rounded Corners 7">
+            <a:extLst>
+              <a:ext uri="{FF2B5EF4-FFF2-40B4-BE49-F238E27FC236}">
+                <a16:creationId xmlns:a16="http://schemas.microsoft.com/office/drawing/2014/main" id="{C99945E3-CF40-5011-C9D7-3C8D234D5A1D}"/>
+              </a:ext>
+            </a:extLst>
+          </p:cNvPr>
+          <p:cNvSpPr/>
+          <p:nvPr/>
+        </p:nvSpPr>
+        <p:spPr>
+          <a:xfrm>
+            <a:off x="7019284" y="4762131"/>
+            <a:ext cx="4131013" cy="365125"/>
+          </a:xfrm>
+          <a:prstGeom prst="roundRect">
+            <a:avLst/>
+          </a:prstGeom>
+          <a:solidFill>
+            <a:schemeClr val="tx1">
+              <a:lumMod val="75000"/>
+              <a:lumOff val="25000"/>
+            </a:schemeClr>
+          </a:solidFill>
+          <a:ln w="12700">
+            <a:solidFill>
+              <a:schemeClr val="tx1">
+                <a:lumMod val="65000"/>
+                <a:lumOff val="35000"/>
+              </a:schemeClr>
+            </a:solidFill>
+          </a:ln>
+        </p:spPr>
+        <p:style>
+          <a:lnRef idx="2">
+            <a:schemeClr val="dk1"/>
+          </a:lnRef>
+          <a:fillRef idx="1">
+            <a:schemeClr val="lt1"/>
+          </a:fillRef>
+          <a:effectRef idx="0">
+            <a:schemeClr val="dk1"/>
+          </a:effectRef>
+          <a:fontRef idx="minor">
+            <a:schemeClr val="dk1"/>
+          </a:fontRef>
+        </p:style>
+        <p:txBody>
+          <a:bodyPr rtlCol="0" anchor="t"/>
+          <a:lstStyle/>
+          <a:p>
+            <a:r>
+              <a:rPr lang="en-GB" sz="1600">
+                <a:solidFill>
+                  <a:srgbClr val="BCBEC4"/>
+                </a:solidFill>
+              </a:rPr>
+              <a:t>Expected '*' or ID but got '1'</a:t>
+            </a:r>
+            <a:endParaRPr lang="en-US" sz="1600">
+              <a:solidFill>
+                <a:srgbClr val="BCBEC4"/>
+              </a:solidFill>
+            </a:endParaRPr>
+          </a:p>
+        </p:txBody>
+      </p:sp>
+      <p:pic>
+        <p:nvPicPr>
+          <p:cNvPr id="12" name="Picture 11">
+            <a:extLst>
+              <a:ext uri="{FF2B5EF4-FFF2-40B4-BE49-F238E27FC236}">
+                <a16:creationId xmlns:a16="http://schemas.microsoft.com/office/drawing/2014/main" id="{7F703AA3-1A30-C5CC-99F6-41A1103FEFE5}"/>
+              </a:ext>
+            </a:extLst>
+          </p:cNvPr>
+          <p:cNvPicPr>
+            <a:picLocks noChangeAspect="1"/>
+          </p:cNvPicPr>
+          <p:nvPr/>
+        </p:nvPicPr>
+        <p:blipFill>
+          <a:blip r:embed="rId2">
+            <a:extLst>
+              <a:ext uri="{28A0092B-C50C-407E-A947-70E740481C1C}">
+                <a14:useLocalDpi xmlns:a14="http://schemas.microsoft.com/office/drawing/2010/main" val="0"/>
+              </a:ext>
+            </a:extLst>
+          </a:blip>
+          <a:stretch>
+            <a:fillRect/>
+          </a:stretch>
+        </p:blipFill>
+        <p:spPr>
+          <a:xfrm>
+            <a:off x="7019284" y="4491961"/>
+            <a:ext cx="130150" cy="194982"/>
+          </a:xfrm>
+          <a:prstGeom prst="rect">
+            <a:avLst/>
+          </a:prstGeom>
+        </p:spPr>
+      </p:pic>
+    </p:spTree>
+    <p:extLst>
+      <p:ext uri="{BB962C8B-B14F-4D97-AF65-F5344CB8AC3E}">
+        <p14:creationId xmlns:p14="http://schemas.microsoft.com/office/powerpoint/2010/main" val="127601684"/>
+      </p:ext>
+    </p:extLst>
+  </p:cSld>
+  <p:clrMapOvr>
+    <a:masterClrMapping/>
+  </p:clrMapOvr>
+</p:sld>
+</file>
+
+<file path=ppt/slides/slide11.xml><?xml version="1.0" encoding="utf-8"?>
+<p:sld xmlns:a="http://schemas.openxmlformats.org/drawingml/2006/main" xmlns:r="http://schemas.openxmlformats.org/officeDocument/2006/relationships" xmlns:p="http://schemas.openxmlformats.org/presentationml/2006/main">
+  <p:cSld>
+    <p:spTree>
+      <p:nvGrpSpPr>
+        <p:cNvPr id="1" name="">
+          <a:extLst>
+            <a:ext uri="{FF2B5EF4-FFF2-40B4-BE49-F238E27FC236}">
+              <a16:creationId xmlns:a16="http://schemas.microsoft.com/office/drawing/2014/main" id="{5E7A86C0-D4FA-144A-B096-4D80615ECE82}"/>
+            </a:ext>
+          </a:extLst>
+        </p:cNvPr>
+        <p:cNvGrpSpPr/>
+        <p:nvPr/>
+      </p:nvGrpSpPr>
+      <p:grpSpPr>
+        <a:xfrm>
+          <a:off x="0" y="0"/>
+          <a:ext cx="0" cy="0"/>
+          <a:chOff x="0" y="0"/>
+          <a:chExt cx="0" cy="0"/>
+        </a:xfrm>
+      </p:grpSpPr>
+      <p:sp>
+        <p:nvSpPr>
+          <p:cNvPr id="2" name="Title 1">
+            <a:extLst>
+              <a:ext uri="{FF2B5EF4-FFF2-40B4-BE49-F238E27FC236}">
+                <a16:creationId xmlns:a16="http://schemas.microsoft.com/office/drawing/2014/main" id="{46A8342A-DA08-D6B2-8792-2155CE7C3C39}"/>
+              </a:ext>
+            </a:extLst>
+          </p:cNvPr>
+          <p:cNvSpPr>
+            <a:spLocks noGrp="1"/>
+          </p:cNvSpPr>
+          <p:nvPr>
+            <p:ph type="title"/>
+          </p:nvPr>
+        </p:nvSpPr>
+        <p:spPr/>
+        <p:txBody>
+          <a:bodyPr/>
+          <a:lstStyle/>
+          <a:p>
+            <a:r>
+              <a:rPr lang="en-GB"/>
+              <a:t>Use Case 3: DSL Syntax Highlighting</a:t>
+            </a:r>
+            <a:endParaRPr lang="en-US"/>
+          </a:p>
+        </p:txBody>
+      </p:sp>
+      <p:sp>
+        <p:nvSpPr>
+          <p:cNvPr id="4" name="Slide Number Placeholder 3">
+            <a:extLst>
+              <a:ext uri="{FF2B5EF4-FFF2-40B4-BE49-F238E27FC236}">
+                <a16:creationId xmlns:a16="http://schemas.microsoft.com/office/drawing/2014/main" id="{9EAC56A8-B6DF-BA9F-3498-46A7E18A6C56}"/>
+              </a:ext>
+            </a:extLst>
+          </p:cNvPr>
+          <p:cNvSpPr>
+            <a:spLocks noGrp="1"/>
+          </p:cNvSpPr>
+          <p:nvPr>
+            <p:ph type="sldNum" sz="quarter" idx="12"/>
+          </p:nvPr>
+        </p:nvSpPr>
+        <p:spPr/>
+        <p:txBody>
+          <a:bodyPr/>
+          <a:lstStyle/>
+          <a:p>
+            <a:fld id="{52890E68-D690-4AC2-96FA-C0B5F80968DC}" type="slidenum">
+              <a:rPr lang="en-US" smtClean="0"/>
+              <a:t>11</a:t>
+            </a:fld>
+            <a:endParaRPr lang="en-US"/>
+          </a:p>
+        </p:txBody>
+      </p:sp>
+      <p:sp>
+        <p:nvSpPr>
+          <p:cNvPr id="5" name="Rectangle 4">
+            <a:extLst>
+              <a:ext uri="{FF2B5EF4-FFF2-40B4-BE49-F238E27FC236}">
+                <a16:creationId xmlns:a16="http://schemas.microsoft.com/office/drawing/2014/main" id="{E5A3E6D8-C4DA-47A4-635D-1290839C1F57}"/>
+              </a:ext>
+            </a:extLst>
+          </p:cNvPr>
+          <p:cNvSpPr/>
+          <p:nvPr/>
+        </p:nvSpPr>
+        <p:spPr>
+          <a:xfrm>
+            <a:off x="3178045" y="2810400"/>
+            <a:ext cx="5835910" cy="1237199"/>
+          </a:xfrm>
+          <a:prstGeom prst="rect">
+            <a:avLst/>
+          </a:prstGeom>
+          <a:solidFill>
+            <a:srgbClr val="1E1F22"/>
+          </a:solidFill>
+          <a:ln w="38100">
+            <a:noFill/>
+          </a:ln>
+        </p:spPr>
+        <p:style>
+          <a:lnRef idx="2">
+            <a:schemeClr val="dk1"/>
+          </a:lnRef>
+          <a:fillRef idx="1">
+            <a:schemeClr val="lt1"/>
+          </a:fillRef>
+          <a:effectRef idx="0">
+            <a:schemeClr val="dk1"/>
+          </a:effectRef>
+          <a:fontRef idx="minor">
+            <a:schemeClr val="dk1"/>
+          </a:fontRef>
+        </p:style>
+        <p:txBody>
+          <a:bodyPr rtlCol="0" anchor="t"/>
+          <a:lstStyle/>
+          <a:p>
+            <a:r>
+              <a:rPr lang="en-US">
+                <a:solidFill>
+                  <a:srgbClr val="BCBEC4"/>
+                </a:solidFill>
+                <a:latin typeface="Consolas" panose="020B0609020204030204" pitchFamily="49" charset="0"/>
+              </a:rPr>
+              <a:t>Query query = SQL.</a:t>
+            </a:r>
+            <a:r>
+              <a:rPr lang="en-US">
+                <a:solidFill>
+                  <a:schemeClr val="accent2"/>
+                </a:solidFill>
+                <a:latin typeface="Consolas" panose="020B0609020204030204" pitchFamily="49" charset="0"/>
+              </a:rPr>
+              <a:t>select</a:t>
+            </a:r>
+            <a:r>
+              <a:rPr lang="en-US">
+                <a:solidFill>
+                  <a:srgbClr val="BCBEC4"/>
+                </a:solidFill>
+                <a:latin typeface="Consolas" panose="020B0609020204030204" pitchFamily="49" charset="0"/>
+              </a:rPr>
+              <a:t>(</a:t>
+            </a:r>
+            <a:r>
+              <a:rPr lang="en-US">
+                <a:solidFill>
+                  <a:srgbClr val="6AAB73"/>
+                </a:solidFill>
+                <a:latin typeface="Consolas" panose="020B0609020204030204" pitchFamily="49" charset="0"/>
+              </a:rPr>
+              <a:t>"</a:t>
+            </a:r>
+            <a:r>
+              <a:rPr lang="en-US">
+                <a:solidFill>
+                  <a:srgbClr val="BCBEC4"/>
+                </a:solidFill>
+                <a:latin typeface="Consolas" panose="020B0609020204030204" pitchFamily="49" charset="0"/>
+              </a:rPr>
+              <a:t>name, birth_year</a:t>
+            </a:r>
+            <a:r>
+              <a:rPr lang="en-US">
+                <a:solidFill>
+                  <a:srgbClr val="6AAB73"/>
+                </a:solidFill>
+                <a:latin typeface="Consolas" panose="020B0609020204030204" pitchFamily="49" charset="0"/>
+              </a:rPr>
+              <a:t>"</a:t>
+            </a:r>
+            <a:r>
+              <a:rPr lang="en-US">
+                <a:solidFill>
+                  <a:srgbClr val="BCBEC4"/>
+                </a:solidFill>
+                <a:latin typeface="Consolas" panose="020B0609020204030204" pitchFamily="49" charset="0"/>
+              </a:rPr>
+              <a:t>)</a:t>
+            </a:r>
+          </a:p>
+          <a:p>
+            <a:r>
+              <a:rPr lang="en-US">
+                <a:solidFill>
+                  <a:srgbClr val="BCBEC4"/>
+                </a:solidFill>
+                <a:latin typeface="Consolas" panose="020B0609020204030204" pitchFamily="49" charset="0"/>
+              </a:rPr>
+              <a:t>                 .</a:t>
+            </a:r>
+            <a:r>
+              <a:rPr lang="en-US">
+                <a:solidFill>
+                  <a:schemeClr val="accent2"/>
+                </a:solidFill>
+                <a:latin typeface="Consolas" panose="020B0609020204030204" pitchFamily="49" charset="0"/>
+              </a:rPr>
+              <a:t>from</a:t>
+            </a:r>
+            <a:r>
+              <a:rPr lang="en-US">
+                <a:solidFill>
+                  <a:srgbClr val="BCBEC4"/>
+                </a:solidFill>
+                <a:latin typeface="Consolas" panose="020B0609020204030204" pitchFamily="49" charset="0"/>
+              </a:rPr>
+              <a:t>(</a:t>
+            </a:r>
+            <a:r>
+              <a:rPr lang="en-US">
+                <a:solidFill>
+                  <a:srgbClr val="6AAB73"/>
+                </a:solidFill>
+                <a:latin typeface="Consolas" panose="020B0609020204030204" pitchFamily="49" charset="0"/>
+              </a:rPr>
+              <a:t>"</a:t>
+            </a:r>
+            <a:r>
+              <a:rPr lang="en-US">
+                <a:solidFill>
+                  <a:srgbClr val="BCBEC4"/>
+                </a:solidFill>
+                <a:latin typeface="Consolas" panose="020B0609020204030204" pitchFamily="49" charset="0"/>
+              </a:rPr>
+              <a:t>Students</a:t>
+            </a:r>
+            <a:r>
+              <a:rPr lang="en-US">
+                <a:solidFill>
+                  <a:srgbClr val="6AAB73"/>
+                </a:solidFill>
+                <a:latin typeface="Consolas" panose="020B0609020204030204" pitchFamily="49" charset="0"/>
+              </a:rPr>
+              <a:t>"</a:t>
+            </a:r>
+            <a:r>
+              <a:rPr lang="en-US">
+                <a:solidFill>
+                  <a:srgbClr val="BCBEC4"/>
+                </a:solidFill>
+                <a:latin typeface="Consolas" panose="020B0609020204030204" pitchFamily="49" charset="0"/>
+              </a:rPr>
+              <a:t>)</a:t>
+            </a:r>
+          </a:p>
+          <a:p>
+            <a:r>
+              <a:rPr lang="en-US">
+                <a:solidFill>
+                  <a:srgbClr val="BCBEC4"/>
+                </a:solidFill>
+                <a:latin typeface="Consolas" panose="020B0609020204030204" pitchFamily="49" charset="0"/>
+              </a:rPr>
+              <a:t>                 .</a:t>
+            </a:r>
+            <a:r>
+              <a:rPr lang="en-US">
+                <a:solidFill>
+                  <a:schemeClr val="accent2"/>
+                </a:solidFill>
+                <a:latin typeface="Consolas" panose="020B0609020204030204" pitchFamily="49" charset="0"/>
+              </a:rPr>
+              <a:t>where</a:t>
+            </a:r>
+            <a:r>
+              <a:rPr lang="en-US">
+                <a:solidFill>
+                  <a:srgbClr val="BCBEC4"/>
+                </a:solidFill>
+                <a:latin typeface="Consolas" panose="020B0609020204030204" pitchFamily="49" charset="0"/>
+              </a:rPr>
+              <a:t>(</a:t>
+            </a:r>
+            <a:r>
+              <a:rPr lang="en-US">
+                <a:solidFill>
+                  <a:srgbClr val="6AAB73"/>
+                </a:solidFill>
+                <a:latin typeface="Consolas" panose="020B0609020204030204" pitchFamily="49" charset="0"/>
+              </a:rPr>
+              <a:t>"</a:t>
+            </a:r>
+            <a:r>
+              <a:rPr lang="en-US">
+                <a:solidFill>
+                  <a:srgbClr val="BCBEC4"/>
+                </a:solidFill>
+                <a:latin typeface="Consolas" panose="020B0609020204030204" pitchFamily="49" charset="0"/>
+              </a:rPr>
+              <a:t>birth_year == </a:t>
+            </a:r>
+            <a:r>
+              <a:rPr lang="en-US">
+                <a:solidFill>
+                  <a:schemeClr val="accent1">
+                    <a:lumMod val="60000"/>
+                    <a:lumOff val="40000"/>
+                  </a:schemeClr>
+                </a:solidFill>
+                <a:latin typeface="Consolas" panose="020B0609020204030204" pitchFamily="49" charset="0"/>
+              </a:rPr>
+              <a:t>2005</a:t>
+            </a:r>
+            <a:r>
+              <a:rPr lang="en-US">
+                <a:solidFill>
+                  <a:srgbClr val="6AAB73"/>
+                </a:solidFill>
+                <a:latin typeface="Consolas" panose="020B0609020204030204" pitchFamily="49" charset="0"/>
+              </a:rPr>
+              <a:t>"</a:t>
+            </a:r>
+            <a:r>
+              <a:rPr lang="en-US">
+                <a:solidFill>
+                  <a:srgbClr val="BCBEC4"/>
+                </a:solidFill>
+                <a:latin typeface="Consolas" panose="020B0609020204030204" pitchFamily="49" charset="0"/>
+              </a:rPr>
+              <a:t>)</a:t>
+            </a:r>
+          </a:p>
+          <a:p>
+            <a:r>
+              <a:rPr lang="en-US">
+                <a:solidFill>
+                  <a:srgbClr val="BCBEC4"/>
+                </a:solidFill>
+                <a:latin typeface="Consolas" panose="020B0609020204030204" pitchFamily="49" charset="0"/>
+              </a:rPr>
+              <a:t>                 .end();</a:t>
+            </a:r>
+          </a:p>
+        </p:txBody>
+      </p:sp>
+    </p:spTree>
+    <p:extLst>
+      <p:ext uri="{BB962C8B-B14F-4D97-AF65-F5344CB8AC3E}">
+        <p14:creationId xmlns:p14="http://schemas.microsoft.com/office/powerpoint/2010/main" val="2923497200"/>
+      </p:ext>
+    </p:extLst>
+  </p:cSld>
+  <p:clrMapOvr>
+    <a:masterClrMapping/>
+  </p:clrMapOvr>
+</p:sld>
+</file>
+
+<file path=ppt/slides/slide12.xml><?xml version="1.0" encoding="utf-8"?>
+<p:sld xmlns:a="http://schemas.openxmlformats.org/drawingml/2006/main" xmlns:r="http://schemas.openxmlformats.org/officeDocument/2006/relationships" xmlns:p="http://schemas.openxmlformats.org/presentationml/2006/main">
+  <p:cSld>
+    <p:spTree>
+      <p:nvGrpSpPr>
+        <p:cNvPr id="1" name="">
+          <a:extLst>
+            <a:ext uri="{FF2B5EF4-FFF2-40B4-BE49-F238E27FC236}">
+              <a16:creationId xmlns:a16="http://schemas.microsoft.com/office/drawing/2014/main" id="{C01402A4-6D13-7F3D-9B64-E083C148CFE1}"/>
+            </a:ext>
+          </a:extLst>
+        </p:cNvPr>
+        <p:cNvGrpSpPr/>
+        <p:nvPr/>
+      </p:nvGrpSpPr>
+      <p:grpSpPr>
+        <a:xfrm>
+          <a:off x="0" y="0"/>
+          <a:ext cx="0" cy="0"/>
+          <a:chOff x="0" y="0"/>
+          <a:chExt cx="0" cy="0"/>
+        </a:xfrm>
+      </p:grpSpPr>
+      <p:sp>
+        <p:nvSpPr>
+          <p:cNvPr id="2" name="Title 1">
+            <a:extLst>
+              <a:ext uri="{FF2B5EF4-FFF2-40B4-BE49-F238E27FC236}">
+                <a16:creationId xmlns:a16="http://schemas.microsoft.com/office/drawing/2014/main" id="{CCF6BBC4-CD10-B120-754E-57D7CA563056}"/>
+              </a:ext>
+            </a:extLst>
+          </p:cNvPr>
+          <p:cNvSpPr>
+            <a:spLocks noGrp="1"/>
+          </p:cNvSpPr>
+          <p:nvPr>
+            <p:ph type="title"/>
+          </p:nvPr>
+        </p:nvSpPr>
+        <p:spPr/>
+        <p:txBody>
+          <a:bodyPr/>
+          <a:lstStyle/>
+          <a:p>
+            <a:r>
+              <a:rPr lang="en-GB"/>
+              <a:t>Use Case 4: Semantic EDSL Analysis</a:t>
+            </a:r>
+            <a:endParaRPr lang="en-US"/>
+          </a:p>
+        </p:txBody>
+      </p:sp>
+      <p:sp>
+        <p:nvSpPr>
+          <p:cNvPr id="4" name="Slide Number Placeholder 3">
+            <a:extLst>
+              <a:ext uri="{FF2B5EF4-FFF2-40B4-BE49-F238E27FC236}">
+                <a16:creationId xmlns:a16="http://schemas.microsoft.com/office/drawing/2014/main" id="{40BFF64D-5F8E-0D53-D334-3E7384E10554}"/>
+              </a:ext>
+            </a:extLst>
+          </p:cNvPr>
+          <p:cNvSpPr>
+            <a:spLocks noGrp="1"/>
+          </p:cNvSpPr>
+          <p:nvPr>
+            <p:ph type="sldNum" sz="quarter" idx="12"/>
+          </p:nvPr>
+        </p:nvSpPr>
+        <p:spPr/>
+        <p:txBody>
+          <a:bodyPr/>
+          <a:lstStyle/>
+          <a:p>
+            <a:fld id="{52890E68-D690-4AC2-96FA-C0B5F80968DC}" type="slidenum">
+              <a:rPr lang="en-US" smtClean="0"/>
+              <a:t>12</a:t>
+            </a:fld>
+            <a:endParaRPr lang="en-US"/>
+          </a:p>
+        </p:txBody>
+      </p:sp>
+      <p:sp>
+        <p:nvSpPr>
+          <p:cNvPr id="5" name="Rectangle 4">
+            <a:extLst>
+              <a:ext uri="{FF2B5EF4-FFF2-40B4-BE49-F238E27FC236}">
+                <a16:creationId xmlns:a16="http://schemas.microsoft.com/office/drawing/2014/main" id="{E2CBE598-DD5D-20B4-E959-2490734AFCF9}"/>
+              </a:ext>
+            </a:extLst>
+          </p:cNvPr>
+          <p:cNvSpPr/>
+          <p:nvPr/>
+        </p:nvSpPr>
+        <p:spPr>
+          <a:xfrm>
+            <a:off x="3178045" y="2810400"/>
+            <a:ext cx="5835910" cy="1237199"/>
+          </a:xfrm>
+          <a:prstGeom prst="rect">
+            <a:avLst/>
+          </a:prstGeom>
+          <a:solidFill>
+            <a:srgbClr val="1E1F22"/>
+          </a:solidFill>
+          <a:ln w="38100">
+            <a:noFill/>
+          </a:ln>
+        </p:spPr>
+        <p:style>
+          <a:lnRef idx="2">
+            <a:schemeClr val="dk1"/>
+          </a:lnRef>
+          <a:fillRef idx="1">
+            <a:schemeClr val="lt1"/>
+          </a:fillRef>
+          <a:effectRef idx="0">
+            <a:schemeClr val="dk1"/>
+          </a:effectRef>
+          <a:fontRef idx="minor">
+            <a:schemeClr val="dk1"/>
+          </a:fontRef>
+        </p:style>
+        <p:txBody>
+          <a:bodyPr rtlCol="0" anchor="t"/>
+          <a:lstStyle/>
+          <a:p>
+            <a:r>
+              <a:rPr lang="en-US">
+                <a:solidFill>
+                  <a:srgbClr val="BCBEC4"/>
+                </a:solidFill>
+                <a:latin typeface="Consolas" panose="020B0609020204030204" pitchFamily="49" charset="0"/>
+              </a:rPr>
+              <a:t>Query query = SQL.</a:t>
+            </a:r>
+            <a:r>
+              <a:rPr lang="en-US">
+                <a:solidFill>
+                  <a:schemeClr val="accent2"/>
+                </a:solidFill>
+                <a:latin typeface="Consolas" panose="020B0609020204030204" pitchFamily="49" charset="0"/>
+              </a:rPr>
+              <a:t>select</a:t>
+            </a:r>
+            <a:r>
+              <a:rPr lang="en-US">
+                <a:solidFill>
+                  <a:srgbClr val="BCBEC4"/>
+                </a:solidFill>
+                <a:latin typeface="Consolas" panose="020B0609020204030204" pitchFamily="49" charset="0"/>
+              </a:rPr>
+              <a:t>(</a:t>
+            </a:r>
+            <a:r>
+              <a:rPr lang="en-US">
+                <a:solidFill>
+                  <a:srgbClr val="6AAB73"/>
+                </a:solidFill>
+                <a:latin typeface="Consolas" panose="020B0609020204030204" pitchFamily="49" charset="0"/>
+              </a:rPr>
+              <a:t>"</a:t>
+            </a:r>
+            <a:r>
+              <a:rPr lang="en-US">
+                <a:solidFill>
+                  <a:srgbClr val="BCBEC4"/>
+                </a:solidFill>
+                <a:latin typeface="Consolas" panose="020B0609020204030204" pitchFamily="49" charset="0"/>
+              </a:rPr>
+              <a:t>name</a:t>
+            </a:r>
+            <a:r>
+              <a:rPr lang="en-US">
+                <a:solidFill>
+                  <a:srgbClr val="6AAB73"/>
+                </a:solidFill>
+                <a:latin typeface="Consolas" panose="020B0609020204030204" pitchFamily="49" charset="0"/>
+              </a:rPr>
+              <a:t>"</a:t>
+            </a:r>
+            <a:r>
+              <a:rPr lang="en-US">
+                <a:solidFill>
+                  <a:srgbClr val="BCBEC4"/>
+                </a:solidFill>
+                <a:latin typeface="Consolas" panose="020B0609020204030204" pitchFamily="49" charset="0"/>
+              </a:rPr>
+              <a:t>)</a:t>
+            </a:r>
+          </a:p>
+          <a:p>
+            <a:r>
+              <a:rPr lang="en-US">
+                <a:solidFill>
+                  <a:srgbClr val="BCBEC4"/>
+                </a:solidFill>
+                <a:latin typeface="Consolas" panose="020B0609020204030204" pitchFamily="49" charset="0"/>
+              </a:rPr>
+              <a:t>                 .</a:t>
+            </a:r>
+            <a:r>
+              <a:rPr lang="en-US">
+                <a:solidFill>
+                  <a:schemeClr val="accent2"/>
+                </a:solidFill>
+                <a:latin typeface="Consolas" panose="020B0609020204030204" pitchFamily="49" charset="0"/>
+              </a:rPr>
+              <a:t>from</a:t>
+            </a:r>
+            <a:r>
+              <a:rPr lang="en-US">
+                <a:solidFill>
+                  <a:srgbClr val="BCBEC4"/>
+                </a:solidFill>
+                <a:latin typeface="Consolas" panose="020B0609020204030204" pitchFamily="49" charset="0"/>
+              </a:rPr>
+              <a:t>(</a:t>
+            </a:r>
+            <a:r>
+              <a:rPr lang="en-US">
+                <a:solidFill>
+                  <a:srgbClr val="6AAB73"/>
+                </a:solidFill>
+                <a:latin typeface="Consolas" panose="020B0609020204030204" pitchFamily="49" charset="0"/>
+              </a:rPr>
+              <a:t>"</a:t>
+            </a:r>
+            <a:r>
+              <a:rPr lang="en-US">
+                <a:solidFill>
+                  <a:srgbClr val="BCBEC4"/>
+                </a:solidFill>
+                <a:latin typeface="Consolas" panose="020B0609020204030204" pitchFamily="49" charset="0"/>
+              </a:rPr>
+              <a:t>Students</a:t>
+            </a:r>
+            <a:r>
+              <a:rPr lang="en-US">
+                <a:solidFill>
+                  <a:srgbClr val="6AAB73"/>
+                </a:solidFill>
+                <a:latin typeface="Consolas" panose="020B0609020204030204" pitchFamily="49" charset="0"/>
+              </a:rPr>
+              <a:t>"</a:t>
+            </a:r>
+            <a:r>
+              <a:rPr lang="en-US">
+                <a:solidFill>
+                  <a:srgbClr val="BCBEC4"/>
+                </a:solidFill>
+                <a:latin typeface="Consolas" panose="020B0609020204030204" pitchFamily="49" charset="0"/>
+              </a:rPr>
+              <a:t>)</a:t>
+            </a:r>
+          </a:p>
+          <a:p>
+            <a:r>
+              <a:rPr lang="en-US">
+                <a:solidFill>
+                  <a:srgbClr val="BCBEC4"/>
+                </a:solidFill>
+                <a:latin typeface="Consolas" panose="020B0609020204030204" pitchFamily="49" charset="0"/>
+              </a:rPr>
+              <a:t>                 .</a:t>
+            </a:r>
+            <a:r>
+              <a:rPr lang="en-US">
+                <a:solidFill>
+                  <a:schemeClr val="accent2"/>
+                </a:solidFill>
+                <a:latin typeface="Consolas" panose="020B0609020204030204" pitchFamily="49" charset="0"/>
+              </a:rPr>
+              <a:t>where</a:t>
+            </a:r>
+            <a:r>
+              <a:rPr lang="en-US">
+                <a:solidFill>
+                  <a:srgbClr val="BCBEC4"/>
+                </a:solidFill>
+                <a:latin typeface="Consolas" panose="020B0609020204030204" pitchFamily="49" charset="0"/>
+              </a:rPr>
+              <a:t>(</a:t>
+            </a:r>
+            <a:r>
+              <a:rPr lang="en-US">
+                <a:solidFill>
+                  <a:srgbClr val="6AAB73"/>
+                </a:solidFill>
+                <a:latin typeface="Consolas" panose="020B0609020204030204" pitchFamily="49" charset="0"/>
+              </a:rPr>
+              <a:t>"</a:t>
+            </a:r>
+            <a:r>
+              <a:rPr lang="en-US" u="wavyHeavy">
+                <a:solidFill>
+                  <a:srgbClr val="BCBEC4"/>
+                </a:solidFill>
+                <a:uFill>
+                  <a:solidFill>
+                    <a:srgbClr val="FF0000"/>
+                  </a:solidFill>
+                </a:uFill>
+                <a:latin typeface="Consolas" panose="020B0609020204030204" pitchFamily="49" charset="0"/>
+              </a:rPr>
+              <a:t>birth_year</a:t>
+            </a:r>
+            <a:r>
+              <a:rPr lang="en-US">
+                <a:solidFill>
+                  <a:srgbClr val="BCBEC4"/>
+                </a:solidFill>
+                <a:latin typeface="Consolas" panose="020B0609020204030204" pitchFamily="49" charset="0"/>
+              </a:rPr>
+              <a:t> == </a:t>
+            </a:r>
+            <a:r>
+              <a:rPr lang="en-US">
+                <a:solidFill>
+                  <a:schemeClr val="accent1">
+                    <a:lumMod val="60000"/>
+                    <a:lumOff val="40000"/>
+                  </a:schemeClr>
+                </a:solidFill>
+                <a:latin typeface="Consolas" panose="020B0609020204030204" pitchFamily="49" charset="0"/>
+              </a:rPr>
+              <a:t>2005</a:t>
+            </a:r>
+            <a:r>
+              <a:rPr lang="en-US">
+                <a:solidFill>
+                  <a:srgbClr val="6AAB73"/>
+                </a:solidFill>
+                <a:latin typeface="Consolas" panose="020B0609020204030204" pitchFamily="49" charset="0"/>
+              </a:rPr>
+              <a:t>"</a:t>
+            </a:r>
+            <a:r>
+              <a:rPr lang="en-US">
+                <a:solidFill>
+                  <a:srgbClr val="BCBEC4"/>
+                </a:solidFill>
+                <a:latin typeface="Consolas" panose="020B0609020204030204" pitchFamily="49" charset="0"/>
+              </a:rPr>
+              <a:t>)</a:t>
+            </a:r>
+          </a:p>
+          <a:p>
+            <a:r>
+              <a:rPr lang="en-US">
+                <a:solidFill>
+                  <a:srgbClr val="BCBEC4"/>
+                </a:solidFill>
+                <a:latin typeface="Consolas" panose="020B0609020204030204" pitchFamily="49" charset="0"/>
+              </a:rPr>
+              <a:t>                 .end();</a:t>
+            </a:r>
+          </a:p>
+        </p:txBody>
+      </p:sp>
+      <p:sp>
+        <p:nvSpPr>
+          <p:cNvPr id="6" name="Rectangle: Rounded Corners 5">
+            <a:extLst>
+              <a:ext uri="{FF2B5EF4-FFF2-40B4-BE49-F238E27FC236}">
+                <a16:creationId xmlns:a16="http://schemas.microsoft.com/office/drawing/2014/main" id="{DF126BE1-004D-263A-1211-1A5E784FDB15}"/>
+              </a:ext>
+            </a:extLst>
+          </p:cNvPr>
+          <p:cNvSpPr/>
+          <p:nvPr/>
+        </p:nvSpPr>
+        <p:spPr>
+          <a:xfrm>
+            <a:off x="6667592" y="3816876"/>
+            <a:ext cx="4131013" cy="365125"/>
+          </a:xfrm>
+          <a:prstGeom prst="roundRect">
+            <a:avLst/>
+          </a:prstGeom>
+          <a:solidFill>
+            <a:schemeClr val="tx1">
+              <a:lumMod val="75000"/>
+              <a:lumOff val="25000"/>
+            </a:schemeClr>
+          </a:solidFill>
+          <a:ln w="12700">
+            <a:solidFill>
+              <a:schemeClr val="tx1">
+                <a:lumMod val="65000"/>
+                <a:lumOff val="35000"/>
+              </a:schemeClr>
+            </a:solidFill>
+          </a:ln>
+        </p:spPr>
+        <p:style>
+          <a:lnRef idx="2">
+            <a:schemeClr val="dk1"/>
+          </a:lnRef>
+          <a:fillRef idx="1">
+            <a:schemeClr val="lt1"/>
+          </a:fillRef>
+          <a:effectRef idx="0">
+            <a:schemeClr val="dk1"/>
+          </a:effectRef>
+          <a:fontRef idx="minor">
+            <a:schemeClr val="dk1"/>
+          </a:fontRef>
+        </p:style>
+        <p:txBody>
+          <a:bodyPr rtlCol="0" anchor="t"/>
+          <a:lstStyle/>
+          <a:p>
+            <a:r>
+              <a:rPr lang="en-GB" sz="1600">
+                <a:solidFill>
+                  <a:srgbClr val="BCBEC4"/>
+                </a:solidFill>
+              </a:rPr>
+              <a:t>Unknown id 'birth_year'</a:t>
+            </a:r>
+            <a:endParaRPr lang="en-US" sz="1600">
+              <a:solidFill>
+                <a:srgbClr val="BCBEC4"/>
+              </a:solidFill>
+            </a:endParaRPr>
+          </a:p>
+        </p:txBody>
+      </p:sp>
+      <p:pic>
+        <p:nvPicPr>
+          <p:cNvPr id="8" name="Picture 7">
+            <a:extLst>
+              <a:ext uri="{FF2B5EF4-FFF2-40B4-BE49-F238E27FC236}">
+                <a16:creationId xmlns:a16="http://schemas.microsoft.com/office/drawing/2014/main" id="{E87CEDD4-B29D-48D3-A9FC-C4DE764FE5A8}"/>
+              </a:ext>
+            </a:extLst>
+          </p:cNvPr>
+          <p:cNvPicPr>
+            <a:picLocks noChangeAspect="1"/>
+          </p:cNvPicPr>
+          <p:nvPr/>
+        </p:nvPicPr>
+        <p:blipFill>
+          <a:blip r:embed="rId2">
+            <a:extLst>
+              <a:ext uri="{28A0092B-C50C-407E-A947-70E740481C1C}">
+                <a14:useLocalDpi xmlns:a14="http://schemas.microsoft.com/office/drawing/2010/main" val="0"/>
+              </a:ext>
+            </a:extLst>
+          </a:blip>
+          <a:stretch>
+            <a:fillRect/>
+          </a:stretch>
+        </p:blipFill>
+        <p:spPr>
+          <a:xfrm>
+            <a:off x="6667592" y="3546706"/>
+            <a:ext cx="130150" cy="194982"/>
+          </a:xfrm>
+          <a:prstGeom prst="rect">
+            <a:avLst/>
+          </a:prstGeom>
+        </p:spPr>
+      </p:pic>
+      <p:sp>
+        <p:nvSpPr>
+          <p:cNvPr id="10" name="Rectangle: Rounded Corners 9">
+            <a:extLst>
+              <a:ext uri="{FF2B5EF4-FFF2-40B4-BE49-F238E27FC236}">
+                <a16:creationId xmlns:a16="http://schemas.microsoft.com/office/drawing/2014/main" id="{F2322C1E-A3FE-D51D-8E4A-FE363E3FDB52}"/>
+              </a:ext>
+            </a:extLst>
+          </p:cNvPr>
+          <p:cNvSpPr/>
+          <p:nvPr/>
+        </p:nvSpPr>
+        <p:spPr>
+          <a:xfrm>
+            <a:off x="6667591" y="4182001"/>
+            <a:ext cx="4131013" cy="365125"/>
+          </a:xfrm>
+          <a:prstGeom prst="roundRect">
+            <a:avLst/>
+          </a:prstGeom>
+          <a:solidFill>
+            <a:schemeClr val="tx1">
+              <a:lumMod val="85000"/>
+              <a:lumOff val="15000"/>
+            </a:schemeClr>
+          </a:solidFill>
+          <a:ln w="12700">
+            <a:solidFill>
+              <a:schemeClr val="tx1">
+                <a:lumMod val="65000"/>
+                <a:lumOff val="35000"/>
+              </a:schemeClr>
+            </a:solidFill>
+          </a:ln>
+        </p:spPr>
+        <p:style>
+          <a:lnRef idx="2">
+            <a:schemeClr val="dk1"/>
+          </a:lnRef>
+          <a:fillRef idx="1">
+            <a:schemeClr val="lt1"/>
+          </a:fillRef>
+          <a:effectRef idx="0">
+            <a:schemeClr val="dk1"/>
+          </a:effectRef>
+          <a:fontRef idx="minor">
+            <a:schemeClr val="dk1"/>
+          </a:fontRef>
+        </p:style>
+        <p:txBody>
+          <a:bodyPr rtlCol="0" anchor="t"/>
+          <a:lstStyle/>
+          <a:p>
+            <a:r>
+              <a:rPr lang="en-GB" sz="1600">
+                <a:solidFill>
+                  <a:schemeClr val="tx2">
+                    <a:lumMod val="50000"/>
+                    <a:lumOff val="50000"/>
+                  </a:schemeClr>
+                </a:solidFill>
+              </a:rPr>
+              <a:t>Select 'birth_year' from table 'Students'</a:t>
+            </a:r>
+            <a:endParaRPr lang="en-US" sz="1600">
+              <a:solidFill>
+                <a:schemeClr val="tx2">
+                  <a:lumMod val="50000"/>
+                  <a:lumOff val="50000"/>
+                </a:schemeClr>
+              </a:solidFill>
+            </a:endParaRPr>
+          </a:p>
+        </p:txBody>
+      </p:sp>
+    </p:spTree>
+    <p:extLst>
+      <p:ext uri="{BB962C8B-B14F-4D97-AF65-F5344CB8AC3E}">
+        <p14:creationId xmlns:p14="http://schemas.microsoft.com/office/powerpoint/2010/main" val="1794034668"/>
+      </p:ext>
+    </p:extLst>
+  </p:cSld>
+  <p:clrMapOvr>
+    <a:masterClrMapping/>
+  </p:clrMapOvr>
+</p:sld>
+</file>
+
+<file path=ppt/slides/slide13.xml><?xml version="1.0" encoding="utf-8"?>
+<p:sld xmlns:a="http://schemas.openxmlformats.org/drawingml/2006/main" xmlns:r="http://schemas.openxmlformats.org/officeDocument/2006/relationships" xmlns:p="http://schemas.openxmlformats.org/presentationml/2006/main">
+  <p:cSld>
+    <p:spTree>
+      <p:nvGrpSpPr>
+        <p:cNvPr id="1" name="">
+          <a:extLst>
+            <a:ext uri="{FF2B5EF4-FFF2-40B4-BE49-F238E27FC236}">
+              <a16:creationId xmlns:a16="http://schemas.microsoft.com/office/drawing/2014/main" id="{6240B38F-BC44-305A-88F0-F6D0E1187EFE}"/>
+            </a:ext>
+          </a:extLst>
+        </p:cNvPr>
+        <p:cNvGrpSpPr/>
+        <p:nvPr/>
+      </p:nvGrpSpPr>
+      <p:grpSpPr>
+        <a:xfrm>
+          <a:off x="0" y="0"/>
+          <a:ext cx="0" cy="0"/>
+          <a:chOff x="0" y="0"/>
+          <a:chExt cx="0" cy="0"/>
+        </a:xfrm>
+      </p:grpSpPr>
+      <p:sp>
+        <p:nvSpPr>
+          <p:cNvPr id="2" name="Title 1">
+            <a:extLst>
+              <a:ext uri="{FF2B5EF4-FFF2-40B4-BE49-F238E27FC236}">
+                <a16:creationId xmlns:a16="http://schemas.microsoft.com/office/drawing/2014/main" id="{3A81D48F-049D-192A-1D7F-53D5362AE57C}"/>
+              </a:ext>
+            </a:extLst>
+          </p:cNvPr>
+          <p:cNvSpPr>
+            <a:spLocks noGrp="1"/>
+          </p:cNvSpPr>
+          <p:nvPr>
+            <p:ph type="title"/>
+          </p:nvPr>
+        </p:nvSpPr>
+        <p:spPr/>
+        <p:txBody>
+          <a:bodyPr/>
+          <a:lstStyle/>
+          <a:p>
+            <a:r>
+              <a:rPr lang="en-GB"/>
+              <a:t>Stretch Goal: </a:t>
+            </a:r>
+            <a:r>
+              <a:rPr lang="en-GB" u="sng"/>
+              <a:t>Simple</a:t>
+            </a:r>
+            <a:r>
+              <a:rPr lang="en-GB"/>
+              <a:t> Dataflow Analysis</a:t>
+            </a:r>
+            <a:endParaRPr lang="en-US"/>
+          </a:p>
+        </p:txBody>
+      </p:sp>
+      <p:sp>
+        <p:nvSpPr>
+          <p:cNvPr id="4" name="Slide Number Placeholder 3">
+            <a:extLst>
+              <a:ext uri="{FF2B5EF4-FFF2-40B4-BE49-F238E27FC236}">
+                <a16:creationId xmlns:a16="http://schemas.microsoft.com/office/drawing/2014/main" id="{61284E70-C55F-9BD6-873C-0935F86BCDDE}"/>
+              </a:ext>
+            </a:extLst>
+          </p:cNvPr>
+          <p:cNvSpPr>
+            <a:spLocks noGrp="1"/>
+          </p:cNvSpPr>
+          <p:nvPr>
+            <p:ph type="sldNum" sz="quarter" idx="12"/>
+          </p:nvPr>
+        </p:nvSpPr>
+        <p:spPr/>
+        <p:txBody>
+          <a:bodyPr/>
+          <a:lstStyle/>
+          <a:p>
+            <a:fld id="{52890E68-D690-4AC2-96FA-C0B5F80968DC}" type="slidenum">
+              <a:rPr lang="en-US" smtClean="0"/>
+              <a:t>13</a:t>
+            </a:fld>
+            <a:endParaRPr lang="en-US"/>
+          </a:p>
+        </p:txBody>
+      </p:sp>
+      <p:sp>
+        <p:nvSpPr>
+          <p:cNvPr id="7" name="Rectangle 6">
+            <a:extLst>
+              <a:ext uri="{FF2B5EF4-FFF2-40B4-BE49-F238E27FC236}">
+                <a16:creationId xmlns:a16="http://schemas.microsoft.com/office/drawing/2014/main" id="{1EF30878-4846-9652-4553-AB32A78DD21A}"/>
+              </a:ext>
+            </a:extLst>
+          </p:cNvPr>
+          <p:cNvSpPr/>
+          <p:nvPr/>
+        </p:nvSpPr>
+        <p:spPr>
+          <a:xfrm>
+            <a:off x="1152415" y="1893877"/>
+            <a:ext cx="9328016" cy="3126531"/>
+          </a:xfrm>
+          <a:prstGeom prst="rect">
+            <a:avLst/>
+          </a:prstGeom>
+          <a:solidFill>
+            <a:srgbClr val="1E1F22"/>
+          </a:solidFill>
+          <a:ln w="38100">
+            <a:noFill/>
+          </a:ln>
+        </p:spPr>
+        <p:style>
+          <a:lnRef idx="2">
+            <a:schemeClr val="dk1"/>
+          </a:lnRef>
+          <a:fillRef idx="1">
+            <a:schemeClr val="lt1"/>
+          </a:fillRef>
+          <a:effectRef idx="0">
+            <a:schemeClr val="dk1"/>
+          </a:effectRef>
+          <a:fontRef idx="minor">
+            <a:schemeClr val="dk1"/>
+          </a:fontRef>
+        </p:style>
+        <p:txBody>
+          <a:bodyPr rtlCol="0" anchor="t"/>
+          <a:lstStyle/>
+          <a:p>
+            <a:r>
+              <a:rPr lang="en-US">
+                <a:solidFill>
+                  <a:srgbClr val="BCBEC4"/>
+                </a:solidFill>
+                <a:latin typeface="Consolas" panose="020B0609020204030204" pitchFamily="49" charset="0"/>
+              </a:rPr>
+              <a:t>Where whereClause;</a:t>
+            </a:r>
+          </a:p>
+          <a:p>
+            <a:r>
+              <a:rPr lang="en-US">
+                <a:solidFill>
+                  <a:schemeClr val="accent2"/>
+                </a:solidFill>
+                <a:latin typeface="Consolas" panose="020B0609020204030204" pitchFamily="49" charset="0"/>
+              </a:rPr>
+              <a:t>if</a:t>
+            </a:r>
+            <a:r>
+              <a:rPr lang="en-US">
+                <a:solidFill>
+                  <a:srgbClr val="BCBEC4"/>
+                </a:solidFill>
+                <a:latin typeface="Consolas" panose="020B0609020204030204" pitchFamily="49" charset="0"/>
+              </a:rPr>
+              <a:t> (negate) {</a:t>
+            </a:r>
+          </a:p>
+          <a:p>
+            <a:r>
+              <a:rPr lang="en-US">
+                <a:solidFill>
+                  <a:srgbClr val="BCBEC4"/>
+                </a:solidFill>
+                <a:latin typeface="Consolas" panose="020B0609020204030204" pitchFamily="49" charset="0"/>
+              </a:rPr>
+              <a:t>  whereClause = Where.columnId("birth_year").notEquals().nat(</a:t>
+            </a:r>
+            <a:r>
+              <a:rPr lang="en-US">
+                <a:solidFill>
+                  <a:schemeClr val="accent1">
+                    <a:lumMod val="60000"/>
+                    <a:lumOff val="40000"/>
+                  </a:schemeClr>
+                </a:solidFill>
+                <a:latin typeface="Consolas" panose="020B0609020204030204" pitchFamily="49" charset="0"/>
+              </a:rPr>
+              <a:t>2005</a:t>
+            </a:r>
+            <a:r>
+              <a:rPr lang="en-US">
+                <a:solidFill>
+                  <a:srgbClr val="BCBEC4"/>
+                </a:solidFill>
+                <a:latin typeface="Consolas" panose="020B0609020204030204" pitchFamily="49" charset="0"/>
+              </a:rPr>
+              <a:t>);</a:t>
+            </a:r>
+          </a:p>
+          <a:p>
+            <a:r>
+              <a:rPr lang="en-US">
+                <a:solidFill>
+                  <a:srgbClr val="BCBEC4"/>
+                </a:solidFill>
+                <a:latin typeface="Consolas" panose="020B0609020204030204" pitchFamily="49" charset="0"/>
+              </a:rPr>
+              <a:t>} </a:t>
+            </a:r>
+            <a:r>
+              <a:rPr lang="en-US">
+                <a:solidFill>
+                  <a:schemeClr val="accent2"/>
+                </a:solidFill>
+                <a:latin typeface="Consolas" panose="020B0609020204030204" pitchFamily="49" charset="0"/>
+              </a:rPr>
+              <a:t>else</a:t>
+            </a:r>
+            <a:r>
+              <a:rPr lang="en-US">
+                <a:solidFill>
+                  <a:srgbClr val="BCBEC4"/>
+                </a:solidFill>
+                <a:latin typeface="Consolas" panose="020B0609020204030204" pitchFamily="49" charset="0"/>
+              </a:rPr>
+              <a:t> {</a:t>
+            </a:r>
+          </a:p>
+          <a:p>
+            <a:r>
+              <a:rPr lang="en-US">
+                <a:solidFill>
+                  <a:srgbClr val="BCBEC4"/>
+                </a:solidFill>
+                <a:latin typeface="Consolas" panose="020B0609020204030204" pitchFamily="49" charset="0"/>
+              </a:rPr>
+              <a:t>  whereClause = Where.columnId("birth_year").equals().nat(</a:t>
+            </a:r>
+            <a:r>
+              <a:rPr lang="en-US">
+                <a:solidFill>
+                  <a:schemeClr val="accent1">
+                    <a:lumMod val="60000"/>
+                    <a:lumOff val="40000"/>
+                  </a:schemeClr>
+                </a:solidFill>
+                <a:latin typeface="Consolas" panose="020B0609020204030204" pitchFamily="49" charset="0"/>
+              </a:rPr>
+              <a:t>2005</a:t>
+            </a:r>
+            <a:r>
+              <a:rPr lang="en-US">
+                <a:solidFill>
+                  <a:srgbClr val="BCBEC4"/>
+                </a:solidFill>
+                <a:latin typeface="Consolas" panose="020B0609020204030204" pitchFamily="49" charset="0"/>
+              </a:rPr>
+              <a:t>);</a:t>
+            </a:r>
+          </a:p>
+          <a:p>
+            <a:r>
+              <a:rPr lang="en-US">
+                <a:solidFill>
+                  <a:srgbClr val="BCBEC4"/>
+                </a:solidFill>
+                <a:latin typeface="Consolas" panose="020B0609020204030204" pitchFamily="49" charset="0"/>
+              </a:rPr>
+              <a:t>}</a:t>
+            </a:r>
+          </a:p>
+          <a:p>
+            <a:endParaRPr lang="en-US">
+              <a:solidFill>
+                <a:srgbClr val="BCBEC4"/>
+              </a:solidFill>
+              <a:latin typeface="Consolas" panose="020B0609020204030204" pitchFamily="49" charset="0"/>
+            </a:endParaRPr>
+          </a:p>
+          <a:p>
+            <a:r>
+              <a:rPr lang="en-US">
+                <a:solidFill>
+                  <a:srgbClr val="BCBEC4"/>
+                </a:solidFill>
+                <a:latin typeface="Consolas" panose="020B0609020204030204" pitchFamily="49" charset="0"/>
+              </a:rPr>
+              <a:t>Query query = SQL.</a:t>
+            </a:r>
+            <a:r>
+              <a:rPr lang="en-US">
+                <a:solidFill>
+                  <a:schemeClr val="accent2"/>
+                </a:solidFill>
+                <a:latin typeface="Consolas" panose="020B0609020204030204" pitchFamily="49" charset="0"/>
+              </a:rPr>
+              <a:t>select</a:t>
+            </a:r>
+            <a:r>
+              <a:rPr lang="en-US">
+                <a:solidFill>
+                  <a:srgbClr val="BCBEC4"/>
+                </a:solidFill>
+                <a:latin typeface="Consolas" panose="020B0609020204030204" pitchFamily="49" charset="0"/>
+              </a:rPr>
+              <a:t>(</a:t>
+            </a:r>
+            <a:r>
+              <a:rPr lang="en-US">
+                <a:solidFill>
+                  <a:srgbClr val="6AAB73"/>
+                </a:solidFill>
+                <a:latin typeface="Consolas" panose="020B0609020204030204" pitchFamily="49" charset="0"/>
+              </a:rPr>
+              <a:t>"</a:t>
+            </a:r>
+            <a:r>
+              <a:rPr lang="en-US">
+                <a:solidFill>
+                  <a:srgbClr val="BCBEC4"/>
+                </a:solidFill>
+                <a:latin typeface="Consolas" panose="020B0609020204030204" pitchFamily="49" charset="0"/>
+              </a:rPr>
+              <a:t>name, birth_year</a:t>
+            </a:r>
+            <a:r>
+              <a:rPr lang="en-US">
+                <a:solidFill>
+                  <a:srgbClr val="6AAB73"/>
+                </a:solidFill>
+                <a:latin typeface="Consolas" panose="020B0609020204030204" pitchFamily="49" charset="0"/>
+              </a:rPr>
+              <a:t>"</a:t>
+            </a:r>
+            <a:r>
+              <a:rPr lang="en-US">
+                <a:solidFill>
+                  <a:srgbClr val="BCBEC4"/>
+                </a:solidFill>
+                <a:latin typeface="Consolas" panose="020B0609020204030204" pitchFamily="49" charset="0"/>
+              </a:rPr>
+              <a:t>)</a:t>
+            </a:r>
+          </a:p>
+          <a:p>
+            <a:r>
+              <a:rPr lang="en-US">
+                <a:solidFill>
+                  <a:srgbClr val="BCBEC4"/>
+                </a:solidFill>
+                <a:latin typeface="Consolas" panose="020B0609020204030204" pitchFamily="49" charset="0"/>
+              </a:rPr>
+              <a:t>                 .</a:t>
+            </a:r>
+            <a:r>
+              <a:rPr lang="en-US">
+                <a:solidFill>
+                  <a:schemeClr val="accent2"/>
+                </a:solidFill>
+                <a:latin typeface="Consolas" panose="020B0609020204030204" pitchFamily="49" charset="0"/>
+              </a:rPr>
+              <a:t>from</a:t>
+            </a:r>
+            <a:r>
+              <a:rPr lang="en-US">
+                <a:solidFill>
+                  <a:srgbClr val="BCBEC4"/>
+                </a:solidFill>
+                <a:latin typeface="Consolas" panose="020B0609020204030204" pitchFamily="49" charset="0"/>
+              </a:rPr>
+              <a:t>(</a:t>
+            </a:r>
+            <a:r>
+              <a:rPr lang="en-US">
+                <a:solidFill>
+                  <a:srgbClr val="6AAB73"/>
+                </a:solidFill>
+                <a:latin typeface="Consolas" panose="020B0609020204030204" pitchFamily="49" charset="0"/>
+              </a:rPr>
+              <a:t>"</a:t>
+            </a:r>
+            <a:r>
+              <a:rPr lang="en-US">
+                <a:solidFill>
+                  <a:srgbClr val="BCBEC4"/>
+                </a:solidFill>
+                <a:latin typeface="Consolas" panose="020B0609020204030204" pitchFamily="49" charset="0"/>
+              </a:rPr>
+              <a:t>Students</a:t>
+            </a:r>
+            <a:r>
+              <a:rPr lang="en-US">
+                <a:solidFill>
+                  <a:srgbClr val="6AAB73"/>
+                </a:solidFill>
+                <a:latin typeface="Consolas" panose="020B0609020204030204" pitchFamily="49" charset="0"/>
+              </a:rPr>
+              <a:t>"</a:t>
+            </a:r>
+            <a:r>
+              <a:rPr lang="en-US">
+                <a:solidFill>
+                  <a:srgbClr val="BCBEC4"/>
+                </a:solidFill>
+                <a:latin typeface="Consolas" panose="020B0609020204030204" pitchFamily="49" charset="0"/>
+              </a:rPr>
+              <a:t>)</a:t>
+            </a:r>
+          </a:p>
+          <a:p>
+            <a:r>
+              <a:rPr lang="en-US">
+                <a:solidFill>
+                  <a:srgbClr val="BCBEC4"/>
+                </a:solidFill>
+                <a:latin typeface="Consolas" panose="020B0609020204030204" pitchFamily="49" charset="0"/>
+              </a:rPr>
+              <a:t>                 .</a:t>
+            </a:r>
+            <a:r>
+              <a:rPr lang="en-US">
+                <a:solidFill>
+                  <a:schemeClr val="accent2"/>
+                </a:solidFill>
+                <a:latin typeface="Consolas" panose="020B0609020204030204" pitchFamily="49" charset="0"/>
+              </a:rPr>
+              <a:t>where</a:t>
+            </a:r>
+            <a:r>
+              <a:rPr lang="en-US">
+                <a:solidFill>
+                  <a:srgbClr val="BCBEC4"/>
+                </a:solidFill>
+                <a:latin typeface="Consolas" panose="020B0609020204030204" pitchFamily="49" charset="0"/>
+              </a:rPr>
+              <a:t>(whereClause)</a:t>
+            </a:r>
+          </a:p>
+          <a:p>
+            <a:r>
+              <a:rPr lang="en-US">
+                <a:solidFill>
+                  <a:srgbClr val="BCBEC4"/>
+                </a:solidFill>
+                <a:latin typeface="Consolas" panose="020B0609020204030204" pitchFamily="49" charset="0"/>
+              </a:rPr>
+              <a:t>                 .end();</a:t>
+            </a:r>
+          </a:p>
+        </p:txBody>
+      </p:sp>
+    </p:spTree>
+    <p:extLst>
+      <p:ext uri="{BB962C8B-B14F-4D97-AF65-F5344CB8AC3E}">
+        <p14:creationId xmlns:p14="http://schemas.microsoft.com/office/powerpoint/2010/main" val="999814529"/>
+      </p:ext>
+    </p:extLst>
+  </p:cSld>
+  <p:clrMapOvr>
+    <a:masterClrMapping/>
+  </p:clrMapOvr>
+</p:sld>
+</file>
+
+<file path=ppt/slides/slide2.xml><?xml version="1.0" encoding="utf-8"?>
+<p:sld xmlns:a="http://schemas.openxmlformats.org/drawingml/2006/main" xmlns:r="http://schemas.openxmlformats.org/officeDocument/2006/relationships" xmlns:p="http://schemas.openxmlformats.org/presentationml/2006/main" show="0">
+  <p:cSld>
+    <p:spTree>
+      <p:nvGrpSpPr>
+        <p:cNvPr id="1" name=""/>
+        <p:cNvGrpSpPr/>
+        <p:nvPr/>
+      </p:nvGrpSpPr>
+      <p:grpSpPr>
+        <a:xfrm>
+          <a:off x="0" y="0"/>
+          <a:ext cx="0" cy="0"/>
+          <a:chOff x="0" y="0"/>
+          <a:chExt cx="0" cy="0"/>
+        </a:xfrm>
+      </p:grpSpPr>
+      <p:sp>
+        <p:nvSpPr>
+          <p:cNvPr id="5" name="Text Placeholder 4">
+            <a:extLst>
+              <a:ext uri="{FF2B5EF4-FFF2-40B4-BE49-F238E27FC236}">
+                <a16:creationId xmlns:a16="http://schemas.microsoft.com/office/drawing/2014/main" id="{8F2E1856-8426-0DF2-F7C3-64019986960E}"/>
+              </a:ext>
+            </a:extLst>
+          </p:cNvPr>
+          <p:cNvSpPr>
+            <a:spLocks noGrp="1"/>
+          </p:cNvSpPr>
+          <p:nvPr>
+            <p:ph type="body" sz="quarter" idx="13"/>
+          </p:nvPr>
+        </p:nvSpPr>
+        <p:spPr/>
+        <p:txBody>
+          <a:bodyPr/>
+          <a:lstStyle/>
+          <a:p>
+            <a:r>
+              <a:rPr lang="en-GB"/>
+              <a:t>Style Sheet</a:t>
+            </a:r>
+            <a:endParaRPr lang="en-US"/>
+          </a:p>
+        </p:txBody>
+      </p:sp>
+      <p:sp>
+        <p:nvSpPr>
+          <p:cNvPr id="7" name="Rectangle 6">
+            <a:extLst>
+              <a:ext uri="{FF2B5EF4-FFF2-40B4-BE49-F238E27FC236}">
+                <a16:creationId xmlns:a16="http://schemas.microsoft.com/office/drawing/2014/main" id="{F1D0299A-2571-75BF-28CD-275B601F5376}"/>
+              </a:ext>
+            </a:extLst>
+          </p:cNvPr>
+          <p:cNvSpPr/>
+          <p:nvPr/>
+        </p:nvSpPr>
+        <p:spPr>
+          <a:xfrm>
+            <a:off x="960544" y="1172630"/>
+            <a:ext cx="8236210" cy="2625648"/>
+          </a:xfrm>
+          <a:prstGeom prst="rect">
+            <a:avLst/>
+          </a:prstGeom>
+          <a:solidFill>
+            <a:schemeClr val="bg1"/>
+          </a:solidFill>
+          <a:ln w="38100">
+            <a:noFill/>
+          </a:ln>
+        </p:spPr>
+        <p:style>
+          <a:lnRef idx="2">
+            <a:schemeClr val="dk1"/>
+          </a:lnRef>
+          <a:fillRef idx="1">
+            <a:schemeClr val="lt1"/>
+          </a:fillRef>
+          <a:effectRef idx="0">
+            <a:schemeClr val="dk1"/>
+          </a:effectRef>
+          <a:fontRef idx="minor">
+            <a:schemeClr val="dk1"/>
+          </a:fontRef>
+        </p:style>
+        <p:txBody>
+          <a:bodyPr rtlCol="0" anchor="t"/>
+          <a:lstStyle/>
+          <a:p>
+            <a:r>
+              <a:rPr lang="en-US">
+                <a:solidFill>
+                  <a:srgbClr val="CB0756"/>
+                </a:solidFill>
+                <a:latin typeface="Consolas" panose="020B0609020204030204" pitchFamily="49" charset="0"/>
+              </a:rPr>
+              <a:t>class</a:t>
+            </a:r>
+            <a:r>
+              <a:rPr lang="en-US">
+                <a:solidFill>
+                  <a:schemeClr val="tx1"/>
+                </a:solidFill>
+                <a:latin typeface="Consolas" panose="020B0609020204030204" pitchFamily="49" charset="0"/>
+              </a:rPr>
+              <a:t> Example {</a:t>
+            </a:r>
+          </a:p>
+          <a:p>
+            <a:r>
+              <a:rPr lang="en-US">
+                <a:solidFill>
+                  <a:schemeClr val="tx1"/>
+                </a:solidFill>
+                <a:latin typeface="Consolas" panose="020B0609020204030204" pitchFamily="49" charset="0"/>
+              </a:rPr>
+              <a:t>  </a:t>
+            </a:r>
+            <a:r>
+              <a:rPr lang="en-US">
+                <a:solidFill>
+                  <a:srgbClr val="CB0756"/>
+                </a:solidFill>
+                <a:latin typeface="Consolas" panose="020B0609020204030204" pitchFamily="49" charset="0"/>
+              </a:rPr>
+              <a:t>public</a:t>
+            </a:r>
+            <a:r>
+              <a:rPr lang="en-US">
+                <a:solidFill>
+                  <a:schemeClr val="tx1"/>
+                </a:solidFill>
+                <a:latin typeface="Consolas" panose="020B0609020204030204" pitchFamily="49" charset="0"/>
+              </a:rPr>
+              <a:t> </a:t>
+            </a:r>
+            <a:r>
+              <a:rPr lang="en-US">
+                <a:solidFill>
+                  <a:srgbClr val="CB0756"/>
+                </a:solidFill>
+                <a:latin typeface="Consolas" panose="020B0609020204030204" pitchFamily="49" charset="0"/>
+              </a:rPr>
+              <a:t>void</a:t>
+            </a:r>
+            <a:r>
+              <a:rPr lang="en-US">
+                <a:solidFill>
+                  <a:schemeClr val="tx1"/>
+                </a:solidFill>
+                <a:latin typeface="Consolas" panose="020B0609020204030204" pitchFamily="49" charset="0"/>
+              </a:rPr>
+              <a:t> main(String[] args) {</a:t>
+            </a:r>
+          </a:p>
+          <a:p>
+            <a:r>
+              <a:rPr lang="en-US">
+                <a:solidFill>
+                  <a:schemeClr val="tx1"/>
+                </a:solidFill>
+                <a:latin typeface="Consolas" panose="020B0609020204030204" pitchFamily="49" charset="0"/>
+              </a:rPr>
+              <a:t>    </a:t>
+            </a:r>
+            <a:r>
+              <a:rPr lang="en-US">
+                <a:solidFill>
+                  <a:srgbClr val="CB0756"/>
+                </a:solidFill>
+                <a:latin typeface="Consolas" panose="020B0609020204030204" pitchFamily="49" charset="0"/>
+              </a:rPr>
+              <a:t>if</a:t>
+            </a:r>
+            <a:r>
+              <a:rPr lang="en-US">
+                <a:solidFill>
+                  <a:schemeClr val="tx1"/>
+                </a:solidFill>
+                <a:latin typeface="Consolas" panose="020B0609020204030204" pitchFamily="49" charset="0"/>
+              </a:rPr>
+              <a:t> (args.length &gt; </a:t>
+            </a:r>
+            <a:r>
+              <a:rPr lang="en-US">
+                <a:solidFill>
+                  <a:srgbClr val="447DE4"/>
+                </a:solidFill>
+                <a:latin typeface="Consolas" panose="020B0609020204030204" pitchFamily="49" charset="0"/>
+              </a:rPr>
+              <a:t>0</a:t>
+            </a:r>
+            <a:r>
+              <a:rPr lang="en-US">
+                <a:solidFill>
+                  <a:schemeClr val="tx1"/>
+                </a:solidFill>
+                <a:latin typeface="Consolas" panose="020B0609020204030204" pitchFamily="49" charset="0"/>
+              </a:rPr>
+              <a:t>) {</a:t>
+            </a:r>
+          </a:p>
+          <a:p>
+            <a:r>
+              <a:rPr lang="en-US">
+                <a:solidFill>
+                  <a:schemeClr val="tx1"/>
+                </a:solidFill>
+                <a:latin typeface="Consolas" panose="020B0609020204030204" pitchFamily="49" charset="0"/>
+              </a:rPr>
+              <a:t>      </a:t>
+            </a:r>
+            <a:r>
+              <a:rPr lang="en-US">
+                <a:solidFill>
+                  <a:srgbClr val="CB0756"/>
+                </a:solidFill>
+                <a:latin typeface="Consolas" panose="020B0609020204030204" pitchFamily="49" charset="0"/>
+              </a:rPr>
+              <a:t>if</a:t>
+            </a:r>
+            <a:r>
+              <a:rPr lang="en-US">
+                <a:solidFill>
+                  <a:schemeClr val="tx1"/>
+                </a:solidFill>
+                <a:latin typeface="Consolas" panose="020B0609020204030204" pitchFamily="49" charset="0"/>
+              </a:rPr>
+              <a:t> (args[</a:t>
+            </a:r>
+            <a:r>
+              <a:rPr lang="en-US">
+                <a:solidFill>
+                  <a:srgbClr val="447DE4"/>
+                </a:solidFill>
+                <a:latin typeface="Consolas" panose="020B0609020204030204" pitchFamily="49" charset="0"/>
+              </a:rPr>
+              <a:t>0</a:t>
+            </a:r>
+            <a:r>
+              <a:rPr lang="en-US">
+                <a:solidFill>
+                  <a:schemeClr val="tx1"/>
+                </a:solidFill>
+                <a:latin typeface="Consolas" panose="020B0609020204030204" pitchFamily="49" charset="0"/>
+              </a:rPr>
+              <a:t>].equals(</a:t>
+            </a:r>
+            <a:r>
+              <a:rPr lang="en-US">
+                <a:solidFill>
+                  <a:srgbClr val="129204"/>
+                </a:solidFill>
+                <a:latin typeface="Consolas" panose="020B0609020204030204" pitchFamily="49" charset="0"/>
+              </a:rPr>
+              <a:t>"help"</a:t>
+            </a:r>
+            <a:r>
+              <a:rPr lang="en-US">
+                <a:solidFill>
+                  <a:schemeClr val="tx1"/>
+                </a:solidFill>
+                <a:latin typeface="Consolas" panose="020B0609020204030204" pitchFamily="49" charset="0"/>
+              </a:rPr>
+              <a:t>)) {</a:t>
+            </a:r>
+          </a:p>
+          <a:p>
+            <a:r>
+              <a:rPr lang="en-US">
+                <a:solidFill>
+                  <a:schemeClr val="tx1"/>
+                </a:solidFill>
+                <a:latin typeface="Consolas" panose="020B0609020204030204" pitchFamily="49" charset="0"/>
+              </a:rPr>
+              <a:t>        System.out.println(</a:t>
+            </a:r>
+            <a:r>
+              <a:rPr lang="en-US">
+                <a:solidFill>
+                  <a:srgbClr val="129204"/>
+                </a:solidFill>
+                <a:latin typeface="Consolas" panose="020B0609020204030204" pitchFamily="49" charset="0"/>
+              </a:rPr>
+              <a:t>"There's no help for the wicked..."</a:t>
+            </a:r>
+            <a:r>
+              <a:rPr lang="en-US">
+                <a:solidFill>
+                  <a:schemeClr val="tx1"/>
+                </a:solidFill>
+                <a:latin typeface="Consolas" panose="020B0609020204030204" pitchFamily="49" charset="0"/>
+              </a:rPr>
+              <a:t>);</a:t>
+            </a:r>
+          </a:p>
+          <a:p>
+            <a:r>
+              <a:rPr lang="en-US">
+                <a:solidFill>
+                  <a:schemeClr val="tx1"/>
+                </a:solidFill>
+                <a:latin typeface="Consolas" panose="020B0609020204030204" pitchFamily="49" charset="0"/>
+              </a:rPr>
+              <a:t>      }</a:t>
+            </a:r>
+          </a:p>
+          <a:p>
+            <a:r>
+              <a:rPr lang="en-US">
+                <a:solidFill>
+                  <a:schemeClr val="tx1"/>
+                </a:solidFill>
+                <a:latin typeface="Consolas" panose="020B0609020204030204" pitchFamily="49" charset="0"/>
+              </a:rPr>
+              <a:t>    }</a:t>
+            </a:r>
+          </a:p>
+          <a:p>
+            <a:r>
+              <a:rPr lang="en-US">
+                <a:solidFill>
+                  <a:schemeClr val="tx1"/>
+                </a:solidFill>
+                <a:latin typeface="Consolas" panose="020B0609020204030204" pitchFamily="49" charset="0"/>
+              </a:rPr>
+              <a:t>  }</a:t>
+            </a:r>
+          </a:p>
+          <a:p>
+            <a:r>
+              <a:rPr lang="en-US">
+                <a:solidFill>
+                  <a:schemeClr val="tx1"/>
+                </a:solidFill>
+                <a:latin typeface="Consolas" panose="020B0609020204030204" pitchFamily="49" charset="0"/>
+              </a:rPr>
+              <a:t>}</a:t>
+            </a:r>
+          </a:p>
+        </p:txBody>
+      </p:sp>
+      <p:sp>
+        <p:nvSpPr>
+          <p:cNvPr id="8" name="TextBox 7">
+            <a:extLst>
+              <a:ext uri="{FF2B5EF4-FFF2-40B4-BE49-F238E27FC236}">
+                <a16:creationId xmlns:a16="http://schemas.microsoft.com/office/drawing/2014/main" id="{E68DAB52-400D-C030-7FEC-EB84659D4D68}"/>
+              </a:ext>
+            </a:extLst>
+          </p:cNvPr>
+          <p:cNvSpPr txBox="1"/>
+          <p:nvPr/>
+        </p:nvSpPr>
+        <p:spPr>
+          <a:xfrm>
+            <a:off x="838200" y="4031108"/>
+            <a:ext cx="6136616" cy="369332"/>
+          </a:xfrm>
+          <a:prstGeom prst="rect">
+            <a:avLst/>
+          </a:prstGeom>
+          <a:noFill/>
+        </p:spPr>
+        <p:txBody>
+          <a:bodyPr wrap="none" rtlCol="0">
+            <a:spAutoFit/>
+          </a:bodyPr>
+          <a:lstStyle/>
+          <a:p>
+            <a:r>
+              <a:rPr lang="en-GB">
+                <a:solidFill>
+                  <a:srgbClr val="CB0756"/>
+                </a:solidFill>
+                <a:latin typeface="Consolas" panose="020B0609020204030204" pitchFamily="49" charset="0"/>
+              </a:rPr>
+              <a:t>SELECT</a:t>
+            </a:r>
+            <a:r>
+              <a:rPr lang="en-GB">
+                <a:latin typeface="Consolas" panose="020B0609020204030204" pitchFamily="49" charset="0"/>
+              </a:rPr>
+              <a:t> * </a:t>
+            </a:r>
+            <a:r>
+              <a:rPr lang="en-GB">
+                <a:solidFill>
+                  <a:srgbClr val="CB0756"/>
+                </a:solidFill>
+                <a:latin typeface="Consolas" panose="020B0609020204030204" pitchFamily="49" charset="0"/>
+              </a:rPr>
+              <a:t>FROM</a:t>
+            </a:r>
+            <a:r>
+              <a:rPr lang="en-GB">
+                <a:latin typeface="Consolas" panose="020B0609020204030204" pitchFamily="49" charset="0"/>
+              </a:rPr>
+              <a:t> Students </a:t>
+            </a:r>
+            <a:r>
+              <a:rPr lang="en-GB">
+                <a:solidFill>
+                  <a:srgbClr val="CB0756"/>
+                </a:solidFill>
+                <a:latin typeface="Consolas" panose="020B0609020204030204" pitchFamily="49" charset="0"/>
+              </a:rPr>
+              <a:t>WHERE</a:t>
+            </a:r>
+            <a:r>
+              <a:rPr lang="en-GB">
+                <a:latin typeface="Consolas" panose="020B0609020204030204" pitchFamily="49" charset="0"/>
+              </a:rPr>
+              <a:t> name == </a:t>
+            </a:r>
+            <a:r>
+              <a:rPr lang="en-GB">
+                <a:solidFill>
+                  <a:srgbClr val="129204"/>
+                </a:solidFill>
+                <a:latin typeface="Consolas" panose="020B0609020204030204" pitchFamily="49" charset="0"/>
+              </a:rPr>
+              <a:t>"John Doe"</a:t>
+            </a:r>
+            <a:endParaRPr lang="en-US">
+              <a:solidFill>
+                <a:srgbClr val="129204"/>
+              </a:solidFill>
+              <a:latin typeface="Consolas" panose="020B0609020204030204" pitchFamily="49" charset="0"/>
+            </a:endParaRPr>
+          </a:p>
+        </p:txBody>
+      </p:sp>
+      <p:sp>
+        <p:nvSpPr>
+          <p:cNvPr id="10" name="TextBox 9">
+            <a:extLst>
+              <a:ext uri="{FF2B5EF4-FFF2-40B4-BE49-F238E27FC236}">
+                <a16:creationId xmlns:a16="http://schemas.microsoft.com/office/drawing/2014/main" id="{D36F49CE-77A9-9A93-2A3C-CA8305812C4D}"/>
+              </a:ext>
+            </a:extLst>
+          </p:cNvPr>
+          <p:cNvSpPr txBox="1"/>
+          <p:nvPr/>
+        </p:nvSpPr>
+        <p:spPr>
+          <a:xfrm>
+            <a:off x="838200" y="4523316"/>
+            <a:ext cx="1071127" cy="369332"/>
+          </a:xfrm>
+          <a:prstGeom prst="rect">
+            <a:avLst/>
+          </a:prstGeom>
+          <a:noFill/>
+        </p:spPr>
+        <p:txBody>
+          <a:bodyPr wrap="none" rtlCol="0">
+            <a:spAutoFit/>
+          </a:bodyPr>
+          <a:lstStyle/>
+          <a:p>
+            <a:r>
+              <a:rPr lang="en-GB">
+                <a:solidFill>
+                  <a:srgbClr val="CB0756"/>
+                </a:solidFill>
+                <a:latin typeface="Consolas" panose="020B0609020204030204" pitchFamily="49" charset="0"/>
+              </a:rPr>
+              <a:t>Keyword</a:t>
+            </a:r>
+            <a:endParaRPr lang="en-US">
+              <a:solidFill>
+                <a:srgbClr val="CB0756"/>
+              </a:solidFill>
+              <a:latin typeface="Consolas" panose="020B0609020204030204" pitchFamily="49" charset="0"/>
+            </a:endParaRPr>
+          </a:p>
+        </p:txBody>
+      </p:sp>
+      <p:sp>
+        <p:nvSpPr>
+          <p:cNvPr id="12" name="TextBox 11">
+            <a:extLst>
+              <a:ext uri="{FF2B5EF4-FFF2-40B4-BE49-F238E27FC236}">
+                <a16:creationId xmlns:a16="http://schemas.microsoft.com/office/drawing/2014/main" id="{C58376D3-709C-334A-BF07-4BD6AB37A690}"/>
+              </a:ext>
+            </a:extLst>
+          </p:cNvPr>
+          <p:cNvSpPr txBox="1"/>
+          <p:nvPr/>
+        </p:nvSpPr>
+        <p:spPr>
+          <a:xfrm>
+            <a:off x="2485292" y="4523316"/>
+            <a:ext cx="1957587" cy="369332"/>
+          </a:xfrm>
+          <a:prstGeom prst="rect">
+            <a:avLst/>
+          </a:prstGeom>
+          <a:noFill/>
+        </p:spPr>
+        <p:txBody>
+          <a:bodyPr wrap="none" rtlCol="0">
+            <a:spAutoFit/>
+          </a:bodyPr>
+          <a:lstStyle/>
+          <a:p>
+            <a:r>
+              <a:rPr lang="en-GB">
+                <a:solidFill>
+                  <a:srgbClr val="129204"/>
+                </a:solidFill>
+                <a:latin typeface="Consolas" panose="020B0609020204030204" pitchFamily="49" charset="0"/>
+              </a:rPr>
+              <a:t>"Hello World!"</a:t>
+            </a:r>
+            <a:endParaRPr lang="en-US">
+              <a:solidFill>
+                <a:srgbClr val="129204"/>
+              </a:solidFill>
+              <a:latin typeface="Consolas" panose="020B0609020204030204" pitchFamily="49" charset="0"/>
+            </a:endParaRPr>
+          </a:p>
+        </p:txBody>
+      </p:sp>
+      <p:sp>
+        <p:nvSpPr>
+          <p:cNvPr id="14" name="TextBox 13">
+            <a:extLst>
+              <a:ext uri="{FF2B5EF4-FFF2-40B4-BE49-F238E27FC236}">
+                <a16:creationId xmlns:a16="http://schemas.microsoft.com/office/drawing/2014/main" id="{8D13B999-9A50-C9D6-C604-43564BBB52DA}"/>
+              </a:ext>
+            </a:extLst>
+          </p:cNvPr>
+          <p:cNvSpPr txBox="1"/>
+          <p:nvPr/>
+        </p:nvSpPr>
+        <p:spPr>
+          <a:xfrm>
+            <a:off x="4826977" y="4523316"/>
+            <a:ext cx="1324402" cy="369332"/>
+          </a:xfrm>
+          <a:prstGeom prst="rect">
+            <a:avLst/>
+          </a:prstGeom>
+          <a:noFill/>
+        </p:spPr>
+        <p:txBody>
+          <a:bodyPr wrap="none" rtlCol="0">
+            <a:spAutoFit/>
+          </a:bodyPr>
+          <a:lstStyle/>
+          <a:p>
+            <a:r>
+              <a:rPr lang="en-GB">
+                <a:solidFill>
+                  <a:srgbClr val="447DE4"/>
+                </a:solidFill>
+                <a:latin typeface="Consolas" panose="020B0609020204030204" pitchFamily="49" charset="0"/>
+              </a:rPr>
+              <a:t>1_000_000</a:t>
+            </a:r>
+            <a:endParaRPr lang="en-US">
+              <a:solidFill>
+                <a:srgbClr val="447DE4"/>
+              </a:solidFill>
+              <a:latin typeface="Consolas" panose="020B0609020204030204" pitchFamily="49" charset="0"/>
+            </a:endParaRPr>
+          </a:p>
+        </p:txBody>
+      </p:sp>
+      <p:sp>
+        <p:nvSpPr>
+          <p:cNvPr id="16" name="TextBox 15">
+            <a:extLst>
+              <a:ext uri="{FF2B5EF4-FFF2-40B4-BE49-F238E27FC236}">
+                <a16:creationId xmlns:a16="http://schemas.microsoft.com/office/drawing/2014/main" id="{A7AC6AEC-BA0F-7A37-788A-2CF669299A5A}"/>
+              </a:ext>
+            </a:extLst>
+          </p:cNvPr>
+          <p:cNvSpPr txBox="1"/>
+          <p:nvPr/>
+        </p:nvSpPr>
+        <p:spPr>
+          <a:xfrm>
+            <a:off x="4898236" y="5015524"/>
+            <a:ext cx="1197764" cy="369332"/>
+          </a:xfrm>
+          <a:prstGeom prst="rect">
+            <a:avLst/>
+          </a:prstGeom>
+          <a:noFill/>
+        </p:spPr>
+        <p:txBody>
+          <a:bodyPr wrap="none" rtlCol="0">
+            <a:spAutoFit/>
+          </a:bodyPr>
+          <a:lstStyle/>
+          <a:p>
+            <a:r>
+              <a:rPr lang="en-GB">
+                <a:solidFill>
+                  <a:srgbClr val="447DE4"/>
+                </a:solidFill>
+                <a:latin typeface="Consolas" panose="020B0609020204030204" pitchFamily="49" charset="0"/>
+              </a:rPr>
+              <a:t>3.141529</a:t>
+            </a:r>
+            <a:endParaRPr lang="en-US">
+              <a:solidFill>
+                <a:srgbClr val="447DE4"/>
+              </a:solidFill>
+              <a:latin typeface="Consolas" panose="020B0609020204030204" pitchFamily="49" charset="0"/>
+            </a:endParaRPr>
+          </a:p>
+        </p:txBody>
+      </p:sp>
+      <p:sp>
+        <p:nvSpPr>
+          <p:cNvPr id="18" name="TextBox 17">
+            <a:extLst>
+              <a:ext uri="{FF2B5EF4-FFF2-40B4-BE49-F238E27FC236}">
+                <a16:creationId xmlns:a16="http://schemas.microsoft.com/office/drawing/2014/main" id="{B6B23F19-1218-6AD5-31C4-9BB7429F0C4E}"/>
+              </a:ext>
+            </a:extLst>
+          </p:cNvPr>
+          <p:cNvSpPr txBox="1"/>
+          <p:nvPr/>
+        </p:nvSpPr>
+        <p:spPr>
+          <a:xfrm>
+            <a:off x="5143570" y="5507732"/>
+            <a:ext cx="691215" cy="369332"/>
+          </a:xfrm>
+          <a:prstGeom prst="rect">
+            <a:avLst/>
+          </a:prstGeom>
+          <a:noFill/>
+        </p:spPr>
+        <p:txBody>
+          <a:bodyPr wrap="none" rtlCol="0">
+            <a:spAutoFit/>
+          </a:bodyPr>
+          <a:lstStyle/>
+          <a:p>
+            <a:r>
+              <a:rPr lang="en-GB">
+                <a:solidFill>
+                  <a:srgbClr val="447DE4"/>
+                </a:solidFill>
+                <a:latin typeface="Consolas" panose="020B0609020204030204" pitchFamily="49" charset="0"/>
+              </a:rPr>
+              <a:t>true</a:t>
+            </a:r>
+            <a:endParaRPr lang="en-US">
+              <a:solidFill>
+                <a:srgbClr val="447DE4"/>
+              </a:solidFill>
+              <a:latin typeface="Consolas" panose="020B0609020204030204" pitchFamily="49" charset="0"/>
+            </a:endParaRPr>
+          </a:p>
+        </p:txBody>
+      </p:sp>
+      <p:sp>
+        <p:nvSpPr>
+          <p:cNvPr id="20" name="TextBox 19">
+            <a:extLst>
+              <a:ext uri="{FF2B5EF4-FFF2-40B4-BE49-F238E27FC236}">
+                <a16:creationId xmlns:a16="http://schemas.microsoft.com/office/drawing/2014/main" id="{43B4C16B-0EE4-1577-DE9D-F3027B508D11}"/>
+              </a:ext>
+            </a:extLst>
+          </p:cNvPr>
+          <p:cNvSpPr txBox="1"/>
+          <p:nvPr/>
+        </p:nvSpPr>
+        <p:spPr>
+          <a:xfrm>
+            <a:off x="7248267" y="4523316"/>
+            <a:ext cx="817853" cy="369332"/>
+          </a:xfrm>
+          <a:prstGeom prst="rect">
+            <a:avLst/>
+          </a:prstGeom>
+          <a:noFill/>
+        </p:spPr>
+        <p:txBody>
+          <a:bodyPr wrap="none" rtlCol="0">
+            <a:spAutoFit/>
+          </a:bodyPr>
+          <a:lstStyle/>
+          <a:p>
+            <a:r>
+              <a:rPr lang="en-GB">
+                <a:latin typeface="Consolas" panose="020B0609020204030204" pitchFamily="49" charset="0"/>
+              </a:rPr>
+              <a:t>other</a:t>
+            </a:r>
+            <a:endParaRPr lang="en-US">
+              <a:latin typeface="Consolas" panose="020B0609020204030204" pitchFamily="49" charset="0"/>
+            </a:endParaRPr>
+          </a:p>
+        </p:txBody>
+      </p:sp>
+      <p:sp>
+        <p:nvSpPr>
+          <p:cNvPr id="22" name="TextBox 21">
+            <a:extLst>
+              <a:ext uri="{FF2B5EF4-FFF2-40B4-BE49-F238E27FC236}">
+                <a16:creationId xmlns:a16="http://schemas.microsoft.com/office/drawing/2014/main" id="{6825771B-60EB-B3AE-20A2-D51070C74581}"/>
+              </a:ext>
+            </a:extLst>
+          </p:cNvPr>
+          <p:cNvSpPr txBox="1"/>
+          <p:nvPr/>
+        </p:nvSpPr>
+        <p:spPr>
+          <a:xfrm>
+            <a:off x="9071206" y="3128540"/>
+            <a:ext cx="817853" cy="369332"/>
+          </a:xfrm>
+          <a:prstGeom prst="rect">
+            <a:avLst/>
+          </a:prstGeom>
+          <a:noFill/>
+        </p:spPr>
+        <p:txBody>
+          <a:bodyPr wrap="none" rtlCol="0">
+            <a:spAutoFit/>
+          </a:bodyPr>
+          <a:lstStyle/>
+          <a:p>
+            <a:r>
+              <a:rPr lang="en-GB" u="wavyHeavy">
+                <a:uFill>
+                  <a:solidFill>
+                    <a:srgbClr val="FF0000"/>
+                  </a:solidFill>
+                </a:uFill>
+                <a:latin typeface="Consolas" panose="020B0609020204030204" pitchFamily="49" charset="0"/>
+              </a:rPr>
+              <a:t>error</a:t>
+            </a:r>
+            <a:endParaRPr lang="en-US" u="wavyHeavy">
+              <a:uFill>
+                <a:solidFill>
+                  <a:srgbClr val="FF0000"/>
+                </a:solidFill>
+              </a:uFill>
+              <a:latin typeface="Consolas" panose="020B0609020204030204" pitchFamily="49" charset="0"/>
+            </a:endParaRPr>
+          </a:p>
+        </p:txBody>
+      </p:sp>
+      <p:sp>
+        <p:nvSpPr>
+          <p:cNvPr id="24" name="TextBox 23">
+            <a:extLst>
+              <a:ext uri="{FF2B5EF4-FFF2-40B4-BE49-F238E27FC236}">
+                <a16:creationId xmlns:a16="http://schemas.microsoft.com/office/drawing/2014/main" id="{1A4A9ECA-BAD3-2A25-E22D-B1112DA9E4F5}"/>
+              </a:ext>
+            </a:extLst>
+          </p:cNvPr>
+          <p:cNvSpPr txBox="1"/>
+          <p:nvPr/>
+        </p:nvSpPr>
+        <p:spPr>
+          <a:xfrm>
+            <a:off x="9071205" y="4031108"/>
+            <a:ext cx="817853" cy="369332"/>
+          </a:xfrm>
+          <a:prstGeom prst="rect">
+            <a:avLst/>
+          </a:prstGeom>
+          <a:noFill/>
+        </p:spPr>
+        <p:txBody>
+          <a:bodyPr wrap="none" rtlCol="0">
+            <a:spAutoFit/>
+          </a:bodyPr>
+          <a:lstStyle/>
+          <a:p>
+            <a:r>
+              <a:rPr lang="en-GB" u="wavyHeavy">
+                <a:uFill>
+                  <a:solidFill>
+                    <a:srgbClr val="FF0000"/>
+                  </a:solidFill>
+                </a:uFill>
+                <a:latin typeface="Consolas" panose="020B0609020204030204" pitchFamily="49" charset="0"/>
+              </a:rPr>
+              <a:t>error</a:t>
+            </a:r>
+            <a:endParaRPr lang="en-US" u="wavyHeavy">
+              <a:uFill>
+                <a:solidFill>
+                  <a:srgbClr val="FF0000"/>
+                </a:solidFill>
+              </a:uFill>
+              <a:latin typeface="Consolas" panose="020B0609020204030204" pitchFamily="49" charset="0"/>
+            </a:endParaRPr>
+          </a:p>
+        </p:txBody>
+      </p:sp>
+      <p:pic>
+        <p:nvPicPr>
+          <p:cNvPr id="26" name="Picture 25">
+            <a:extLst>
+              <a:ext uri="{FF2B5EF4-FFF2-40B4-BE49-F238E27FC236}">
+                <a16:creationId xmlns:a16="http://schemas.microsoft.com/office/drawing/2014/main" id="{5BFA6880-5088-69D2-4BE2-9E2B88A2D540}"/>
+              </a:ext>
+            </a:extLst>
+          </p:cNvPr>
+          <p:cNvPicPr>
+            <a:picLocks noChangeAspect="1"/>
+          </p:cNvPicPr>
+          <p:nvPr/>
+        </p:nvPicPr>
+        <p:blipFill>
+          <a:blip r:embed="rId2">
+            <a:extLst>
+              <a:ext uri="{28A0092B-C50C-407E-A947-70E740481C1C}">
+                <a14:useLocalDpi xmlns:a14="http://schemas.microsoft.com/office/drawing/2010/main" val="0"/>
+              </a:ext>
+            </a:extLst>
+          </a:blip>
+          <a:stretch>
+            <a:fillRect/>
+          </a:stretch>
+        </p:blipFill>
+        <p:spPr>
+          <a:xfrm>
+            <a:off x="9569789" y="4205458"/>
+            <a:ext cx="130150" cy="194982"/>
+          </a:xfrm>
+          <a:prstGeom prst="rect">
+            <a:avLst/>
+          </a:prstGeom>
+        </p:spPr>
+      </p:pic>
+      <p:sp>
+        <p:nvSpPr>
+          <p:cNvPr id="28" name="Rectangle: Rounded Corners 27">
+            <a:extLst>
+              <a:ext uri="{FF2B5EF4-FFF2-40B4-BE49-F238E27FC236}">
+                <a16:creationId xmlns:a16="http://schemas.microsoft.com/office/drawing/2014/main" id="{874836C6-869E-8912-BE21-38887BE085A5}"/>
+              </a:ext>
+            </a:extLst>
+          </p:cNvPr>
+          <p:cNvSpPr/>
+          <p:nvPr/>
+        </p:nvSpPr>
+        <p:spPr>
+          <a:xfrm>
+            <a:off x="9569789" y="4379423"/>
+            <a:ext cx="1657988" cy="365125"/>
+          </a:xfrm>
+          <a:prstGeom prst="roundRect">
+            <a:avLst/>
+          </a:prstGeom>
+          <a:solidFill>
+            <a:schemeClr val="bg1">
+              <a:lumMod val="95000"/>
+            </a:schemeClr>
+          </a:solidFill>
+          <a:ln w="12700">
+            <a:solidFill>
+              <a:schemeClr val="tx1">
+                <a:lumMod val="65000"/>
+                <a:lumOff val="35000"/>
+              </a:schemeClr>
+            </a:solidFill>
+          </a:ln>
+        </p:spPr>
+        <p:style>
+          <a:lnRef idx="2">
+            <a:schemeClr val="dk1"/>
+          </a:lnRef>
+          <a:fillRef idx="1">
+            <a:schemeClr val="lt1"/>
+          </a:fillRef>
+          <a:effectRef idx="0">
+            <a:schemeClr val="dk1"/>
+          </a:effectRef>
+          <a:fontRef idx="minor">
+            <a:schemeClr val="dk1"/>
+          </a:fontRef>
+        </p:style>
+        <p:txBody>
+          <a:bodyPr rtlCol="0" anchor="t"/>
+          <a:lstStyle/>
+          <a:p>
+            <a:r>
+              <a:rPr lang="en-GB" sz="1600">
+                <a:solidFill>
+                  <a:schemeClr val="bg2">
+                    <a:lumMod val="25000"/>
+                  </a:schemeClr>
+                </a:solidFill>
+              </a:rPr>
+              <a:t>Error annotation</a:t>
+            </a:r>
+            <a:endParaRPr lang="en-US" sz="1600">
+              <a:solidFill>
+                <a:schemeClr val="bg2">
+                  <a:lumMod val="25000"/>
+                </a:schemeClr>
+              </a:solidFill>
+            </a:endParaRPr>
+          </a:p>
+        </p:txBody>
+      </p:sp>
+      <p:sp>
+        <p:nvSpPr>
+          <p:cNvPr id="32" name="Rectangle: Rounded Corners 31">
+            <a:extLst>
+              <a:ext uri="{FF2B5EF4-FFF2-40B4-BE49-F238E27FC236}">
+                <a16:creationId xmlns:a16="http://schemas.microsoft.com/office/drawing/2014/main" id="{C9F32643-EC9B-CB00-3679-8FFAB04BFDC9}"/>
+              </a:ext>
+            </a:extLst>
+          </p:cNvPr>
+          <p:cNvSpPr/>
+          <p:nvPr/>
+        </p:nvSpPr>
+        <p:spPr>
+          <a:xfrm>
+            <a:off x="9569788" y="5275427"/>
+            <a:ext cx="1784011" cy="856432"/>
+          </a:xfrm>
+          <a:prstGeom prst="roundRect">
+            <a:avLst/>
+          </a:prstGeom>
+          <a:solidFill>
+            <a:schemeClr val="bg1">
+              <a:lumMod val="95000"/>
+            </a:schemeClr>
+          </a:solidFill>
+          <a:ln w="12700">
+            <a:solidFill>
+              <a:schemeClr val="tx1">
+                <a:lumMod val="65000"/>
+                <a:lumOff val="35000"/>
+              </a:schemeClr>
+            </a:solidFill>
+          </a:ln>
+        </p:spPr>
+        <p:style>
+          <a:lnRef idx="2">
+            <a:schemeClr val="dk1"/>
+          </a:lnRef>
+          <a:fillRef idx="1">
+            <a:schemeClr val="lt1"/>
+          </a:fillRef>
+          <a:effectRef idx="0">
+            <a:schemeClr val="dk1"/>
+          </a:effectRef>
+          <a:fontRef idx="minor">
+            <a:schemeClr val="dk1"/>
+          </a:fontRef>
+        </p:style>
+        <p:txBody>
+          <a:bodyPr rtlCol="0" anchor="t"/>
+          <a:lstStyle/>
+          <a:p>
+            <a:r>
+              <a:rPr lang="en-GB" sz="1600">
+                <a:solidFill>
+                  <a:schemeClr val="bg2">
+                    <a:lumMod val="25000"/>
+                  </a:schemeClr>
+                </a:solidFill>
+              </a:rPr>
+              <a:t>Error annotation</a:t>
+            </a:r>
+          </a:p>
+          <a:p>
+            <a:pPr>
+              <a:lnSpc>
+                <a:spcPct val="200000"/>
+              </a:lnSpc>
+            </a:pPr>
+            <a:r>
+              <a:rPr lang="en-US" sz="1600" u="sng">
+                <a:solidFill>
+                  <a:schemeClr val="tx2">
+                    <a:lumMod val="50000"/>
+                    <a:lumOff val="50000"/>
+                  </a:schemeClr>
+                </a:solidFill>
+              </a:rPr>
+              <a:t>Fix suggestion</a:t>
+            </a:r>
+          </a:p>
+        </p:txBody>
+      </p:sp>
+      <p:pic>
+        <p:nvPicPr>
+          <p:cNvPr id="34" name="Picture 33">
+            <a:extLst>
+              <a:ext uri="{FF2B5EF4-FFF2-40B4-BE49-F238E27FC236}">
+                <a16:creationId xmlns:a16="http://schemas.microsoft.com/office/drawing/2014/main" id="{558CF9CF-9025-1582-E812-62675947F542}"/>
+              </a:ext>
+            </a:extLst>
+          </p:cNvPr>
+          <p:cNvPicPr>
+            <a:picLocks noChangeAspect="1"/>
+          </p:cNvPicPr>
+          <p:nvPr/>
+        </p:nvPicPr>
+        <p:blipFill>
+          <a:blip r:embed="rId2">
+            <a:extLst>
+              <a:ext uri="{28A0092B-C50C-407E-A947-70E740481C1C}">
+                <a14:useLocalDpi xmlns:a14="http://schemas.microsoft.com/office/drawing/2010/main" val="0"/>
+              </a:ext>
+            </a:extLst>
+          </a:blip>
+          <a:stretch>
+            <a:fillRect/>
+          </a:stretch>
+        </p:blipFill>
+        <p:spPr>
+          <a:xfrm>
+            <a:off x="10573836" y="3238271"/>
+            <a:ext cx="130150" cy="194982"/>
+          </a:xfrm>
+          <a:prstGeom prst="rect">
+            <a:avLst/>
+          </a:prstGeom>
+        </p:spPr>
+      </p:pic>
+    </p:spTree>
+    <p:extLst>
+      <p:ext uri="{BB962C8B-B14F-4D97-AF65-F5344CB8AC3E}">
+        <p14:creationId xmlns:p14="http://schemas.microsoft.com/office/powerpoint/2010/main" val="2448866607"/>
+      </p:ext>
+    </p:extLst>
+  </p:cSld>
+  <p:clrMapOvr>
+    <a:masterClrMapping/>
+  </p:clrMapOvr>
+</p:sld>
+</file>
+
+<file path=ppt/slides/slide3.xml><?xml version="1.0" encoding="utf-8"?>
+<p:sld xmlns:a="http://schemas.openxmlformats.org/drawingml/2006/main" xmlns:r="http://schemas.openxmlformats.org/officeDocument/2006/relationships" xmlns:p="http://schemas.openxmlformats.org/presentationml/2006/main" show="0">
+  <p:cSld>
+    <p:spTree>
+      <p:nvGrpSpPr>
+        <p:cNvPr id="1" name="">
+          <a:extLst>
+            <a:ext uri="{FF2B5EF4-FFF2-40B4-BE49-F238E27FC236}">
+              <a16:creationId xmlns:a16="http://schemas.microsoft.com/office/drawing/2014/main" id="{02958DA7-4C65-1754-9928-920A5355DF84}"/>
+            </a:ext>
+          </a:extLst>
+        </p:cNvPr>
+        <p:cNvGrpSpPr/>
+        <p:nvPr/>
+      </p:nvGrpSpPr>
+      <p:grpSpPr>
+        <a:xfrm>
+          <a:off x="0" y="0"/>
+          <a:ext cx="0" cy="0"/>
+          <a:chOff x="0" y="0"/>
+          <a:chExt cx="0" cy="0"/>
+        </a:xfrm>
+      </p:grpSpPr>
+      <p:sp>
+        <p:nvSpPr>
+          <p:cNvPr id="5" name="Text Placeholder 4">
+            <a:extLst>
+              <a:ext uri="{FF2B5EF4-FFF2-40B4-BE49-F238E27FC236}">
+                <a16:creationId xmlns:a16="http://schemas.microsoft.com/office/drawing/2014/main" id="{8EF1F2D7-4EAD-1B81-CA3D-D55F93051BBA}"/>
+              </a:ext>
+            </a:extLst>
+          </p:cNvPr>
+          <p:cNvSpPr>
+            <a:spLocks noGrp="1"/>
+          </p:cNvSpPr>
+          <p:nvPr>
+            <p:ph type="body" sz="quarter" idx="13"/>
+          </p:nvPr>
+        </p:nvSpPr>
+        <p:spPr/>
+        <p:txBody>
+          <a:bodyPr/>
+          <a:lstStyle/>
+          <a:p>
+            <a:r>
+              <a:rPr lang="en-GB"/>
+              <a:t>Style Sheet</a:t>
+            </a:r>
+            <a:endParaRPr lang="en-US"/>
+          </a:p>
+        </p:txBody>
+      </p:sp>
+    </p:spTree>
+    <p:extLst>
+      <p:ext uri="{BB962C8B-B14F-4D97-AF65-F5344CB8AC3E}">
+        <p14:creationId xmlns:p14="http://schemas.microsoft.com/office/powerpoint/2010/main" val="1007096814"/>
+      </p:ext>
+    </p:extLst>
+  </p:cSld>
+  <p:clrMapOvr>
+    <a:masterClrMapping/>
+  </p:clrMapOvr>
+</p:sld>
+</file>
+
+<file path=ppt/slides/slide4.xml><?xml version="1.0" encoding="utf-8"?>
+<p:sld xmlns:a="http://schemas.openxmlformats.org/drawingml/2006/main" xmlns:r="http://schemas.openxmlformats.org/officeDocument/2006/relationships" xmlns:p="http://schemas.openxmlformats.org/presentationml/2006/main">
+  <p:cSld>
+    <p:spTree>
+      <p:nvGrpSpPr>
+        <p:cNvPr id="1" name=""/>
+        <p:cNvGrpSpPr/>
+        <p:nvPr/>
+      </p:nvGrpSpPr>
+      <p:grpSpPr>
+        <a:xfrm>
+          <a:off x="0" y="0"/>
+          <a:ext cx="0" cy="0"/>
+          <a:chOff x="0" y="0"/>
+          <a:chExt cx="0" cy="0"/>
+        </a:xfrm>
+      </p:grpSpPr>
+      <p:sp>
+        <p:nvSpPr>
+          <p:cNvPr id="2" name="Title 1">
+            <a:extLst>
+              <a:ext uri="{FF2B5EF4-FFF2-40B4-BE49-F238E27FC236}">
+                <a16:creationId xmlns:a16="http://schemas.microsoft.com/office/drawing/2014/main" id="{CD2F66A0-1FB2-E377-1206-0E1F3726B0E3}"/>
+              </a:ext>
+            </a:extLst>
+          </p:cNvPr>
+          <p:cNvSpPr>
+            <a:spLocks noGrp="1"/>
+          </p:cNvSpPr>
+          <p:nvPr>
+            <p:ph type="title"/>
+          </p:nvPr>
+        </p:nvSpPr>
+        <p:spPr/>
+        <p:txBody>
+          <a:bodyPr/>
+          <a:lstStyle/>
+          <a:p>
+            <a:r>
+              <a:rPr lang="en-GB"/>
+              <a:t>Contents</a:t>
+            </a:r>
+            <a:endParaRPr lang="en-US"/>
+          </a:p>
+        </p:txBody>
+      </p:sp>
+      <p:sp>
+        <p:nvSpPr>
+          <p:cNvPr id="3" name="Content Placeholder 2">
+            <a:extLst>
+              <a:ext uri="{FF2B5EF4-FFF2-40B4-BE49-F238E27FC236}">
+                <a16:creationId xmlns:a16="http://schemas.microsoft.com/office/drawing/2014/main" id="{C102F97D-9FF1-CD4B-EBD4-6D9B512B50BF}"/>
+              </a:ext>
+            </a:extLst>
+          </p:cNvPr>
+          <p:cNvSpPr>
+            <a:spLocks noGrp="1"/>
+          </p:cNvSpPr>
+          <p:nvPr>
+            <p:ph idx="1"/>
+          </p:nvPr>
+        </p:nvSpPr>
+        <p:spPr/>
+        <p:txBody>
+          <a:bodyPr/>
+          <a:lstStyle/>
+          <a:p>
+            <a:r>
+              <a:rPr lang="en-GB"/>
+              <a:t>Background</a:t>
+            </a:r>
+          </a:p>
+          <a:p>
+            <a:r>
+              <a:rPr lang="en-GB"/>
+              <a:t>Related Work</a:t>
+            </a:r>
+          </a:p>
+          <a:p>
+            <a:r>
+              <a:rPr lang="en-GB"/>
+              <a:t>My Proposal</a:t>
+            </a:r>
+          </a:p>
+          <a:p>
+            <a:r>
+              <a:rPr lang="en-GB"/>
+              <a:t>Current Progress &amp; Summary</a:t>
+            </a:r>
+            <a:endParaRPr lang="en-US"/>
+          </a:p>
+        </p:txBody>
+      </p:sp>
+      <p:sp>
+        <p:nvSpPr>
+          <p:cNvPr id="4" name="Slide Number Placeholder 3">
+            <a:extLst>
+              <a:ext uri="{FF2B5EF4-FFF2-40B4-BE49-F238E27FC236}">
+                <a16:creationId xmlns:a16="http://schemas.microsoft.com/office/drawing/2014/main" id="{0D4C2189-1D99-DDAA-7C14-063D748F943F}"/>
+              </a:ext>
+            </a:extLst>
+          </p:cNvPr>
+          <p:cNvSpPr>
+            <a:spLocks noGrp="1"/>
+          </p:cNvSpPr>
+          <p:nvPr>
+            <p:ph type="sldNum" sz="quarter" idx="12"/>
+          </p:nvPr>
+        </p:nvSpPr>
+        <p:spPr/>
+        <p:txBody>
+          <a:bodyPr/>
+          <a:lstStyle/>
+          <a:p>
+            <a:r>
+              <a:rPr lang="en-GB"/>
+              <a:t>2</a:t>
+            </a:r>
+            <a:endParaRPr lang="en-US"/>
+          </a:p>
+        </p:txBody>
+      </p:sp>
+      <p:sp>
+        <p:nvSpPr>
+          <p:cNvPr id="5" name="Text Placeholder 4">
+            <a:extLst>
+              <a:ext uri="{FF2B5EF4-FFF2-40B4-BE49-F238E27FC236}">
+                <a16:creationId xmlns:a16="http://schemas.microsoft.com/office/drawing/2014/main" id="{0F66B32D-B2B2-F1A5-24F6-2108CC48FE0A}"/>
+              </a:ext>
+            </a:extLst>
+          </p:cNvPr>
+          <p:cNvSpPr>
+            <a:spLocks noGrp="1"/>
+          </p:cNvSpPr>
+          <p:nvPr>
+            <p:ph type="body" sz="quarter" idx="13"/>
+          </p:nvPr>
+        </p:nvSpPr>
+        <p:spPr/>
+        <p:txBody>
+          <a:bodyPr/>
+          <a:lstStyle/>
+          <a:p>
+            <a:endParaRPr lang="en-US"/>
+          </a:p>
+        </p:txBody>
+      </p:sp>
+    </p:spTree>
+    <p:extLst>
+      <p:ext uri="{BB962C8B-B14F-4D97-AF65-F5344CB8AC3E}">
+        <p14:creationId xmlns:p14="http://schemas.microsoft.com/office/powerpoint/2010/main" val="2477728915"/>
+      </p:ext>
+    </p:extLst>
+  </p:cSld>
+  <p:clrMapOvr>
+    <a:masterClrMapping/>
+  </p:clrMapOvr>
+</p:sld>
+</file>
+
+<file path=ppt/slides/slide5.xml><?xml version="1.0" encoding="utf-8"?>
+<p:sld xmlns:a="http://schemas.openxmlformats.org/drawingml/2006/main" xmlns:r="http://schemas.openxmlformats.org/officeDocument/2006/relationships" xmlns:p="http://schemas.openxmlformats.org/presentationml/2006/main">
+  <p:cSld>
+    <p:spTree>
+      <p:nvGrpSpPr>
+        <p:cNvPr id="1" name=""/>
+        <p:cNvGrpSpPr/>
+        <p:nvPr/>
+      </p:nvGrpSpPr>
+      <p:grpSpPr>
+        <a:xfrm>
+          <a:off x="0" y="0"/>
+          <a:ext cx="0" cy="0"/>
+          <a:chOff x="0" y="0"/>
+          <a:chExt cx="0" cy="0"/>
+        </a:xfrm>
+      </p:grpSpPr>
+      <p:sp>
+        <p:nvSpPr>
+          <p:cNvPr id="2" name="Title 1">
+            <a:extLst>
+              <a:ext uri="{FF2B5EF4-FFF2-40B4-BE49-F238E27FC236}">
+                <a16:creationId xmlns:a16="http://schemas.microsoft.com/office/drawing/2014/main" id="{E160DE6D-9215-4A91-C1BB-D5CC7976B435}"/>
+              </a:ext>
+            </a:extLst>
+          </p:cNvPr>
+          <p:cNvSpPr>
+            <a:spLocks noGrp="1"/>
+          </p:cNvSpPr>
+          <p:nvPr>
+            <p:ph type="title"/>
+          </p:nvPr>
+        </p:nvSpPr>
+        <p:spPr/>
+        <p:txBody>
+          <a:bodyPr/>
+          <a:lstStyle/>
+          <a:p>
+            <a:r>
+              <a:rPr lang="en-GB"/>
+              <a:t>What are Fluent APIs?</a:t>
+            </a:r>
+            <a:endParaRPr lang="en-US"/>
+          </a:p>
+        </p:txBody>
+      </p:sp>
+      <p:sp>
+        <p:nvSpPr>
+          <p:cNvPr id="4" name="Slide Number Placeholder 3">
+            <a:extLst>
+              <a:ext uri="{FF2B5EF4-FFF2-40B4-BE49-F238E27FC236}">
+                <a16:creationId xmlns:a16="http://schemas.microsoft.com/office/drawing/2014/main" id="{C92429F1-A76F-94B4-3FA1-B3940F3DCD95}"/>
+              </a:ext>
+            </a:extLst>
+          </p:cNvPr>
+          <p:cNvSpPr>
+            <a:spLocks noGrp="1"/>
+          </p:cNvSpPr>
+          <p:nvPr>
+            <p:ph type="sldNum" sz="quarter" idx="12"/>
+          </p:nvPr>
+        </p:nvSpPr>
+        <p:spPr/>
+        <p:txBody>
+          <a:bodyPr/>
+          <a:lstStyle/>
+          <a:p>
+            <a:fld id="{52890E68-D690-4AC2-96FA-C0B5F80968DC}" type="slidenum">
+              <a:rPr lang="en-US" smtClean="0"/>
+              <a:t>5</a:t>
+            </a:fld>
+            <a:endParaRPr lang="en-US"/>
+          </a:p>
+        </p:txBody>
+      </p:sp>
+      <p:sp>
+        <p:nvSpPr>
+          <p:cNvPr id="5" name="Text Placeholder 4">
+            <a:extLst>
+              <a:ext uri="{FF2B5EF4-FFF2-40B4-BE49-F238E27FC236}">
+                <a16:creationId xmlns:a16="http://schemas.microsoft.com/office/drawing/2014/main" id="{8C155F2F-A5F3-01AB-CC97-0D86A9C58981}"/>
+              </a:ext>
+            </a:extLst>
+          </p:cNvPr>
+          <p:cNvSpPr>
+            <a:spLocks noGrp="1"/>
+          </p:cNvSpPr>
+          <p:nvPr>
+            <p:ph type="body" sz="quarter" idx="13"/>
+          </p:nvPr>
+        </p:nvSpPr>
+        <p:spPr/>
+        <p:txBody>
+          <a:bodyPr/>
+          <a:lstStyle/>
+          <a:p>
+            <a:r>
+              <a:rPr lang="en-GB"/>
+              <a:t>Background</a:t>
+            </a:r>
+            <a:endParaRPr lang="en-US"/>
+          </a:p>
+        </p:txBody>
+      </p:sp>
+      <p:sp>
+        <p:nvSpPr>
+          <p:cNvPr id="7" name="Rectangle 6">
+            <a:extLst>
+              <a:ext uri="{FF2B5EF4-FFF2-40B4-BE49-F238E27FC236}">
+                <a16:creationId xmlns:a16="http://schemas.microsoft.com/office/drawing/2014/main" id="{FB8F5142-B743-D51B-4828-DE321A2163FD}"/>
+              </a:ext>
+            </a:extLst>
+          </p:cNvPr>
+          <p:cNvSpPr/>
+          <p:nvPr/>
+        </p:nvSpPr>
+        <p:spPr>
+          <a:xfrm>
+            <a:off x="838200" y="1934307"/>
+            <a:ext cx="5238033" cy="1782173"/>
+          </a:xfrm>
+          <a:prstGeom prst="rect">
+            <a:avLst/>
+          </a:prstGeom>
+          <a:solidFill>
+            <a:schemeClr val="bg1"/>
+          </a:solidFill>
+          <a:ln w="38100">
+            <a:noFill/>
+          </a:ln>
+        </p:spPr>
+        <p:style>
+          <a:lnRef idx="2">
+            <a:schemeClr val="dk1"/>
+          </a:lnRef>
+          <a:fillRef idx="1">
+            <a:schemeClr val="lt1"/>
+          </a:fillRef>
+          <a:effectRef idx="0">
+            <a:schemeClr val="dk1"/>
+          </a:effectRef>
+          <a:fontRef idx="minor">
+            <a:schemeClr val="dk1"/>
+          </a:fontRef>
+        </p:style>
+        <p:txBody>
+          <a:bodyPr rtlCol="0" anchor="t"/>
+          <a:lstStyle/>
+          <a:p>
+            <a:r>
+              <a:rPr lang="en-US">
+                <a:solidFill>
+                  <a:schemeClr val="tx1"/>
+                </a:solidFill>
+                <a:latin typeface="Consolas" panose="020B0609020204030204" pitchFamily="49" charset="0"/>
+              </a:rPr>
+              <a:t>List&lt;Integer&gt; ys = </a:t>
+            </a:r>
+            <a:r>
+              <a:rPr lang="en-US">
+                <a:solidFill>
+                  <a:srgbClr val="CB0756"/>
+                </a:solidFill>
+                <a:latin typeface="Consolas" panose="020B0609020204030204" pitchFamily="49" charset="0"/>
+              </a:rPr>
+              <a:t>new</a:t>
+            </a:r>
+            <a:r>
+              <a:rPr lang="en-US">
+                <a:solidFill>
+                  <a:schemeClr val="tx1"/>
+                </a:solidFill>
+                <a:latin typeface="Consolas" panose="020B0609020204030204" pitchFamily="49" charset="0"/>
+              </a:rPr>
+              <a:t> ArrayList();</a:t>
+            </a:r>
+          </a:p>
+          <a:p>
+            <a:r>
+              <a:rPr lang="en-US">
+                <a:solidFill>
+                  <a:srgbClr val="CB0756"/>
+                </a:solidFill>
+                <a:latin typeface="Consolas" panose="020B0609020204030204" pitchFamily="49" charset="0"/>
+              </a:rPr>
+              <a:t>for</a:t>
+            </a:r>
+            <a:r>
+              <a:rPr lang="en-US">
+                <a:solidFill>
+                  <a:schemeClr val="tx1"/>
+                </a:solidFill>
+                <a:latin typeface="Consolas" panose="020B0609020204030204" pitchFamily="49" charset="0"/>
+              </a:rPr>
+              <a:t> (int x : xs) {</a:t>
+            </a:r>
+          </a:p>
+          <a:p>
+            <a:r>
+              <a:rPr lang="en-US">
+                <a:solidFill>
+                  <a:schemeClr val="tx1"/>
+                </a:solidFill>
+                <a:latin typeface="Consolas" panose="020B0609020204030204" pitchFamily="49" charset="0"/>
+              </a:rPr>
+              <a:t>    </a:t>
+            </a:r>
+            <a:r>
+              <a:rPr lang="en-US">
+                <a:solidFill>
+                  <a:srgbClr val="CB0756"/>
+                </a:solidFill>
+                <a:latin typeface="Consolas" panose="020B0609020204030204" pitchFamily="49" charset="0"/>
+              </a:rPr>
+              <a:t>if</a:t>
+            </a:r>
+            <a:r>
+              <a:rPr lang="en-US">
+                <a:solidFill>
+                  <a:schemeClr val="tx1"/>
+                </a:solidFill>
+                <a:latin typeface="Consolas" panose="020B0609020204030204" pitchFamily="49" charset="0"/>
+              </a:rPr>
+              <a:t> (x &gt;= </a:t>
+            </a:r>
+            <a:r>
+              <a:rPr lang="en-US">
+                <a:solidFill>
+                  <a:srgbClr val="447DE4"/>
+                </a:solidFill>
+                <a:latin typeface="Consolas" panose="020B0609020204030204" pitchFamily="49" charset="0"/>
+              </a:rPr>
+              <a:t>0</a:t>
+            </a:r>
+            <a:r>
+              <a:rPr lang="en-US">
+                <a:solidFill>
+                  <a:schemeClr val="tx1"/>
+                </a:solidFill>
+                <a:latin typeface="Consolas" panose="020B0609020204030204" pitchFamily="49" charset="0"/>
+              </a:rPr>
+              <a:t>) {</a:t>
+            </a:r>
+          </a:p>
+          <a:p>
+            <a:r>
+              <a:rPr lang="en-US">
+                <a:solidFill>
+                  <a:schemeClr val="tx1"/>
+                </a:solidFill>
+                <a:latin typeface="Consolas" panose="020B0609020204030204" pitchFamily="49" charset="0"/>
+              </a:rPr>
+              <a:t>        ys.add(</a:t>
+            </a:r>
+            <a:r>
+              <a:rPr lang="en-US">
+                <a:solidFill>
+                  <a:srgbClr val="447DE4"/>
+                </a:solidFill>
+                <a:latin typeface="Consolas" panose="020B0609020204030204" pitchFamily="49" charset="0"/>
+              </a:rPr>
+              <a:t>2</a:t>
+            </a:r>
+            <a:r>
+              <a:rPr lang="en-US">
+                <a:solidFill>
+                  <a:schemeClr val="tx1"/>
+                </a:solidFill>
+                <a:latin typeface="Consolas" panose="020B0609020204030204" pitchFamily="49" charset="0"/>
+              </a:rPr>
+              <a:t> * x);</a:t>
+            </a:r>
+          </a:p>
+          <a:p>
+            <a:r>
+              <a:rPr lang="en-US">
+                <a:solidFill>
+                  <a:schemeClr val="tx1"/>
+                </a:solidFill>
+                <a:latin typeface="Consolas" panose="020B0609020204030204" pitchFamily="49" charset="0"/>
+              </a:rPr>
+              <a:t>    }</a:t>
+            </a:r>
+          </a:p>
+          <a:p>
+            <a:r>
+              <a:rPr lang="en-US">
+                <a:solidFill>
+                  <a:schemeClr val="tx1"/>
+                </a:solidFill>
+                <a:latin typeface="Consolas" panose="020B0609020204030204" pitchFamily="49" charset="0"/>
+              </a:rPr>
+              <a:t>}</a:t>
+            </a:r>
+          </a:p>
+        </p:txBody>
+      </p:sp>
+      <p:sp>
+        <p:nvSpPr>
+          <p:cNvPr id="9" name="Rectangle 8">
+            <a:extLst>
+              <a:ext uri="{FF2B5EF4-FFF2-40B4-BE49-F238E27FC236}">
+                <a16:creationId xmlns:a16="http://schemas.microsoft.com/office/drawing/2014/main" id="{CE7D84D5-0BBB-DA00-9F1B-9515D7A597F7}"/>
+              </a:ext>
+            </a:extLst>
+          </p:cNvPr>
+          <p:cNvSpPr/>
+          <p:nvPr/>
+        </p:nvSpPr>
+        <p:spPr>
+          <a:xfrm>
+            <a:off x="6115769" y="1936971"/>
+            <a:ext cx="5238033" cy="1492029"/>
+          </a:xfrm>
+          <a:prstGeom prst="rect">
+            <a:avLst/>
+          </a:prstGeom>
+          <a:solidFill>
+            <a:schemeClr val="bg1"/>
+          </a:solidFill>
+          <a:ln w="38100">
+            <a:noFill/>
+          </a:ln>
+        </p:spPr>
+        <p:style>
+          <a:lnRef idx="2">
+            <a:schemeClr val="dk1"/>
+          </a:lnRef>
+          <a:fillRef idx="1">
+            <a:schemeClr val="lt1"/>
+          </a:fillRef>
+          <a:effectRef idx="0">
+            <a:schemeClr val="dk1"/>
+          </a:effectRef>
+          <a:fontRef idx="minor">
+            <a:schemeClr val="dk1"/>
+          </a:fontRef>
+        </p:style>
+        <p:txBody>
+          <a:bodyPr rtlCol="0" anchor="t"/>
+          <a:lstStyle/>
+          <a:p>
+            <a:r>
+              <a:rPr lang="en-US">
+                <a:solidFill>
+                  <a:schemeClr val="tx1"/>
+                </a:solidFill>
+                <a:latin typeface="Consolas" panose="020B0609020204030204" pitchFamily="49" charset="0"/>
+              </a:rPr>
+              <a:t>List&lt;Integer&gt; ys = xs</a:t>
+            </a:r>
+          </a:p>
+          <a:p>
+            <a:r>
+              <a:rPr lang="en-US">
+                <a:solidFill>
+                  <a:schemeClr val="tx1"/>
+                </a:solidFill>
+                <a:latin typeface="Consolas" panose="020B0609020204030204" pitchFamily="49" charset="0"/>
+              </a:rPr>
+              <a:t>    .stream()</a:t>
+            </a:r>
+          </a:p>
+          <a:p>
+            <a:r>
+              <a:rPr lang="en-US">
+                <a:solidFill>
+                  <a:schemeClr val="tx1"/>
+                </a:solidFill>
+                <a:latin typeface="Consolas" panose="020B0609020204030204" pitchFamily="49" charset="0"/>
+              </a:rPr>
+              <a:t>    .filter(x -&gt; x &gt;= </a:t>
+            </a:r>
+            <a:r>
+              <a:rPr lang="en-US">
+                <a:solidFill>
+                  <a:srgbClr val="447DE4"/>
+                </a:solidFill>
+                <a:latin typeface="Consolas" panose="020B0609020204030204" pitchFamily="49" charset="0"/>
+              </a:rPr>
+              <a:t>0</a:t>
+            </a:r>
+            <a:r>
+              <a:rPr lang="en-US">
+                <a:solidFill>
+                  <a:schemeClr val="tx1"/>
+                </a:solidFill>
+                <a:latin typeface="Consolas" panose="020B0609020204030204" pitchFamily="49" charset="0"/>
+              </a:rPr>
+              <a:t>)</a:t>
+            </a:r>
+          </a:p>
+          <a:p>
+            <a:r>
+              <a:rPr lang="en-US">
+                <a:solidFill>
+                  <a:schemeClr val="tx1"/>
+                </a:solidFill>
+                <a:latin typeface="Consolas" panose="020B0609020204030204" pitchFamily="49" charset="0"/>
+              </a:rPr>
+              <a:t>    .map(x -&gt; </a:t>
+            </a:r>
+            <a:r>
+              <a:rPr lang="en-US">
+                <a:solidFill>
+                  <a:srgbClr val="447DE4"/>
+                </a:solidFill>
+                <a:latin typeface="Consolas" panose="020B0609020204030204" pitchFamily="49" charset="0"/>
+              </a:rPr>
+              <a:t>2</a:t>
+            </a:r>
+            <a:r>
+              <a:rPr lang="en-US">
+                <a:solidFill>
+                  <a:schemeClr val="tx1"/>
+                </a:solidFill>
+                <a:latin typeface="Consolas" panose="020B0609020204030204" pitchFamily="49" charset="0"/>
+              </a:rPr>
+              <a:t> * x)</a:t>
+            </a:r>
+          </a:p>
+          <a:p>
+            <a:r>
+              <a:rPr lang="en-US">
+                <a:solidFill>
+                  <a:schemeClr val="tx1"/>
+                </a:solidFill>
+                <a:latin typeface="Consolas" panose="020B0609020204030204" pitchFamily="49" charset="0"/>
+              </a:rPr>
+              <a:t>    .collect();</a:t>
+            </a:r>
+          </a:p>
+        </p:txBody>
+      </p:sp>
+      <p:sp>
+        <p:nvSpPr>
+          <p:cNvPr id="14" name="Text Placeholder 2">
+            <a:extLst>
+              <a:ext uri="{FF2B5EF4-FFF2-40B4-BE49-F238E27FC236}">
+                <a16:creationId xmlns:a16="http://schemas.microsoft.com/office/drawing/2014/main" id="{311D47EB-ADF9-1F2D-765F-120123C5F418}"/>
+              </a:ext>
+            </a:extLst>
+          </p:cNvPr>
+          <p:cNvSpPr txBox="1">
+            <a:spLocks/>
+          </p:cNvSpPr>
+          <p:nvPr/>
+        </p:nvSpPr>
+        <p:spPr>
+          <a:xfrm>
+            <a:off x="838200" y="3675283"/>
+            <a:ext cx="5157787" cy="823912"/>
+          </a:xfrm>
+          <a:prstGeom prst="rect">
+            <a:avLst/>
+          </a:prstGeom>
+        </p:spPr>
+        <p:txBody>
+          <a:bodyPr vert="horz" lIns="91440" tIns="45720" rIns="91440" bIns="45720" rtlCol="0" anchor="b">
+            <a:normAutofit/>
+          </a:bodyPr>
+          <a:lstStyle>
+            <a:lvl1pPr marL="228600" indent="-228600" algn="l" defTabSz="914400" rtl="0" eaLnBrk="1" latinLnBrk="0" hangingPunct="1">
+              <a:lnSpc>
+                <a:spcPct val="90000"/>
+              </a:lnSpc>
+              <a:spcBef>
+                <a:spcPts val="1000"/>
+              </a:spcBef>
+              <a:buFont typeface="Arial" panose="020B0604020202020204" pitchFamily="34" charset="0"/>
+              <a:buChar char="•"/>
+              <a:defRPr sz="2800" kern="1200">
+                <a:solidFill>
+                  <a:schemeClr val="tx1"/>
+                </a:solidFill>
+                <a:latin typeface="+mn-lt"/>
+                <a:ea typeface="+mn-ea"/>
+                <a:cs typeface="+mn-cs"/>
+              </a:defRPr>
+            </a:lvl1pPr>
+            <a:lvl2pPr marL="685800" indent="-228600" algn="l" defTabSz="914400" rtl="0" eaLnBrk="1" latinLnBrk="0" hangingPunct="1">
+              <a:lnSpc>
+                <a:spcPct val="90000"/>
+              </a:lnSpc>
+              <a:spcBef>
+                <a:spcPts val="500"/>
+              </a:spcBef>
+              <a:buFont typeface="Arial" panose="020B0604020202020204" pitchFamily="34" charset="0"/>
+              <a:buChar char="•"/>
+              <a:defRPr sz="2400" kern="1200">
+                <a:solidFill>
+                  <a:schemeClr val="tx1"/>
+                </a:solidFill>
+                <a:latin typeface="+mn-lt"/>
+                <a:ea typeface="+mn-ea"/>
+                <a:cs typeface="+mn-cs"/>
+              </a:defRPr>
+            </a:lvl2pPr>
+            <a:lvl3pPr marL="1143000" indent="-228600" algn="l" defTabSz="914400" rtl="0" eaLnBrk="1" latinLnBrk="0" hangingPunct="1">
+              <a:lnSpc>
+                <a:spcPct val="90000"/>
+              </a:lnSpc>
+              <a:spcBef>
+                <a:spcPts val="500"/>
+              </a:spcBef>
+              <a:buFont typeface="Arial" panose="020B0604020202020204" pitchFamily="34" charset="0"/>
+              <a:buChar char="•"/>
+              <a:defRPr sz="2000" kern="1200">
+                <a:solidFill>
+                  <a:schemeClr val="tx1"/>
+                </a:solidFill>
+                <a:latin typeface="+mn-lt"/>
+                <a:ea typeface="+mn-ea"/>
+                <a:cs typeface="+mn-cs"/>
+              </a:defRPr>
+            </a:lvl3pPr>
+            <a:lvl4pPr marL="1600200" indent="-228600" algn="l" defTabSz="914400" rtl="0" eaLnBrk="1" latinLnBrk="0" hangingPunct="1">
+              <a:lnSpc>
+                <a:spcPct val="90000"/>
+              </a:lnSpc>
+              <a:spcBef>
+                <a:spcPts val="500"/>
+              </a:spcBef>
+              <a:buFont typeface="Arial" panose="020B0604020202020204" pitchFamily="34" charset="0"/>
+              <a:buChar char="•"/>
+              <a:defRPr sz="1800" kern="1200">
+                <a:solidFill>
+                  <a:schemeClr val="tx1"/>
+                </a:solidFill>
+                <a:latin typeface="+mn-lt"/>
+                <a:ea typeface="+mn-ea"/>
+                <a:cs typeface="+mn-cs"/>
+              </a:defRPr>
+            </a:lvl4pPr>
+            <a:lvl5pPr marL="2057400" indent="-228600" algn="l" defTabSz="914400" rtl="0" eaLnBrk="1" latinLnBrk="0" hangingPunct="1">
+              <a:lnSpc>
+                <a:spcPct val="90000"/>
+              </a:lnSpc>
+              <a:spcBef>
+                <a:spcPts val="500"/>
+              </a:spcBef>
+              <a:buFont typeface="Arial" panose="020B0604020202020204" pitchFamily="34" charset="0"/>
+              <a:buChar char="•"/>
+              <a:defRPr sz="1800" kern="1200">
+                <a:solidFill>
+                  <a:schemeClr val="tx1"/>
+                </a:solidFill>
+                <a:latin typeface="+mn-lt"/>
+                <a:ea typeface="+mn-ea"/>
+                <a:cs typeface="+mn-cs"/>
+              </a:defRPr>
+            </a:lvl5pPr>
+            <a:lvl6pPr marL="2514600" indent="-228600" algn="l" defTabSz="914400" rtl="0" eaLnBrk="1" latinLnBrk="0" hangingPunct="1">
+              <a:lnSpc>
+                <a:spcPct val="90000"/>
+              </a:lnSpc>
+              <a:spcBef>
+                <a:spcPts val="500"/>
+              </a:spcBef>
+              <a:buFont typeface="Arial" panose="020B0604020202020204" pitchFamily="34" charset="0"/>
+              <a:buChar char="•"/>
+              <a:defRPr sz="1800" kern="1200">
+                <a:solidFill>
+                  <a:schemeClr val="tx1"/>
+                </a:solidFill>
+                <a:latin typeface="+mn-lt"/>
+                <a:ea typeface="+mn-ea"/>
+                <a:cs typeface="+mn-cs"/>
+              </a:defRPr>
+            </a:lvl6pPr>
+            <a:lvl7pPr marL="2971800" indent="-228600" algn="l" defTabSz="914400" rtl="0" eaLnBrk="1" latinLnBrk="0" hangingPunct="1">
+              <a:lnSpc>
+                <a:spcPct val="90000"/>
+              </a:lnSpc>
+              <a:spcBef>
+                <a:spcPts val="500"/>
+              </a:spcBef>
+              <a:buFont typeface="Arial" panose="020B0604020202020204" pitchFamily="34" charset="0"/>
+              <a:buChar char="•"/>
+              <a:defRPr sz="1800" kern="1200">
+                <a:solidFill>
+                  <a:schemeClr val="tx1"/>
+                </a:solidFill>
+                <a:latin typeface="+mn-lt"/>
+                <a:ea typeface="+mn-ea"/>
+                <a:cs typeface="+mn-cs"/>
+              </a:defRPr>
+            </a:lvl7pPr>
+            <a:lvl8pPr marL="3429000" indent="-228600" algn="l" defTabSz="914400" rtl="0" eaLnBrk="1" latinLnBrk="0" hangingPunct="1">
+              <a:lnSpc>
+                <a:spcPct val="90000"/>
+              </a:lnSpc>
+              <a:spcBef>
+                <a:spcPts val="500"/>
+              </a:spcBef>
+              <a:buFont typeface="Arial" panose="020B0604020202020204" pitchFamily="34" charset="0"/>
+              <a:buChar char="•"/>
+              <a:defRPr sz="1800" kern="1200">
+                <a:solidFill>
+                  <a:schemeClr val="tx1"/>
+                </a:solidFill>
+                <a:latin typeface="+mn-lt"/>
+                <a:ea typeface="+mn-ea"/>
+                <a:cs typeface="+mn-cs"/>
+              </a:defRPr>
+            </a:lvl8pPr>
+            <a:lvl9pPr marL="3886200" indent="-228600" algn="l" defTabSz="914400" rtl="0" eaLnBrk="1" latinLnBrk="0" hangingPunct="1">
+              <a:lnSpc>
+                <a:spcPct val="90000"/>
+              </a:lnSpc>
+              <a:spcBef>
+                <a:spcPts val="500"/>
+              </a:spcBef>
+              <a:buFont typeface="Arial" panose="020B0604020202020204" pitchFamily="34" charset="0"/>
+              <a:buChar char="•"/>
+              <a:defRPr sz="1800" kern="1200">
+                <a:solidFill>
+                  <a:schemeClr val="tx1"/>
+                </a:solidFill>
+                <a:latin typeface="+mn-lt"/>
+                <a:ea typeface="+mn-ea"/>
+                <a:cs typeface="+mn-cs"/>
+              </a:defRPr>
+            </a:lvl9pPr>
+          </a:lstStyle>
+          <a:p>
+            <a:pPr marL="457200" lvl="1" indent="0" algn="ctr">
+              <a:buNone/>
+            </a:pPr>
+            <a:r>
+              <a:rPr lang="en-GB" b="1"/>
+              <a:t>Imperative Style</a:t>
+            </a:r>
+            <a:endParaRPr lang="en-US" b="1"/>
+          </a:p>
+        </p:txBody>
+      </p:sp>
+      <p:sp>
+        <p:nvSpPr>
+          <p:cNvPr id="15" name="Content Placeholder 3">
+            <a:extLst>
+              <a:ext uri="{FF2B5EF4-FFF2-40B4-BE49-F238E27FC236}">
+                <a16:creationId xmlns:a16="http://schemas.microsoft.com/office/drawing/2014/main" id="{F9C43515-1A3F-8DDF-88E5-4D5491DB04BA}"/>
+              </a:ext>
+            </a:extLst>
+          </p:cNvPr>
+          <p:cNvSpPr txBox="1">
+            <a:spLocks/>
+          </p:cNvSpPr>
+          <p:nvPr/>
+        </p:nvSpPr>
+        <p:spPr>
+          <a:xfrm>
+            <a:off x="838200" y="4499195"/>
+            <a:ext cx="5157787" cy="3684588"/>
+          </a:xfrm>
+          <a:prstGeom prst="rect">
+            <a:avLst/>
+          </a:prstGeom>
+        </p:spPr>
+        <p:txBody>
+          <a:bodyPr/>
+          <a:lstStyle>
+            <a:lvl1pPr marL="228600" indent="-228600" algn="l" defTabSz="914400" rtl="0" eaLnBrk="1" latinLnBrk="0" hangingPunct="1">
+              <a:lnSpc>
+                <a:spcPct val="90000"/>
+              </a:lnSpc>
+              <a:spcBef>
+                <a:spcPts val="1000"/>
+              </a:spcBef>
+              <a:buFont typeface="Arial" panose="020B0604020202020204" pitchFamily="34" charset="0"/>
+              <a:buChar char="•"/>
+              <a:defRPr sz="2800" kern="1200">
+                <a:solidFill>
+                  <a:schemeClr val="tx1"/>
+                </a:solidFill>
+                <a:latin typeface="+mn-lt"/>
+                <a:ea typeface="+mn-ea"/>
+                <a:cs typeface="+mn-cs"/>
+              </a:defRPr>
+            </a:lvl1pPr>
+            <a:lvl2pPr marL="685800" indent="-228600" algn="l" defTabSz="914400" rtl="0" eaLnBrk="1" latinLnBrk="0" hangingPunct="1">
+              <a:lnSpc>
+                <a:spcPct val="90000"/>
+              </a:lnSpc>
+              <a:spcBef>
+                <a:spcPts val="500"/>
+              </a:spcBef>
+              <a:buFont typeface="Arial" panose="020B0604020202020204" pitchFamily="34" charset="0"/>
+              <a:buChar char="•"/>
+              <a:defRPr sz="2400" kern="1200">
+                <a:solidFill>
+                  <a:schemeClr val="tx1"/>
+                </a:solidFill>
+                <a:latin typeface="+mn-lt"/>
+                <a:ea typeface="+mn-ea"/>
+                <a:cs typeface="+mn-cs"/>
+              </a:defRPr>
+            </a:lvl2pPr>
+            <a:lvl3pPr marL="1143000" indent="-228600" algn="l" defTabSz="914400" rtl="0" eaLnBrk="1" latinLnBrk="0" hangingPunct="1">
+              <a:lnSpc>
+                <a:spcPct val="90000"/>
+              </a:lnSpc>
+              <a:spcBef>
+                <a:spcPts val="500"/>
+              </a:spcBef>
+              <a:buFont typeface="Arial" panose="020B0604020202020204" pitchFamily="34" charset="0"/>
+              <a:buChar char="•"/>
+              <a:defRPr sz="2000" kern="1200">
+                <a:solidFill>
+                  <a:schemeClr val="tx1"/>
+                </a:solidFill>
+                <a:latin typeface="+mn-lt"/>
+                <a:ea typeface="+mn-ea"/>
+                <a:cs typeface="+mn-cs"/>
+              </a:defRPr>
+            </a:lvl3pPr>
+            <a:lvl4pPr marL="1600200" indent="-228600" algn="l" defTabSz="914400" rtl="0" eaLnBrk="1" latinLnBrk="0" hangingPunct="1">
+              <a:lnSpc>
+                <a:spcPct val="90000"/>
+              </a:lnSpc>
+              <a:spcBef>
+                <a:spcPts val="500"/>
+              </a:spcBef>
+              <a:buFont typeface="Arial" panose="020B0604020202020204" pitchFamily="34" charset="0"/>
+              <a:buChar char="•"/>
+              <a:defRPr sz="1800" kern="1200">
+                <a:solidFill>
+                  <a:schemeClr val="tx1"/>
+                </a:solidFill>
+                <a:latin typeface="+mn-lt"/>
+                <a:ea typeface="+mn-ea"/>
+                <a:cs typeface="+mn-cs"/>
+              </a:defRPr>
+            </a:lvl4pPr>
+            <a:lvl5pPr marL="2057400" indent="-228600" algn="l" defTabSz="914400" rtl="0" eaLnBrk="1" latinLnBrk="0" hangingPunct="1">
+              <a:lnSpc>
+                <a:spcPct val="90000"/>
+              </a:lnSpc>
+              <a:spcBef>
+                <a:spcPts val="500"/>
+              </a:spcBef>
+              <a:buFont typeface="Arial" panose="020B0604020202020204" pitchFamily="34" charset="0"/>
+              <a:buChar char="•"/>
+              <a:defRPr sz="1800" kern="1200">
+                <a:solidFill>
+                  <a:schemeClr val="tx1"/>
+                </a:solidFill>
+                <a:latin typeface="+mn-lt"/>
+                <a:ea typeface="+mn-ea"/>
+                <a:cs typeface="+mn-cs"/>
+              </a:defRPr>
+            </a:lvl5pPr>
+            <a:lvl6pPr marL="2514600" indent="-228600" algn="l" defTabSz="914400" rtl="0" eaLnBrk="1" latinLnBrk="0" hangingPunct="1">
+              <a:lnSpc>
+                <a:spcPct val="90000"/>
+              </a:lnSpc>
+              <a:spcBef>
+                <a:spcPts val="500"/>
+              </a:spcBef>
+              <a:buFont typeface="Arial" panose="020B0604020202020204" pitchFamily="34" charset="0"/>
+              <a:buChar char="•"/>
+              <a:defRPr sz="1800" kern="1200">
+                <a:solidFill>
+                  <a:schemeClr val="tx1"/>
+                </a:solidFill>
+                <a:latin typeface="+mn-lt"/>
+                <a:ea typeface="+mn-ea"/>
+                <a:cs typeface="+mn-cs"/>
+              </a:defRPr>
+            </a:lvl6pPr>
+            <a:lvl7pPr marL="2971800" indent="-228600" algn="l" defTabSz="914400" rtl="0" eaLnBrk="1" latinLnBrk="0" hangingPunct="1">
+              <a:lnSpc>
+                <a:spcPct val="90000"/>
+              </a:lnSpc>
+              <a:spcBef>
+                <a:spcPts val="500"/>
+              </a:spcBef>
+              <a:buFont typeface="Arial" panose="020B0604020202020204" pitchFamily="34" charset="0"/>
+              <a:buChar char="•"/>
+              <a:defRPr sz="1800" kern="1200">
+                <a:solidFill>
+                  <a:schemeClr val="tx1"/>
+                </a:solidFill>
+                <a:latin typeface="+mn-lt"/>
+                <a:ea typeface="+mn-ea"/>
+                <a:cs typeface="+mn-cs"/>
+              </a:defRPr>
+            </a:lvl7pPr>
+            <a:lvl8pPr marL="3429000" indent="-228600" algn="l" defTabSz="914400" rtl="0" eaLnBrk="1" latinLnBrk="0" hangingPunct="1">
+              <a:lnSpc>
+                <a:spcPct val="90000"/>
+              </a:lnSpc>
+              <a:spcBef>
+                <a:spcPts val="500"/>
+              </a:spcBef>
+              <a:buFont typeface="Arial" panose="020B0604020202020204" pitchFamily="34" charset="0"/>
+              <a:buChar char="•"/>
+              <a:defRPr sz="1800" kern="1200">
+                <a:solidFill>
+                  <a:schemeClr val="tx1"/>
+                </a:solidFill>
+                <a:latin typeface="+mn-lt"/>
+                <a:ea typeface="+mn-ea"/>
+                <a:cs typeface="+mn-cs"/>
+              </a:defRPr>
+            </a:lvl8pPr>
+            <a:lvl9pPr marL="3886200" indent="-228600" algn="l" defTabSz="914400" rtl="0" eaLnBrk="1" latinLnBrk="0" hangingPunct="1">
+              <a:lnSpc>
+                <a:spcPct val="90000"/>
+              </a:lnSpc>
+              <a:spcBef>
+                <a:spcPts val="500"/>
+              </a:spcBef>
+              <a:buFont typeface="Arial" panose="020B0604020202020204" pitchFamily="34" charset="0"/>
+              <a:buChar char="•"/>
+              <a:defRPr sz="1800" kern="1200">
+                <a:solidFill>
+                  <a:schemeClr val="tx1"/>
+                </a:solidFill>
+                <a:latin typeface="+mn-lt"/>
+                <a:ea typeface="+mn-ea"/>
+                <a:cs typeface="+mn-cs"/>
+              </a:defRPr>
+            </a:lvl9pPr>
+          </a:lstStyle>
+          <a:p>
+            <a:r>
+              <a:rPr lang="en-GB"/>
+              <a:t>For-loops, if-clauses, …</a:t>
+            </a:r>
+          </a:p>
+          <a:p>
+            <a:r>
+              <a:rPr lang="en-US"/>
+              <a:t>Nested</a:t>
+            </a:r>
+          </a:p>
+        </p:txBody>
+      </p:sp>
+      <p:sp>
+        <p:nvSpPr>
+          <p:cNvPr id="16" name="Text Placeholder 4">
+            <a:extLst>
+              <a:ext uri="{FF2B5EF4-FFF2-40B4-BE49-F238E27FC236}">
+                <a16:creationId xmlns:a16="http://schemas.microsoft.com/office/drawing/2014/main" id="{0C703BAC-0F23-93C0-FA4D-22A78A533ECA}"/>
+              </a:ext>
+            </a:extLst>
+          </p:cNvPr>
+          <p:cNvSpPr txBox="1">
+            <a:spLocks/>
+          </p:cNvSpPr>
+          <p:nvPr/>
+        </p:nvSpPr>
+        <p:spPr>
+          <a:xfrm>
+            <a:off x="6170612" y="3675283"/>
+            <a:ext cx="5183188" cy="823912"/>
+          </a:xfrm>
+          <a:prstGeom prst="rect">
+            <a:avLst/>
+          </a:prstGeom>
+        </p:spPr>
+        <p:txBody>
+          <a:bodyPr anchor="b"/>
+          <a:lstStyle>
+            <a:lvl1pPr marL="228600" indent="-228600" algn="l" defTabSz="914400" rtl="0" eaLnBrk="1" latinLnBrk="0" hangingPunct="1">
+              <a:lnSpc>
+                <a:spcPct val="90000"/>
+              </a:lnSpc>
+              <a:spcBef>
+                <a:spcPts val="1000"/>
+              </a:spcBef>
+              <a:buFont typeface="Arial" panose="020B0604020202020204" pitchFamily="34" charset="0"/>
+              <a:buChar char="•"/>
+              <a:defRPr sz="2800" kern="1200">
+                <a:solidFill>
+                  <a:schemeClr val="tx1"/>
+                </a:solidFill>
+                <a:latin typeface="+mn-lt"/>
+                <a:ea typeface="+mn-ea"/>
+                <a:cs typeface="+mn-cs"/>
+              </a:defRPr>
+            </a:lvl1pPr>
+            <a:lvl2pPr marL="685800" indent="-228600" algn="l" defTabSz="914400" rtl="0" eaLnBrk="1" latinLnBrk="0" hangingPunct="1">
+              <a:lnSpc>
+                <a:spcPct val="90000"/>
+              </a:lnSpc>
+              <a:spcBef>
+                <a:spcPts val="500"/>
+              </a:spcBef>
+              <a:buFont typeface="Arial" panose="020B0604020202020204" pitchFamily="34" charset="0"/>
+              <a:buChar char="•"/>
+              <a:defRPr sz="2400" kern="1200">
+                <a:solidFill>
+                  <a:schemeClr val="tx1"/>
+                </a:solidFill>
+                <a:latin typeface="+mn-lt"/>
+                <a:ea typeface="+mn-ea"/>
+                <a:cs typeface="+mn-cs"/>
+              </a:defRPr>
+            </a:lvl2pPr>
+            <a:lvl3pPr marL="1143000" indent="-228600" algn="l" defTabSz="914400" rtl="0" eaLnBrk="1" latinLnBrk="0" hangingPunct="1">
+              <a:lnSpc>
+                <a:spcPct val="90000"/>
+              </a:lnSpc>
+              <a:spcBef>
+                <a:spcPts val="500"/>
+              </a:spcBef>
+              <a:buFont typeface="Arial" panose="020B0604020202020204" pitchFamily="34" charset="0"/>
+              <a:buChar char="•"/>
+              <a:defRPr sz="2000" kern="1200">
+                <a:solidFill>
+                  <a:schemeClr val="tx1"/>
+                </a:solidFill>
+                <a:latin typeface="+mn-lt"/>
+                <a:ea typeface="+mn-ea"/>
+                <a:cs typeface="+mn-cs"/>
+              </a:defRPr>
+            </a:lvl3pPr>
+            <a:lvl4pPr marL="1600200" indent="-228600" algn="l" defTabSz="914400" rtl="0" eaLnBrk="1" latinLnBrk="0" hangingPunct="1">
+              <a:lnSpc>
+                <a:spcPct val="90000"/>
+              </a:lnSpc>
+              <a:spcBef>
+                <a:spcPts val="500"/>
+              </a:spcBef>
+              <a:buFont typeface="Arial" panose="020B0604020202020204" pitchFamily="34" charset="0"/>
+              <a:buChar char="•"/>
+              <a:defRPr sz="1800" kern="1200">
+                <a:solidFill>
+                  <a:schemeClr val="tx1"/>
+                </a:solidFill>
+                <a:latin typeface="+mn-lt"/>
+                <a:ea typeface="+mn-ea"/>
+                <a:cs typeface="+mn-cs"/>
+              </a:defRPr>
+            </a:lvl4pPr>
+            <a:lvl5pPr marL="2057400" indent="-228600" algn="l" defTabSz="914400" rtl="0" eaLnBrk="1" latinLnBrk="0" hangingPunct="1">
+              <a:lnSpc>
+                <a:spcPct val="90000"/>
+              </a:lnSpc>
+              <a:spcBef>
+                <a:spcPts val="500"/>
+              </a:spcBef>
+              <a:buFont typeface="Arial" panose="020B0604020202020204" pitchFamily="34" charset="0"/>
+              <a:buChar char="•"/>
+              <a:defRPr sz="1800" kern="1200">
+                <a:solidFill>
+                  <a:schemeClr val="tx1"/>
+                </a:solidFill>
+                <a:latin typeface="+mn-lt"/>
+                <a:ea typeface="+mn-ea"/>
+                <a:cs typeface="+mn-cs"/>
+              </a:defRPr>
+            </a:lvl5pPr>
+            <a:lvl6pPr marL="2514600" indent="-228600" algn="l" defTabSz="914400" rtl="0" eaLnBrk="1" latinLnBrk="0" hangingPunct="1">
+              <a:lnSpc>
+                <a:spcPct val="90000"/>
+              </a:lnSpc>
+              <a:spcBef>
+                <a:spcPts val="500"/>
+              </a:spcBef>
+              <a:buFont typeface="Arial" panose="020B0604020202020204" pitchFamily="34" charset="0"/>
+              <a:buChar char="•"/>
+              <a:defRPr sz="1800" kern="1200">
+                <a:solidFill>
+                  <a:schemeClr val="tx1"/>
+                </a:solidFill>
+                <a:latin typeface="+mn-lt"/>
+                <a:ea typeface="+mn-ea"/>
+                <a:cs typeface="+mn-cs"/>
+              </a:defRPr>
+            </a:lvl6pPr>
+            <a:lvl7pPr marL="2971800" indent="-228600" algn="l" defTabSz="914400" rtl="0" eaLnBrk="1" latinLnBrk="0" hangingPunct="1">
+              <a:lnSpc>
+                <a:spcPct val="90000"/>
+              </a:lnSpc>
+              <a:spcBef>
+                <a:spcPts val="500"/>
+              </a:spcBef>
+              <a:buFont typeface="Arial" panose="020B0604020202020204" pitchFamily="34" charset="0"/>
+              <a:buChar char="•"/>
+              <a:defRPr sz="1800" kern="1200">
+                <a:solidFill>
+                  <a:schemeClr val="tx1"/>
+                </a:solidFill>
+                <a:latin typeface="+mn-lt"/>
+                <a:ea typeface="+mn-ea"/>
+                <a:cs typeface="+mn-cs"/>
+              </a:defRPr>
+            </a:lvl7pPr>
+            <a:lvl8pPr marL="3429000" indent="-228600" algn="l" defTabSz="914400" rtl="0" eaLnBrk="1" latinLnBrk="0" hangingPunct="1">
+              <a:lnSpc>
+                <a:spcPct val="90000"/>
+              </a:lnSpc>
+              <a:spcBef>
+                <a:spcPts val="500"/>
+              </a:spcBef>
+              <a:buFont typeface="Arial" panose="020B0604020202020204" pitchFamily="34" charset="0"/>
+              <a:buChar char="•"/>
+              <a:defRPr sz="1800" kern="1200">
+                <a:solidFill>
+                  <a:schemeClr val="tx1"/>
+                </a:solidFill>
+                <a:latin typeface="+mn-lt"/>
+                <a:ea typeface="+mn-ea"/>
+                <a:cs typeface="+mn-cs"/>
+              </a:defRPr>
+            </a:lvl8pPr>
+            <a:lvl9pPr marL="3886200" indent="-228600" algn="l" defTabSz="914400" rtl="0" eaLnBrk="1" latinLnBrk="0" hangingPunct="1">
+              <a:lnSpc>
+                <a:spcPct val="90000"/>
+              </a:lnSpc>
+              <a:spcBef>
+                <a:spcPts val="500"/>
+              </a:spcBef>
+              <a:buFont typeface="Arial" panose="020B0604020202020204" pitchFamily="34" charset="0"/>
+              <a:buChar char="•"/>
+              <a:defRPr sz="1800" kern="1200">
+                <a:solidFill>
+                  <a:schemeClr val="tx1"/>
+                </a:solidFill>
+                <a:latin typeface="+mn-lt"/>
+                <a:ea typeface="+mn-ea"/>
+                <a:cs typeface="+mn-cs"/>
+              </a:defRPr>
+            </a:lvl9pPr>
+          </a:lstStyle>
+          <a:p>
+            <a:pPr marL="0" indent="0" algn="ctr">
+              <a:buNone/>
+            </a:pPr>
+            <a:r>
+              <a:rPr lang="en-GB" sz="2400" b="1"/>
+              <a:t>Fluent Style</a:t>
+            </a:r>
+            <a:endParaRPr lang="en-US" sz="2400" b="1"/>
+          </a:p>
+        </p:txBody>
+      </p:sp>
+      <p:sp>
+        <p:nvSpPr>
+          <p:cNvPr id="17" name="Content Placeholder 5">
+            <a:extLst>
+              <a:ext uri="{FF2B5EF4-FFF2-40B4-BE49-F238E27FC236}">
+                <a16:creationId xmlns:a16="http://schemas.microsoft.com/office/drawing/2014/main" id="{293D38D1-9E71-93A0-1494-74FD22D350B3}"/>
+              </a:ext>
+            </a:extLst>
+          </p:cNvPr>
+          <p:cNvSpPr txBox="1">
+            <a:spLocks/>
+          </p:cNvSpPr>
+          <p:nvPr/>
+        </p:nvSpPr>
+        <p:spPr>
+          <a:xfrm>
+            <a:off x="6170612" y="4499195"/>
+            <a:ext cx="5183188" cy="3684588"/>
+          </a:xfrm>
+          <a:prstGeom prst="rect">
+            <a:avLst/>
+          </a:prstGeom>
+        </p:spPr>
+        <p:txBody>
+          <a:bodyPr/>
+          <a:lstStyle>
+            <a:lvl1pPr marL="228600" indent="-228600" algn="l" defTabSz="914400" rtl="0" eaLnBrk="1" latinLnBrk="0" hangingPunct="1">
+              <a:lnSpc>
+                <a:spcPct val="90000"/>
+              </a:lnSpc>
+              <a:spcBef>
+                <a:spcPts val="1000"/>
+              </a:spcBef>
+              <a:buFont typeface="Arial" panose="020B0604020202020204" pitchFamily="34" charset="0"/>
+              <a:buChar char="•"/>
+              <a:defRPr sz="2800" kern="1200">
+                <a:solidFill>
+                  <a:schemeClr val="tx1"/>
+                </a:solidFill>
+                <a:latin typeface="+mn-lt"/>
+                <a:ea typeface="+mn-ea"/>
+                <a:cs typeface="+mn-cs"/>
+              </a:defRPr>
+            </a:lvl1pPr>
+            <a:lvl2pPr marL="685800" indent="-228600" algn="l" defTabSz="914400" rtl="0" eaLnBrk="1" latinLnBrk="0" hangingPunct="1">
+              <a:lnSpc>
+                <a:spcPct val="90000"/>
+              </a:lnSpc>
+              <a:spcBef>
+                <a:spcPts val="500"/>
+              </a:spcBef>
+              <a:buFont typeface="Arial" panose="020B0604020202020204" pitchFamily="34" charset="0"/>
+              <a:buChar char="•"/>
+              <a:defRPr sz="2400" kern="1200">
+                <a:solidFill>
+                  <a:schemeClr val="tx1"/>
+                </a:solidFill>
+                <a:latin typeface="+mn-lt"/>
+                <a:ea typeface="+mn-ea"/>
+                <a:cs typeface="+mn-cs"/>
+              </a:defRPr>
+            </a:lvl2pPr>
+            <a:lvl3pPr marL="1143000" indent="-228600" algn="l" defTabSz="914400" rtl="0" eaLnBrk="1" latinLnBrk="0" hangingPunct="1">
+              <a:lnSpc>
+                <a:spcPct val="90000"/>
+              </a:lnSpc>
+              <a:spcBef>
+                <a:spcPts val="500"/>
+              </a:spcBef>
+              <a:buFont typeface="Arial" panose="020B0604020202020204" pitchFamily="34" charset="0"/>
+              <a:buChar char="•"/>
+              <a:defRPr sz="2000" kern="1200">
+                <a:solidFill>
+                  <a:schemeClr val="tx1"/>
+                </a:solidFill>
+                <a:latin typeface="+mn-lt"/>
+                <a:ea typeface="+mn-ea"/>
+                <a:cs typeface="+mn-cs"/>
+              </a:defRPr>
+            </a:lvl3pPr>
+            <a:lvl4pPr marL="1600200" indent="-228600" algn="l" defTabSz="914400" rtl="0" eaLnBrk="1" latinLnBrk="0" hangingPunct="1">
+              <a:lnSpc>
+                <a:spcPct val="90000"/>
+              </a:lnSpc>
+              <a:spcBef>
+                <a:spcPts val="500"/>
+              </a:spcBef>
+              <a:buFont typeface="Arial" panose="020B0604020202020204" pitchFamily="34" charset="0"/>
+              <a:buChar char="•"/>
+              <a:defRPr sz="1800" kern="1200">
+                <a:solidFill>
+                  <a:schemeClr val="tx1"/>
+                </a:solidFill>
+                <a:latin typeface="+mn-lt"/>
+                <a:ea typeface="+mn-ea"/>
+                <a:cs typeface="+mn-cs"/>
+              </a:defRPr>
+            </a:lvl4pPr>
+            <a:lvl5pPr marL="2057400" indent="-228600" algn="l" defTabSz="914400" rtl="0" eaLnBrk="1" latinLnBrk="0" hangingPunct="1">
+              <a:lnSpc>
+                <a:spcPct val="90000"/>
+              </a:lnSpc>
+              <a:spcBef>
+                <a:spcPts val="500"/>
+              </a:spcBef>
+              <a:buFont typeface="Arial" panose="020B0604020202020204" pitchFamily="34" charset="0"/>
+              <a:buChar char="•"/>
+              <a:defRPr sz="1800" kern="1200">
+                <a:solidFill>
+                  <a:schemeClr val="tx1"/>
+                </a:solidFill>
+                <a:latin typeface="+mn-lt"/>
+                <a:ea typeface="+mn-ea"/>
+                <a:cs typeface="+mn-cs"/>
+              </a:defRPr>
+            </a:lvl5pPr>
+            <a:lvl6pPr marL="2514600" indent="-228600" algn="l" defTabSz="914400" rtl="0" eaLnBrk="1" latinLnBrk="0" hangingPunct="1">
+              <a:lnSpc>
+                <a:spcPct val="90000"/>
+              </a:lnSpc>
+              <a:spcBef>
+                <a:spcPts val="500"/>
+              </a:spcBef>
+              <a:buFont typeface="Arial" panose="020B0604020202020204" pitchFamily="34" charset="0"/>
+              <a:buChar char="•"/>
+              <a:defRPr sz="1800" kern="1200">
+                <a:solidFill>
+                  <a:schemeClr val="tx1"/>
+                </a:solidFill>
+                <a:latin typeface="+mn-lt"/>
+                <a:ea typeface="+mn-ea"/>
+                <a:cs typeface="+mn-cs"/>
+              </a:defRPr>
+            </a:lvl6pPr>
+            <a:lvl7pPr marL="2971800" indent="-228600" algn="l" defTabSz="914400" rtl="0" eaLnBrk="1" latinLnBrk="0" hangingPunct="1">
+              <a:lnSpc>
+                <a:spcPct val="90000"/>
+              </a:lnSpc>
+              <a:spcBef>
+                <a:spcPts val="500"/>
+              </a:spcBef>
+              <a:buFont typeface="Arial" panose="020B0604020202020204" pitchFamily="34" charset="0"/>
+              <a:buChar char="•"/>
+              <a:defRPr sz="1800" kern="1200">
+                <a:solidFill>
+                  <a:schemeClr val="tx1"/>
+                </a:solidFill>
+                <a:latin typeface="+mn-lt"/>
+                <a:ea typeface="+mn-ea"/>
+                <a:cs typeface="+mn-cs"/>
+              </a:defRPr>
+            </a:lvl7pPr>
+            <a:lvl8pPr marL="3429000" indent="-228600" algn="l" defTabSz="914400" rtl="0" eaLnBrk="1" latinLnBrk="0" hangingPunct="1">
+              <a:lnSpc>
+                <a:spcPct val="90000"/>
+              </a:lnSpc>
+              <a:spcBef>
+                <a:spcPts val="500"/>
+              </a:spcBef>
+              <a:buFont typeface="Arial" panose="020B0604020202020204" pitchFamily="34" charset="0"/>
+              <a:buChar char="•"/>
+              <a:defRPr sz="1800" kern="1200">
+                <a:solidFill>
+                  <a:schemeClr val="tx1"/>
+                </a:solidFill>
+                <a:latin typeface="+mn-lt"/>
+                <a:ea typeface="+mn-ea"/>
+                <a:cs typeface="+mn-cs"/>
+              </a:defRPr>
+            </a:lvl8pPr>
+            <a:lvl9pPr marL="3886200" indent="-228600" algn="l" defTabSz="914400" rtl="0" eaLnBrk="1" latinLnBrk="0" hangingPunct="1">
+              <a:lnSpc>
+                <a:spcPct val="90000"/>
+              </a:lnSpc>
+              <a:spcBef>
+                <a:spcPts val="500"/>
+              </a:spcBef>
+              <a:buFont typeface="Arial" panose="020B0604020202020204" pitchFamily="34" charset="0"/>
+              <a:buChar char="•"/>
+              <a:defRPr sz="1800" kern="1200">
+                <a:solidFill>
+                  <a:schemeClr val="tx1"/>
+                </a:solidFill>
+                <a:latin typeface="+mn-lt"/>
+                <a:ea typeface="+mn-ea"/>
+                <a:cs typeface="+mn-cs"/>
+              </a:defRPr>
+            </a:lvl9pPr>
+          </a:lstStyle>
+          <a:p>
+            <a:r>
+              <a:rPr lang="en-GB"/>
+              <a:t>Method chaining</a:t>
+            </a:r>
+          </a:p>
+          <a:p>
+            <a:r>
+              <a:rPr lang="en-GB"/>
+              <a:t>Flat </a:t>
+            </a:r>
+            <a:endParaRPr lang="en-US"/>
+          </a:p>
+        </p:txBody>
+      </p:sp>
+    </p:spTree>
+    <p:extLst>
+      <p:ext uri="{BB962C8B-B14F-4D97-AF65-F5344CB8AC3E}">
+        <p14:creationId xmlns:p14="http://schemas.microsoft.com/office/powerpoint/2010/main" val="1532621718"/>
+      </p:ext>
+    </p:extLst>
+  </p:cSld>
+  <p:clrMapOvr>
+    <a:masterClrMapping/>
+  </p:clrMapOvr>
+  <p:timing>
+    <p:tnLst>
+      <p:par>
+        <p:cTn id="1" dur="indefinite" restart="never" nodeType="tmRoot">
+          <p:childTnLst>
+            <p:seq concurrent="1" nextAc="seek">
+              <p:cTn id="2" dur="indefinite" nodeType="mainSeq">
+                <p:childTnLst>
+                  <p:par>
+                    <p:cTn id="3" fill="hold">
+                      <p:stCondLst>
+                        <p:cond delay="indefinite"/>
+                      </p:stCondLst>
+                      <p:childTnLst>
+                        <p:par>
+                          <p:cTn id="4" fill="hold">
+                            <p:stCondLst>
+                              <p:cond delay="0"/>
+                            </p:stCondLst>
+                            <p:childTnLst>
+                              <p:par>
+                                <p:cTn id="5" presetID="1" presetClass="entr" presetSubtype="0" fill="hold" grpId="0" nodeType="clickEffect">
+                                  <p:stCondLst>
+                                    <p:cond delay="0"/>
+                                  </p:stCondLst>
+                                  <p:childTnLst>
+                                    <p:set>
+                                      <p:cBhvr>
+                                        <p:cTn id="6" dur="1" fill="hold">
+                                          <p:stCondLst>
+                                            <p:cond delay="0"/>
+                                          </p:stCondLst>
+                                        </p:cTn>
+                                        <p:tgtEl>
+                                          <p:spTgt spid="15"/>
+                                        </p:tgtEl>
+                                        <p:attrNameLst>
+                                          <p:attrName>style.visibility</p:attrName>
+                                        </p:attrNameLst>
+                                      </p:cBhvr>
+                                      <p:to>
+                                        <p:strVal val="visible"/>
+                                      </p:to>
+                                    </p:set>
+                                  </p:childTnLst>
+                                </p:cTn>
+                              </p:par>
+                              <p:par>
+                                <p:cTn id="7" presetID="1" presetClass="entr" presetSubtype="0" fill="hold" grpId="0" nodeType="withEffect">
+                                  <p:stCondLst>
+                                    <p:cond delay="0"/>
+                                  </p:stCondLst>
+                                  <p:childTnLst>
+                                    <p:set>
+                                      <p:cBhvr>
+                                        <p:cTn id="8" dur="1" fill="hold">
+                                          <p:stCondLst>
+                                            <p:cond delay="0"/>
+                                          </p:stCondLst>
+                                        </p:cTn>
+                                        <p:tgtEl>
+                                          <p:spTgt spid="14"/>
+                                        </p:tgtEl>
+                                        <p:attrNameLst>
+                                          <p:attrName>style.visibility</p:attrName>
+                                        </p:attrNameLst>
+                                      </p:cBhvr>
+                                      <p:to>
+                                        <p:strVal val="visible"/>
+                                      </p:to>
+                                    </p:set>
+                                  </p:childTnLst>
+                                </p:cTn>
+                              </p:par>
+                            </p:childTnLst>
+                          </p:cTn>
+                        </p:par>
+                      </p:childTnLst>
+                    </p:cTn>
+                  </p:par>
+                  <p:par>
+                    <p:cTn id="9" fill="hold">
+                      <p:stCondLst>
+                        <p:cond delay="indefinite"/>
+                      </p:stCondLst>
+                      <p:childTnLst>
+                        <p:par>
+                          <p:cTn id="10" fill="hold">
+                            <p:stCondLst>
+                              <p:cond delay="0"/>
+                            </p:stCondLst>
+                            <p:childTnLst>
+                              <p:par>
+                                <p:cTn id="11" presetID="1" presetClass="entr" presetSubtype="0" fill="hold" grpId="0" nodeType="clickEffect">
+                                  <p:stCondLst>
+                                    <p:cond delay="0"/>
+                                  </p:stCondLst>
+                                  <p:childTnLst>
+                                    <p:set>
+                                      <p:cBhvr>
+                                        <p:cTn id="12" dur="1" fill="hold">
+                                          <p:stCondLst>
+                                            <p:cond delay="0"/>
+                                          </p:stCondLst>
+                                        </p:cTn>
+                                        <p:tgtEl>
+                                          <p:spTgt spid="16"/>
+                                        </p:tgtEl>
+                                        <p:attrNameLst>
+                                          <p:attrName>style.visibility</p:attrName>
+                                        </p:attrNameLst>
+                                      </p:cBhvr>
+                                      <p:to>
+                                        <p:strVal val="visible"/>
+                                      </p:to>
+                                    </p:set>
+                                  </p:childTnLst>
+                                </p:cTn>
+                              </p:par>
+                              <p:par>
+                                <p:cTn id="13" presetID="1" presetClass="entr" presetSubtype="0" fill="hold" grpId="0" nodeType="withEffect">
+                                  <p:stCondLst>
+                                    <p:cond delay="0"/>
+                                  </p:stCondLst>
+                                  <p:childTnLst>
+                                    <p:set>
+                                      <p:cBhvr>
+                                        <p:cTn id="14" dur="1" fill="hold">
+                                          <p:stCondLst>
+                                            <p:cond delay="0"/>
+                                          </p:stCondLst>
+                                        </p:cTn>
+                                        <p:tgtEl>
+                                          <p:spTgt spid="17"/>
+                                        </p:tgtEl>
+                                        <p:attrNameLst>
+                                          <p:attrName>style.visibility</p:attrName>
+                                        </p:attrNameLst>
+                                      </p:cBhvr>
+                                      <p:to>
+                                        <p:strVal val="visible"/>
+                                      </p:to>
+                                    </p:set>
+                                  </p:childTnLst>
+                                </p:cTn>
+                              </p:par>
+                            </p:childTnLst>
+                          </p:cTn>
+                        </p:par>
+                      </p:childTnLst>
+                    </p:cTn>
+                  </p:par>
+                </p:childTnLst>
+              </p:cTn>
+              <p:prevCondLst>
+                <p:cond evt="onPrev" delay="0">
+                  <p:tgtEl>
+                    <p:sldTgt/>
+                  </p:tgtEl>
+                </p:cond>
+              </p:prevCondLst>
+              <p:nextCondLst>
+                <p:cond evt="onNext" delay="0">
+                  <p:tgtEl>
+                    <p:sldTgt/>
+                  </p:tgtEl>
+                </p:cond>
+              </p:nextCondLst>
+            </p:seq>
+          </p:childTnLst>
+        </p:cTn>
+      </p:par>
+    </p:tnLst>
+    <p:bldLst>
+      <p:bldP spid="14" grpId="0"/>
+      <p:bldP spid="15" grpId="0"/>
+      <p:bldP spid="16" grpId="0"/>
+      <p:bldP spid="17" grpId="0"/>
+    </p:bldLst>
+  </p:timing>
+</p:sld>
+</file>
+
+<file path=ppt/slides/slide6.xml><?xml version="1.0" encoding="utf-8"?>
+<p:sld xmlns:a="http://schemas.openxmlformats.org/drawingml/2006/main" xmlns:r="http://schemas.openxmlformats.org/officeDocument/2006/relationships" xmlns:p="http://schemas.openxmlformats.org/presentationml/2006/main">
+  <p:cSld>
+    <p:spTree>
+      <p:nvGrpSpPr>
+        <p:cNvPr id="1" name=""/>
+        <p:cNvGrpSpPr/>
+        <p:nvPr/>
+      </p:nvGrpSpPr>
+      <p:grpSpPr>
+        <a:xfrm>
+          <a:off x="0" y="0"/>
+          <a:ext cx="0" cy="0"/>
+          <a:chOff x="0" y="0"/>
+          <a:chExt cx="0" cy="0"/>
+        </a:xfrm>
+      </p:grpSpPr>
+      <p:sp>
+        <p:nvSpPr>
+          <p:cNvPr id="2" name="Title 1">
+            <a:extLst>
+              <a:ext uri="{FF2B5EF4-FFF2-40B4-BE49-F238E27FC236}">
+                <a16:creationId xmlns:a16="http://schemas.microsoft.com/office/drawing/2014/main" id="{F02CEA0F-B2B3-10BC-EEA5-5F4BE9991764}"/>
+              </a:ext>
+            </a:extLst>
+          </p:cNvPr>
+          <p:cNvSpPr>
+            <a:spLocks noGrp="1"/>
+          </p:cNvSpPr>
+          <p:nvPr>
+            <p:ph type="title"/>
+          </p:nvPr>
+        </p:nvSpPr>
+        <p:spPr/>
+        <p:txBody>
+          <a:bodyPr/>
+          <a:lstStyle/>
+          <a:p>
+            <a:r>
+              <a:rPr lang="en-GB"/>
+              <a:t>Fluent APIs 🤝 Embedded DSLs</a:t>
+            </a:r>
+            <a:endParaRPr lang="en-US"/>
+          </a:p>
+        </p:txBody>
+      </p:sp>
+      <p:sp>
+        <p:nvSpPr>
+          <p:cNvPr id="4" name="Slide Number Placeholder 3">
+            <a:extLst>
+              <a:ext uri="{FF2B5EF4-FFF2-40B4-BE49-F238E27FC236}">
+                <a16:creationId xmlns:a16="http://schemas.microsoft.com/office/drawing/2014/main" id="{7DAFBB45-C607-5812-7C6A-3A40CBC1FECD}"/>
+              </a:ext>
+            </a:extLst>
+          </p:cNvPr>
+          <p:cNvSpPr>
+            <a:spLocks noGrp="1"/>
+          </p:cNvSpPr>
+          <p:nvPr>
+            <p:ph type="sldNum" sz="quarter" idx="12"/>
+          </p:nvPr>
+        </p:nvSpPr>
+        <p:spPr/>
+        <p:txBody>
+          <a:bodyPr/>
+          <a:lstStyle/>
+          <a:p>
+            <a:fld id="{52890E68-D690-4AC2-96FA-C0B5F80968DC}" type="slidenum">
+              <a:rPr lang="en-US" smtClean="0"/>
+              <a:t>6</a:t>
+            </a:fld>
+            <a:endParaRPr lang="en-US"/>
+          </a:p>
+        </p:txBody>
+      </p:sp>
+      <p:sp>
+        <p:nvSpPr>
+          <p:cNvPr id="5" name="Text Placeholder 4">
+            <a:extLst>
+              <a:ext uri="{FF2B5EF4-FFF2-40B4-BE49-F238E27FC236}">
+                <a16:creationId xmlns:a16="http://schemas.microsoft.com/office/drawing/2014/main" id="{22346461-09DF-54B5-9D46-8B488986E3F1}"/>
+              </a:ext>
+            </a:extLst>
+          </p:cNvPr>
+          <p:cNvSpPr>
+            <a:spLocks noGrp="1"/>
+          </p:cNvSpPr>
+          <p:nvPr>
+            <p:ph type="body" sz="quarter" idx="13"/>
+          </p:nvPr>
+        </p:nvSpPr>
+        <p:spPr/>
+        <p:txBody>
+          <a:bodyPr/>
+          <a:lstStyle/>
+          <a:p>
+            <a:r>
+              <a:rPr lang="en-GB"/>
+              <a:t>Background</a:t>
+            </a:r>
+            <a:endParaRPr lang="en-US"/>
+          </a:p>
+        </p:txBody>
+      </p:sp>
+      <p:sp>
+        <p:nvSpPr>
+          <p:cNvPr id="7" name="TextBox 6">
+            <a:extLst>
+              <a:ext uri="{FF2B5EF4-FFF2-40B4-BE49-F238E27FC236}">
+                <a16:creationId xmlns:a16="http://schemas.microsoft.com/office/drawing/2014/main" id="{7CF461BA-2C79-406F-0EB9-52C4D2911B0F}"/>
+              </a:ext>
+            </a:extLst>
+          </p:cNvPr>
+          <p:cNvSpPr txBox="1"/>
+          <p:nvPr/>
+        </p:nvSpPr>
+        <p:spPr>
+          <a:xfrm>
+            <a:off x="4146305" y="2124580"/>
+            <a:ext cx="3196004" cy="923330"/>
+          </a:xfrm>
+          <a:prstGeom prst="rect">
+            <a:avLst/>
+          </a:prstGeom>
+          <a:noFill/>
+        </p:spPr>
+        <p:txBody>
+          <a:bodyPr wrap="square" rtlCol="0">
+            <a:spAutoFit/>
+          </a:bodyPr>
+          <a:lstStyle/>
+          <a:p>
+            <a:r>
+              <a:rPr lang="en-GB">
+                <a:solidFill>
+                  <a:srgbClr val="CB0756"/>
+                </a:solidFill>
+                <a:latin typeface="Consolas" panose="020B0609020204030204" pitchFamily="49" charset="0"/>
+              </a:rPr>
+              <a:t>SELECT</a:t>
+            </a:r>
+            <a:r>
+              <a:rPr lang="en-GB">
+                <a:latin typeface="Consolas" panose="020B0609020204030204" pitchFamily="49" charset="0"/>
+              </a:rPr>
+              <a:t> name, birth_year </a:t>
+            </a:r>
+          </a:p>
+          <a:p>
+            <a:r>
+              <a:rPr lang="en-GB">
+                <a:solidFill>
+                  <a:srgbClr val="CB0756"/>
+                </a:solidFill>
+                <a:latin typeface="Consolas" panose="020B0609020204030204" pitchFamily="49" charset="0"/>
+              </a:rPr>
+              <a:t>FROM</a:t>
+            </a:r>
+            <a:r>
+              <a:rPr lang="en-GB">
+                <a:latin typeface="Consolas" panose="020B0609020204030204" pitchFamily="49" charset="0"/>
+              </a:rPr>
+              <a:t> Students </a:t>
+            </a:r>
+          </a:p>
+          <a:p>
+            <a:r>
+              <a:rPr lang="en-GB">
+                <a:solidFill>
+                  <a:srgbClr val="CB0756"/>
+                </a:solidFill>
+                <a:latin typeface="Consolas" panose="020B0609020204030204" pitchFamily="49" charset="0"/>
+              </a:rPr>
+              <a:t>WHERE</a:t>
+            </a:r>
+            <a:r>
+              <a:rPr lang="en-GB">
+                <a:latin typeface="Consolas" panose="020B0609020204030204" pitchFamily="49" charset="0"/>
+              </a:rPr>
+              <a:t> birth_year == </a:t>
+            </a:r>
+            <a:r>
+              <a:rPr lang="en-GB">
+                <a:solidFill>
+                  <a:srgbClr val="447DE4"/>
+                </a:solidFill>
+                <a:latin typeface="Consolas" panose="020B0609020204030204" pitchFamily="49" charset="0"/>
+              </a:rPr>
+              <a:t>2005</a:t>
+            </a:r>
+            <a:endParaRPr lang="en-US">
+              <a:solidFill>
+                <a:srgbClr val="447DE4"/>
+              </a:solidFill>
+              <a:latin typeface="Consolas" panose="020B0609020204030204" pitchFamily="49" charset="0"/>
+            </a:endParaRPr>
+          </a:p>
+        </p:txBody>
+      </p:sp>
+      <p:sp>
+        <p:nvSpPr>
+          <p:cNvPr id="9" name="TextBox 8">
+            <a:extLst>
+              <a:ext uri="{FF2B5EF4-FFF2-40B4-BE49-F238E27FC236}">
+                <a16:creationId xmlns:a16="http://schemas.microsoft.com/office/drawing/2014/main" id="{A214C915-B6FC-76E0-BADA-8D8F388FC913}"/>
+              </a:ext>
+            </a:extLst>
+          </p:cNvPr>
+          <p:cNvSpPr txBox="1"/>
+          <p:nvPr/>
+        </p:nvSpPr>
+        <p:spPr>
+          <a:xfrm>
+            <a:off x="838198" y="4159282"/>
+            <a:ext cx="4299438" cy="1200329"/>
+          </a:xfrm>
+          <a:prstGeom prst="rect">
+            <a:avLst/>
+          </a:prstGeom>
+          <a:noFill/>
+        </p:spPr>
+        <p:txBody>
+          <a:bodyPr wrap="square" rtlCol="0">
+            <a:spAutoFit/>
+          </a:bodyPr>
+          <a:lstStyle/>
+          <a:p>
+            <a:r>
+              <a:rPr lang="en-GB">
+                <a:latin typeface="Consolas" panose="020B0609020204030204" pitchFamily="49" charset="0"/>
+              </a:rPr>
+              <a:t>Query query = SQL.query(</a:t>
+            </a:r>
+          </a:p>
+          <a:p>
+            <a:r>
+              <a:rPr lang="en-GB">
+                <a:latin typeface="Consolas" panose="020B0609020204030204" pitchFamily="49" charset="0"/>
+              </a:rPr>
+              <a:t>  </a:t>
+            </a:r>
+            <a:r>
+              <a:rPr lang="en-GB">
+                <a:solidFill>
+                  <a:srgbClr val="129204"/>
+                </a:solidFill>
+                <a:latin typeface="Consolas" panose="020B0609020204030204" pitchFamily="49" charset="0"/>
+              </a:rPr>
+              <a:t>"SELECT name, birth_year "</a:t>
+            </a:r>
+            <a:r>
+              <a:rPr lang="en-GB">
+                <a:latin typeface="Consolas" panose="020B0609020204030204" pitchFamily="49" charset="0"/>
+              </a:rPr>
+              <a:t>  </a:t>
+            </a:r>
+          </a:p>
+          <a:p>
+            <a:r>
+              <a:rPr lang="en-GB">
+                <a:latin typeface="Consolas" panose="020B0609020204030204" pitchFamily="49" charset="0"/>
+              </a:rPr>
+              <a:t>  + </a:t>
+            </a:r>
+            <a:r>
+              <a:rPr lang="en-GB">
+                <a:solidFill>
+                  <a:srgbClr val="129204"/>
+                </a:solidFill>
+                <a:latin typeface="Consolas" panose="020B0609020204030204" pitchFamily="49" charset="0"/>
+              </a:rPr>
+              <a:t>"FROM Students "</a:t>
+            </a:r>
+            <a:r>
+              <a:rPr lang="en-GB">
+                <a:latin typeface="Consolas" panose="020B0609020204030204" pitchFamily="49" charset="0"/>
+              </a:rPr>
+              <a:t> </a:t>
+            </a:r>
+          </a:p>
+          <a:p>
+            <a:r>
+              <a:rPr lang="en-GB">
+                <a:latin typeface="Consolas" panose="020B0609020204030204" pitchFamily="49" charset="0"/>
+              </a:rPr>
+              <a:t>  + </a:t>
+            </a:r>
+            <a:r>
+              <a:rPr lang="en-GB">
+                <a:solidFill>
+                  <a:srgbClr val="129204"/>
+                </a:solidFill>
+                <a:latin typeface="Consolas" panose="020B0609020204030204" pitchFamily="49" charset="0"/>
+              </a:rPr>
+              <a:t>"WHERE birth_year == 2005"</a:t>
+            </a:r>
+            <a:r>
+              <a:rPr lang="en-GB">
+                <a:latin typeface="Consolas" panose="020B0609020204030204" pitchFamily="49" charset="0"/>
+              </a:rPr>
+              <a:t>);</a:t>
+            </a:r>
+            <a:endParaRPr lang="en-US">
+              <a:latin typeface="Consolas" panose="020B0609020204030204" pitchFamily="49" charset="0"/>
+            </a:endParaRPr>
+          </a:p>
+        </p:txBody>
+      </p:sp>
+      <p:sp>
+        <p:nvSpPr>
+          <p:cNvPr id="11" name="TextBox 10">
+            <a:extLst>
+              <a:ext uri="{FF2B5EF4-FFF2-40B4-BE49-F238E27FC236}">
+                <a16:creationId xmlns:a16="http://schemas.microsoft.com/office/drawing/2014/main" id="{4189D9EC-A5FB-96A1-EA14-EC302E02061C}"/>
+              </a:ext>
+            </a:extLst>
+          </p:cNvPr>
+          <p:cNvSpPr txBox="1"/>
+          <p:nvPr/>
+        </p:nvSpPr>
+        <p:spPr>
+          <a:xfrm>
+            <a:off x="6365629" y="4159281"/>
+            <a:ext cx="4988171" cy="1200329"/>
+          </a:xfrm>
+          <a:prstGeom prst="rect">
+            <a:avLst/>
+          </a:prstGeom>
+          <a:noFill/>
+        </p:spPr>
+        <p:txBody>
+          <a:bodyPr wrap="square" rtlCol="0">
+            <a:spAutoFit/>
+          </a:bodyPr>
+          <a:lstStyle/>
+          <a:p>
+            <a:r>
+              <a:rPr lang="en-GB">
+                <a:latin typeface="Consolas" panose="020B0609020204030204" pitchFamily="49" charset="0"/>
+              </a:rPr>
+              <a:t>Query query = SQL</a:t>
+            </a:r>
+          </a:p>
+          <a:p>
+            <a:r>
+              <a:rPr lang="en-GB">
+                <a:latin typeface="Consolas" panose="020B0609020204030204" pitchFamily="49" charset="0"/>
+              </a:rPr>
+              <a:t>  .select(</a:t>
+            </a:r>
+            <a:r>
+              <a:rPr lang="en-GB">
+                <a:solidFill>
+                  <a:srgbClr val="129204"/>
+                </a:solidFill>
+                <a:latin typeface="Consolas" panose="020B0609020204030204" pitchFamily="49" charset="0"/>
+              </a:rPr>
+              <a:t>"name, birth_year"</a:t>
+            </a:r>
+            <a:r>
+              <a:rPr lang="en-GB">
+                <a:latin typeface="Consolas" panose="020B0609020204030204" pitchFamily="49" charset="0"/>
+              </a:rPr>
+              <a:t>)</a:t>
+            </a:r>
+          </a:p>
+          <a:p>
+            <a:r>
+              <a:rPr lang="en-GB">
+                <a:latin typeface="Consolas" panose="020B0609020204030204" pitchFamily="49" charset="0"/>
+              </a:rPr>
+              <a:t>  .from(</a:t>
+            </a:r>
+            <a:r>
+              <a:rPr lang="en-GB">
+                <a:solidFill>
+                  <a:srgbClr val="129204"/>
+                </a:solidFill>
+                <a:latin typeface="Consolas" panose="020B0609020204030204" pitchFamily="49" charset="0"/>
+              </a:rPr>
+              <a:t>"Students"</a:t>
+            </a:r>
+            <a:r>
+              <a:rPr lang="en-GB">
+                <a:latin typeface="Consolas" panose="020B0609020204030204" pitchFamily="49" charset="0"/>
+              </a:rPr>
+              <a:t>)</a:t>
+            </a:r>
+          </a:p>
+          <a:p>
+            <a:r>
+              <a:rPr lang="en-GB">
+                <a:latin typeface="Consolas" panose="020B0609020204030204" pitchFamily="49" charset="0"/>
+              </a:rPr>
+              <a:t>  .where(</a:t>
+            </a:r>
+            <a:r>
+              <a:rPr lang="en-GB">
+                <a:solidFill>
+                  <a:srgbClr val="129204"/>
+                </a:solidFill>
+                <a:latin typeface="Consolas" panose="020B0609020204030204" pitchFamily="49" charset="0"/>
+              </a:rPr>
+              <a:t>"birth_year == 2005"</a:t>
+            </a:r>
+            <a:r>
+              <a:rPr lang="en-GB">
+                <a:latin typeface="Consolas" panose="020B0609020204030204" pitchFamily="49" charset="0"/>
+              </a:rPr>
+              <a:t>);</a:t>
+            </a:r>
+          </a:p>
+        </p:txBody>
+      </p:sp>
+      <p:cxnSp>
+        <p:nvCxnSpPr>
+          <p:cNvPr id="6" name="Straight Arrow Connector 5">
+            <a:extLst>
+              <a:ext uri="{FF2B5EF4-FFF2-40B4-BE49-F238E27FC236}">
+                <a16:creationId xmlns:a16="http://schemas.microsoft.com/office/drawing/2014/main" id="{EF7DE014-3CBE-A3D1-3582-1312464434B6}"/>
+              </a:ext>
+            </a:extLst>
+          </p:cNvPr>
+          <p:cNvCxnSpPr>
+            <a:cxnSpLocks/>
+          </p:cNvCxnSpPr>
+          <p:nvPr/>
+        </p:nvCxnSpPr>
+        <p:spPr>
+          <a:xfrm flipH="1">
+            <a:off x="3288323" y="3047910"/>
+            <a:ext cx="857982" cy="1111371"/>
+          </a:xfrm>
+          <a:prstGeom prst="straightConnector1">
+            <a:avLst/>
+          </a:prstGeom>
+          <a:ln>
+            <a:tailEnd type="triangle"/>
+          </a:ln>
+        </p:spPr>
+        <p:style>
+          <a:lnRef idx="2">
+            <a:schemeClr val="dk1"/>
+          </a:lnRef>
+          <a:fillRef idx="0">
+            <a:schemeClr val="dk1"/>
+          </a:fillRef>
+          <a:effectRef idx="1">
+            <a:schemeClr val="dk1"/>
+          </a:effectRef>
+          <a:fontRef idx="minor">
+            <a:schemeClr val="tx1"/>
+          </a:fontRef>
+        </p:style>
+      </p:cxnSp>
+      <p:cxnSp>
+        <p:nvCxnSpPr>
+          <p:cNvPr id="10" name="Straight Arrow Connector 9">
+            <a:extLst>
+              <a:ext uri="{FF2B5EF4-FFF2-40B4-BE49-F238E27FC236}">
+                <a16:creationId xmlns:a16="http://schemas.microsoft.com/office/drawing/2014/main" id="{24832EAD-7BF5-E71C-C499-E102F59CE812}"/>
+              </a:ext>
+            </a:extLst>
+          </p:cNvPr>
+          <p:cNvCxnSpPr>
+            <a:cxnSpLocks/>
+          </p:cNvCxnSpPr>
+          <p:nvPr/>
+        </p:nvCxnSpPr>
+        <p:spPr>
+          <a:xfrm>
+            <a:off x="7342309" y="3047910"/>
+            <a:ext cx="857982" cy="1111371"/>
+          </a:xfrm>
+          <a:prstGeom prst="straightConnector1">
+            <a:avLst/>
+          </a:prstGeom>
+          <a:ln>
+            <a:tailEnd type="triangle"/>
+          </a:ln>
+        </p:spPr>
+        <p:style>
+          <a:lnRef idx="2">
+            <a:schemeClr val="dk1"/>
+          </a:lnRef>
+          <a:fillRef idx="0">
+            <a:schemeClr val="dk1"/>
+          </a:fillRef>
+          <a:effectRef idx="1">
+            <a:schemeClr val="dk1"/>
+          </a:effectRef>
+          <a:fontRef idx="minor">
+            <a:schemeClr val="tx1"/>
+          </a:fontRef>
+        </p:style>
+      </p:cxnSp>
+      <p:sp>
+        <p:nvSpPr>
+          <p:cNvPr id="12" name="TextBox 11">
+            <a:extLst>
+              <a:ext uri="{FF2B5EF4-FFF2-40B4-BE49-F238E27FC236}">
+                <a16:creationId xmlns:a16="http://schemas.microsoft.com/office/drawing/2014/main" id="{14495246-4373-35B0-70B2-C8487ADAF2D6}"/>
+              </a:ext>
+            </a:extLst>
+          </p:cNvPr>
+          <p:cNvSpPr txBox="1"/>
+          <p:nvPr/>
+        </p:nvSpPr>
+        <p:spPr>
+          <a:xfrm>
+            <a:off x="1817159" y="3328284"/>
+            <a:ext cx="1883208" cy="369332"/>
+          </a:xfrm>
+          <a:prstGeom prst="rect">
+            <a:avLst/>
+          </a:prstGeom>
+          <a:noFill/>
+        </p:spPr>
+        <p:txBody>
+          <a:bodyPr wrap="none" rtlCol="0">
+            <a:spAutoFit/>
+          </a:bodyPr>
+          <a:lstStyle/>
+          <a:p>
+            <a:r>
+              <a:rPr lang="en-GB"/>
+              <a:t>naïve embedding</a:t>
+            </a:r>
+            <a:endParaRPr lang="en-US"/>
+          </a:p>
+        </p:txBody>
+      </p:sp>
+      <p:sp>
+        <p:nvSpPr>
+          <p:cNvPr id="14" name="TextBox 13">
+            <a:extLst>
+              <a:ext uri="{FF2B5EF4-FFF2-40B4-BE49-F238E27FC236}">
+                <a16:creationId xmlns:a16="http://schemas.microsoft.com/office/drawing/2014/main" id="{E2A79767-24AC-D11F-2F92-2FB098457C34}"/>
+              </a:ext>
+            </a:extLst>
+          </p:cNvPr>
+          <p:cNvSpPr txBox="1"/>
+          <p:nvPr/>
+        </p:nvSpPr>
+        <p:spPr>
+          <a:xfrm>
+            <a:off x="7892141" y="3328284"/>
+            <a:ext cx="1935145" cy="369332"/>
+          </a:xfrm>
+          <a:prstGeom prst="rect">
+            <a:avLst/>
+          </a:prstGeom>
+          <a:noFill/>
+        </p:spPr>
+        <p:txBody>
+          <a:bodyPr wrap="none" rtlCol="0">
+            <a:spAutoFit/>
+          </a:bodyPr>
+          <a:lstStyle/>
+          <a:p>
+            <a:r>
+              <a:rPr lang="en-GB"/>
+              <a:t>fluent embedding</a:t>
+            </a:r>
+            <a:endParaRPr lang="en-US"/>
+          </a:p>
+        </p:txBody>
+      </p:sp>
+    </p:spTree>
+    <p:extLst>
+      <p:ext uri="{BB962C8B-B14F-4D97-AF65-F5344CB8AC3E}">
+        <p14:creationId xmlns:p14="http://schemas.microsoft.com/office/powerpoint/2010/main" val="1181523592"/>
+      </p:ext>
+    </p:extLst>
+  </p:cSld>
+  <p:clrMapOvr>
+    <a:masterClrMapping/>
+  </p:clrMapOvr>
+  <p:timing>
+    <p:tnLst>
+      <p:par>
+        <p:cTn id="1" dur="indefinite" restart="never" nodeType="tmRoot">
+          <p:childTnLst>
+            <p:seq concurrent="1" nextAc="seek">
+              <p:cTn id="2" dur="indefinite" nodeType="mainSeq">
+                <p:childTnLst>
+                  <p:par>
+                    <p:cTn id="3" fill="hold">
+                      <p:stCondLst>
+                        <p:cond delay="indefinite"/>
+                      </p:stCondLst>
+                      <p:childTnLst>
+                        <p:par>
+                          <p:cTn id="4" fill="hold">
+                            <p:stCondLst>
+                              <p:cond delay="0"/>
+                            </p:stCondLst>
+                            <p:childTnLst>
+                              <p:par>
+                                <p:cTn id="5" presetID="1" presetClass="entr" presetSubtype="0" fill="hold" nodeType="clickEffect">
+                                  <p:stCondLst>
+                                    <p:cond delay="0"/>
+                                  </p:stCondLst>
+                                  <p:childTnLst>
+                                    <p:set>
+                                      <p:cBhvr>
+                                        <p:cTn id="6" dur="1" fill="hold">
+                                          <p:stCondLst>
+                                            <p:cond delay="0"/>
+                                          </p:stCondLst>
+                                        </p:cTn>
+                                        <p:tgtEl>
+                                          <p:spTgt spid="6"/>
+                                        </p:tgtEl>
+                                        <p:attrNameLst>
+                                          <p:attrName>style.visibility</p:attrName>
+                                        </p:attrNameLst>
+                                      </p:cBhvr>
+                                      <p:to>
+                                        <p:strVal val="visible"/>
+                                      </p:to>
+                                    </p:set>
+                                  </p:childTnLst>
+                                </p:cTn>
+                              </p:par>
+                              <p:par>
+                                <p:cTn id="7" presetID="1" presetClass="entr" presetSubtype="0" fill="hold" grpId="0" nodeType="withEffect">
+                                  <p:stCondLst>
+                                    <p:cond delay="0"/>
+                                  </p:stCondLst>
+                                  <p:childTnLst>
+                                    <p:set>
+                                      <p:cBhvr>
+                                        <p:cTn id="8" dur="1" fill="hold">
+                                          <p:stCondLst>
+                                            <p:cond delay="0"/>
+                                          </p:stCondLst>
+                                        </p:cTn>
+                                        <p:tgtEl>
+                                          <p:spTgt spid="12"/>
+                                        </p:tgtEl>
+                                        <p:attrNameLst>
+                                          <p:attrName>style.visibility</p:attrName>
+                                        </p:attrNameLst>
+                                      </p:cBhvr>
+                                      <p:to>
+                                        <p:strVal val="visible"/>
+                                      </p:to>
+                                    </p:set>
+                                  </p:childTnLst>
+                                </p:cTn>
+                              </p:par>
+                              <p:par>
+                                <p:cTn id="9" presetID="1" presetClass="entr" presetSubtype="0" fill="hold" grpId="0" nodeType="withEffect">
+                                  <p:stCondLst>
+                                    <p:cond delay="0"/>
+                                  </p:stCondLst>
+                                  <p:childTnLst>
+                                    <p:set>
+                                      <p:cBhvr>
+                                        <p:cTn id="10" dur="1" fill="hold">
+                                          <p:stCondLst>
+                                            <p:cond delay="0"/>
+                                          </p:stCondLst>
+                                        </p:cTn>
+                                        <p:tgtEl>
+                                          <p:spTgt spid="9"/>
+                                        </p:tgtEl>
+                                        <p:attrNameLst>
+                                          <p:attrName>style.visibility</p:attrName>
+                                        </p:attrNameLst>
+                                      </p:cBhvr>
+                                      <p:to>
+                                        <p:strVal val="visible"/>
+                                      </p:to>
+                                    </p:set>
+                                  </p:childTnLst>
+                                </p:cTn>
+                              </p:par>
+                            </p:childTnLst>
+                          </p:cTn>
+                        </p:par>
+                      </p:childTnLst>
+                    </p:cTn>
+                  </p:par>
+                  <p:par>
+                    <p:cTn id="11" fill="hold">
+                      <p:stCondLst>
+                        <p:cond delay="indefinite"/>
+                      </p:stCondLst>
+                      <p:childTnLst>
+                        <p:par>
+                          <p:cTn id="12" fill="hold">
+                            <p:stCondLst>
+                              <p:cond delay="0"/>
+                            </p:stCondLst>
+                            <p:childTnLst>
+                              <p:par>
+                                <p:cTn id="13" presetID="1" presetClass="entr" presetSubtype="0" fill="hold" grpId="0" nodeType="clickEffect">
+                                  <p:stCondLst>
+                                    <p:cond delay="0"/>
+                                  </p:stCondLst>
+                                  <p:childTnLst>
+                                    <p:set>
+                                      <p:cBhvr>
+                                        <p:cTn id="14" dur="1" fill="hold">
+                                          <p:stCondLst>
+                                            <p:cond delay="0"/>
+                                          </p:stCondLst>
+                                        </p:cTn>
+                                        <p:tgtEl>
+                                          <p:spTgt spid="14"/>
+                                        </p:tgtEl>
+                                        <p:attrNameLst>
+                                          <p:attrName>style.visibility</p:attrName>
+                                        </p:attrNameLst>
+                                      </p:cBhvr>
+                                      <p:to>
+                                        <p:strVal val="visible"/>
+                                      </p:to>
+                                    </p:set>
+                                  </p:childTnLst>
+                                </p:cTn>
+                              </p:par>
+                              <p:par>
+                                <p:cTn id="15" presetID="1" presetClass="entr" presetSubtype="0" fill="hold" nodeType="withEffect">
+                                  <p:stCondLst>
+                                    <p:cond delay="0"/>
+                                  </p:stCondLst>
+                                  <p:childTnLst>
+                                    <p:set>
+                                      <p:cBhvr>
+                                        <p:cTn id="16" dur="1" fill="hold">
+                                          <p:stCondLst>
+                                            <p:cond delay="0"/>
+                                          </p:stCondLst>
+                                        </p:cTn>
+                                        <p:tgtEl>
+                                          <p:spTgt spid="10"/>
+                                        </p:tgtEl>
+                                        <p:attrNameLst>
+                                          <p:attrName>style.visibility</p:attrName>
+                                        </p:attrNameLst>
+                                      </p:cBhvr>
+                                      <p:to>
+                                        <p:strVal val="visible"/>
+                                      </p:to>
+                                    </p:set>
+                                  </p:childTnLst>
+                                </p:cTn>
+                              </p:par>
+                              <p:par>
+                                <p:cTn id="17" presetID="1" presetClass="entr" presetSubtype="0" fill="hold" grpId="0" nodeType="withEffect">
+                                  <p:stCondLst>
+                                    <p:cond delay="0"/>
+                                  </p:stCondLst>
+                                  <p:childTnLst>
+                                    <p:set>
+                                      <p:cBhvr>
+                                        <p:cTn id="18" dur="1" fill="hold">
+                                          <p:stCondLst>
+                                            <p:cond delay="0"/>
+                                          </p:stCondLst>
+                                        </p:cTn>
+                                        <p:tgtEl>
+                                          <p:spTgt spid="11"/>
+                                        </p:tgtEl>
+                                        <p:attrNameLst>
+                                          <p:attrName>style.visibility</p:attrName>
+                                        </p:attrNameLst>
+                                      </p:cBhvr>
+                                      <p:to>
+                                        <p:strVal val="visible"/>
+                                      </p:to>
+                                    </p:set>
+                                  </p:childTnLst>
+                                </p:cTn>
+                              </p:par>
+                            </p:childTnLst>
+                          </p:cTn>
+                        </p:par>
+                      </p:childTnLst>
+                    </p:cTn>
+                  </p:par>
+                </p:childTnLst>
+              </p:cTn>
+              <p:prevCondLst>
+                <p:cond evt="onPrev" delay="0">
+                  <p:tgtEl>
+                    <p:sldTgt/>
+                  </p:tgtEl>
+                </p:cond>
+              </p:prevCondLst>
+              <p:nextCondLst>
+                <p:cond evt="onNext" delay="0">
+                  <p:tgtEl>
+                    <p:sldTgt/>
+                  </p:tgtEl>
+                </p:cond>
+              </p:nextCondLst>
+            </p:seq>
+          </p:childTnLst>
+        </p:cTn>
+      </p:par>
+    </p:tnLst>
+    <p:bldLst>
+      <p:bldP spid="9" grpId="0"/>
+      <p:bldP spid="11" grpId="0"/>
+      <p:bldP spid="12" grpId="0"/>
+      <p:bldP spid="14" grpId="0"/>
+    </p:bldLst>
+  </p:timing>
+</p:sld>
+</file>
+
+<file path=ppt/slides/slide7.xml><?xml version="1.0" encoding="utf-8"?>
+<p:sld xmlns:a="http://schemas.openxmlformats.org/drawingml/2006/main" xmlns:r="http://schemas.openxmlformats.org/officeDocument/2006/relationships" xmlns:p="http://schemas.openxmlformats.org/presentationml/2006/main">
+  <p:cSld>
+    <p:spTree>
+      <p:nvGrpSpPr>
+        <p:cNvPr id="1" name="">
+          <a:extLst>
+            <a:ext uri="{FF2B5EF4-FFF2-40B4-BE49-F238E27FC236}">
+              <a16:creationId xmlns:a16="http://schemas.microsoft.com/office/drawing/2014/main" id="{74461ABC-2EA7-C235-3557-C5B9C0110B84}"/>
+            </a:ext>
+          </a:extLst>
+        </p:cNvPr>
+        <p:cNvGrpSpPr/>
+        <p:nvPr/>
+      </p:nvGrpSpPr>
+      <p:grpSpPr>
+        <a:xfrm>
+          <a:off x="0" y="0"/>
+          <a:ext cx="0" cy="0"/>
+          <a:chOff x="0" y="0"/>
+          <a:chExt cx="0" cy="0"/>
+        </a:xfrm>
+      </p:grpSpPr>
+      <p:sp>
+        <p:nvSpPr>
+          <p:cNvPr id="2" name="Title 1">
+            <a:extLst>
+              <a:ext uri="{FF2B5EF4-FFF2-40B4-BE49-F238E27FC236}">
+                <a16:creationId xmlns:a16="http://schemas.microsoft.com/office/drawing/2014/main" id="{D9E197C5-2EB8-C59D-B398-1337B2DEA7BE}"/>
+              </a:ext>
+            </a:extLst>
+          </p:cNvPr>
+          <p:cNvSpPr>
+            <a:spLocks noGrp="1"/>
+          </p:cNvSpPr>
+          <p:nvPr>
+            <p:ph type="title"/>
+          </p:nvPr>
+        </p:nvSpPr>
+        <p:spPr/>
+        <p:txBody>
+          <a:bodyPr/>
+          <a:lstStyle/>
+          <a:p>
+            <a:r>
+              <a:rPr lang="en-GB"/>
+              <a:t>The Tradeoff</a:t>
+            </a:r>
+            <a:endParaRPr lang="en-US"/>
+          </a:p>
+        </p:txBody>
+      </p:sp>
+      <p:sp>
+        <p:nvSpPr>
+          <p:cNvPr id="4" name="Slide Number Placeholder 3">
+            <a:extLst>
+              <a:ext uri="{FF2B5EF4-FFF2-40B4-BE49-F238E27FC236}">
+                <a16:creationId xmlns:a16="http://schemas.microsoft.com/office/drawing/2014/main" id="{670E5763-67F9-3969-1176-32D3A60D3A93}"/>
+              </a:ext>
+            </a:extLst>
+          </p:cNvPr>
+          <p:cNvSpPr>
+            <a:spLocks noGrp="1"/>
+          </p:cNvSpPr>
+          <p:nvPr>
+            <p:ph type="sldNum" sz="quarter" idx="12"/>
+          </p:nvPr>
+        </p:nvSpPr>
+        <p:spPr/>
+        <p:txBody>
+          <a:bodyPr/>
+          <a:lstStyle/>
+          <a:p>
+            <a:fld id="{52890E68-D690-4AC2-96FA-C0B5F80968DC}" type="slidenum">
+              <a:rPr lang="en-US" smtClean="0"/>
+              <a:t>7</a:t>
+            </a:fld>
+            <a:endParaRPr lang="en-US"/>
+          </a:p>
+        </p:txBody>
+      </p:sp>
+      <p:sp>
+        <p:nvSpPr>
+          <p:cNvPr id="5" name="Text Placeholder 4">
+            <a:extLst>
+              <a:ext uri="{FF2B5EF4-FFF2-40B4-BE49-F238E27FC236}">
+                <a16:creationId xmlns:a16="http://schemas.microsoft.com/office/drawing/2014/main" id="{B46B4804-32F3-C3AA-A814-D89F0950291B}"/>
+              </a:ext>
+            </a:extLst>
+          </p:cNvPr>
+          <p:cNvSpPr>
+            <a:spLocks noGrp="1"/>
+          </p:cNvSpPr>
+          <p:nvPr>
+            <p:ph type="body" sz="quarter" idx="13"/>
+          </p:nvPr>
+        </p:nvSpPr>
+        <p:spPr/>
+        <p:txBody>
+          <a:bodyPr/>
+          <a:lstStyle/>
+          <a:p>
+            <a:r>
+              <a:rPr lang="en-GB"/>
+              <a:t>Background</a:t>
+            </a:r>
+            <a:endParaRPr lang="en-US"/>
+          </a:p>
+        </p:txBody>
+      </p:sp>
+      <p:sp>
+        <p:nvSpPr>
+          <p:cNvPr id="23" name="Text Placeholder 2">
+            <a:extLst>
+              <a:ext uri="{FF2B5EF4-FFF2-40B4-BE49-F238E27FC236}">
+                <a16:creationId xmlns:a16="http://schemas.microsoft.com/office/drawing/2014/main" id="{6BE623D3-CB17-F0E1-8D96-B47F8A3AE5D9}"/>
+              </a:ext>
+            </a:extLst>
+          </p:cNvPr>
+          <p:cNvSpPr>
+            <a:spLocks noGrp="1"/>
+          </p:cNvSpPr>
+          <p:nvPr/>
+        </p:nvSpPr>
+        <p:spPr>
+          <a:xfrm>
+            <a:off x="838200" y="1690688"/>
+            <a:ext cx="5157787" cy="823912"/>
+          </a:xfrm>
+          <a:prstGeom prst="rect">
+            <a:avLst/>
+          </a:prstGeom>
+        </p:spPr>
+        <p:txBody>
+          <a:bodyPr vert="horz" lIns="91440" tIns="45720" rIns="91440" bIns="45720" rtlCol="0" anchor="b">
+            <a:normAutofit/>
+          </a:bodyPr>
+          <a:lstStyle>
+            <a:lvl1pPr marL="0" indent="0" algn="l" defTabSz="914400" rtl="0" eaLnBrk="1" latinLnBrk="0" hangingPunct="1">
+              <a:lnSpc>
+                <a:spcPct val="90000"/>
+              </a:lnSpc>
+              <a:spcBef>
+                <a:spcPts val="1000"/>
+              </a:spcBef>
+              <a:buFont typeface="Arial" panose="020B0604020202020204" pitchFamily="34" charset="0"/>
+              <a:buNone/>
+              <a:defRPr sz="2400" b="1" kern="1200">
+                <a:solidFill>
+                  <a:schemeClr val="tx1"/>
+                </a:solidFill>
+                <a:latin typeface="+mn-lt"/>
+                <a:ea typeface="+mn-ea"/>
+                <a:cs typeface="+mn-cs"/>
+              </a:defRPr>
+            </a:lvl1pPr>
+            <a:lvl2pPr marL="457200" indent="0" algn="l" defTabSz="914400" rtl="0" eaLnBrk="1" latinLnBrk="0" hangingPunct="1">
+              <a:lnSpc>
+                <a:spcPct val="90000"/>
+              </a:lnSpc>
+              <a:spcBef>
+                <a:spcPts val="500"/>
+              </a:spcBef>
+              <a:buFont typeface="Arial" panose="020B0604020202020204" pitchFamily="34" charset="0"/>
+              <a:buNone/>
+              <a:defRPr sz="2000" b="1" kern="1200">
+                <a:solidFill>
+                  <a:schemeClr val="tx1"/>
+                </a:solidFill>
+                <a:latin typeface="+mn-lt"/>
+                <a:ea typeface="+mn-ea"/>
+                <a:cs typeface="+mn-cs"/>
+              </a:defRPr>
+            </a:lvl2pPr>
+            <a:lvl3pPr marL="914400" indent="0" algn="l" defTabSz="914400" rtl="0" eaLnBrk="1" latinLnBrk="0" hangingPunct="1">
+              <a:lnSpc>
+                <a:spcPct val="90000"/>
+              </a:lnSpc>
+              <a:spcBef>
+                <a:spcPts val="500"/>
+              </a:spcBef>
+              <a:buFont typeface="Arial" panose="020B0604020202020204" pitchFamily="34" charset="0"/>
+              <a:buNone/>
+              <a:defRPr sz="1800" b="1" kern="1200">
+                <a:solidFill>
+                  <a:schemeClr val="tx1"/>
+                </a:solidFill>
+                <a:latin typeface="+mn-lt"/>
+                <a:ea typeface="+mn-ea"/>
+                <a:cs typeface="+mn-cs"/>
+              </a:defRPr>
+            </a:lvl3pPr>
+            <a:lvl4pPr marL="1371600" indent="0" algn="l" defTabSz="914400" rtl="0" eaLnBrk="1" latinLnBrk="0" hangingPunct="1">
+              <a:lnSpc>
+                <a:spcPct val="90000"/>
+              </a:lnSpc>
+              <a:spcBef>
+                <a:spcPts val="500"/>
+              </a:spcBef>
+              <a:buFont typeface="Arial" panose="020B0604020202020204" pitchFamily="34" charset="0"/>
+              <a:buNone/>
+              <a:defRPr sz="1600" b="1" kern="1200">
+                <a:solidFill>
+                  <a:schemeClr val="tx1"/>
+                </a:solidFill>
+                <a:latin typeface="+mn-lt"/>
+                <a:ea typeface="+mn-ea"/>
+                <a:cs typeface="+mn-cs"/>
+              </a:defRPr>
+            </a:lvl4pPr>
+            <a:lvl5pPr marL="1828800" indent="0" algn="l" defTabSz="914400" rtl="0" eaLnBrk="1" latinLnBrk="0" hangingPunct="1">
+              <a:lnSpc>
+                <a:spcPct val="90000"/>
+              </a:lnSpc>
+              <a:spcBef>
+                <a:spcPts val="500"/>
+              </a:spcBef>
+              <a:buFont typeface="Arial" panose="020B0604020202020204" pitchFamily="34" charset="0"/>
+              <a:buNone/>
+              <a:defRPr sz="1600" b="1" kern="1200">
+                <a:solidFill>
+                  <a:schemeClr val="tx1"/>
+                </a:solidFill>
+                <a:latin typeface="+mn-lt"/>
+                <a:ea typeface="+mn-ea"/>
+                <a:cs typeface="+mn-cs"/>
+              </a:defRPr>
+            </a:lvl5pPr>
+            <a:lvl6pPr marL="2286000" indent="0" algn="l" defTabSz="914400" rtl="0" eaLnBrk="1" latinLnBrk="0" hangingPunct="1">
+              <a:lnSpc>
+                <a:spcPct val="90000"/>
+              </a:lnSpc>
+              <a:spcBef>
+                <a:spcPts val="500"/>
+              </a:spcBef>
+              <a:buFont typeface="Arial" panose="020B0604020202020204" pitchFamily="34" charset="0"/>
+              <a:buNone/>
+              <a:defRPr sz="1600" b="1" kern="1200">
+                <a:solidFill>
+                  <a:schemeClr val="tx1"/>
+                </a:solidFill>
+                <a:latin typeface="+mn-lt"/>
+                <a:ea typeface="+mn-ea"/>
+                <a:cs typeface="+mn-cs"/>
+              </a:defRPr>
+            </a:lvl6pPr>
+            <a:lvl7pPr marL="2743200" indent="0" algn="l" defTabSz="914400" rtl="0" eaLnBrk="1" latinLnBrk="0" hangingPunct="1">
+              <a:lnSpc>
+                <a:spcPct val="90000"/>
+              </a:lnSpc>
+              <a:spcBef>
+                <a:spcPts val="500"/>
+              </a:spcBef>
+              <a:buFont typeface="Arial" panose="020B0604020202020204" pitchFamily="34" charset="0"/>
+              <a:buNone/>
+              <a:defRPr sz="1600" b="1" kern="1200">
+                <a:solidFill>
+                  <a:schemeClr val="tx1"/>
+                </a:solidFill>
+                <a:latin typeface="+mn-lt"/>
+                <a:ea typeface="+mn-ea"/>
+                <a:cs typeface="+mn-cs"/>
+              </a:defRPr>
+            </a:lvl7pPr>
+            <a:lvl8pPr marL="3200400" indent="0" algn="l" defTabSz="914400" rtl="0" eaLnBrk="1" latinLnBrk="0" hangingPunct="1">
+              <a:lnSpc>
+                <a:spcPct val="90000"/>
+              </a:lnSpc>
+              <a:spcBef>
+                <a:spcPts val="500"/>
+              </a:spcBef>
+              <a:buFont typeface="Arial" panose="020B0604020202020204" pitchFamily="34" charset="0"/>
+              <a:buNone/>
+              <a:defRPr sz="1600" b="1" kern="1200">
+                <a:solidFill>
+                  <a:schemeClr val="tx1"/>
+                </a:solidFill>
+                <a:latin typeface="+mn-lt"/>
+                <a:ea typeface="+mn-ea"/>
+                <a:cs typeface="+mn-cs"/>
+              </a:defRPr>
+            </a:lvl8pPr>
+            <a:lvl9pPr marL="3657600" indent="0" algn="l" defTabSz="914400" rtl="0" eaLnBrk="1" latinLnBrk="0" hangingPunct="1">
+              <a:lnSpc>
+                <a:spcPct val="90000"/>
+              </a:lnSpc>
+              <a:spcBef>
+                <a:spcPts val="500"/>
+              </a:spcBef>
+              <a:buFont typeface="Arial" panose="020B0604020202020204" pitchFamily="34" charset="0"/>
+              <a:buNone/>
+              <a:defRPr sz="1600" b="1" kern="1200">
+                <a:solidFill>
+                  <a:schemeClr val="tx1"/>
+                </a:solidFill>
+                <a:latin typeface="+mn-lt"/>
+                <a:ea typeface="+mn-ea"/>
+                <a:cs typeface="+mn-cs"/>
+              </a:defRPr>
+            </a:lvl9pPr>
+          </a:lstStyle>
+          <a:p>
+            <a:r>
+              <a:rPr lang="en-GB"/>
+              <a:t>Advantages</a:t>
+            </a:r>
+            <a:endParaRPr lang="en-US"/>
+          </a:p>
+        </p:txBody>
+      </p:sp>
+      <p:sp>
+        <p:nvSpPr>
+          <p:cNvPr id="25" name="Content Placeholder 3">
+            <a:extLst>
+              <a:ext uri="{FF2B5EF4-FFF2-40B4-BE49-F238E27FC236}">
+                <a16:creationId xmlns:a16="http://schemas.microsoft.com/office/drawing/2014/main" id="{46B6F0F8-599F-A243-43AB-BEB3E175E26C}"/>
+              </a:ext>
+            </a:extLst>
+          </p:cNvPr>
+          <p:cNvSpPr>
+            <a:spLocks noGrp="1"/>
+          </p:cNvSpPr>
+          <p:nvPr/>
+        </p:nvSpPr>
+        <p:spPr>
+          <a:xfrm>
+            <a:off x="838200" y="2514600"/>
+            <a:ext cx="5157787" cy="3684588"/>
+          </a:xfrm>
+          <a:prstGeom prst="rect">
+            <a:avLst/>
+          </a:prstGeom>
+        </p:spPr>
+        <p:txBody>
+          <a:bodyPr vert="horz" lIns="91440" tIns="45720" rIns="91440" bIns="45720" rtlCol="0">
+            <a:normAutofit/>
+          </a:bodyPr>
+          <a:lstStyle>
+            <a:lvl1pPr marL="228600" indent="-228600" algn="l" defTabSz="914400" rtl="0" eaLnBrk="1" latinLnBrk="0" hangingPunct="1">
+              <a:lnSpc>
+                <a:spcPct val="90000"/>
+              </a:lnSpc>
+              <a:spcBef>
+                <a:spcPts val="1000"/>
+              </a:spcBef>
+              <a:buFont typeface="Arial" panose="020B0604020202020204" pitchFamily="34" charset="0"/>
+              <a:buChar char="•"/>
+              <a:defRPr sz="2800" kern="1200">
+                <a:solidFill>
+                  <a:schemeClr val="tx1"/>
+                </a:solidFill>
+                <a:latin typeface="+mn-lt"/>
+                <a:ea typeface="+mn-ea"/>
+                <a:cs typeface="+mn-cs"/>
+              </a:defRPr>
+            </a:lvl1pPr>
+            <a:lvl2pPr marL="685800" indent="-228600" algn="l" defTabSz="914400" rtl="0" eaLnBrk="1" latinLnBrk="0" hangingPunct="1">
+              <a:lnSpc>
+                <a:spcPct val="90000"/>
+              </a:lnSpc>
+              <a:spcBef>
+                <a:spcPts val="500"/>
+              </a:spcBef>
+              <a:buFont typeface="Arial" panose="020B0604020202020204" pitchFamily="34" charset="0"/>
+              <a:buChar char="•"/>
+              <a:defRPr sz="2400" kern="1200">
+                <a:solidFill>
+                  <a:schemeClr val="tx1"/>
+                </a:solidFill>
+                <a:latin typeface="+mn-lt"/>
+                <a:ea typeface="+mn-ea"/>
+                <a:cs typeface="+mn-cs"/>
+              </a:defRPr>
+            </a:lvl2pPr>
+            <a:lvl3pPr marL="1143000" indent="-228600" algn="l" defTabSz="914400" rtl="0" eaLnBrk="1" latinLnBrk="0" hangingPunct="1">
+              <a:lnSpc>
+                <a:spcPct val="90000"/>
+              </a:lnSpc>
+              <a:spcBef>
+                <a:spcPts val="500"/>
+              </a:spcBef>
+              <a:buFont typeface="Arial" panose="020B0604020202020204" pitchFamily="34" charset="0"/>
+              <a:buChar char="•"/>
+              <a:defRPr sz="2000" kern="1200">
+                <a:solidFill>
+                  <a:schemeClr val="tx1"/>
+                </a:solidFill>
+                <a:latin typeface="+mn-lt"/>
+                <a:ea typeface="+mn-ea"/>
+                <a:cs typeface="+mn-cs"/>
+              </a:defRPr>
+            </a:lvl3pPr>
+            <a:lvl4pPr marL="1600200" indent="-228600" algn="l" defTabSz="914400" rtl="0" eaLnBrk="1" latinLnBrk="0" hangingPunct="1">
+              <a:lnSpc>
+                <a:spcPct val="90000"/>
+              </a:lnSpc>
+              <a:spcBef>
+                <a:spcPts val="500"/>
+              </a:spcBef>
+              <a:buFont typeface="Arial" panose="020B0604020202020204" pitchFamily="34" charset="0"/>
+              <a:buChar char="•"/>
+              <a:defRPr sz="1800" kern="1200">
+                <a:solidFill>
+                  <a:schemeClr val="tx1"/>
+                </a:solidFill>
+                <a:latin typeface="+mn-lt"/>
+                <a:ea typeface="+mn-ea"/>
+                <a:cs typeface="+mn-cs"/>
+              </a:defRPr>
+            </a:lvl4pPr>
+            <a:lvl5pPr marL="2057400" indent="-228600" algn="l" defTabSz="914400" rtl="0" eaLnBrk="1" latinLnBrk="0" hangingPunct="1">
+              <a:lnSpc>
+                <a:spcPct val="90000"/>
+              </a:lnSpc>
+              <a:spcBef>
+                <a:spcPts val="500"/>
+              </a:spcBef>
+              <a:buFont typeface="Arial" panose="020B0604020202020204" pitchFamily="34" charset="0"/>
+              <a:buChar char="•"/>
+              <a:defRPr sz="1800" kern="1200">
+                <a:solidFill>
+                  <a:schemeClr val="tx1"/>
+                </a:solidFill>
+                <a:latin typeface="+mn-lt"/>
+                <a:ea typeface="+mn-ea"/>
+                <a:cs typeface="+mn-cs"/>
+              </a:defRPr>
+            </a:lvl5pPr>
+            <a:lvl6pPr marL="2514600" indent="-228600" algn="l" defTabSz="914400" rtl="0" eaLnBrk="1" latinLnBrk="0" hangingPunct="1">
+              <a:lnSpc>
+                <a:spcPct val="90000"/>
+              </a:lnSpc>
+              <a:spcBef>
+                <a:spcPts val="500"/>
+              </a:spcBef>
+              <a:buFont typeface="Arial" panose="020B0604020202020204" pitchFamily="34" charset="0"/>
+              <a:buChar char="•"/>
+              <a:defRPr sz="1800" kern="1200">
+                <a:solidFill>
+                  <a:schemeClr val="tx1"/>
+                </a:solidFill>
+                <a:latin typeface="+mn-lt"/>
+                <a:ea typeface="+mn-ea"/>
+                <a:cs typeface="+mn-cs"/>
+              </a:defRPr>
+            </a:lvl6pPr>
+            <a:lvl7pPr marL="2971800" indent="-228600" algn="l" defTabSz="914400" rtl="0" eaLnBrk="1" latinLnBrk="0" hangingPunct="1">
+              <a:lnSpc>
+                <a:spcPct val="90000"/>
+              </a:lnSpc>
+              <a:spcBef>
+                <a:spcPts val="500"/>
+              </a:spcBef>
+              <a:buFont typeface="Arial" panose="020B0604020202020204" pitchFamily="34" charset="0"/>
+              <a:buChar char="•"/>
+              <a:defRPr sz="1800" kern="1200">
+                <a:solidFill>
+                  <a:schemeClr val="tx1"/>
+                </a:solidFill>
+                <a:latin typeface="+mn-lt"/>
+                <a:ea typeface="+mn-ea"/>
+                <a:cs typeface="+mn-cs"/>
+              </a:defRPr>
+            </a:lvl7pPr>
+            <a:lvl8pPr marL="3429000" indent="-228600" algn="l" defTabSz="914400" rtl="0" eaLnBrk="1" latinLnBrk="0" hangingPunct="1">
+              <a:lnSpc>
+                <a:spcPct val="90000"/>
+              </a:lnSpc>
+              <a:spcBef>
+                <a:spcPts val="500"/>
+              </a:spcBef>
+              <a:buFont typeface="Arial" panose="020B0604020202020204" pitchFamily="34" charset="0"/>
+              <a:buChar char="•"/>
+              <a:defRPr sz="1800" kern="1200">
+                <a:solidFill>
+                  <a:schemeClr val="tx1"/>
+                </a:solidFill>
+                <a:latin typeface="+mn-lt"/>
+                <a:ea typeface="+mn-ea"/>
+                <a:cs typeface="+mn-cs"/>
+              </a:defRPr>
+            </a:lvl8pPr>
+            <a:lvl9pPr marL="3886200" indent="-228600" algn="l" defTabSz="914400" rtl="0" eaLnBrk="1" latinLnBrk="0" hangingPunct="1">
+              <a:lnSpc>
+                <a:spcPct val="90000"/>
+              </a:lnSpc>
+              <a:spcBef>
+                <a:spcPts val="500"/>
+              </a:spcBef>
+              <a:buFont typeface="Arial" panose="020B0604020202020204" pitchFamily="34" charset="0"/>
+              <a:buChar char="•"/>
+              <a:defRPr sz="1800" kern="1200">
+                <a:solidFill>
+                  <a:schemeClr val="tx1"/>
+                </a:solidFill>
+                <a:latin typeface="+mn-lt"/>
+                <a:ea typeface="+mn-ea"/>
+                <a:cs typeface="+mn-cs"/>
+              </a:defRPr>
+            </a:lvl9pPr>
+          </a:lstStyle>
+          <a:p>
+            <a:r>
+              <a:rPr lang="en-GB"/>
+              <a:t>Less syntax to remember</a:t>
+            </a:r>
+          </a:p>
+          <a:p>
+            <a:r>
+              <a:rPr lang="en-GB"/>
+              <a:t>Dynamic data support</a:t>
+            </a:r>
+          </a:p>
+          <a:p>
+            <a:endParaRPr lang="en-GB"/>
+          </a:p>
+          <a:p>
+            <a:endParaRPr lang="en-GB"/>
+          </a:p>
+          <a:p>
+            <a:pPr marL="0" indent="0">
+              <a:buNone/>
+            </a:pPr>
+            <a:endParaRPr lang="en-US"/>
+          </a:p>
+        </p:txBody>
+      </p:sp>
+      <p:sp>
+        <p:nvSpPr>
+          <p:cNvPr id="27" name="Text Placeholder 4">
+            <a:extLst>
+              <a:ext uri="{FF2B5EF4-FFF2-40B4-BE49-F238E27FC236}">
+                <a16:creationId xmlns:a16="http://schemas.microsoft.com/office/drawing/2014/main" id="{FC071023-1BDE-00EE-B05D-6A36FF942A25}"/>
+              </a:ext>
+            </a:extLst>
+          </p:cNvPr>
+          <p:cNvSpPr>
+            <a:spLocks noGrp="1"/>
+          </p:cNvSpPr>
+          <p:nvPr/>
+        </p:nvSpPr>
+        <p:spPr>
+          <a:xfrm>
+            <a:off x="6170612" y="1690688"/>
+            <a:ext cx="5183188" cy="823912"/>
+          </a:xfrm>
+          <a:prstGeom prst="rect">
+            <a:avLst/>
+          </a:prstGeom>
+        </p:spPr>
+        <p:txBody>
+          <a:bodyPr vert="horz" lIns="91440" tIns="45720" rIns="91440" bIns="45720" rtlCol="0" anchor="b">
+            <a:normAutofit/>
+          </a:bodyPr>
+          <a:lstStyle>
+            <a:lvl1pPr marL="0" indent="0" algn="l" defTabSz="914400" rtl="0" eaLnBrk="1" latinLnBrk="0" hangingPunct="1">
+              <a:lnSpc>
+                <a:spcPct val="90000"/>
+              </a:lnSpc>
+              <a:spcBef>
+                <a:spcPts val="1000"/>
+              </a:spcBef>
+              <a:buFont typeface="Arial" panose="020B0604020202020204" pitchFamily="34" charset="0"/>
+              <a:buNone/>
+              <a:defRPr sz="2400" b="1" kern="1200">
+                <a:solidFill>
+                  <a:schemeClr val="tx1"/>
+                </a:solidFill>
+                <a:latin typeface="+mn-lt"/>
+                <a:ea typeface="+mn-ea"/>
+                <a:cs typeface="+mn-cs"/>
+              </a:defRPr>
+            </a:lvl1pPr>
+            <a:lvl2pPr marL="457200" indent="0" algn="l" defTabSz="914400" rtl="0" eaLnBrk="1" latinLnBrk="0" hangingPunct="1">
+              <a:lnSpc>
+                <a:spcPct val="90000"/>
+              </a:lnSpc>
+              <a:spcBef>
+                <a:spcPts val="500"/>
+              </a:spcBef>
+              <a:buFont typeface="Arial" panose="020B0604020202020204" pitchFamily="34" charset="0"/>
+              <a:buNone/>
+              <a:defRPr sz="2000" b="1" kern="1200">
+                <a:solidFill>
+                  <a:schemeClr val="tx1"/>
+                </a:solidFill>
+                <a:latin typeface="+mn-lt"/>
+                <a:ea typeface="+mn-ea"/>
+                <a:cs typeface="+mn-cs"/>
+              </a:defRPr>
+            </a:lvl2pPr>
+            <a:lvl3pPr marL="914400" indent="0" algn="l" defTabSz="914400" rtl="0" eaLnBrk="1" latinLnBrk="0" hangingPunct="1">
+              <a:lnSpc>
+                <a:spcPct val="90000"/>
+              </a:lnSpc>
+              <a:spcBef>
+                <a:spcPts val="500"/>
+              </a:spcBef>
+              <a:buFont typeface="Arial" panose="020B0604020202020204" pitchFamily="34" charset="0"/>
+              <a:buNone/>
+              <a:defRPr sz="1800" b="1" kern="1200">
+                <a:solidFill>
+                  <a:schemeClr val="tx1"/>
+                </a:solidFill>
+                <a:latin typeface="+mn-lt"/>
+                <a:ea typeface="+mn-ea"/>
+                <a:cs typeface="+mn-cs"/>
+              </a:defRPr>
+            </a:lvl3pPr>
+            <a:lvl4pPr marL="1371600" indent="0" algn="l" defTabSz="914400" rtl="0" eaLnBrk="1" latinLnBrk="0" hangingPunct="1">
+              <a:lnSpc>
+                <a:spcPct val="90000"/>
+              </a:lnSpc>
+              <a:spcBef>
+                <a:spcPts val="500"/>
+              </a:spcBef>
+              <a:buFont typeface="Arial" panose="020B0604020202020204" pitchFamily="34" charset="0"/>
+              <a:buNone/>
+              <a:defRPr sz="1600" b="1" kern="1200">
+                <a:solidFill>
+                  <a:schemeClr val="tx1"/>
+                </a:solidFill>
+                <a:latin typeface="+mn-lt"/>
+                <a:ea typeface="+mn-ea"/>
+                <a:cs typeface="+mn-cs"/>
+              </a:defRPr>
+            </a:lvl4pPr>
+            <a:lvl5pPr marL="1828800" indent="0" algn="l" defTabSz="914400" rtl="0" eaLnBrk="1" latinLnBrk="0" hangingPunct="1">
+              <a:lnSpc>
+                <a:spcPct val="90000"/>
+              </a:lnSpc>
+              <a:spcBef>
+                <a:spcPts val="500"/>
+              </a:spcBef>
+              <a:buFont typeface="Arial" panose="020B0604020202020204" pitchFamily="34" charset="0"/>
+              <a:buNone/>
+              <a:defRPr sz="1600" b="1" kern="1200">
+                <a:solidFill>
+                  <a:schemeClr val="tx1"/>
+                </a:solidFill>
+                <a:latin typeface="+mn-lt"/>
+                <a:ea typeface="+mn-ea"/>
+                <a:cs typeface="+mn-cs"/>
+              </a:defRPr>
+            </a:lvl5pPr>
+            <a:lvl6pPr marL="2286000" indent="0" algn="l" defTabSz="914400" rtl="0" eaLnBrk="1" latinLnBrk="0" hangingPunct="1">
+              <a:lnSpc>
+                <a:spcPct val="90000"/>
+              </a:lnSpc>
+              <a:spcBef>
+                <a:spcPts val="500"/>
+              </a:spcBef>
+              <a:buFont typeface="Arial" panose="020B0604020202020204" pitchFamily="34" charset="0"/>
+              <a:buNone/>
+              <a:defRPr sz="1600" b="1" kern="1200">
+                <a:solidFill>
+                  <a:schemeClr val="tx1"/>
+                </a:solidFill>
+                <a:latin typeface="+mn-lt"/>
+                <a:ea typeface="+mn-ea"/>
+                <a:cs typeface="+mn-cs"/>
+              </a:defRPr>
+            </a:lvl6pPr>
+            <a:lvl7pPr marL="2743200" indent="0" algn="l" defTabSz="914400" rtl="0" eaLnBrk="1" latinLnBrk="0" hangingPunct="1">
+              <a:lnSpc>
+                <a:spcPct val="90000"/>
+              </a:lnSpc>
+              <a:spcBef>
+                <a:spcPts val="500"/>
+              </a:spcBef>
+              <a:buFont typeface="Arial" panose="020B0604020202020204" pitchFamily="34" charset="0"/>
+              <a:buNone/>
+              <a:defRPr sz="1600" b="1" kern="1200">
+                <a:solidFill>
+                  <a:schemeClr val="tx1"/>
+                </a:solidFill>
+                <a:latin typeface="+mn-lt"/>
+                <a:ea typeface="+mn-ea"/>
+                <a:cs typeface="+mn-cs"/>
+              </a:defRPr>
+            </a:lvl7pPr>
+            <a:lvl8pPr marL="3200400" indent="0" algn="l" defTabSz="914400" rtl="0" eaLnBrk="1" latinLnBrk="0" hangingPunct="1">
+              <a:lnSpc>
+                <a:spcPct val="90000"/>
+              </a:lnSpc>
+              <a:spcBef>
+                <a:spcPts val="500"/>
+              </a:spcBef>
+              <a:buFont typeface="Arial" panose="020B0604020202020204" pitchFamily="34" charset="0"/>
+              <a:buNone/>
+              <a:defRPr sz="1600" b="1" kern="1200">
+                <a:solidFill>
+                  <a:schemeClr val="tx1"/>
+                </a:solidFill>
+                <a:latin typeface="+mn-lt"/>
+                <a:ea typeface="+mn-ea"/>
+                <a:cs typeface="+mn-cs"/>
+              </a:defRPr>
+            </a:lvl8pPr>
+            <a:lvl9pPr marL="3657600" indent="0" algn="l" defTabSz="914400" rtl="0" eaLnBrk="1" latinLnBrk="0" hangingPunct="1">
+              <a:lnSpc>
+                <a:spcPct val="90000"/>
+              </a:lnSpc>
+              <a:spcBef>
+                <a:spcPts val="500"/>
+              </a:spcBef>
+              <a:buFont typeface="Arial" panose="020B0604020202020204" pitchFamily="34" charset="0"/>
+              <a:buNone/>
+              <a:defRPr sz="1600" b="1" kern="1200">
+                <a:solidFill>
+                  <a:schemeClr val="tx1"/>
+                </a:solidFill>
+                <a:latin typeface="+mn-lt"/>
+                <a:ea typeface="+mn-ea"/>
+                <a:cs typeface="+mn-cs"/>
+              </a:defRPr>
+            </a:lvl9pPr>
+          </a:lstStyle>
+          <a:p>
+            <a:r>
+              <a:rPr lang="en-GB"/>
+              <a:t>Disadvantages</a:t>
+            </a:r>
+            <a:endParaRPr lang="en-US"/>
+          </a:p>
+        </p:txBody>
+      </p:sp>
+      <p:sp>
+        <p:nvSpPr>
+          <p:cNvPr id="29" name="Content Placeholder 5">
+            <a:extLst>
+              <a:ext uri="{FF2B5EF4-FFF2-40B4-BE49-F238E27FC236}">
+                <a16:creationId xmlns:a16="http://schemas.microsoft.com/office/drawing/2014/main" id="{E58F0A3B-F734-C183-AB2F-E7A5AAF15B3A}"/>
+              </a:ext>
+            </a:extLst>
+          </p:cNvPr>
+          <p:cNvSpPr>
+            <a:spLocks noGrp="1"/>
+          </p:cNvSpPr>
+          <p:nvPr/>
+        </p:nvSpPr>
+        <p:spPr>
+          <a:xfrm>
+            <a:off x="6170612" y="2514600"/>
+            <a:ext cx="5183188" cy="3684588"/>
+          </a:xfrm>
+          <a:prstGeom prst="rect">
+            <a:avLst/>
+          </a:prstGeom>
+        </p:spPr>
+        <p:txBody>
+          <a:bodyPr vert="horz" lIns="91440" tIns="45720" rIns="91440" bIns="45720" rtlCol="0">
+            <a:normAutofit/>
+          </a:bodyPr>
+          <a:lstStyle>
+            <a:lvl1pPr marL="228600" indent="-228600" algn="l" defTabSz="914400" rtl="0" eaLnBrk="1" latinLnBrk="0" hangingPunct="1">
+              <a:lnSpc>
+                <a:spcPct val="90000"/>
+              </a:lnSpc>
+              <a:spcBef>
+                <a:spcPts val="1000"/>
+              </a:spcBef>
+              <a:buFont typeface="Arial" panose="020B0604020202020204" pitchFamily="34" charset="0"/>
+              <a:buChar char="•"/>
+              <a:defRPr sz="2800" kern="1200">
+                <a:solidFill>
+                  <a:schemeClr val="tx1"/>
+                </a:solidFill>
+                <a:latin typeface="+mn-lt"/>
+                <a:ea typeface="+mn-ea"/>
+                <a:cs typeface="+mn-cs"/>
+              </a:defRPr>
+            </a:lvl1pPr>
+            <a:lvl2pPr marL="685800" indent="-228600" algn="l" defTabSz="914400" rtl="0" eaLnBrk="1" latinLnBrk="0" hangingPunct="1">
+              <a:lnSpc>
+                <a:spcPct val="90000"/>
+              </a:lnSpc>
+              <a:spcBef>
+                <a:spcPts val="500"/>
+              </a:spcBef>
+              <a:buFont typeface="Arial" panose="020B0604020202020204" pitchFamily="34" charset="0"/>
+              <a:buChar char="•"/>
+              <a:defRPr sz="2400" kern="1200">
+                <a:solidFill>
+                  <a:schemeClr val="tx1"/>
+                </a:solidFill>
+                <a:latin typeface="+mn-lt"/>
+                <a:ea typeface="+mn-ea"/>
+                <a:cs typeface="+mn-cs"/>
+              </a:defRPr>
+            </a:lvl2pPr>
+            <a:lvl3pPr marL="1143000" indent="-228600" algn="l" defTabSz="914400" rtl="0" eaLnBrk="1" latinLnBrk="0" hangingPunct="1">
+              <a:lnSpc>
+                <a:spcPct val="90000"/>
+              </a:lnSpc>
+              <a:spcBef>
+                <a:spcPts val="500"/>
+              </a:spcBef>
+              <a:buFont typeface="Arial" panose="020B0604020202020204" pitchFamily="34" charset="0"/>
+              <a:buChar char="•"/>
+              <a:defRPr sz="2000" kern="1200">
+                <a:solidFill>
+                  <a:schemeClr val="tx1"/>
+                </a:solidFill>
+                <a:latin typeface="+mn-lt"/>
+                <a:ea typeface="+mn-ea"/>
+                <a:cs typeface="+mn-cs"/>
+              </a:defRPr>
+            </a:lvl3pPr>
+            <a:lvl4pPr marL="1600200" indent="-228600" algn="l" defTabSz="914400" rtl="0" eaLnBrk="1" latinLnBrk="0" hangingPunct="1">
+              <a:lnSpc>
+                <a:spcPct val="90000"/>
+              </a:lnSpc>
+              <a:spcBef>
+                <a:spcPts val="500"/>
+              </a:spcBef>
+              <a:buFont typeface="Arial" panose="020B0604020202020204" pitchFamily="34" charset="0"/>
+              <a:buChar char="•"/>
+              <a:defRPr sz="1800" kern="1200">
+                <a:solidFill>
+                  <a:schemeClr val="tx1"/>
+                </a:solidFill>
+                <a:latin typeface="+mn-lt"/>
+                <a:ea typeface="+mn-ea"/>
+                <a:cs typeface="+mn-cs"/>
+              </a:defRPr>
+            </a:lvl4pPr>
+            <a:lvl5pPr marL="2057400" indent="-228600" algn="l" defTabSz="914400" rtl="0" eaLnBrk="1" latinLnBrk="0" hangingPunct="1">
+              <a:lnSpc>
+                <a:spcPct val="90000"/>
+              </a:lnSpc>
+              <a:spcBef>
+                <a:spcPts val="500"/>
+              </a:spcBef>
+              <a:buFont typeface="Arial" panose="020B0604020202020204" pitchFamily="34" charset="0"/>
+              <a:buChar char="•"/>
+              <a:defRPr sz="1800" kern="1200">
+                <a:solidFill>
+                  <a:schemeClr val="tx1"/>
+                </a:solidFill>
+                <a:latin typeface="+mn-lt"/>
+                <a:ea typeface="+mn-ea"/>
+                <a:cs typeface="+mn-cs"/>
+              </a:defRPr>
+            </a:lvl5pPr>
+            <a:lvl6pPr marL="2514600" indent="-228600" algn="l" defTabSz="914400" rtl="0" eaLnBrk="1" latinLnBrk="0" hangingPunct="1">
+              <a:lnSpc>
+                <a:spcPct val="90000"/>
+              </a:lnSpc>
+              <a:spcBef>
+                <a:spcPts val="500"/>
+              </a:spcBef>
+              <a:buFont typeface="Arial" panose="020B0604020202020204" pitchFamily="34" charset="0"/>
+              <a:buChar char="•"/>
+              <a:defRPr sz="1800" kern="1200">
+                <a:solidFill>
+                  <a:schemeClr val="tx1"/>
+                </a:solidFill>
+                <a:latin typeface="+mn-lt"/>
+                <a:ea typeface="+mn-ea"/>
+                <a:cs typeface="+mn-cs"/>
+              </a:defRPr>
+            </a:lvl6pPr>
+            <a:lvl7pPr marL="2971800" indent="-228600" algn="l" defTabSz="914400" rtl="0" eaLnBrk="1" latinLnBrk="0" hangingPunct="1">
+              <a:lnSpc>
+                <a:spcPct val="90000"/>
+              </a:lnSpc>
+              <a:spcBef>
+                <a:spcPts val="500"/>
+              </a:spcBef>
+              <a:buFont typeface="Arial" panose="020B0604020202020204" pitchFamily="34" charset="0"/>
+              <a:buChar char="•"/>
+              <a:defRPr sz="1800" kern="1200">
+                <a:solidFill>
+                  <a:schemeClr val="tx1"/>
+                </a:solidFill>
+                <a:latin typeface="+mn-lt"/>
+                <a:ea typeface="+mn-ea"/>
+                <a:cs typeface="+mn-cs"/>
+              </a:defRPr>
+            </a:lvl7pPr>
+            <a:lvl8pPr marL="3429000" indent="-228600" algn="l" defTabSz="914400" rtl="0" eaLnBrk="1" latinLnBrk="0" hangingPunct="1">
+              <a:lnSpc>
+                <a:spcPct val="90000"/>
+              </a:lnSpc>
+              <a:spcBef>
+                <a:spcPts val="500"/>
+              </a:spcBef>
+              <a:buFont typeface="Arial" panose="020B0604020202020204" pitchFamily="34" charset="0"/>
+              <a:buChar char="•"/>
+              <a:defRPr sz="1800" kern="1200">
+                <a:solidFill>
+                  <a:schemeClr val="tx1"/>
+                </a:solidFill>
+                <a:latin typeface="+mn-lt"/>
+                <a:ea typeface="+mn-ea"/>
+                <a:cs typeface="+mn-cs"/>
+              </a:defRPr>
+            </a:lvl8pPr>
+            <a:lvl9pPr marL="3886200" indent="-228600" algn="l" defTabSz="914400" rtl="0" eaLnBrk="1" latinLnBrk="0" hangingPunct="1">
+              <a:lnSpc>
+                <a:spcPct val="90000"/>
+              </a:lnSpc>
+              <a:spcBef>
+                <a:spcPts val="500"/>
+              </a:spcBef>
+              <a:buFont typeface="Arial" panose="020B0604020202020204" pitchFamily="34" charset="0"/>
+              <a:buChar char="•"/>
+              <a:defRPr sz="1800" kern="1200">
+                <a:solidFill>
+                  <a:schemeClr val="tx1"/>
+                </a:solidFill>
+                <a:latin typeface="+mn-lt"/>
+                <a:ea typeface="+mn-ea"/>
+                <a:cs typeface="+mn-cs"/>
+              </a:defRPr>
+            </a:lvl9pPr>
+          </a:lstStyle>
+          <a:p>
+            <a:r>
+              <a:rPr lang="en-GB"/>
+              <a:t>NO static safety guarantees</a:t>
+            </a:r>
+          </a:p>
+          <a:p>
+            <a:pPr lvl="1"/>
+            <a:r>
+              <a:rPr lang="en-GB"/>
+              <a:t>NO syntax checking</a:t>
+            </a:r>
+          </a:p>
+          <a:p>
+            <a:pPr lvl="1"/>
+            <a:r>
+              <a:rPr lang="en-GB"/>
+              <a:t>NO type checking</a:t>
+            </a:r>
+          </a:p>
+          <a:p>
+            <a:pPr lvl="1"/>
+            <a:r>
+              <a:rPr lang="en-GB"/>
+              <a:t>NO semantic analysis</a:t>
+            </a:r>
+            <a:endParaRPr lang="en-US"/>
+          </a:p>
+        </p:txBody>
+      </p:sp>
+      <p:grpSp>
+        <p:nvGrpSpPr>
+          <p:cNvPr id="35" name="Group 34">
+            <a:extLst>
+              <a:ext uri="{FF2B5EF4-FFF2-40B4-BE49-F238E27FC236}">
+                <a16:creationId xmlns:a16="http://schemas.microsoft.com/office/drawing/2014/main" id="{EB6C3CE0-CBE4-925A-C87C-734F7E820A5D}"/>
+              </a:ext>
+            </a:extLst>
+          </p:cNvPr>
+          <p:cNvGrpSpPr/>
+          <p:nvPr/>
+        </p:nvGrpSpPr>
+        <p:grpSpPr>
+          <a:xfrm>
+            <a:off x="1088065" y="3543245"/>
+            <a:ext cx="4658056" cy="1305854"/>
+            <a:chOff x="1092507" y="3059668"/>
+            <a:chExt cx="4658056" cy="1305854"/>
+          </a:xfrm>
+        </p:grpSpPr>
+        <p:sp>
+          <p:nvSpPr>
+            <p:cNvPr id="31" name="TextBox 30">
+              <a:extLst>
+                <a:ext uri="{FF2B5EF4-FFF2-40B4-BE49-F238E27FC236}">
+                  <a16:creationId xmlns:a16="http://schemas.microsoft.com/office/drawing/2014/main" id="{8F548EF0-59F9-45BF-3480-4F57D9880DF8}"/>
+                </a:ext>
+              </a:extLst>
+            </p:cNvPr>
+            <p:cNvSpPr txBox="1"/>
+            <p:nvPr/>
+          </p:nvSpPr>
+          <p:spPr>
+            <a:xfrm>
+              <a:off x="1260231" y="3059668"/>
+              <a:ext cx="4490332" cy="369332"/>
+            </a:xfrm>
+            <a:prstGeom prst="rect">
+              <a:avLst/>
+            </a:prstGeom>
+            <a:noFill/>
+          </p:spPr>
+          <p:txBody>
+            <a:bodyPr wrap="none" rtlCol="0">
+              <a:spAutoFit/>
+            </a:bodyPr>
+            <a:lstStyle/>
+            <a:p>
+              <a:r>
+                <a:rPr lang="en-GB">
+                  <a:latin typeface="Consolas" panose="020B0609020204030204" pitchFamily="49" charset="0"/>
+                </a:rPr>
+                <a:t>SQL.select(</a:t>
+              </a:r>
+              <a:r>
+                <a:rPr lang="en-GB" u="sng">
+                  <a:uFill>
+                    <a:solidFill>
+                      <a:srgbClr val="0070C0"/>
+                    </a:solidFill>
+                  </a:uFill>
+                  <a:latin typeface="Consolas" panose="020B0609020204030204" pitchFamily="49" charset="0"/>
+                </a:rPr>
+                <a:t>field</a:t>
+              </a:r>
+              <a:r>
+                <a:rPr lang="en-GB">
+                  <a:latin typeface="Consolas" panose="020B0609020204030204" pitchFamily="49" charset="0"/>
+                </a:rPr>
+                <a:t>).from(</a:t>
+              </a:r>
+              <a:r>
+                <a:rPr lang="en-GB">
+                  <a:solidFill>
+                    <a:srgbClr val="129204"/>
+                  </a:solidFill>
+                  <a:latin typeface="Consolas" panose="020B0609020204030204" pitchFamily="49" charset="0"/>
+                </a:rPr>
+                <a:t>"Students"</a:t>
+              </a:r>
+              <a:r>
+                <a:rPr lang="en-GB">
+                  <a:latin typeface="Consolas" panose="020B0609020204030204" pitchFamily="49" charset="0"/>
+                </a:rPr>
+                <a:t>)</a:t>
+              </a:r>
+              <a:endParaRPr lang="en-US">
+                <a:latin typeface="Consolas" panose="020B0609020204030204" pitchFamily="49" charset="0"/>
+              </a:endParaRPr>
+            </a:p>
+          </p:txBody>
+        </p:sp>
+        <p:sp>
+          <p:nvSpPr>
+            <p:cNvPr id="33" name="TextBox 32">
+              <a:extLst>
+                <a:ext uri="{FF2B5EF4-FFF2-40B4-BE49-F238E27FC236}">
+                  <a16:creationId xmlns:a16="http://schemas.microsoft.com/office/drawing/2014/main" id="{D473CCAA-F5FE-5029-F72B-9D9E810B4791}"/>
+                </a:ext>
+              </a:extLst>
+            </p:cNvPr>
+            <p:cNvSpPr txBox="1"/>
+            <p:nvPr/>
+          </p:nvSpPr>
+          <p:spPr>
+            <a:xfrm>
+              <a:off x="1092507" y="3780747"/>
+              <a:ext cx="1822935" cy="584775"/>
+            </a:xfrm>
+            <a:prstGeom prst="rect">
+              <a:avLst/>
+            </a:prstGeom>
+            <a:noFill/>
+          </p:spPr>
+          <p:txBody>
+            <a:bodyPr wrap="none" rtlCol="0">
+              <a:spAutoFit/>
+            </a:bodyPr>
+            <a:lstStyle/>
+            <a:p>
+              <a:pPr algn="ctr"/>
+              <a:r>
+                <a:rPr lang="en-GB" sz="1600">
+                  <a:solidFill>
+                    <a:srgbClr val="0070C0"/>
+                  </a:solidFill>
+                  <a:latin typeface="Comic Sans MS" panose="030F0702030302020204" pitchFamily="66" charset="0"/>
+                </a:rPr>
+                <a:t>can be set</a:t>
+              </a:r>
+            </a:p>
+            <a:p>
+              <a:pPr algn="ctr"/>
+              <a:r>
+                <a:rPr lang="en-GB" sz="1600">
+                  <a:solidFill>
+                    <a:srgbClr val="0070C0"/>
+                  </a:solidFill>
+                  <a:latin typeface="Comic Sans MS" panose="030F0702030302020204" pitchFamily="66" charset="0"/>
+                </a:rPr>
+                <a:t>programmatically</a:t>
+              </a:r>
+              <a:endParaRPr lang="en-US" sz="1600">
+                <a:solidFill>
+                  <a:srgbClr val="0070C0"/>
+                </a:solidFill>
+                <a:latin typeface="Comic Sans MS" panose="030F0702030302020204" pitchFamily="66" charset="0"/>
+              </a:endParaRPr>
+            </a:p>
+          </p:txBody>
+        </p:sp>
+        <p:sp>
+          <p:nvSpPr>
+            <p:cNvPr id="34" name="Freeform: Shape 33">
+              <a:extLst>
+                <a:ext uri="{FF2B5EF4-FFF2-40B4-BE49-F238E27FC236}">
+                  <a16:creationId xmlns:a16="http://schemas.microsoft.com/office/drawing/2014/main" id="{A726EB60-6F33-C844-7BA8-EDBE0E99DB5D}"/>
+                </a:ext>
+              </a:extLst>
+            </p:cNvPr>
+            <p:cNvSpPr/>
+            <p:nvPr/>
+          </p:nvSpPr>
+          <p:spPr>
+            <a:xfrm>
+              <a:off x="2848708" y="3472962"/>
+              <a:ext cx="228600" cy="574767"/>
+            </a:xfrm>
+            <a:custGeom>
+              <a:avLst/>
+              <a:gdLst>
+                <a:gd name="csX0" fmla="*/ 0 w 228600"/>
+                <a:gd name="csY0" fmla="*/ 536330 h 574767"/>
+                <a:gd name="csX1" fmla="*/ 175846 w 228600"/>
+                <a:gd name="csY1" fmla="*/ 518746 h 574767"/>
+                <a:gd name="csX2" fmla="*/ 228600 w 228600"/>
+                <a:gd name="csY2" fmla="*/ 0 h 574767"/>
+              </a:gdLst>
+              <a:ahLst/>
+              <a:cxnLst>
+                <a:cxn ang="0">
+                  <a:pos x="csX0" y="csY0"/>
+                </a:cxn>
+                <a:cxn ang="0">
+                  <a:pos x="csX1" y="csY1"/>
+                </a:cxn>
+                <a:cxn ang="0">
+                  <a:pos x="csX2" y="csY2"/>
+                </a:cxn>
+              </a:cxnLst>
+              <a:rect l="l" t="t" r="r" b="b"/>
+              <a:pathLst>
+                <a:path w="228600" h="574767">
+                  <a:moveTo>
+                    <a:pt x="0" y="536330"/>
+                  </a:moveTo>
+                  <a:cubicBezTo>
+                    <a:pt x="68873" y="572232"/>
+                    <a:pt x="137746" y="608134"/>
+                    <a:pt x="175846" y="518746"/>
+                  </a:cubicBezTo>
+                  <a:cubicBezTo>
+                    <a:pt x="213946" y="429358"/>
+                    <a:pt x="221273" y="214679"/>
+                    <a:pt x="228600" y="0"/>
+                  </a:cubicBezTo>
+                </a:path>
+              </a:pathLst>
+            </a:custGeom>
+            <a:ln w="19050" cap="flat" cmpd="sng" algn="ctr">
+              <a:solidFill>
+                <a:srgbClr val="0070C0"/>
+              </a:solidFill>
+              <a:prstDash val="solid"/>
+              <a:round/>
+              <a:headEnd type="none" w="med" len="med"/>
+              <a:tailEnd type="arrow" w="med" len="med"/>
+            </a:ln>
+          </p:spPr>
+          <p:style>
+            <a:lnRef idx="0">
+              <a:scrgbClr r="0" g="0" b="0"/>
+            </a:lnRef>
+            <a:fillRef idx="0">
+              <a:scrgbClr r="0" g="0" b="0"/>
+            </a:fillRef>
+            <a:effectRef idx="0">
+              <a:scrgbClr r="0" g="0" b="0"/>
+            </a:effectRef>
+            <a:fontRef idx="minor">
+              <a:schemeClr val="tx1"/>
+            </a:fontRef>
+          </p:style>
+          <p:txBody>
+            <a:bodyPr rtlCol="0" anchor="ctr"/>
+            <a:lstStyle/>
+            <a:p>
+              <a:pPr algn="ctr"/>
+              <a:endParaRPr lang="en-US"/>
+            </a:p>
+          </p:txBody>
+        </p:sp>
+      </p:grpSp>
+      <p:sp>
+        <p:nvSpPr>
+          <p:cNvPr id="36" name="TextBox 35">
+            <a:extLst>
+              <a:ext uri="{FF2B5EF4-FFF2-40B4-BE49-F238E27FC236}">
+                <a16:creationId xmlns:a16="http://schemas.microsoft.com/office/drawing/2014/main" id="{C4A39234-9A51-D479-A227-E84686F28A44}"/>
+              </a:ext>
+            </a:extLst>
+          </p:cNvPr>
+          <p:cNvSpPr txBox="1"/>
+          <p:nvPr/>
+        </p:nvSpPr>
+        <p:spPr>
+          <a:xfrm>
+            <a:off x="6365629" y="4243922"/>
+            <a:ext cx="4988171" cy="923330"/>
+          </a:xfrm>
+          <a:prstGeom prst="rect">
+            <a:avLst/>
+          </a:prstGeom>
+          <a:noFill/>
+        </p:spPr>
+        <p:txBody>
+          <a:bodyPr wrap="square" rtlCol="0">
+            <a:spAutoFit/>
+          </a:bodyPr>
+          <a:lstStyle/>
+          <a:p>
+            <a:r>
+              <a:rPr lang="en-GB">
+                <a:latin typeface="Consolas" panose="020B0609020204030204" pitchFamily="49" charset="0"/>
+              </a:rPr>
+              <a:t>SQL.select(</a:t>
+            </a:r>
+            <a:r>
+              <a:rPr lang="en-GB">
+                <a:solidFill>
+                  <a:srgbClr val="129204"/>
+                </a:solidFill>
+                <a:latin typeface="Consolas" panose="020B0609020204030204" pitchFamily="49" charset="0"/>
+              </a:rPr>
+              <a:t>"name, birth_year"</a:t>
+            </a:r>
+            <a:r>
+              <a:rPr lang="en-GB">
+                <a:latin typeface="Consolas" panose="020B0609020204030204" pitchFamily="49" charset="0"/>
+              </a:rPr>
+              <a:t>)</a:t>
+            </a:r>
+          </a:p>
+          <a:p>
+            <a:r>
+              <a:rPr lang="en-GB">
+                <a:latin typeface="Consolas" panose="020B0609020204030204" pitchFamily="49" charset="0"/>
+              </a:rPr>
+              <a:t>   .from(</a:t>
+            </a:r>
+            <a:r>
+              <a:rPr lang="en-GB">
+                <a:solidFill>
+                  <a:srgbClr val="129204"/>
+                </a:solidFill>
+                <a:latin typeface="Consolas" panose="020B0609020204030204" pitchFamily="49" charset="0"/>
+              </a:rPr>
+              <a:t>"Students"</a:t>
+            </a:r>
+            <a:r>
+              <a:rPr lang="en-GB">
+                <a:latin typeface="Consolas" panose="020B0609020204030204" pitchFamily="49" charset="0"/>
+              </a:rPr>
+              <a:t>)</a:t>
+            </a:r>
+          </a:p>
+          <a:p>
+            <a:r>
+              <a:rPr lang="en-GB">
+                <a:latin typeface="Consolas" panose="020B0609020204030204" pitchFamily="49" charset="0"/>
+              </a:rPr>
+              <a:t>   .</a:t>
+            </a:r>
+            <a:r>
+              <a:rPr lang="en-GB" u="wavyHeavy">
+                <a:uFill>
+                  <a:solidFill>
+                    <a:srgbClr val="FF0000"/>
+                  </a:solidFill>
+                </a:uFill>
+                <a:latin typeface="Consolas" panose="020B0609020204030204" pitchFamily="49" charset="0"/>
+              </a:rPr>
+              <a:t>from</a:t>
+            </a:r>
+            <a:r>
+              <a:rPr lang="en-GB">
+                <a:latin typeface="Consolas" panose="020B0609020204030204" pitchFamily="49" charset="0"/>
+              </a:rPr>
+              <a:t>(</a:t>
+            </a:r>
+            <a:r>
+              <a:rPr lang="en-GB">
+                <a:solidFill>
+                  <a:srgbClr val="129204"/>
+                </a:solidFill>
+                <a:latin typeface="Consolas" panose="020B0609020204030204" pitchFamily="49" charset="0"/>
+              </a:rPr>
+              <a:t>"Teachers"</a:t>
+            </a:r>
+            <a:r>
+              <a:rPr lang="en-GB">
+                <a:latin typeface="Consolas" panose="020B0609020204030204" pitchFamily="49" charset="0"/>
+              </a:rPr>
+              <a:t>)</a:t>
+            </a:r>
+          </a:p>
+        </p:txBody>
+      </p:sp>
+      <p:sp>
+        <p:nvSpPr>
+          <p:cNvPr id="39" name="Freeform: Shape 38">
+            <a:extLst>
+              <a:ext uri="{FF2B5EF4-FFF2-40B4-BE49-F238E27FC236}">
+                <a16:creationId xmlns:a16="http://schemas.microsoft.com/office/drawing/2014/main" id="{3C36C946-87D5-61E5-811C-9B77DA26C2EB}"/>
+              </a:ext>
+            </a:extLst>
+          </p:cNvPr>
+          <p:cNvSpPr/>
+          <p:nvPr/>
+        </p:nvSpPr>
+        <p:spPr>
+          <a:xfrm>
+            <a:off x="7142011" y="5187462"/>
+            <a:ext cx="533674" cy="474784"/>
+          </a:xfrm>
+          <a:custGeom>
+            <a:avLst/>
+            <a:gdLst>
+              <a:gd name="csX0" fmla="*/ 533674 w 533674"/>
+              <a:gd name="csY0" fmla="*/ 474784 h 474784"/>
+              <a:gd name="csX1" fmla="*/ 58889 w 533674"/>
+              <a:gd name="csY1" fmla="*/ 369276 h 474784"/>
+              <a:gd name="csX2" fmla="*/ 23720 w 533674"/>
+              <a:gd name="csY2" fmla="*/ 0 h 474784"/>
+            </a:gdLst>
+            <a:ahLst/>
+            <a:cxnLst>
+              <a:cxn ang="0">
+                <a:pos x="csX0" y="csY0"/>
+              </a:cxn>
+              <a:cxn ang="0">
+                <a:pos x="csX1" y="csY1"/>
+              </a:cxn>
+              <a:cxn ang="0">
+                <a:pos x="csX2" y="csY2"/>
+              </a:cxn>
+            </a:cxnLst>
+            <a:rect l="l" t="t" r="r" b="b"/>
+            <a:pathLst>
+              <a:path w="533674" h="474784">
+                <a:moveTo>
+                  <a:pt x="533674" y="474784"/>
+                </a:moveTo>
+                <a:cubicBezTo>
+                  <a:pt x="338777" y="461595"/>
+                  <a:pt x="143881" y="448407"/>
+                  <a:pt x="58889" y="369276"/>
+                </a:cubicBezTo>
+                <a:cubicBezTo>
+                  <a:pt x="-26103" y="290145"/>
+                  <a:pt x="-1192" y="145072"/>
+                  <a:pt x="23720" y="0"/>
+                </a:cubicBezTo>
+              </a:path>
+            </a:pathLst>
+          </a:custGeom>
+          <a:noFill/>
+          <a:ln w="19050" cap="flat" cmpd="sng" algn="ctr">
+            <a:solidFill>
+              <a:srgbClr val="0070C0"/>
+            </a:solidFill>
+            <a:prstDash val="solid"/>
+            <a:round/>
+            <a:headEnd type="none" w="med" len="med"/>
+            <a:tailEnd type="arrow" w="med" len="med"/>
+          </a:ln>
+        </p:spPr>
+        <p:style>
+          <a:lnRef idx="0">
+            <a:scrgbClr r="0" g="0" b="0"/>
+          </a:lnRef>
+          <a:fillRef idx="0">
+            <a:scrgbClr r="0" g="0" b="0"/>
+          </a:fillRef>
+          <a:effectRef idx="0">
+            <a:scrgbClr r="0" g="0" b="0"/>
+          </a:effectRef>
+          <a:fontRef idx="minor">
+            <a:schemeClr val="tx1"/>
+          </a:fontRef>
+        </p:style>
+        <p:txBody>
+          <a:bodyPr rtlCol="0" anchor="ctr"/>
+          <a:lstStyle/>
+          <a:p>
+            <a:pPr algn="ctr"/>
+            <a:endParaRPr lang="en-US"/>
+          </a:p>
+        </p:txBody>
+      </p:sp>
+      <p:sp>
+        <p:nvSpPr>
+          <p:cNvPr id="41" name="TextBox 40">
+            <a:extLst>
+              <a:ext uri="{FF2B5EF4-FFF2-40B4-BE49-F238E27FC236}">
+                <a16:creationId xmlns:a16="http://schemas.microsoft.com/office/drawing/2014/main" id="{EE4CC440-3875-68C2-72EC-559A801840E2}"/>
+              </a:ext>
+            </a:extLst>
+          </p:cNvPr>
+          <p:cNvSpPr txBox="1"/>
+          <p:nvPr/>
+        </p:nvSpPr>
+        <p:spPr>
+          <a:xfrm>
+            <a:off x="7321513" y="5527020"/>
+            <a:ext cx="2193229" cy="584775"/>
+          </a:xfrm>
+          <a:prstGeom prst="rect">
+            <a:avLst/>
+          </a:prstGeom>
+          <a:noFill/>
+        </p:spPr>
+        <p:txBody>
+          <a:bodyPr wrap="none" rtlCol="0">
+            <a:spAutoFit/>
+          </a:bodyPr>
+          <a:lstStyle/>
+          <a:p>
+            <a:pPr algn="ctr"/>
+            <a:r>
+              <a:rPr lang="en-GB" sz="1600">
+                <a:solidFill>
+                  <a:srgbClr val="0070C0"/>
+                </a:solidFill>
+                <a:latin typeface="Comic Sans MS" panose="030F0702030302020204" pitchFamily="66" charset="0"/>
+              </a:rPr>
+              <a:t>illegal syntax</a:t>
+            </a:r>
+          </a:p>
+          <a:p>
+            <a:pPr algn="ctr"/>
+            <a:r>
+              <a:rPr lang="en-GB" sz="1600">
+                <a:solidFill>
+                  <a:srgbClr val="0070C0"/>
+                </a:solidFill>
+                <a:latin typeface="Comic Sans MS" panose="030F0702030302020204" pitchFamily="66" charset="0"/>
+              </a:rPr>
+              <a:t>causes </a:t>
+            </a:r>
+            <a:r>
+              <a:rPr lang="en-GB" sz="1600">
+                <a:solidFill>
+                  <a:srgbClr val="FF0000"/>
+                </a:solidFill>
+                <a:latin typeface="Comic Sans MS" panose="030F0702030302020204" pitchFamily="66" charset="0"/>
+              </a:rPr>
+              <a:t>runtime error</a:t>
+            </a:r>
+            <a:endParaRPr lang="en-US" sz="1600">
+              <a:solidFill>
+                <a:srgbClr val="FF0000"/>
+              </a:solidFill>
+              <a:latin typeface="Comic Sans MS" panose="030F0702030302020204" pitchFamily="66" charset="0"/>
+            </a:endParaRPr>
+          </a:p>
+        </p:txBody>
+      </p:sp>
+    </p:spTree>
+    <p:extLst>
+      <p:ext uri="{BB962C8B-B14F-4D97-AF65-F5344CB8AC3E}">
+        <p14:creationId xmlns:p14="http://schemas.microsoft.com/office/powerpoint/2010/main" val="2919970539"/>
+      </p:ext>
+    </p:extLst>
+  </p:cSld>
+  <p:clrMapOvr>
+    <a:masterClrMapping/>
+  </p:clrMapOvr>
+  <p:timing>
+    <p:tnLst>
+      <p:par>
+        <p:cTn id="1" dur="indefinite" restart="never" nodeType="tmRoot">
+          <p:childTnLst>
+            <p:seq concurrent="1" nextAc="seek">
+              <p:cTn id="2" dur="indefinite" nodeType="mainSeq">
+                <p:childTnLst>
+                  <p:par>
+                    <p:cTn id="3" fill="hold">
+                      <p:stCondLst>
+                        <p:cond delay="indefinite"/>
+                      </p:stCondLst>
+                      <p:childTnLst>
+                        <p:par>
+                          <p:cTn id="4" fill="hold">
+                            <p:stCondLst>
+                              <p:cond delay="0"/>
+                            </p:stCondLst>
+                            <p:childTnLst>
+                              <p:par>
+                                <p:cTn id="5" presetID="1" presetClass="entr" presetSubtype="0" fill="hold" grpId="0" nodeType="clickEffect">
+                                  <p:stCondLst>
+                                    <p:cond delay="0"/>
+                                  </p:stCondLst>
+                                  <p:childTnLst>
+                                    <p:set>
+                                      <p:cBhvr>
+                                        <p:cTn id="6" dur="1" fill="hold">
+                                          <p:stCondLst>
+                                            <p:cond delay="0"/>
+                                          </p:stCondLst>
+                                        </p:cTn>
+                                        <p:tgtEl>
+                                          <p:spTgt spid="23"/>
+                                        </p:tgtEl>
+                                        <p:attrNameLst>
+                                          <p:attrName>style.visibility</p:attrName>
+                                        </p:attrNameLst>
+                                      </p:cBhvr>
+                                      <p:to>
+                                        <p:strVal val="visible"/>
+                                      </p:to>
+                                    </p:set>
+                                  </p:childTnLst>
+                                </p:cTn>
+                              </p:par>
+                              <p:par>
+                                <p:cTn id="7" presetID="1" presetClass="entr" presetSubtype="0" fill="hold" grpId="0" nodeType="withEffect">
+                                  <p:stCondLst>
+                                    <p:cond delay="0"/>
+                                  </p:stCondLst>
+                                  <p:childTnLst>
+                                    <p:set>
+                                      <p:cBhvr>
+                                        <p:cTn id="8" dur="1" fill="hold">
+                                          <p:stCondLst>
+                                            <p:cond delay="0"/>
+                                          </p:stCondLst>
+                                        </p:cTn>
+                                        <p:tgtEl>
+                                          <p:spTgt spid="25"/>
+                                        </p:tgtEl>
+                                        <p:attrNameLst>
+                                          <p:attrName>style.visibility</p:attrName>
+                                        </p:attrNameLst>
+                                      </p:cBhvr>
+                                      <p:to>
+                                        <p:strVal val="visible"/>
+                                      </p:to>
+                                    </p:set>
+                                  </p:childTnLst>
+                                </p:cTn>
+                              </p:par>
+                              <p:par>
+                                <p:cTn id="9" presetID="1" presetClass="entr" presetSubtype="0" fill="hold" nodeType="withEffect">
+                                  <p:stCondLst>
+                                    <p:cond delay="0"/>
+                                  </p:stCondLst>
+                                  <p:childTnLst>
+                                    <p:set>
+                                      <p:cBhvr>
+                                        <p:cTn id="10" dur="1" fill="hold">
+                                          <p:stCondLst>
+                                            <p:cond delay="0"/>
+                                          </p:stCondLst>
+                                        </p:cTn>
+                                        <p:tgtEl>
+                                          <p:spTgt spid="35"/>
+                                        </p:tgtEl>
+                                        <p:attrNameLst>
+                                          <p:attrName>style.visibility</p:attrName>
+                                        </p:attrNameLst>
+                                      </p:cBhvr>
+                                      <p:to>
+                                        <p:strVal val="visible"/>
+                                      </p:to>
+                                    </p:set>
+                                  </p:childTnLst>
+                                </p:cTn>
+                              </p:par>
+                            </p:childTnLst>
+                          </p:cTn>
+                        </p:par>
+                      </p:childTnLst>
+                    </p:cTn>
+                  </p:par>
+                  <p:par>
+                    <p:cTn id="11" fill="hold">
+                      <p:stCondLst>
+                        <p:cond delay="indefinite"/>
+                      </p:stCondLst>
+                      <p:childTnLst>
+                        <p:par>
+                          <p:cTn id="12" fill="hold">
+                            <p:stCondLst>
+                              <p:cond delay="0"/>
+                            </p:stCondLst>
+                            <p:childTnLst>
+                              <p:par>
+                                <p:cTn id="13" presetID="1" presetClass="entr" presetSubtype="0" fill="hold" grpId="0" nodeType="clickEffect">
+                                  <p:stCondLst>
+                                    <p:cond delay="0"/>
+                                  </p:stCondLst>
+                                  <p:childTnLst>
+                                    <p:set>
+                                      <p:cBhvr>
+                                        <p:cTn id="14" dur="1" fill="hold">
+                                          <p:stCondLst>
+                                            <p:cond delay="0"/>
+                                          </p:stCondLst>
+                                        </p:cTn>
+                                        <p:tgtEl>
+                                          <p:spTgt spid="29"/>
+                                        </p:tgtEl>
+                                        <p:attrNameLst>
+                                          <p:attrName>style.visibility</p:attrName>
+                                        </p:attrNameLst>
+                                      </p:cBhvr>
+                                      <p:to>
+                                        <p:strVal val="visible"/>
+                                      </p:to>
+                                    </p:set>
+                                  </p:childTnLst>
+                                </p:cTn>
+                              </p:par>
+                              <p:par>
+                                <p:cTn id="15" presetID="1" presetClass="entr" presetSubtype="0" fill="hold" grpId="0" nodeType="withEffect">
+                                  <p:stCondLst>
+                                    <p:cond delay="0"/>
+                                  </p:stCondLst>
+                                  <p:childTnLst>
+                                    <p:set>
+                                      <p:cBhvr>
+                                        <p:cTn id="16" dur="1" fill="hold">
+                                          <p:stCondLst>
+                                            <p:cond delay="0"/>
+                                          </p:stCondLst>
+                                        </p:cTn>
+                                        <p:tgtEl>
+                                          <p:spTgt spid="27"/>
+                                        </p:tgtEl>
+                                        <p:attrNameLst>
+                                          <p:attrName>style.visibility</p:attrName>
+                                        </p:attrNameLst>
+                                      </p:cBhvr>
+                                      <p:to>
+                                        <p:strVal val="visible"/>
+                                      </p:to>
+                                    </p:set>
+                                  </p:childTnLst>
+                                </p:cTn>
+                              </p:par>
+                              <p:par>
+                                <p:cTn id="17" presetID="1" presetClass="entr" presetSubtype="0" fill="hold" grpId="0" nodeType="withEffect">
+                                  <p:stCondLst>
+                                    <p:cond delay="0"/>
+                                  </p:stCondLst>
+                                  <p:childTnLst>
+                                    <p:set>
+                                      <p:cBhvr>
+                                        <p:cTn id="18" dur="1" fill="hold">
+                                          <p:stCondLst>
+                                            <p:cond delay="0"/>
+                                          </p:stCondLst>
+                                        </p:cTn>
+                                        <p:tgtEl>
+                                          <p:spTgt spid="41"/>
+                                        </p:tgtEl>
+                                        <p:attrNameLst>
+                                          <p:attrName>style.visibility</p:attrName>
+                                        </p:attrNameLst>
+                                      </p:cBhvr>
+                                      <p:to>
+                                        <p:strVal val="visible"/>
+                                      </p:to>
+                                    </p:set>
+                                  </p:childTnLst>
+                                </p:cTn>
+                              </p:par>
+                              <p:par>
+                                <p:cTn id="19" presetID="1" presetClass="entr" presetSubtype="0" fill="hold" grpId="0" nodeType="withEffect">
+                                  <p:stCondLst>
+                                    <p:cond delay="0"/>
+                                  </p:stCondLst>
+                                  <p:childTnLst>
+                                    <p:set>
+                                      <p:cBhvr>
+                                        <p:cTn id="20" dur="1" fill="hold">
+                                          <p:stCondLst>
+                                            <p:cond delay="0"/>
+                                          </p:stCondLst>
+                                        </p:cTn>
+                                        <p:tgtEl>
+                                          <p:spTgt spid="39"/>
+                                        </p:tgtEl>
+                                        <p:attrNameLst>
+                                          <p:attrName>style.visibility</p:attrName>
+                                        </p:attrNameLst>
+                                      </p:cBhvr>
+                                      <p:to>
+                                        <p:strVal val="visible"/>
+                                      </p:to>
+                                    </p:set>
+                                  </p:childTnLst>
+                                </p:cTn>
+                              </p:par>
+                              <p:par>
+                                <p:cTn id="21" presetID="1" presetClass="entr" presetSubtype="0" fill="hold" grpId="0" nodeType="withEffect">
+                                  <p:stCondLst>
+                                    <p:cond delay="0"/>
+                                  </p:stCondLst>
+                                  <p:childTnLst>
+                                    <p:set>
+                                      <p:cBhvr>
+                                        <p:cTn id="22" dur="1" fill="hold">
+                                          <p:stCondLst>
+                                            <p:cond delay="0"/>
+                                          </p:stCondLst>
+                                        </p:cTn>
+                                        <p:tgtEl>
+                                          <p:spTgt spid="36"/>
+                                        </p:tgtEl>
+                                        <p:attrNameLst>
+                                          <p:attrName>style.visibility</p:attrName>
+                                        </p:attrNameLst>
+                                      </p:cBhvr>
+                                      <p:to>
+                                        <p:strVal val="visible"/>
+                                      </p:to>
+                                    </p:set>
+                                  </p:childTnLst>
+                                </p:cTn>
+                              </p:par>
+                            </p:childTnLst>
+                          </p:cTn>
+                        </p:par>
+                      </p:childTnLst>
+                    </p:cTn>
+                  </p:par>
+                </p:childTnLst>
+              </p:cTn>
+              <p:prevCondLst>
+                <p:cond evt="onPrev" delay="0">
+                  <p:tgtEl>
+                    <p:sldTgt/>
+                  </p:tgtEl>
+                </p:cond>
+              </p:prevCondLst>
+              <p:nextCondLst>
+                <p:cond evt="onNext" delay="0">
+                  <p:tgtEl>
+                    <p:sldTgt/>
+                  </p:tgtEl>
+                </p:cond>
+              </p:nextCondLst>
+            </p:seq>
+          </p:childTnLst>
+        </p:cTn>
+      </p:par>
+    </p:tnLst>
+    <p:bldLst>
+      <p:bldP spid="23" grpId="0"/>
+      <p:bldP spid="25" grpId="0"/>
+      <p:bldP spid="27" grpId="0"/>
+      <p:bldP spid="29" grpId="0"/>
+      <p:bldP spid="36" grpId="0"/>
+      <p:bldP spid="39" grpId="0" animBg="1"/>
+      <p:bldP spid="41" grpId="0"/>
+    </p:bldLst>
+  </p:timing>
+</p:sld>
+</file>
+
+<file path=ppt/slides/slide8.xml><?xml version="1.0" encoding="utf-8"?>
+<p:sld xmlns:a="http://schemas.openxmlformats.org/drawingml/2006/main" xmlns:r="http://schemas.openxmlformats.org/officeDocument/2006/relationships" xmlns:p="http://schemas.openxmlformats.org/presentationml/2006/main">
+  <p:cSld>
+    <p:spTree>
+      <p:nvGrpSpPr>
+        <p:cNvPr id="1" name=""/>
+        <p:cNvGrpSpPr/>
+        <p:nvPr/>
+      </p:nvGrpSpPr>
+      <p:grpSpPr>
+        <a:xfrm>
+          <a:off x="0" y="0"/>
+          <a:ext cx="0" cy="0"/>
+          <a:chOff x="0" y="0"/>
+          <a:chExt cx="0" cy="0"/>
+        </a:xfrm>
+      </p:grpSpPr>
+      <p:sp>
+        <p:nvSpPr>
+          <p:cNvPr id="2" name="Title 1">
+            <a:extLst>
+              <a:ext uri="{FF2B5EF4-FFF2-40B4-BE49-F238E27FC236}">
+                <a16:creationId xmlns:a16="http://schemas.microsoft.com/office/drawing/2014/main" id="{62B81C78-6A13-E3C1-FA0D-4A34E58A3FCD}"/>
+              </a:ext>
+            </a:extLst>
+          </p:cNvPr>
+          <p:cNvSpPr>
+            <a:spLocks noGrp="1"/>
+          </p:cNvSpPr>
+          <p:nvPr>
+            <p:ph type="title"/>
+          </p:nvPr>
+        </p:nvSpPr>
+        <p:spPr>
+          <a:xfrm>
+            <a:off x="838200" y="939114"/>
+            <a:ext cx="10697308" cy="751574"/>
+          </a:xfrm>
+        </p:spPr>
+        <p:txBody>
+          <a:bodyPr/>
+          <a:lstStyle/>
+          <a:p>
+            <a:r>
+              <a:rPr lang="en-GB"/>
+              <a:t>Safe Fluent APIs</a:t>
+            </a:r>
+            <a:r>
+              <a:rPr lang="en-GB" sz="2800"/>
+              <a:t>[EriLex, H. Xu, 2010][Fling, Gil &amp; Roth, 2019][...]</a:t>
+            </a:r>
+            <a:endParaRPr lang="en-US" sz="2800"/>
+          </a:p>
+        </p:txBody>
+      </p:sp>
+      <p:sp>
+        <p:nvSpPr>
+          <p:cNvPr id="3" name="Content Placeholder 2">
+            <a:extLst>
+              <a:ext uri="{FF2B5EF4-FFF2-40B4-BE49-F238E27FC236}">
+                <a16:creationId xmlns:a16="http://schemas.microsoft.com/office/drawing/2014/main" id="{DA3B6186-E59B-6E80-77B0-34E11EB75ED4}"/>
+              </a:ext>
+            </a:extLst>
+          </p:cNvPr>
+          <p:cNvSpPr>
+            <a:spLocks noGrp="1"/>
+          </p:cNvSpPr>
+          <p:nvPr>
+            <p:ph idx="1"/>
+          </p:nvPr>
+        </p:nvSpPr>
+        <p:spPr/>
+        <p:txBody>
+          <a:bodyPr/>
+          <a:lstStyle/>
+          <a:p>
+            <a:pPr marL="0" indent="0">
+              <a:buNone/>
+            </a:pPr>
+            <a:r>
+              <a:rPr lang="en-GB"/>
+              <a:t>Approach: Disallow bad method chains via the type system</a:t>
+            </a:r>
+            <a:endParaRPr lang="en-US"/>
+          </a:p>
+        </p:txBody>
+      </p:sp>
+      <p:sp>
+        <p:nvSpPr>
+          <p:cNvPr id="4" name="Slide Number Placeholder 3">
+            <a:extLst>
+              <a:ext uri="{FF2B5EF4-FFF2-40B4-BE49-F238E27FC236}">
+                <a16:creationId xmlns:a16="http://schemas.microsoft.com/office/drawing/2014/main" id="{E25E16D5-AB9D-7049-355B-409B9C122CF2}"/>
+              </a:ext>
+            </a:extLst>
+          </p:cNvPr>
+          <p:cNvSpPr>
+            <a:spLocks noGrp="1"/>
+          </p:cNvSpPr>
+          <p:nvPr>
+            <p:ph type="sldNum" sz="quarter" idx="12"/>
+          </p:nvPr>
+        </p:nvSpPr>
+        <p:spPr/>
+        <p:txBody>
+          <a:bodyPr/>
+          <a:lstStyle/>
+          <a:p>
+            <a:fld id="{52890E68-D690-4AC2-96FA-C0B5F80968DC}" type="slidenum">
+              <a:rPr lang="en-US" smtClean="0"/>
+              <a:t>8</a:t>
+            </a:fld>
+            <a:endParaRPr lang="en-US"/>
+          </a:p>
+        </p:txBody>
+      </p:sp>
+      <p:sp>
+        <p:nvSpPr>
+          <p:cNvPr id="5" name="Text Placeholder 4">
+            <a:extLst>
+              <a:ext uri="{FF2B5EF4-FFF2-40B4-BE49-F238E27FC236}">
+                <a16:creationId xmlns:a16="http://schemas.microsoft.com/office/drawing/2014/main" id="{D273EAE5-A45C-46BA-4FA5-94366390CF86}"/>
+              </a:ext>
+            </a:extLst>
+          </p:cNvPr>
+          <p:cNvSpPr>
+            <a:spLocks noGrp="1"/>
+          </p:cNvSpPr>
+          <p:nvPr>
+            <p:ph type="body" sz="quarter" idx="13"/>
+          </p:nvPr>
+        </p:nvSpPr>
+        <p:spPr/>
+        <p:txBody>
+          <a:bodyPr/>
+          <a:lstStyle/>
+          <a:p>
+            <a:r>
+              <a:rPr lang="en-GB"/>
+              <a:t>Related Work</a:t>
+            </a:r>
+            <a:endParaRPr lang="en-US"/>
+          </a:p>
+        </p:txBody>
+      </p:sp>
+    </p:spTree>
+    <p:extLst>
+      <p:ext uri="{BB962C8B-B14F-4D97-AF65-F5344CB8AC3E}">
+        <p14:creationId xmlns:p14="http://schemas.microsoft.com/office/powerpoint/2010/main" val="1741931420"/>
+      </p:ext>
+    </p:extLst>
+  </p:cSld>
+  <p:clrMapOvr>
+    <a:masterClrMapping/>
+  </p:clrMapOvr>
+</p:sld>
+</file>
+
+<file path=ppt/slides/slide9.xml><?xml version="1.0" encoding="utf-8"?>
+<p:sld xmlns:a="http://schemas.openxmlformats.org/drawingml/2006/main" xmlns:r="http://schemas.openxmlformats.org/officeDocument/2006/relationships" xmlns:p="http://schemas.openxmlformats.org/presentationml/2006/main">
+  <p:cSld>
+    <p:spTree>
+      <p:nvGrpSpPr>
         <p:cNvPr id="1" name="">
           <a:extLst>
             <a:ext uri="{FF2B5EF4-FFF2-40B4-BE49-F238E27FC236}">
@@ -3741,7 +11186,7 @@
           <a:p>
             <a:fld id="{52890E68-D690-4AC2-96FA-C0B5F80968DC}" type="slidenum">
               <a:rPr lang="en-US" smtClean="0"/>
-              <a:t>1</a:t>
+              <a:t>9</a:t>
             </a:fld>
             <a:endParaRPr lang="en-US"/>
           </a:p>
@@ -4262,1852 +11707,6 @@
     <p:extLst>
       <p:ext uri="{BB962C8B-B14F-4D97-AF65-F5344CB8AC3E}">
         <p14:creationId xmlns:p14="http://schemas.microsoft.com/office/powerpoint/2010/main" val="1828451840"/>
-      </p:ext>
-    </p:extLst>
-  </p:cSld>
-  <p:clrMapOvr>
-    <a:masterClrMapping/>
-  </p:clrMapOvr>
-</p:sld>
-</file>
-
-<file path=ppt/slides/slide2.xml><?xml version="1.0" encoding="utf-8"?>
-<p:sld xmlns:a="http://schemas.openxmlformats.org/drawingml/2006/main" xmlns:r="http://schemas.openxmlformats.org/officeDocument/2006/relationships" xmlns:p="http://schemas.openxmlformats.org/presentationml/2006/main">
-  <p:cSld>
-    <p:spTree>
-      <p:nvGrpSpPr>
-        <p:cNvPr id="1" name="">
-          <a:extLst>
-            <a:ext uri="{FF2B5EF4-FFF2-40B4-BE49-F238E27FC236}">
-              <a16:creationId xmlns:a16="http://schemas.microsoft.com/office/drawing/2014/main" id="{443C1E30-2F61-951D-46FF-5BA9CB21901B}"/>
-            </a:ext>
-          </a:extLst>
-        </p:cNvPr>
-        <p:cNvGrpSpPr/>
-        <p:nvPr/>
-      </p:nvGrpSpPr>
-      <p:grpSpPr>
-        <a:xfrm>
-          <a:off x="0" y="0"/>
-          <a:ext cx="0" cy="0"/>
-          <a:chOff x="0" y="0"/>
-          <a:chExt cx="0" cy="0"/>
-        </a:xfrm>
-      </p:grpSpPr>
-      <p:sp>
-        <p:nvSpPr>
-          <p:cNvPr id="6" name="Rectangle 5">
-            <a:extLst>
-              <a:ext uri="{FF2B5EF4-FFF2-40B4-BE49-F238E27FC236}">
-                <a16:creationId xmlns:a16="http://schemas.microsoft.com/office/drawing/2014/main" id="{0274853B-4518-FEAD-0748-C739F688ECC7}"/>
-              </a:ext>
-            </a:extLst>
-          </p:cNvPr>
-          <p:cNvSpPr/>
-          <p:nvPr/>
-        </p:nvSpPr>
-        <p:spPr>
-          <a:xfrm>
-            <a:off x="3527898" y="4339018"/>
-            <a:ext cx="5136204" cy="943154"/>
-          </a:xfrm>
-          <a:prstGeom prst="rect">
-            <a:avLst/>
-          </a:prstGeom>
-          <a:solidFill>
-            <a:srgbClr val="1E1F22"/>
-          </a:solidFill>
-          <a:ln w="38100">
-            <a:noFill/>
-          </a:ln>
-        </p:spPr>
-        <p:style>
-          <a:lnRef idx="2">
-            <a:schemeClr val="dk1"/>
-          </a:lnRef>
-          <a:fillRef idx="1">
-            <a:schemeClr val="lt1"/>
-          </a:fillRef>
-          <a:effectRef idx="0">
-            <a:schemeClr val="dk1"/>
-          </a:effectRef>
-          <a:fontRef idx="minor">
-            <a:schemeClr val="dk1"/>
-          </a:fontRef>
-        </p:style>
-        <p:txBody>
-          <a:bodyPr rtlCol="0" anchor="t"/>
-          <a:lstStyle/>
-          <a:p>
-            <a:r>
-              <a:rPr lang="en-US">
-                <a:solidFill>
-                  <a:srgbClr val="BCBEC4"/>
-                </a:solidFill>
-                <a:latin typeface="Consolas" panose="020B0609020204030204" pitchFamily="49" charset="0"/>
-              </a:rPr>
-              <a:t>Query query = SQL.select(</a:t>
-            </a:r>
-            <a:r>
-              <a:rPr lang="en-US">
-                <a:solidFill>
-                  <a:srgbClr val="6AAB73"/>
-                </a:solidFill>
-                <a:latin typeface="Consolas" panose="020B0609020204030204" pitchFamily="49" charset="0"/>
-              </a:rPr>
-              <a:t>"</a:t>
-            </a:r>
-            <a:r>
-              <a:rPr lang="en-US" u="wavyHeavy">
-                <a:solidFill>
-                  <a:srgbClr val="6AAB73"/>
-                </a:solidFill>
-                <a:uFill>
-                  <a:solidFill>
-                    <a:srgbClr val="FF0000"/>
-                  </a:solidFill>
-                </a:uFill>
-                <a:latin typeface="Consolas" panose="020B0609020204030204" pitchFamily="49" charset="0"/>
-              </a:rPr>
-              <a:t>1 </a:t>
-            </a:r>
-            <a:r>
-              <a:rPr lang="en-US">
-                <a:solidFill>
-                  <a:srgbClr val="6AAB73"/>
-                </a:solidFill>
-                <a:latin typeface="Consolas" panose="020B0609020204030204" pitchFamily="49" charset="0"/>
-              </a:rPr>
-              <a:t>+ 5"</a:t>
-            </a:r>
-            <a:r>
-              <a:rPr lang="en-US">
-                <a:solidFill>
-                  <a:srgbClr val="BCBEC4"/>
-                </a:solidFill>
-                <a:latin typeface="Consolas" panose="020B0609020204030204" pitchFamily="49" charset="0"/>
-              </a:rPr>
-              <a:t>)</a:t>
-            </a:r>
-          </a:p>
-          <a:p>
-            <a:r>
-              <a:rPr lang="en-US">
-                <a:solidFill>
-                  <a:srgbClr val="BCBEC4"/>
-                </a:solidFill>
-                <a:latin typeface="Consolas" panose="020B0609020204030204" pitchFamily="49" charset="0"/>
-              </a:rPr>
-              <a:t>                 .from(</a:t>
-            </a:r>
-            <a:r>
-              <a:rPr lang="en-US">
-                <a:solidFill>
-                  <a:srgbClr val="6AAB73"/>
-                </a:solidFill>
-                <a:latin typeface="Consolas" panose="020B0609020204030204" pitchFamily="49" charset="0"/>
-              </a:rPr>
-              <a:t>"Students"</a:t>
-            </a:r>
-            <a:r>
-              <a:rPr lang="en-US">
-                <a:solidFill>
-                  <a:srgbClr val="BCBEC4"/>
-                </a:solidFill>
-                <a:latin typeface="Consolas" panose="020B0609020204030204" pitchFamily="49" charset="0"/>
-              </a:rPr>
-              <a:t>)</a:t>
-            </a:r>
-          </a:p>
-          <a:p>
-            <a:r>
-              <a:rPr lang="en-US">
-                <a:solidFill>
-                  <a:srgbClr val="BCBEC4"/>
-                </a:solidFill>
-                <a:latin typeface="Consolas" panose="020B0609020204030204" pitchFamily="49" charset="0"/>
-              </a:rPr>
-              <a:t>                 .end();</a:t>
-            </a:r>
-          </a:p>
-        </p:txBody>
-      </p:sp>
-      <p:sp>
-        <p:nvSpPr>
-          <p:cNvPr id="2" name="Title 1">
-            <a:extLst>
-              <a:ext uri="{FF2B5EF4-FFF2-40B4-BE49-F238E27FC236}">
-                <a16:creationId xmlns:a16="http://schemas.microsoft.com/office/drawing/2014/main" id="{F40B221C-34EB-5291-3719-7053CB04F2E3}"/>
-              </a:ext>
-            </a:extLst>
-          </p:cNvPr>
-          <p:cNvSpPr>
-            <a:spLocks noGrp="1"/>
-          </p:cNvSpPr>
-          <p:nvPr>
-            <p:ph type="title"/>
-          </p:nvPr>
-        </p:nvSpPr>
-        <p:spPr/>
-        <p:txBody>
-          <a:bodyPr/>
-          <a:lstStyle/>
-          <a:p>
-            <a:r>
-              <a:rPr lang="en-GB"/>
-              <a:t>Use Case 2: Analyzing String Literals</a:t>
-            </a:r>
-            <a:endParaRPr lang="en-US"/>
-          </a:p>
-        </p:txBody>
-      </p:sp>
-      <p:sp>
-        <p:nvSpPr>
-          <p:cNvPr id="4" name="Slide Number Placeholder 3">
-            <a:extLst>
-              <a:ext uri="{FF2B5EF4-FFF2-40B4-BE49-F238E27FC236}">
-                <a16:creationId xmlns:a16="http://schemas.microsoft.com/office/drawing/2014/main" id="{AC07B5FB-6A78-3AD9-87A9-0381EEAA8F0F}"/>
-              </a:ext>
-            </a:extLst>
-          </p:cNvPr>
-          <p:cNvSpPr>
-            <a:spLocks noGrp="1"/>
-          </p:cNvSpPr>
-          <p:nvPr>
-            <p:ph type="sldNum" sz="quarter" idx="12"/>
-          </p:nvPr>
-        </p:nvSpPr>
-        <p:spPr/>
-        <p:txBody>
-          <a:bodyPr/>
-          <a:lstStyle/>
-          <a:p>
-            <a:fld id="{52890E68-D690-4AC2-96FA-C0B5F80968DC}" type="slidenum">
-              <a:rPr lang="en-US" smtClean="0"/>
-              <a:t>2</a:t>
-            </a:fld>
-            <a:endParaRPr lang="en-US"/>
-          </a:p>
-        </p:txBody>
-      </p:sp>
-      <p:sp>
-        <p:nvSpPr>
-          <p:cNvPr id="5" name="Rectangle 4">
-            <a:extLst>
-              <a:ext uri="{FF2B5EF4-FFF2-40B4-BE49-F238E27FC236}">
-                <a16:creationId xmlns:a16="http://schemas.microsoft.com/office/drawing/2014/main" id="{67972773-4748-E484-1CB5-4C8C748DF3CB}"/>
-              </a:ext>
-            </a:extLst>
-          </p:cNvPr>
-          <p:cNvSpPr/>
-          <p:nvPr/>
-        </p:nvSpPr>
-        <p:spPr>
-          <a:xfrm>
-            <a:off x="3527898" y="1682583"/>
-            <a:ext cx="5136204" cy="943154"/>
-          </a:xfrm>
-          <a:prstGeom prst="rect">
-            <a:avLst/>
-          </a:prstGeom>
-          <a:solidFill>
-            <a:srgbClr val="1E1F22"/>
-          </a:solidFill>
-          <a:ln w="38100">
-            <a:noFill/>
-          </a:ln>
-        </p:spPr>
-        <p:style>
-          <a:lnRef idx="2">
-            <a:schemeClr val="dk1"/>
-          </a:lnRef>
-          <a:fillRef idx="1">
-            <a:schemeClr val="lt1"/>
-          </a:fillRef>
-          <a:effectRef idx="0">
-            <a:schemeClr val="dk1"/>
-          </a:effectRef>
-          <a:fontRef idx="minor">
-            <a:schemeClr val="dk1"/>
-          </a:fontRef>
-        </p:style>
-        <p:txBody>
-          <a:bodyPr rtlCol="0" anchor="t"/>
-          <a:lstStyle/>
-          <a:p>
-            <a:r>
-              <a:rPr lang="en-US">
-                <a:solidFill>
-                  <a:srgbClr val="BCBEC4"/>
-                </a:solidFill>
-                <a:latin typeface="Consolas" panose="020B0609020204030204" pitchFamily="49" charset="0"/>
-              </a:rPr>
-              <a:t>Query query = SQL.select(</a:t>
-            </a:r>
-            <a:r>
-              <a:rPr lang="en-US">
-                <a:solidFill>
-                  <a:srgbClr val="6AAB73"/>
-                </a:solidFill>
-                <a:latin typeface="Consolas" panose="020B0609020204030204" pitchFamily="49" charset="0"/>
-              </a:rPr>
-              <a:t>"</a:t>
-            </a:r>
-            <a:r>
-              <a:rPr lang="en-US" u="wavyHeavy">
-                <a:solidFill>
-                  <a:srgbClr val="6AAB73"/>
-                </a:solidFill>
-                <a:uFill>
-                  <a:solidFill>
-                    <a:srgbClr val="FF0000"/>
-                  </a:solidFill>
-                </a:uFill>
-                <a:latin typeface="Consolas" panose="020B0609020204030204" pitchFamily="49" charset="0"/>
-              </a:rPr>
-              <a:t>1 </a:t>
-            </a:r>
-            <a:r>
-              <a:rPr lang="en-US">
-                <a:solidFill>
-                  <a:srgbClr val="6AAB73"/>
-                </a:solidFill>
-                <a:latin typeface="Consolas" panose="020B0609020204030204" pitchFamily="49" charset="0"/>
-              </a:rPr>
-              <a:t>+ 5"</a:t>
-            </a:r>
-            <a:r>
-              <a:rPr lang="en-US">
-                <a:solidFill>
-                  <a:srgbClr val="BCBEC4"/>
-                </a:solidFill>
-                <a:latin typeface="Consolas" panose="020B0609020204030204" pitchFamily="49" charset="0"/>
-              </a:rPr>
-              <a:t>)</a:t>
-            </a:r>
-          </a:p>
-          <a:p>
-            <a:r>
-              <a:rPr lang="en-US">
-                <a:solidFill>
-                  <a:srgbClr val="BCBEC4"/>
-                </a:solidFill>
-                <a:latin typeface="Consolas" panose="020B0609020204030204" pitchFamily="49" charset="0"/>
-              </a:rPr>
-              <a:t>                 .from(</a:t>
-            </a:r>
-            <a:r>
-              <a:rPr lang="en-US">
-                <a:solidFill>
-                  <a:srgbClr val="6AAB73"/>
-                </a:solidFill>
-                <a:latin typeface="Consolas" panose="020B0609020204030204" pitchFamily="49" charset="0"/>
-              </a:rPr>
-              <a:t>"Students"</a:t>
-            </a:r>
-            <a:r>
-              <a:rPr lang="en-US">
-                <a:solidFill>
-                  <a:srgbClr val="BCBEC4"/>
-                </a:solidFill>
-                <a:latin typeface="Consolas" panose="020B0609020204030204" pitchFamily="49" charset="0"/>
-              </a:rPr>
-              <a:t>)</a:t>
-            </a:r>
-          </a:p>
-          <a:p>
-            <a:r>
-              <a:rPr lang="en-US">
-                <a:solidFill>
-                  <a:srgbClr val="BCBEC4"/>
-                </a:solidFill>
-                <a:latin typeface="Consolas" panose="020B0609020204030204" pitchFamily="49" charset="0"/>
-              </a:rPr>
-              <a:t>                 .end();</a:t>
-            </a:r>
-          </a:p>
-        </p:txBody>
-      </p:sp>
-      <p:sp>
-        <p:nvSpPr>
-          <p:cNvPr id="8" name="Rectangle: Rounded Corners 7">
-            <a:extLst>
-              <a:ext uri="{FF2B5EF4-FFF2-40B4-BE49-F238E27FC236}">
-                <a16:creationId xmlns:a16="http://schemas.microsoft.com/office/drawing/2014/main" id="{C99945E3-CF40-5011-C9D7-3C8D234D5A1D}"/>
-              </a:ext>
-            </a:extLst>
-          </p:cNvPr>
-          <p:cNvSpPr/>
-          <p:nvPr/>
-        </p:nvSpPr>
-        <p:spPr>
-          <a:xfrm>
-            <a:off x="7019284" y="4762131"/>
-            <a:ext cx="4131013" cy="365125"/>
-          </a:xfrm>
-          <a:prstGeom prst="roundRect">
-            <a:avLst/>
-          </a:prstGeom>
-          <a:solidFill>
-            <a:schemeClr val="tx1">
-              <a:lumMod val="75000"/>
-              <a:lumOff val="25000"/>
-            </a:schemeClr>
-          </a:solidFill>
-          <a:ln w="12700">
-            <a:solidFill>
-              <a:schemeClr val="tx1">
-                <a:lumMod val="65000"/>
-                <a:lumOff val="35000"/>
-              </a:schemeClr>
-            </a:solidFill>
-          </a:ln>
-        </p:spPr>
-        <p:style>
-          <a:lnRef idx="2">
-            <a:schemeClr val="dk1"/>
-          </a:lnRef>
-          <a:fillRef idx="1">
-            <a:schemeClr val="lt1"/>
-          </a:fillRef>
-          <a:effectRef idx="0">
-            <a:schemeClr val="dk1"/>
-          </a:effectRef>
-          <a:fontRef idx="minor">
-            <a:schemeClr val="dk1"/>
-          </a:fontRef>
-        </p:style>
-        <p:txBody>
-          <a:bodyPr rtlCol="0" anchor="t"/>
-          <a:lstStyle/>
-          <a:p>
-            <a:r>
-              <a:rPr lang="en-GB" sz="1600">
-                <a:solidFill>
-                  <a:srgbClr val="BCBEC4"/>
-                </a:solidFill>
-              </a:rPr>
-              <a:t>Expected '*' or ID but got '1'</a:t>
-            </a:r>
-            <a:endParaRPr lang="en-US" sz="1600">
-              <a:solidFill>
-                <a:srgbClr val="BCBEC4"/>
-              </a:solidFill>
-            </a:endParaRPr>
-          </a:p>
-        </p:txBody>
-      </p:sp>
-      <p:pic>
-        <p:nvPicPr>
-          <p:cNvPr id="12" name="Picture 11">
-            <a:extLst>
-              <a:ext uri="{FF2B5EF4-FFF2-40B4-BE49-F238E27FC236}">
-                <a16:creationId xmlns:a16="http://schemas.microsoft.com/office/drawing/2014/main" id="{7F703AA3-1A30-C5CC-99F6-41A1103FEFE5}"/>
-              </a:ext>
-            </a:extLst>
-          </p:cNvPr>
-          <p:cNvPicPr>
-            <a:picLocks noChangeAspect="1"/>
-          </p:cNvPicPr>
-          <p:nvPr/>
-        </p:nvPicPr>
-        <p:blipFill>
-          <a:blip r:embed="rId2">
-            <a:extLst>
-              <a:ext uri="{28A0092B-C50C-407E-A947-70E740481C1C}">
-                <a14:useLocalDpi xmlns:a14="http://schemas.microsoft.com/office/drawing/2010/main" val="0"/>
-              </a:ext>
-            </a:extLst>
-          </a:blip>
-          <a:stretch>
-            <a:fillRect/>
-          </a:stretch>
-        </p:blipFill>
-        <p:spPr>
-          <a:xfrm>
-            <a:off x="7019284" y="4491961"/>
-            <a:ext cx="130150" cy="194982"/>
-          </a:xfrm>
-          <a:prstGeom prst="rect">
-            <a:avLst/>
-          </a:prstGeom>
-        </p:spPr>
-      </p:pic>
-    </p:spTree>
-    <p:extLst>
-      <p:ext uri="{BB962C8B-B14F-4D97-AF65-F5344CB8AC3E}">
-        <p14:creationId xmlns:p14="http://schemas.microsoft.com/office/powerpoint/2010/main" val="127601684"/>
-      </p:ext>
-    </p:extLst>
-  </p:cSld>
-  <p:clrMapOvr>
-    <a:masterClrMapping/>
-  </p:clrMapOvr>
-</p:sld>
-</file>
-
-<file path=ppt/slides/slide3.xml><?xml version="1.0" encoding="utf-8"?>
-<p:sld xmlns:a="http://schemas.openxmlformats.org/drawingml/2006/main" xmlns:r="http://schemas.openxmlformats.org/officeDocument/2006/relationships" xmlns:p="http://schemas.openxmlformats.org/presentationml/2006/main">
-  <p:cSld>
-    <p:spTree>
-      <p:nvGrpSpPr>
-        <p:cNvPr id="1" name="">
-          <a:extLst>
-            <a:ext uri="{FF2B5EF4-FFF2-40B4-BE49-F238E27FC236}">
-              <a16:creationId xmlns:a16="http://schemas.microsoft.com/office/drawing/2014/main" id="{5E7A86C0-D4FA-144A-B096-4D80615ECE82}"/>
-            </a:ext>
-          </a:extLst>
-        </p:cNvPr>
-        <p:cNvGrpSpPr/>
-        <p:nvPr/>
-      </p:nvGrpSpPr>
-      <p:grpSpPr>
-        <a:xfrm>
-          <a:off x="0" y="0"/>
-          <a:ext cx="0" cy="0"/>
-          <a:chOff x="0" y="0"/>
-          <a:chExt cx="0" cy="0"/>
-        </a:xfrm>
-      </p:grpSpPr>
-      <p:sp>
-        <p:nvSpPr>
-          <p:cNvPr id="2" name="Title 1">
-            <a:extLst>
-              <a:ext uri="{FF2B5EF4-FFF2-40B4-BE49-F238E27FC236}">
-                <a16:creationId xmlns:a16="http://schemas.microsoft.com/office/drawing/2014/main" id="{46A8342A-DA08-D6B2-8792-2155CE7C3C39}"/>
-              </a:ext>
-            </a:extLst>
-          </p:cNvPr>
-          <p:cNvSpPr>
-            <a:spLocks noGrp="1"/>
-          </p:cNvSpPr>
-          <p:nvPr>
-            <p:ph type="title"/>
-          </p:nvPr>
-        </p:nvSpPr>
-        <p:spPr/>
-        <p:txBody>
-          <a:bodyPr/>
-          <a:lstStyle/>
-          <a:p>
-            <a:r>
-              <a:rPr lang="en-GB"/>
-              <a:t>Use Case 3: DSL Syntax Highlighting</a:t>
-            </a:r>
-            <a:endParaRPr lang="en-US"/>
-          </a:p>
-        </p:txBody>
-      </p:sp>
-      <p:sp>
-        <p:nvSpPr>
-          <p:cNvPr id="4" name="Slide Number Placeholder 3">
-            <a:extLst>
-              <a:ext uri="{FF2B5EF4-FFF2-40B4-BE49-F238E27FC236}">
-                <a16:creationId xmlns:a16="http://schemas.microsoft.com/office/drawing/2014/main" id="{9EAC56A8-B6DF-BA9F-3498-46A7E18A6C56}"/>
-              </a:ext>
-            </a:extLst>
-          </p:cNvPr>
-          <p:cNvSpPr>
-            <a:spLocks noGrp="1"/>
-          </p:cNvSpPr>
-          <p:nvPr>
-            <p:ph type="sldNum" sz="quarter" idx="12"/>
-          </p:nvPr>
-        </p:nvSpPr>
-        <p:spPr/>
-        <p:txBody>
-          <a:bodyPr/>
-          <a:lstStyle/>
-          <a:p>
-            <a:fld id="{52890E68-D690-4AC2-96FA-C0B5F80968DC}" type="slidenum">
-              <a:rPr lang="en-US" smtClean="0"/>
-              <a:t>3</a:t>
-            </a:fld>
-            <a:endParaRPr lang="en-US"/>
-          </a:p>
-        </p:txBody>
-      </p:sp>
-      <p:sp>
-        <p:nvSpPr>
-          <p:cNvPr id="5" name="Rectangle 4">
-            <a:extLst>
-              <a:ext uri="{FF2B5EF4-FFF2-40B4-BE49-F238E27FC236}">
-                <a16:creationId xmlns:a16="http://schemas.microsoft.com/office/drawing/2014/main" id="{E5A3E6D8-C4DA-47A4-635D-1290839C1F57}"/>
-              </a:ext>
-            </a:extLst>
-          </p:cNvPr>
-          <p:cNvSpPr/>
-          <p:nvPr/>
-        </p:nvSpPr>
-        <p:spPr>
-          <a:xfrm>
-            <a:off x="3178045" y="2810400"/>
-            <a:ext cx="5835910" cy="1237199"/>
-          </a:xfrm>
-          <a:prstGeom prst="rect">
-            <a:avLst/>
-          </a:prstGeom>
-          <a:solidFill>
-            <a:srgbClr val="1E1F22"/>
-          </a:solidFill>
-          <a:ln w="38100">
-            <a:noFill/>
-          </a:ln>
-        </p:spPr>
-        <p:style>
-          <a:lnRef idx="2">
-            <a:schemeClr val="dk1"/>
-          </a:lnRef>
-          <a:fillRef idx="1">
-            <a:schemeClr val="lt1"/>
-          </a:fillRef>
-          <a:effectRef idx="0">
-            <a:schemeClr val="dk1"/>
-          </a:effectRef>
-          <a:fontRef idx="minor">
-            <a:schemeClr val="dk1"/>
-          </a:fontRef>
-        </p:style>
-        <p:txBody>
-          <a:bodyPr rtlCol="0" anchor="t"/>
-          <a:lstStyle/>
-          <a:p>
-            <a:r>
-              <a:rPr lang="en-US">
-                <a:solidFill>
-                  <a:srgbClr val="BCBEC4"/>
-                </a:solidFill>
-                <a:latin typeface="Consolas" panose="020B0609020204030204" pitchFamily="49" charset="0"/>
-              </a:rPr>
-              <a:t>Query query = SQL.</a:t>
-            </a:r>
-            <a:r>
-              <a:rPr lang="en-US">
-                <a:solidFill>
-                  <a:schemeClr val="accent2"/>
-                </a:solidFill>
-                <a:latin typeface="Consolas" panose="020B0609020204030204" pitchFamily="49" charset="0"/>
-              </a:rPr>
-              <a:t>select</a:t>
-            </a:r>
-            <a:r>
-              <a:rPr lang="en-US">
-                <a:solidFill>
-                  <a:srgbClr val="BCBEC4"/>
-                </a:solidFill>
-                <a:latin typeface="Consolas" panose="020B0609020204030204" pitchFamily="49" charset="0"/>
-              </a:rPr>
-              <a:t>(</a:t>
-            </a:r>
-            <a:r>
-              <a:rPr lang="en-US">
-                <a:solidFill>
-                  <a:srgbClr val="6AAB73"/>
-                </a:solidFill>
-                <a:latin typeface="Consolas" panose="020B0609020204030204" pitchFamily="49" charset="0"/>
-              </a:rPr>
-              <a:t>"</a:t>
-            </a:r>
-            <a:r>
-              <a:rPr lang="en-US">
-                <a:solidFill>
-                  <a:srgbClr val="BCBEC4"/>
-                </a:solidFill>
-                <a:latin typeface="Consolas" panose="020B0609020204030204" pitchFamily="49" charset="0"/>
-              </a:rPr>
-              <a:t>name, birth_year</a:t>
-            </a:r>
-            <a:r>
-              <a:rPr lang="en-US">
-                <a:solidFill>
-                  <a:srgbClr val="6AAB73"/>
-                </a:solidFill>
-                <a:latin typeface="Consolas" panose="020B0609020204030204" pitchFamily="49" charset="0"/>
-              </a:rPr>
-              <a:t>"</a:t>
-            </a:r>
-            <a:r>
-              <a:rPr lang="en-US">
-                <a:solidFill>
-                  <a:srgbClr val="BCBEC4"/>
-                </a:solidFill>
-                <a:latin typeface="Consolas" panose="020B0609020204030204" pitchFamily="49" charset="0"/>
-              </a:rPr>
-              <a:t>)</a:t>
-            </a:r>
-          </a:p>
-          <a:p>
-            <a:r>
-              <a:rPr lang="en-US">
-                <a:solidFill>
-                  <a:srgbClr val="BCBEC4"/>
-                </a:solidFill>
-                <a:latin typeface="Consolas" panose="020B0609020204030204" pitchFamily="49" charset="0"/>
-              </a:rPr>
-              <a:t>                 .</a:t>
-            </a:r>
-            <a:r>
-              <a:rPr lang="en-US">
-                <a:solidFill>
-                  <a:schemeClr val="accent2"/>
-                </a:solidFill>
-                <a:latin typeface="Consolas" panose="020B0609020204030204" pitchFamily="49" charset="0"/>
-              </a:rPr>
-              <a:t>from</a:t>
-            </a:r>
-            <a:r>
-              <a:rPr lang="en-US">
-                <a:solidFill>
-                  <a:srgbClr val="BCBEC4"/>
-                </a:solidFill>
-                <a:latin typeface="Consolas" panose="020B0609020204030204" pitchFamily="49" charset="0"/>
-              </a:rPr>
-              <a:t>(</a:t>
-            </a:r>
-            <a:r>
-              <a:rPr lang="en-US">
-                <a:solidFill>
-                  <a:srgbClr val="6AAB73"/>
-                </a:solidFill>
-                <a:latin typeface="Consolas" panose="020B0609020204030204" pitchFamily="49" charset="0"/>
-              </a:rPr>
-              <a:t>"</a:t>
-            </a:r>
-            <a:r>
-              <a:rPr lang="en-US">
-                <a:solidFill>
-                  <a:srgbClr val="BCBEC4"/>
-                </a:solidFill>
-                <a:latin typeface="Consolas" panose="020B0609020204030204" pitchFamily="49" charset="0"/>
-              </a:rPr>
-              <a:t>Students</a:t>
-            </a:r>
-            <a:r>
-              <a:rPr lang="en-US">
-                <a:solidFill>
-                  <a:srgbClr val="6AAB73"/>
-                </a:solidFill>
-                <a:latin typeface="Consolas" panose="020B0609020204030204" pitchFamily="49" charset="0"/>
-              </a:rPr>
-              <a:t>"</a:t>
-            </a:r>
-            <a:r>
-              <a:rPr lang="en-US">
-                <a:solidFill>
-                  <a:srgbClr val="BCBEC4"/>
-                </a:solidFill>
-                <a:latin typeface="Consolas" panose="020B0609020204030204" pitchFamily="49" charset="0"/>
-              </a:rPr>
-              <a:t>)</a:t>
-            </a:r>
-          </a:p>
-          <a:p>
-            <a:r>
-              <a:rPr lang="en-US">
-                <a:solidFill>
-                  <a:srgbClr val="BCBEC4"/>
-                </a:solidFill>
-                <a:latin typeface="Consolas" panose="020B0609020204030204" pitchFamily="49" charset="0"/>
-              </a:rPr>
-              <a:t>                 .</a:t>
-            </a:r>
-            <a:r>
-              <a:rPr lang="en-US">
-                <a:solidFill>
-                  <a:schemeClr val="accent2"/>
-                </a:solidFill>
-                <a:latin typeface="Consolas" panose="020B0609020204030204" pitchFamily="49" charset="0"/>
-              </a:rPr>
-              <a:t>where</a:t>
-            </a:r>
-            <a:r>
-              <a:rPr lang="en-US">
-                <a:solidFill>
-                  <a:srgbClr val="BCBEC4"/>
-                </a:solidFill>
-                <a:latin typeface="Consolas" panose="020B0609020204030204" pitchFamily="49" charset="0"/>
-              </a:rPr>
-              <a:t>(</a:t>
-            </a:r>
-            <a:r>
-              <a:rPr lang="en-US">
-                <a:solidFill>
-                  <a:srgbClr val="6AAB73"/>
-                </a:solidFill>
-                <a:latin typeface="Consolas" panose="020B0609020204030204" pitchFamily="49" charset="0"/>
-              </a:rPr>
-              <a:t>"</a:t>
-            </a:r>
-            <a:r>
-              <a:rPr lang="en-US">
-                <a:solidFill>
-                  <a:srgbClr val="BCBEC4"/>
-                </a:solidFill>
-                <a:latin typeface="Consolas" panose="020B0609020204030204" pitchFamily="49" charset="0"/>
-              </a:rPr>
-              <a:t>birth_year == </a:t>
-            </a:r>
-            <a:r>
-              <a:rPr lang="en-US">
-                <a:solidFill>
-                  <a:schemeClr val="accent1">
-                    <a:lumMod val="60000"/>
-                    <a:lumOff val="40000"/>
-                  </a:schemeClr>
-                </a:solidFill>
-                <a:latin typeface="Consolas" panose="020B0609020204030204" pitchFamily="49" charset="0"/>
-              </a:rPr>
-              <a:t>2005</a:t>
-            </a:r>
-            <a:r>
-              <a:rPr lang="en-US">
-                <a:solidFill>
-                  <a:srgbClr val="6AAB73"/>
-                </a:solidFill>
-                <a:latin typeface="Consolas" panose="020B0609020204030204" pitchFamily="49" charset="0"/>
-              </a:rPr>
-              <a:t>"</a:t>
-            </a:r>
-            <a:r>
-              <a:rPr lang="en-US">
-                <a:solidFill>
-                  <a:srgbClr val="BCBEC4"/>
-                </a:solidFill>
-                <a:latin typeface="Consolas" panose="020B0609020204030204" pitchFamily="49" charset="0"/>
-              </a:rPr>
-              <a:t>)</a:t>
-            </a:r>
-          </a:p>
-          <a:p>
-            <a:r>
-              <a:rPr lang="en-US">
-                <a:solidFill>
-                  <a:srgbClr val="BCBEC4"/>
-                </a:solidFill>
-                <a:latin typeface="Consolas" panose="020B0609020204030204" pitchFamily="49" charset="0"/>
-              </a:rPr>
-              <a:t>                 .end();</a:t>
-            </a:r>
-          </a:p>
-        </p:txBody>
-      </p:sp>
-    </p:spTree>
-    <p:extLst>
-      <p:ext uri="{BB962C8B-B14F-4D97-AF65-F5344CB8AC3E}">
-        <p14:creationId xmlns:p14="http://schemas.microsoft.com/office/powerpoint/2010/main" val="2923497200"/>
-      </p:ext>
-    </p:extLst>
-  </p:cSld>
-  <p:clrMapOvr>
-    <a:masterClrMapping/>
-  </p:clrMapOvr>
-</p:sld>
-</file>
-
-<file path=ppt/slides/slide4.xml><?xml version="1.0" encoding="utf-8"?>
-<p:sld xmlns:a="http://schemas.openxmlformats.org/drawingml/2006/main" xmlns:r="http://schemas.openxmlformats.org/officeDocument/2006/relationships" xmlns:p="http://schemas.openxmlformats.org/presentationml/2006/main">
-  <p:cSld>
-    <p:spTree>
-      <p:nvGrpSpPr>
-        <p:cNvPr id="1" name="">
-          <a:extLst>
-            <a:ext uri="{FF2B5EF4-FFF2-40B4-BE49-F238E27FC236}">
-              <a16:creationId xmlns:a16="http://schemas.microsoft.com/office/drawing/2014/main" id="{C01402A4-6D13-7F3D-9B64-E083C148CFE1}"/>
-            </a:ext>
-          </a:extLst>
-        </p:cNvPr>
-        <p:cNvGrpSpPr/>
-        <p:nvPr/>
-      </p:nvGrpSpPr>
-      <p:grpSpPr>
-        <a:xfrm>
-          <a:off x="0" y="0"/>
-          <a:ext cx="0" cy="0"/>
-          <a:chOff x="0" y="0"/>
-          <a:chExt cx="0" cy="0"/>
-        </a:xfrm>
-      </p:grpSpPr>
-      <p:sp>
-        <p:nvSpPr>
-          <p:cNvPr id="2" name="Title 1">
-            <a:extLst>
-              <a:ext uri="{FF2B5EF4-FFF2-40B4-BE49-F238E27FC236}">
-                <a16:creationId xmlns:a16="http://schemas.microsoft.com/office/drawing/2014/main" id="{CCF6BBC4-CD10-B120-754E-57D7CA563056}"/>
-              </a:ext>
-            </a:extLst>
-          </p:cNvPr>
-          <p:cNvSpPr>
-            <a:spLocks noGrp="1"/>
-          </p:cNvSpPr>
-          <p:nvPr>
-            <p:ph type="title"/>
-          </p:nvPr>
-        </p:nvSpPr>
-        <p:spPr/>
-        <p:txBody>
-          <a:bodyPr/>
-          <a:lstStyle/>
-          <a:p>
-            <a:r>
-              <a:rPr lang="en-GB"/>
-              <a:t>Use Case 4: Semantic EDSL Analysis</a:t>
-            </a:r>
-            <a:endParaRPr lang="en-US"/>
-          </a:p>
-        </p:txBody>
-      </p:sp>
-      <p:sp>
-        <p:nvSpPr>
-          <p:cNvPr id="4" name="Slide Number Placeholder 3">
-            <a:extLst>
-              <a:ext uri="{FF2B5EF4-FFF2-40B4-BE49-F238E27FC236}">
-                <a16:creationId xmlns:a16="http://schemas.microsoft.com/office/drawing/2014/main" id="{40BFF64D-5F8E-0D53-D334-3E7384E10554}"/>
-              </a:ext>
-            </a:extLst>
-          </p:cNvPr>
-          <p:cNvSpPr>
-            <a:spLocks noGrp="1"/>
-          </p:cNvSpPr>
-          <p:nvPr>
-            <p:ph type="sldNum" sz="quarter" idx="12"/>
-          </p:nvPr>
-        </p:nvSpPr>
-        <p:spPr/>
-        <p:txBody>
-          <a:bodyPr/>
-          <a:lstStyle/>
-          <a:p>
-            <a:fld id="{52890E68-D690-4AC2-96FA-C0B5F80968DC}" type="slidenum">
-              <a:rPr lang="en-US" smtClean="0"/>
-              <a:t>4</a:t>
-            </a:fld>
-            <a:endParaRPr lang="en-US"/>
-          </a:p>
-        </p:txBody>
-      </p:sp>
-      <p:sp>
-        <p:nvSpPr>
-          <p:cNvPr id="5" name="Rectangle 4">
-            <a:extLst>
-              <a:ext uri="{FF2B5EF4-FFF2-40B4-BE49-F238E27FC236}">
-                <a16:creationId xmlns:a16="http://schemas.microsoft.com/office/drawing/2014/main" id="{E2CBE598-DD5D-20B4-E959-2490734AFCF9}"/>
-              </a:ext>
-            </a:extLst>
-          </p:cNvPr>
-          <p:cNvSpPr/>
-          <p:nvPr/>
-        </p:nvSpPr>
-        <p:spPr>
-          <a:xfrm>
-            <a:off x="3178045" y="2810400"/>
-            <a:ext cx="5835910" cy="1237199"/>
-          </a:xfrm>
-          <a:prstGeom prst="rect">
-            <a:avLst/>
-          </a:prstGeom>
-          <a:solidFill>
-            <a:srgbClr val="1E1F22"/>
-          </a:solidFill>
-          <a:ln w="38100">
-            <a:noFill/>
-          </a:ln>
-        </p:spPr>
-        <p:style>
-          <a:lnRef idx="2">
-            <a:schemeClr val="dk1"/>
-          </a:lnRef>
-          <a:fillRef idx="1">
-            <a:schemeClr val="lt1"/>
-          </a:fillRef>
-          <a:effectRef idx="0">
-            <a:schemeClr val="dk1"/>
-          </a:effectRef>
-          <a:fontRef idx="minor">
-            <a:schemeClr val="dk1"/>
-          </a:fontRef>
-        </p:style>
-        <p:txBody>
-          <a:bodyPr rtlCol="0" anchor="t"/>
-          <a:lstStyle/>
-          <a:p>
-            <a:r>
-              <a:rPr lang="en-US">
-                <a:solidFill>
-                  <a:srgbClr val="BCBEC4"/>
-                </a:solidFill>
-                <a:latin typeface="Consolas" panose="020B0609020204030204" pitchFamily="49" charset="0"/>
-              </a:rPr>
-              <a:t>Query query = SQL.</a:t>
-            </a:r>
-            <a:r>
-              <a:rPr lang="en-US">
-                <a:solidFill>
-                  <a:schemeClr val="accent2"/>
-                </a:solidFill>
-                <a:latin typeface="Consolas" panose="020B0609020204030204" pitchFamily="49" charset="0"/>
-              </a:rPr>
-              <a:t>select</a:t>
-            </a:r>
-            <a:r>
-              <a:rPr lang="en-US">
-                <a:solidFill>
-                  <a:srgbClr val="BCBEC4"/>
-                </a:solidFill>
-                <a:latin typeface="Consolas" panose="020B0609020204030204" pitchFamily="49" charset="0"/>
-              </a:rPr>
-              <a:t>(</a:t>
-            </a:r>
-            <a:r>
-              <a:rPr lang="en-US">
-                <a:solidFill>
-                  <a:srgbClr val="6AAB73"/>
-                </a:solidFill>
-                <a:latin typeface="Consolas" panose="020B0609020204030204" pitchFamily="49" charset="0"/>
-              </a:rPr>
-              <a:t>"</a:t>
-            </a:r>
-            <a:r>
-              <a:rPr lang="en-US">
-                <a:solidFill>
-                  <a:srgbClr val="BCBEC4"/>
-                </a:solidFill>
-                <a:latin typeface="Consolas" panose="020B0609020204030204" pitchFamily="49" charset="0"/>
-              </a:rPr>
-              <a:t>name</a:t>
-            </a:r>
-            <a:r>
-              <a:rPr lang="en-US">
-                <a:solidFill>
-                  <a:srgbClr val="6AAB73"/>
-                </a:solidFill>
-                <a:latin typeface="Consolas" panose="020B0609020204030204" pitchFamily="49" charset="0"/>
-              </a:rPr>
-              <a:t>"</a:t>
-            </a:r>
-            <a:r>
-              <a:rPr lang="en-US">
-                <a:solidFill>
-                  <a:srgbClr val="BCBEC4"/>
-                </a:solidFill>
-                <a:latin typeface="Consolas" panose="020B0609020204030204" pitchFamily="49" charset="0"/>
-              </a:rPr>
-              <a:t>)</a:t>
-            </a:r>
-          </a:p>
-          <a:p>
-            <a:r>
-              <a:rPr lang="en-US">
-                <a:solidFill>
-                  <a:srgbClr val="BCBEC4"/>
-                </a:solidFill>
-                <a:latin typeface="Consolas" panose="020B0609020204030204" pitchFamily="49" charset="0"/>
-              </a:rPr>
-              <a:t>                 .</a:t>
-            </a:r>
-            <a:r>
-              <a:rPr lang="en-US">
-                <a:solidFill>
-                  <a:schemeClr val="accent2"/>
-                </a:solidFill>
-                <a:latin typeface="Consolas" panose="020B0609020204030204" pitchFamily="49" charset="0"/>
-              </a:rPr>
-              <a:t>from</a:t>
-            </a:r>
-            <a:r>
-              <a:rPr lang="en-US">
-                <a:solidFill>
-                  <a:srgbClr val="BCBEC4"/>
-                </a:solidFill>
-                <a:latin typeface="Consolas" panose="020B0609020204030204" pitchFamily="49" charset="0"/>
-              </a:rPr>
-              <a:t>(</a:t>
-            </a:r>
-            <a:r>
-              <a:rPr lang="en-US">
-                <a:solidFill>
-                  <a:srgbClr val="6AAB73"/>
-                </a:solidFill>
-                <a:latin typeface="Consolas" panose="020B0609020204030204" pitchFamily="49" charset="0"/>
-              </a:rPr>
-              <a:t>"</a:t>
-            </a:r>
-            <a:r>
-              <a:rPr lang="en-US">
-                <a:solidFill>
-                  <a:srgbClr val="BCBEC4"/>
-                </a:solidFill>
-                <a:latin typeface="Consolas" panose="020B0609020204030204" pitchFamily="49" charset="0"/>
-              </a:rPr>
-              <a:t>Students</a:t>
-            </a:r>
-            <a:r>
-              <a:rPr lang="en-US">
-                <a:solidFill>
-                  <a:srgbClr val="6AAB73"/>
-                </a:solidFill>
-                <a:latin typeface="Consolas" panose="020B0609020204030204" pitchFamily="49" charset="0"/>
-              </a:rPr>
-              <a:t>"</a:t>
-            </a:r>
-            <a:r>
-              <a:rPr lang="en-US">
-                <a:solidFill>
-                  <a:srgbClr val="BCBEC4"/>
-                </a:solidFill>
-                <a:latin typeface="Consolas" panose="020B0609020204030204" pitchFamily="49" charset="0"/>
-              </a:rPr>
-              <a:t>)</a:t>
-            </a:r>
-          </a:p>
-          <a:p>
-            <a:r>
-              <a:rPr lang="en-US">
-                <a:solidFill>
-                  <a:srgbClr val="BCBEC4"/>
-                </a:solidFill>
-                <a:latin typeface="Consolas" panose="020B0609020204030204" pitchFamily="49" charset="0"/>
-              </a:rPr>
-              <a:t>                 .</a:t>
-            </a:r>
-            <a:r>
-              <a:rPr lang="en-US">
-                <a:solidFill>
-                  <a:schemeClr val="accent2"/>
-                </a:solidFill>
-                <a:latin typeface="Consolas" panose="020B0609020204030204" pitchFamily="49" charset="0"/>
-              </a:rPr>
-              <a:t>where</a:t>
-            </a:r>
-            <a:r>
-              <a:rPr lang="en-US">
-                <a:solidFill>
-                  <a:srgbClr val="BCBEC4"/>
-                </a:solidFill>
-                <a:latin typeface="Consolas" panose="020B0609020204030204" pitchFamily="49" charset="0"/>
-              </a:rPr>
-              <a:t>(</a:t>
-            </a:r>
-            <a:r>
-              <a:rPr lang="en-US">
-                <a:solidFill>
-                  <a:srgbClr val="6AAB73"/>
-                </a:solidFill>
-                <a:latin typeface="Consolas" panose="020B0609020204030204" pitchFamily="49" charset="0"/>
-              </a:rPr>
-              <a:t>"</a:t>
-            </a:r>
-            <a:r>
-              <a:rPr lang="en-US" u="wavyHeavy">
-                <a:solidFill>
-                  <a:srgbClr val="BCBEC4"/>
-                </a:solidFill>
-                <a:uFill>
-                  <a:solidFill>
-                    <a:srgbClr val="FF0000"/>
-                  </a:solidFill>
-                </a:uFill>
-                <a:latin typeface="Consolas" panose="020B0609020204030204" pitchFamily="49" charset="0"/>
-              </a:rPr>
-              <a:t>birth_year</a:t>
-            </a:r>
-            <a:r>
-              <a:rPr lang="en-US">
-                <a:solidFill>
-                  <a:srgbClr val="BCBEC4"/>
-                </a:solidFill>
-                <a:latin typeface="Consolas" panose="020B0609020204030204" pitchFamily="49" charset="0"/>
-              </a:rPr>
-              <a:t> == </a:t>
-            </a:r>
-            <a:r>
-              <a:rPr lang="en-US">
-                <a:solidFill>
-                  <a:schemeClr val="accent1">
-                    <a:lumMod val="60000"/>
-                    <a:lumOff val="40000"/>
-                  </a:schemeClr>
-                </a:solidFill>
-                <a:latin typeface="Consolas" panose="020B0609020204030204" pitchFamily="49" charset="0"/>
-              </a:rPr>
-              <a:t>2005</a:t>
-            </a:r>
-            <a:r>
-              <a:rPr lang="en-US">
-                <a:solidFill>
-                  <a:srgbClr val="6AAB73"/>
-                </a:solidFill>
-                <a:latin typeface="Consolas" panose="020B0609020204030204" pitchFamily="49" charset="0"/>
-              </a:rPr>
-              <a:t>"</a:t>
-            </a:r>
-            <a:r>
-              <a:rPr lang="en-US">
-                <a:solidFill>
-                  <a:srgbClr val="BCBEC4"/>
-                </a:solidFill>
-                <a:latin typeface="Consolas" panose="020B0609020204030204" pitchFamily="49" charset="0"/>
-              </a:rPr>
-              <a:t>)</a:t>
-            </a:r>
-          </a:p>
-          <a:p>
-            <a:r>
-              <a:rPr lang="en-US">
-                <a:solidFill>
-                  <a:srgbClr val="BCBEC4"/>
-                </a:solidFill>
-                <a:latin typeface="Consolas" panose="020B0609020204030204" pitchFamily="49" charset="0"/>
-              </a:rPr>
-              <a:t>                 .end();</a:t>
-            </a:r>
-          </a:p>
-        </p:txBody>
-      </p:sp>
-      <p:sp>
-        <p:nvSpPr>
-          <p:cNvPr id="6" name="Rectangle: Rounded Corners 5">
-            <a:extLst>
-              <a:ext uri="{FF2B5EF4-FFF2-40B4-BE49-F238E27FC236}">
-                <a16:creationId xmlns:a16="http://schemas.microsoft.com/office/drawing/2014/main" id="{DF126BE1-004D-263A-1211-1A5E784FDB15}"/>
-              </a:ext>
-            </a:extLst>
-          </p:cNvPr>
-          <p:cNvSpPr/>
-          <p:nvPr/>
-        </p:nvSpPr>
-        <p:spPr>
-          <a:xfrm>
-            <a:off x="6667592" y="3816876"/>
-            <a:ext cx="4131013" cy="365125"/>
-          </a:xfrm>
-          <a:prstGeom prst="roundRect">
-            <a:avLst/>
-          </a:prstGeom>
-          <a:solidFill>
-            <a:schemeClr val="tx1">
-              <a:lumMod val="75000"/>
-              <a:lumOff val="25000"/>
-            </a:schemeClr>
-          </a:solidFill>
-          <a:ln w="12700">
-            <a:solidFill>
-              <a:schemeClr val="tx1">
-                <a:lumMod val="65000"/>
-                <a:lumOff val="35000"/>
-              </a:schemeClr>
-            </a:solidFill>
-          </a:ln>
-        </p:spPr>
-        <p:style>
-          <a:lnRef idx="2">
-            <a:schemeClr val="dk1"/>
-          </a:lnRef>
-          <a:fillRef idx="1">
-            <a:schemeClr val="lt1"/>
-          </a:fillRef>
-          <a:effectRef idx="0">
-            <a:schemeClr val="dk1"/>
-          </a:effectRef>
-          <a:fontRef idx="minor">
-            <a:schemeClr val="dk1"/>
-          </a:fontRef>
-        </p:style>
-        <p:txBody>
-          <a:bodyPr rtlCol="0" anchor="t"/>
-          <a:lstStyle/>
-          <a:p>
-            <a:r>
-              <a:rPr lang="en-GB" sz="1600">
-                <a:solidFill>
-                  <a:srgbClr val="BCBEC4"/>
-                </a:solidFill>
-              </a:rPr>
-              <a:t>Unknown id 'birth_year'</a:t>
-            </a:r>
-            <a:endParaRPr lang="en-US" sz="1600">
-              <a:solidFill>
-                <a:srgbClr val="BCBEC4"/>
-              </a:solidFill>
-            </a:endParaRPr>
-          </a:p>
-        </p:txBody>
-      </p:sp>
-      <p:pic>
-        <p:nvPicPr>
-          <p:cNvPr id="8" name="Picture 7">
-            <a:extLst>
-              <a:ext uri="{FF2B5EF4-FFF2-40B4-BE49-F238E27FC236}">
-                <a16:creationId xmlns:a16="http://schemas.microsoft.com/office/drawing/2014/main" id="{E87CEDD4-B29D-48D3-A9FC-C4DE764FE5A8}"/>
-              </a:ext>
-            </a:extLst>
-          </p:cNvPr>
-          <p:cNvPicPr>
-            <a:picLocks noChangeAspect="1"/>
-          </p:cNvPicPr>
-          <p:nvPr/>
-        </p:nvPicPr>
-        <p:blipFill>
-          <a:blip r:embed="rId2">
-            <a:extLst>
-              <a:ext uri="{28A0092B-C50C-407E-A947-70E740481C1C}">
-                <a14:useLocalDpi xmlns:a14="http://schemas.microsoft.com/office/drawing/2010/main" val="0"/>
-              </a:ext>
-            </a:extLst>
-          </a:blip>
-          <a:stretch>
-            <a:fillRect/>
-          </a:stretch>
-        </p:blipFill>
-        <p:spPr>
-          <a:xfrm>
-            <a:off x="6667592" y="3546706"/>
-            <a:ext cx="130150" cy="194982"/>
-          </a:xfrm>
-          <a:prstGeom prst="rect">
-            <a:avLst/>
-          </a:prstGeom>
-        </p:spPr>
-      </p:pic>
-      <p:sp>
-        <p:nvSpPr>
-          <p:cNvPr id="10" name="Rectangle: Rounded Corners 9">
-            <a:extLst>
-              <a:ext uri="{FF2B5EF4-FFF2-40B4-BE49-F238E27FC236}">
-                <a16:creationId xmlns:a16="http://schemas.microsoft.com/office/drawing/2014/main" id="{F2322C1E-A3FE-D51D-8E4A-FE363E3FDB52}"/>
-              </a:ext>
-            </a:extLst>
-          </p:cNvPr>
-          <p:cNvSpPr/>
-          <p:nvPr/>
-        </p:nvSpPr>
-        <p:spPr>
-          <a:xfrm>
-            <a:off x="6667591" y="4182001"/>
-            <a:ext cx="4131013" cy="365125"/>
-          </a:xfrm>
-          <a:prstGeom prst="roundRect">
-            <a:avLst/>
-          </a:prstGeom>
-          <a:solidFill>
-            <a:schemeClr val="tx1">
-              <a:lumMod val="85000"/>
-              <a:lumOff val="15000"/>
-            </a:schemeClr>
-          </a:solidFill>
-          <a:ln w="12700">
-            <a:solidFill>
-              <a:schemeClr val="tx1">
-                <a:lumMod val="65000"/>
-                <a:lumOff val="35000"/>
-              </a:schemeClr>
-            </a:solidFill>
-          </a:ln>
-        </p:spPr>
-        <p:style>
-          <a:lnRef idx="2">
-            <a:schemeClr val="dk1"/>
-          </a:lnRef>
-          <a:fillRef idx="1">
-            <a:schemeClr val="lt1"/>
-          </a:fillRef>
-          <a:effectRef idx="0">
-            <a:schemeClr val="dk1"/>
-          </a:effectRef>
-          <a:fontRef idx="minor">
-            <a:schemeClr val="dk1"/>
-          </a:fontRef>
-        </p:style>
-        <p:txBody>
-          <a:bodyPr rtlCol="0" anchor="t"/>
-          <a:lstStyle/>
-          <a:p>
-            <a:r>
-              <a:rPr lang="en-GB" sz="1600">
-                <a:solidFill>
-                  <a:schemeClr val="tx2">
-                    <a:lumMod val="50000"/>
-                    <a:lumOff val="50000"/>
-                  </a:schemeClr>
-                </a:solidFill>
-              </a:rPr>
-              <a:t>Select 'birth_year' from table 'Students'</a:t>
-            </a:r>
-            <a:endParaRPr lang="en-US" sz="1600">
-              <a:solidFill>
-                <a:schemeClr val="tx2">
-                  <a:lumMod val="50000"/>
-                  <a:lumOff val="50000"/>
-                </a:schemeClr>
-              </a:solidFill>
-            </a:endParaRPr>
-          </a:p>
-        </p:txBody>
-      </p:sp>
-    </p:spTree>
-    <p:extLst>
-      <p:ext uri="{BB962C8B-B14F-4D97-AF65-F5344CB8AC3E}">
-        <p14:creationId xmlns:p14="http://schemas.microsoft.com/office/powerpoint/2010/main" val="1794034668"/>
-      </p:ext>
-    </p:extLst>
-  </p:cSld>
-  <p:clrMapOvr>
-    <a:masterClrMapping/>
-  </p:clrMapOvr>
-</p:sld>
-</file>
-
-<file path=ppt/slides/slide5.xml><?xml version="1.0" encoding="utf-8"?>
-<p:sld xmlns:a="http://schemas.openxmlformats.org/drawingml/2006/main" xmlns:r="http://schemas.openxmlformats.org/officeDocument/2006/relationships" xmlns:p="http://schemas.openxmlformats.org/presentationml/2006/main">
-  <p:cSld>
-    <p:spTree>
-      <p:nvGrpSpPr>
-        <p:cNvPr id="1" name="">
-          <a:extLst>
-            <a:ext uri="{FF2B5EF4-FFF2-40B4-BE49-F238E27FC236}">
-              <a16:creationId xmlns:a16="http://schemas.microsoft.com/office/drawing/2014/main" id="{6240B38F-BC44-305A-88F0-F6D0E1187EFE}"/>
-            </a:ext>
-          </a:extLst>
-        </p:cNvPr>
-        <p:cNvGrpSpPr/>
-        <p:nvPr/>
-      </p:nvGrpSpPr>
-      <p:grpSpPr>
-        <a:xfrm>
-          <a:off x="0" y="0"/>
-          <a:ext cx="0" cy="0"/>
-          <a:chOff x="0" y="0"/>
-          <a:chExt cx="0" cy="0"/>
-        </a:xfrm>
-      </p:grpSpPr>
-      <p:sp>
-        <p:nvSpPr>
-          <p:cNvPr id="2" name="Title 1">
-            <a:extLst>
-              <a:ext uri="{FF2B5EF4-FFF2-40B4-BE49-F238E27FC236}">
-                <a16:creationId xmlns:a16="http://schemas.microsoft.com/office/drawing/2014/main" id="{3A81D48F-049D-192A-1D7F-53D5362AE57C}"/>
-              </a:ext>
-            </a:extLst>
-          </p:cNvPr>
-          <p:cNvSpPr>
-            <a:spLocks noGrp="1"/>
-          </p:cNvSpPr>
-          <p:nvPr>
-            <p:ph type="title"/>
-          </p:nvPr>
-        </p:nvSpPr>
-        <p:spPr/>
-        <p:txBody>
-          <a:bodyPr/>
-          <a:lstStyle/>
-          <a:p>
-            <a:r>
-              <a:rPr lang="en-GB"/>
-              <a:t>Stretch Goal: </a:t>
-            </a:r>
-            <a:r>
-              <a:rPr lang="en-GB" u="sng"/>
-              <a:t>Simple</a:t>
-            </a:r>
-            <a:r>
-              <a:rPr lang="en-GB"/>
-              <a:t> Dataflow Analysis</a:t>
-            </a:r>
-            <a:endParaRPr lang="en-US"/>
-          </a:p>
-        </p:txBody>
-      </p:sp>
-      <p:sp>
-        <p:nvSpPr>
-          <p:cNvPr id="4" name="Slide Number Placeholder 3">
-            <a:extLst>
-              <a:ext uri="{FF2B5EF4-FFF2-40B4-BE49-F238E27FC236}">
-                <a16:creationId xmlns:a16="http://schemas.microsoft.com/office/drawing/2014/main" id="{61284E70-C55F-9BD6-873C-0935F86BCDDE}"/>
-              </a:ext>
-            </a:extLst>
-          </p:cNvPr>
-          <p:cNvSpPr>
-            <a:spLocks noGrp="1"/>
-          </p:cNvSpPr>
-          <p:nvPr>
-            <p:ph type="sldNum" sz="quarter" idx="12"/>
-          </p:nvPr>
-        </p:nvSpPr>
-        <p:spPr/>
-        <p:txBody>
-          <a:bodyPr/>
-          <a:lstStyle/>
-          <a:p>
-            <a:fld id="{52890E68-D690-4AC2-96FA-C0B5F80968DC}" type="slidenum">
-              <a:rPr lang="en-US" smtClean="0"/>
-              <a:t>5</a:t>
-            </a:fld>
-            <a:endParaRPr lang="en-US"/>
-          </a:p>
-        </p:txBody>
-      </p:sp>
-      <p:sp>
-        <p:nvSpPr>
-          <p:cNvPr id="7" name="Rectangle 6">
-            <a:extLst>
-              <a:ext uri="{FF2B5EF4-FFF2-40B4-BE49-F238E27FC236}">
-                <a16:creationId xmlns:a16="http://schemas.microsoft.com/office/drawing/2014/main" id="{1EF30878-4846-9652-4553-AB32A78DD21A}"/>
-              </a:ext>
-            </a:extLst>
-          </p:cNvPr>
-          <p:cNvSpPr/>
-          <p:nvPr/>
-        </p:nvSpPr>
-        <p:spPr>
-          <a:xfrm>
-            <a:off x="1152415" y="1893877"/>
-            <a:ext cx="9328016" cy="3126531"/>
-          </a:xfrm>
-          <a:prstGeom prst="rect">
-            <a:avLst/>
-          </a:prstGeom>
-          <a:solidFill>
-            <a:srgbClr val="1E1F22"/>
-          </a:solidFill>
-          <a:ln w="38100">
-            <a:noFill/>
-          </a:ln>
-        </p:spPr>
-        <p:style>
-          <a:lnRef idx="2">
-            <a:schemeClr val="dk1"/>
-          </a:lnRef>
-          <a:fillRef idx="1">
-            <a:schemeClr val="lt1"/>
-          </a:fillRef>
-          <a:effectRef idx="0">
-            <a:schemeClr val="dk1"/>
-          </a:effectRef>
-          <a:fontRef idx="minor">
-            <a:schemeClr val="dk1"/>
-          </a:fontRef>
-        </p:style>
-        <p:txBody>
-          <a:bodyPr rtlCol="0" anchor="t"/>
-          <a:lstStyle/>
-          <a:p>
-            <a:r>
-              <a:rPr lang="en-US">
-                <a:solidFill>
-                  <a:srgbClr val="BCBEC4"/>
-                </a:solidFill>
-                <a:latin typeface="Consolas" panose="020B0609020204030204" pitchFamily="49" charset="0"/>
-              </a:rPr>
-              <a:t>Where whereClause;</a:t>
-            </a:r>
-          </a:p>
-          <a:p>
-            <a:r>
-              <a:rPr lang="en-US">
-                <a:solidFill>
-                  <a:schemeClr val="accent2"/>
-                </a:solidFill>
-                <a:latin typeface="Consolas" panose="020B0609020204030204" pitchFamily="49" charset="0"/>
-              </a:rPr>
-              <a:t>if</a:t>
-            </a:r>
-            <a:r>
-              <a:rPr lang="en-US">
-                <a:solidFill>
-                  <a:srgbClr val="BCBEC4"/>
-                </a:solidFill>
-                <a:latin typeface="Consolas" panose="020B0609020204030204" pitchFamily="49" charset="0"/>
-              </a:rPr>
-              <a:t> (negate) {</a:t>
-            </a:r>
-          </a:p>
-          <a:p>
-            <a:r>
-              <a:rPr lang="en-US">
-                <a:solidFill>
-                  <a:srgbClr val="BCBEC4"/>
-                </a:solidFill>
-                <a:latin typeface="Consolas" panose="020B0609020204030204" pitchFamily="49" charset="0"/>
-              </a:rPr>
-              <a:t>  whereClause = Where.columnId("birth_year").notEquals().nat(</a:t>
-            </a:r>
-            <a:r>
-              <a:rPr lang="en-US">
-                <a:solidFill>
-                  <a:schemeClr val="accent1">
-                    <a:lumMod val="60000"/>
-                    <a:lumOff val="40000"/>
-                  </a:schemeClr>
-                </a:solidFill>
-                <a:latin typeface="Consolas" panose="020B0609020204030204" pitchFamily="49" charset="0"/>
-              </a:rPr>
-              <a:t>2005</a:t>
-            </a:r>
-            <a:r>
-              <a:rPr lang="en-US">
-                <a:solidFill>
-                  <a:srgbClr val="BCBEC4"/>
-                </a:solidFill>
-                <a:latin typeface="Consolas" panose="020B0609020204030204" pitchFamily="49" charset="0"/>
-              </a:rPr>
-              <a:t>);</a:t>
-            </a:r>
-          </a:p>
-          <a:p>
-            <a:r>
-              <a:rPr lang="en-US">
-                <a:solidFill>
-                  <a:srgbClr val="BCBEC4"/>
-                </a:solidFill>
-                <a:latin typeface="Consolas" panose="020B0609020204030204" pitchFamily="49" charset="0"/>
-              </a:rPr>
-              <a:t>} </a:t>
-            </a:r>
-            <a:r>
-              <a:rPr lang="en-US">
-                <a:solidFill>
-                  <a:schemeClr val="accent2"/>
-                </a:solidFill>
-                <a:latin typeface="Consolas" panose="020B0609020204030204" pitchFamily="49" charset="0"/>
-              </a:rPr>
-              <a:t>else</a:t>
-            </a:r>
-            <a:r>
-              <a:rPr lang="en-US">
-                <a:solidFill>
-                  <a:srgbClr val="BCBEC4"/>
-                </a:solidFill>
-                <a:latin typeface="Consolas" panose="020B0609020204030204" pitchFamily="49" charset="0"/>
-              </a:rPr>
-              <a:t> {</a:t>
-            </a:r>
-          </a:p>
-          <a:p>
-            <a:r>
-              <a:rPr lang="en-US">
-                <a:solidFill>
-                  <a:srgbClr val="BCBEC4"/>
-                </a:solidFill>
-                <a:latin typeface="Consolas" panose="020B0609020204030204" pitchFamily="49" charset="0"/>
-              </a:rPr>
-              <a:t>  whereClause = Where.columnId("birth_year").equals().nat(</a:t>
-            </a:r>
-            <a:r>
-              <a:rPr lang="en-US">
-                <a:solidFill>
-                  <a:schemeClr val="accent1">
-                    <a:lumMod val="60000"/>
-                    <a:lumOff val="40000"/>
-                  </a:schemeClr>
-                </a:solidFill>
-                <a:latin typeface="Consolas" panose="020B0609020204030204" pitchFamily="49" charset="0"/>
-              </a:rPr>
-              <a:t>2005</a:t>
-            </a:r>
-            <a:r>
-              <a:rPr lang="en-US">
-                <a:solidFill>
-                  <a:srgbClr val="BCBEC4"/>
-                </a:solidFill>
-                <a:latin typeface="Consolas" panose="020B0609020204030204" pitchFamily="49" charset="0"/>
-              </a:rPr>
-              <a:t>);</a:t>
-            </a:r>
-          </a:p>
-          <a:p>
-            <a:r>
-              <a:rPr lang="en-US">
-                <a:solidFill>
-                  <a:srgbClr val="BCBEC4"/>
-                </a:solidFill>
-                <a:latin typeface="Consolas" panose="020B0609020204030204" pitchFamily="49" charset="0"/>
-              </a:rPr>
-              <a:t>}</a:t>
-            </a:r>
-          </a:p>
-          <a:p>
-            <a:endParaRPr lang="en-US">
-              <a:solidFill>
-                <a:srgbClr val="BCBEC4"/>
-              </a:solidFill>
-              <a:latin typeface="Consolas" panose="020B0609020204030204" pitchFamily="49" charset="0"/>
-            </a:endParaRPr>
-          </a:p>
-          <a:p>
-            <a:r>
-              <a:rPr lang="en-US">
-                <a:solidFill>
-                  <a:srgbClr val="BCBEC4"/>
-                </a:solidFill>
-                <a:latin typeface="Consolas" panose="020B0609020204030204" pitchFamily="49" charset="0"/>
-              </a:rPr>
-              <a:t>Query query = SQL.</a:t>
-            </a:r>
-            <a:r>
-              <a:rPr lang="en-US">
-                <a:solidFill>
-                  <a:schemeClr val="accent2"/>
-                </a:solidFill>
-                <a:latin typeface="Consolas" panose="020B0609020204030204" pitchFamily="49" charset="0"/>
-              </a:rPr>
-              <a:t>select</a:t>
-            </a:r>
-            <a:r>
-              <a:rPr lang="en-US">
-                <a:solidFill>
-                  <a:srgbClr val="BCBEC4"/>
-                </a:solidFill>
-                <a:latin typeface="Consolas" panose="020B0609020204030204" pitchFamily="49" charset="0"/>
-              </a:rPr>
-              <a:t>(</a:t>
-            </a:r>
-            <a:r>
-              <a:rPr lang="en-US">
-                <a:solidFill>
-                  <a:srgbClr val="6AAB73"/>
-                </a:solidFill>
-                <a:latin typeface="Consolas" panose="020B0609020204030204" pitchFamily="49" charset="0"/>
-              </a:rPr>
-              <a:t>"</a:t>
-            </a:r>
-            <a:r>
-              <a:rPr lang="en-US">
-                <a:solidFill>
-                  <a:srgbClr val="BCBEC4"/>
-                </a:solidFill>
-                <a:latin typeface="Consolas" panose="020B0609020204030204" pitchFamily="49" charset="0"/>
-              </a:rPr>
-              <a:t>name, birth_year</a:t>
-            </a:r>
-            <a:r>
-              <a:rPr lang="en-US">
-                <a:solidFill>
-                  <a:srgbClr val="6AAB73"/>
-                </a:solidFill>
-                <a:latin typeface="Consolas" panose="020B0609020204030204" pitchFamily="49" charset="0"/>
-              </a:rPr>
-              <a:t>"</a:t>
-            </a:r>
-            <a:r>
-              <a:rPr lang="en-US">
-                <a:solidFill>
-                  <a:srgbClr val="BCBEC4"/>
-                </a:solidFill>
-                <a:latin typeface="Consolas" panose="020B0609020204030204" pitchFamily="49" charset="0"/>
-              </a:rPr>
-              <a:t>)</a:t>
-            </a:r>
-          </a:p>
-          <a:p>
-            <a:r>
-              <a:rPr lang="en-US">
-                <a:solidFill>
-                  <a:srgbClr val="BCBEC4"/>
-                </a:solidFill>
-                <a:latin typeface="Consolas" panose="020B0609020204030204" pitchFamily="49" charset="0"/>
-              </a:rPr>
-              <a:t>                 .</a:t>
-            </a:r>
-            <a:r>
-              <a:rPr lang="en-US">
-                <a:solidFill>
-                  <a:schemeClr val="accent2"/>
-                </a:solidFill>
-                <a:latin typeface="Consolas" panose="020B0609020204030204" pitchFamily="49" charset="0"/>
-              </a:rPr>
-              <a:t>from</a:t>
-            </a:r>
-            <a:r>
-              <a:rPr lang="en-US">
-                <a:solidFill>
-                  <a:srgbClr val="BCBEC4"/>
-                </a:solidFill>
-                <a:latin typeface="Consolas" panose="020B0609020204030204" pitchFamily="49" charset="0"/>
-              </a:rPr>
-              <a:t>(</a:t>
-            </a:r>
-            <a:r>
-              <a:rPr lang="en-US">
-                <a:solidFill>
-                  <a:srgbClr val="6AAB73"/>
-                </a:solidFill>
-                <a:latin typeface="Consolas" panose="020B0609020204030204" pitchFamily="49" charset="0"/>
-              </a:rPr>
-              <a:t>"</a:t>
-            </a:r>
-            <a:r>
-              <a:rPr lang="en-US">
-                <a:solidFill>
-                  <a:srgbClr val="BCBEC4"/>
-                </a:solidFill>
-                <a:latin typeface="Consolas" panose="020B0609020204030204" pitchFamily="49" charset="0"/>
-              </a:rPr>
-              <a:t>Students</a:t>
-            </a:r>
-            <a:r>
-              <a:rPr lang="en-US">
-                <a:solidFill>
-                  <a:srgbClr val="6AAB73"/>
-                </a:solidFill>
-                <a:latin typeface="Consolas" panose="020B0609020204030204" pitchFamily="49" charset="0"/>
-              </a:rPr>
-              <a:t>"</a:t>
-            </a:r>
-            <a:r>
-              <a:rPr lang="en-US">
-                <a:solidFill>
-                  <a:srgbClr val="BCBEC4"/>
-                </a:solidFill>
-                <a:latin typeface="Consolas" panose="020B0609020204030204" pitchFamily="49" charset="0"/>
-              </a:rPr>
-              <a:t>)</a:t>
-            </a:r>
-          </a:p>
-          <a:p>
-            <a:r>
-              <a:rPr lang="en-US">
-                <a:solidFill>
-                  <a:srgbClr val="BCBEC4"/>
-                </a:solidFill>
-                <a:latin typeface="Consolas" panose="020B0609020204030204" pitchFamily="49" charset="0"/>
-              </a:rPr>
-              <a:t>                 .</a:t>
-            </a:r>
-            <a:r>
-              <a:rPr lang="en-US">
-                <a:solidFill>
-                  <a:schemeClr val="accent2"/>
-                </a:solidFill>
-                <a:latin typeface="Consolas" panose="020B0609020204030204" pitchFamily="49" charset="0"/>
-              </a:rPr>
-              <a:t>where</a:t>
-            </a:r>
-            <a:r>
-              <a:rPr lang="en-US">
-                <a:solidFill>
-                  <a:srgbClr val="BCBEC4"/>
-                </a:solidFill>
-                <a:latin typeface="Consolas" panose="020B0609020204030204" pitchFamily="49" charset="0"/>
-              </a:rPr>
-              <a:t>(whereClause)</a:t>
-            </a:r>
-          </a:p>
-          <a:p>
-            <a:r>
-              <a:rPr lang="en-US">
-                <a:solidFill>
-                  <a:srgbClr val="BCBEC4"/>
-                </a:solidFill>
-                <a:latin typeface="Consolas" panose="020B0609020204030204" pitchFamily="49" charset="0"/>
-              </a:rPr>
-              <a:t>                 .end();</a:t>
-            </a:r>
-          </a:p>
-        </p:txBody>
-      </p:sp>
-    </p:spTree>
-    <p:extLst>
-      <p:ext uri="{BB962C8B-B14F-4D97-AF65-F5344CB8AC3E}">
-        <p14:creationId xmlns:p14="http://schemas.microsoft.com/office/powerpoint/2010/main" val="999814529"/>
       </p:ext>
     </p:extLst>
   </p:cSld>
@@ -6405,7 +12004,15 @@
   <a:objectDefaults>
     <a:spDef>
       <a:spPr>
-        <a:ln w="38100"/>
+        <a:ln w="19050" cap="flat" cmpd="sng" algn="ctr">
+          <a:solidFill>
+            <a:srgbClr val="0070C0"/>
+          </a:solidFill>
+          <a:prstDash val="solid"/>
+          <a:round/>
+          <a:headEnd type="none" w="med" len="med"/>
+          <a:tailEnd type="arrow" w="med" len="med"/>
+        </a:ln>
       </a:spPr>
       <a:bodyPr rtlCol="0" anchor="ctr"/>
       <a:lstStyle>
@@ -6414,17 +12021,17 @@
         </a:defPPr>
       </a:lstStyle>
       <a:style>
-        <a:lnRef idx="2">
-          <a:schemeClr val="dk1"/>
+        <a:lnRef idx="0">
+          <a:scrgbClr r="0" g="0" b="0"/>
         </a:lnRef>
-        <a:fillRef idx="1">
-          <a:schemeClr val="lt1"/>
+        <a:fillRef idx="0">
+          <a:scrgbClr r="0" g="0" b="0"/>
         </a:fillRef>
         <a:effectRef idx="0">
-          <a:schemeClr val="dk1"/>
+          <a:scrgbClr r="0" g="0" b="0"/>
         </a:effectRef>
         <a:fontRef idx="minor">
-          <a:schemeClr val="dk1"/>
+          <a:schemeClr val="tx1"/>
         </a:fontRef>
       </a:style>
     </a:spDef>
